--- a/docs/pptx/auc3/jx-auc3-linsubhr-ratio-hosp8.pptx
+++ b/docs/pptx/auc3/jx-auc3-linsubhr-ratio-hosp8.pptx
@@ -2271,7 +2271,7 @@
           </p:nvSpPr>
           <p:spPr>
             <a:xfrm>
-              <a:off x="817517" y="5114368"/>
+              <a:off x="817517" y="5142518"/>
               <a:ext cx="7799693" cy="0"/>
             </a:xfrm>
             <a:custGeom>
@@ -2314,7 +2314,7 @@
           </p:nvSpPr>
           <p:spPr>
             <a:xfrm>
-              <a:off x="817517" y="4244691"/>
+              <a:off x="817517" y="4313054"/>
               <a:ext cx="7799693" cy="0"/>
             </a:xfrm>
             <a:custGeom>
@@ -2357,7 +2357,7 @@
           </p:nvSpPr>
           <p:spPr>
             <a:xfrm>
-              <a:off x="817517" y="3375014"/>
+              <a:off x="817517" y="3483591"/>
               <a:ext cx="7799693" cy="0"/>
             </a:xfrm>
             <a:custGeom>
@@ -2400,7 +2400,7 @@
           </p:nvSpPr>
           <p:spPr>
             <a:xfrm>
-              <a:off x="817517" y="2505337"/>
+              <a:off x="817517" y="2654127"/>
               <a:ext cx="7799693" cy="0"/>
             </a:xfrm>
             <a:custGeom>
@@ -2443,15 +2443,15 @@
           </p:nvSpPr>
           <p:spPr>
             <a:xfrm>
-              <a:off x="1615213" y="1896563"/>
-              <a:ext cx="0" cy="3826579"/>
+              <a:off x="1615213" y="2073503"/>
+              <a:ext cx="0" cy="3649639"/>
             </a:xfrm>
             <a:custGeom>
               <a:avLst/>
               <a:pathLst>
-                <a:path w="0" h="3826579">
+                <a:path w="0" h="3649639">
                   <a:moveTo>
-                    <a:pt x="0" y="3826579"/>
+                    <a:pt x="0" y="3649639"/>
                   </a:moveTo>
                   <a:lnTo>
                     <a:pt x="0" y="0"/>
@@ -2486,15 +2486,15 @@
           </p:nvSpPr>
           <p:spPr>
             <a:xfrm>
-              <a:off x="3387871" y="1896563"/>
-              <a:ext cx="0" cy="3826579"/>
+              <a:off x="3387871" y="2073503"/>
+              <a:ext cx="0" cy="3649639"/>
             </a:xfrm>
             <a:custGeom>
               <a:avLst/>
               <a:pathLst>
-                <a:path w="0" h="3826579">
+                <a:path w="0" h="3649639">
                   <a:moveTo>
-                    <a:pt x="0" y="3826579"/>
+                    <a:pt x="0" y="3649639"/>
                   </a:moveTo>
                   <a:lnTo>
                     <a:pt x="0" y="0"/>
@@ -2529,15 +2529,15 @@
           </p:nvSpPr>
           <p:spPr>
             <a:xfrm>
-              <a:off x="5160528" y="1896563"/>
-              <a:ext cx="0" cy="3826579"/>
+              <a:off x="5160528" y="2073503"/>
+              <a:ext cx="0" cy="3649639"/>
             </a:xfrm>
             <a:custGeom>
               <a:avLst/>
               <a:pathLst>
-                <a:path w="0" h="3826579">
+                <a:path w="0" h="3649639">
                   <a:moveTo>
-                    <a:pt x="0" y="3826579"/>
+                    <a:pt x="0" y="3649639"/>
                   </a:moveTo>
                   <a:lnTo>
                     <a:pt x="0" y="0"/>
@@ -2572,15 +2572,15 @@
           </p:nvSpPr>
           <p:spPr>
             <a:xfrm>
-              <a:off x="6933186" y="1896563"/>
-              <a:ext cx="0" cy="3826579"/>
+              <a:off x="6933186" y="2073503"/>
+              <a:ext cx="0" cy="3649639"/>
             </a:xfrm>
             <a:custGeom>
               <a:avLst/>
               <a:pathLst>
-                <a:path w="0" h="3826579">
+                <a:path w="0" h="3649639">
                   <a:moveTo>
-                    <a:pt x="0" y="3826579"/>
+                    <a:pt x="0" y="3649639"/>
                   </a:moveTo>
                   <a:lnTo>
                     <a:pt x="0" y="0"/>
@@ -2615,7 +2615,7 @@
           </p:nvSpPr>
           <p:spPr>
             <a:xfrm>
-              <a:off x="817517" y="5549207"/>
+              <a:off x="817517" y="5557249"/>
               <a:ext cx="7799693" cy="0"/>
             </a:xfrm>
             <a:custGeom>
@@ -2658,7 +2658,7 @@
           </p:nvSpPr>
           <p:spPr>
             <a:xfrm>
-              <a:off x="817517" y="4679530"/>
+              <a:off x="817517" y="4727786"/>
               <a:ext cx="7799693" cy="0"/>
             </a:xfrm>
             <a:custGeom>
@@ -2701,7 +2701,7 @@
           </p:nvSpPr>
           <p:spPr>
             <a:xfrm>
-              <a:off x="817517" y="3809853"/>
+              <a:off x="817517" y="3898322"/>
               <a:ext cx="7799693" cy="0"/>
             </a:xfrm>
             <a:custGeom>
@@ -2744,7 +2744,7 @@
           </p:nvSpPr>
           <p:spPr>
             <a:xfrm>
-              <a:off x="817517" y="2940175"/>
+              <a:off x="817517" y="3068859"/>
               <a:ext cx="7799693" cy="0"/>
             </a:xfrm>
             <a:custGeom>
@@ -2787,7 +2787,7 @@
           </p:nvSpPr>
           <p:spPr>
             <a:xfrm>
-              <a:off x="817517" y="2070498"/>
+              <a:off x="817517" y="2239395"/>
               <a:ext cx="7799693" cy="0"/>
             </a:xfrm>
             <a:custGeom>
@@ -2830,15 +2830,15 @@
           </p:nvSpPr>
           <p:spPr>
             <a:xfrm>
-              <a:off x="2501542" y="1896563"/>
-              <a:ext cx="0" cy="3826579"/>
+              <a:off x="2501542" y="2073503"/>
+              <a:ext cx="0" cy="3649639"/>
             </a:xfrm>
             <a:custGeom>
               <a:avLst/>
               <a:pathLst>
-                <a:path w="0" h="3826579">
+                <a:path w="0" h="3649639">
                   <a:moveTo>
-                    <a:pt x="0" y="3826579"/>
+                    <a:pt x="0" y="3649639"/>
                   </a:moveTo>
                   <a:lnTo>
                     <a:pt x="0" y="0"/>
@@ -2873,15 +2873,15 @@
           </p:nvSpPr>
           <p:spPr>
             <a:xfrm>
-              <a:off x="4274200" y="1896563"/>
-              <a:ext cx="0" cy="3826579"/>
+              <a:off x="4274200" y="2073503"/>
+              <a:ext cx="0" cy="3649639"/>
             </a:xfrm>
             <a:custGeom>
               <a:avLst/>
               <a:pathLst>
-                <a:path w="0" h="3826579">
+                <a:path w="0" h="3649639">
                   <a:moveTo>
-                    <a:pt x="0" y="3826579"/>
+                    <a:pt x="0" y="3649639"/>
                   </a:moveTo>
                   <a:lnTo>
                     <a:pt x="0" y="0"/>
@@ -2916,15 +2916,15 @@
           </p:nvSpPr>
           <p:spPr>
             <a:xfrm>
-              <a:off x="6046857" y="1896563"/>
-              <a:ext cx="0" cy="3826579"/>
+              <a:off x="6046857" y="2073503"/>
+              <a:ext cx="0" cy="3649639"/>
             </a:xfrm>
             <a:custGeom>
               <a:avLst/>
               <a:pathLst>
-                <a:path w="0" h="3826579">
+                <a:path w="0" h="3649639">
                   <a:moveTo>
-                    <a:pt x="0" y="3826579"/>
+                    <a:pt x="0" y="3649639"/>
                   </a:moveTo>
                   <a:lnTo>
                     <a:pt x="0" y="0"/>
@@ -2959,15 +2959,15 @@
           </p:nvSpPr>
           <p:spPr>
             <a:xfrm>
-              <a:off x="7819515" y="1896563"/>
-              <a:ext cx="0" cy="3826579"/>
+              <a:off x="7819515" y="2073503"/>
+              <a:ext cx="0" cy="3649639"/>
             </a:xfrm>
             <a:custGeom>
               <a:avLst/>
               <a:pathLst>
-                <a:path w="0" h="3826579">
+                <a:path w="0" h="3649639">
                   <a:moveTo>
-                    <a:pt x="0" y="3826579"/>
+                    <a:pt x="0" y="3649639"/>
                   </a:moveTo>
                   <a:lnTo>
                     <a:pt x="0" y="0"/>
@@ -3002,594 +3002,594 @@
           </p:nvSpPr>
           <p:spPr>
             <a:xfrm>
-              <a:off x="817517" y="1896563"/>
-              <a:ext cx="7392041" cy="3507631"/>
+              <a:off x="817517" y="2073503"/>
+              <a:ext cx="7392041" cy="3345439"/>
             </a:xfrm>
             <a:custGeom>
               <a:avLst/>
               <a:pathLst>
-                <a:path w="7392041" h="3507631">
+                <a:path w="7392041" h="3345439">
                   <a:moveTo>
                     <a:pt x="21957" y="0"/>
                   </a:moveTo>
                   <a:lnTo>
-                    <a:pt x="53901" y="51221"/>
-                  </a:lnTo>
-                  <a:lnTo>
-                    <a:pt x="131145" y="170961"/>
-                  </a:lnTo>
-                  <a:lnTo>
-                    <a:pt x="208389" y="286721"/>
-                  </a:lnTo>
-                  <a:lnTo>
-                    <a:pt x="285632" y="398631"/>
-                  </a:lnTo>
-                  <a:lnTo>
-                    <a:pt x="362876" y="506820"/>
-                  </a:lnTo>
-                  <a:lnTo>
-                    <a:pt x="440119" y="611413"/>
-                  </a:lnTo>
-                  <a:lnTo>
-                    <a:pt x="517363" y="712528"/>
-                  </a:lnTo>
-                  <a:lnTo>
-                    <a:pt x="594606" y="810281"/>
-                  </a:lnTo>
-                  <a:lnTo>
-                    <a:pt x="671850" y="904784"/>
-                  </a:lnTo>
-                  <a:lnTo>
-                    <a:pt x="749094" y="996145"/>
-                  </a:lnTo>
-                  <a:lnTo>
-                    <a:pt x="826337" y="1084468"/>
-                  </a:lnTo>
-                  <a:lnTo>
-                    <a:pt x="903581" y="1169855"/>
-                  </a:lnTo>
-                  <a:lnTo>
-                    <a:pt x="980824" y="1252402"/>
-                  </a:lnTo>
-                  <a:lnTo>
-                    <a:pt x="1058068" y="1332206"/>
-                  </a:lnTo>
-                  <a:lnTo>
-                    <a:pt x="1135311" y="1409356"/>
-                  </a:lnTo>
-                  <a:lnTo>
-                    <a:pt x="1212555" y="1483941"/>
-                  </a:lnTo>
-                  <a:lnTo>
-                    <a:pt x="1289799" y="1556046"/>
-                  </a:lnTo>
-                  <a:lnTo>
-                    <a:pt x="1367042" y="1625753"/>
-                  </a:lnTo>
-                  <a:lnTo>
-                    <a:pt x="1444286" y="1693144"/>
-                  </a:lnTo>
-                  <a:lnTo>
-                    <a:pt x="1521529" y="1758293"/>
-                  </a:lnTo>
-                  <a:lnTo>
-                    <a:pt x="1598773" y="1821276"/>
-                  </a:lnTo>
-                  <a:lnTo>
-                    <a:pt x="1676016" y="1882166"/>
-                  </a:lnTo>
-                  <a:lnTo>
-                    <a:pt x="1753260" y="1941031"/>
-                  </a:lnTo>
-                  <a:lnTo>
-                    <a:pt x="1830504" y="1997938"/>
-                  </a:lnTo>
-                  <a:lnTo>
-                    <a:pt x="1907747" y="2052954"/>
-                  </a:lnTo>
-                  <a:lnTo>
-                    <a:pt x="1984991" y="2106141"/>
-                  </a:lnTo>
-                  <a:lnTo>
-                    <a:pt x="2062234" y="2157559"/>
-                  </a:lnTo>
-                  <a:lnTo>
-                    <a:pt x="2139478" y="2207267"/>
-                  </a:lnTo>
-                  <a:lnTo>
-                    <a:pt x="2216721" y="2255323"/>
-                  </a:lnTo>
-                  <a:lnTo>
-                    <a:pt x="2293965" y="2301781"/>
-                  </a:lnTo>
-                  <a:lnTo>
-                    <a:pt x="2371209" y="2346695"/>
-                  </a:lnTo>
-                  <a:lnTo>
-                    <a:pt x="2448452" y="2390115"/>
-                  </a:lnTo>
-                  <a:lnTo>
-                    <a:pt x="2525696" y="2432092"/>
-                  </a:lnTo>
-                  <a:lnTo>
-                    <a:pt x="2602939" y="2472673"/>
-                  </a:lnTo>
-                  <a:lnTo>
-                    <a:pt x="2680183" y="2511904"/>
-                  </a:lnTo>
-                  <a:lnTo>
-                    <a:pt x="2757426" y="2549832"/>
-                  </a:lnTo>
-                  <a:lnTo>
-                    <a:pt x="2834670" y="2586498"/>
-                  </a:lnTo>
-                  <a:lnTo>
-                    <a:pt x="2911914" y="2621945"/>
-                  </a:lnTo>
-                  <a:lnTo>
-                    <a:pt x="2989157" y="2656214"/>
-                  </a:lnTo>
-                  <a:lnTo>
-                    <a:pt x="3066401" y="2689343"/>
-                  </a:lnTo>
-                  <a:lnTo>
-                    <a:pt x="3143644" y="2721371"/>
-                  </a:lnTo>
-                  <a:lnTo>
-                    <a:pt x="3220888" y="2752334"/>
-                  </a:lnTo>
-                  <a:lnTo>
-                    <a:pt x="3298131" y="2782267"/>
-                  </a:lnTo>
-                  <a:lnTo>
-                    <a:pt x="3375375" y="2779270"/>
-                  </a:lnTo>
-                  <a:lnTo>
-                    <a:pt x="3452619" y="2775467"/>
-                  </a:lnTo>
-                  <a:lnTo>
-                    <a:pt x="3529862" y="2771648"/>
-                  </a:lnTo>
-                  <a:lnTo>
-                    <a:pt x="3607106" y="2767812"/>
-                  </a:lnTo>
-                  <a:lnTo>
-                    <a:pt x="3684349" y="2763960"/>
-                  </a:lnTo>
-                  <a:lnTo>
-                    <a:pt x="3761593" y="2760090"/>
-                  </a:lnTo>
-                  <a:lnTo>
-                    <a:pt x="3838836" y="2756204"/>
-                  </a:lnTo>
-                  <a:lnTo>
-                    <a:pt x="3916080" y="2752301"/>
-                  </a:lnTo>
-                  <a:lnTo>
-                    <a:pt x="3993324" y="2748381"/>
-                  </a:lnTo>
-                  <a:lnTo>
-                    <a:pt x="4070567" y="2744444"/>
-                  </a:lnTo>
-                  <a:lnTo>
-                    <a:pt x="4147811" y="2740490"/>
-                  </a:lnTo>
-                  <a:lnTo>
-                    <a:pt x="4225054" y="2736519"/>
-                  </a:lnTo>
-                  <a:lnTo>
-                    <a:pt x="4302298" y="2732530"/>
-                  </a:lnTo>
-                  <a:lnTo>
-                    <a:pt x="4379541" y="2728524"/>
-                  </a:lnTo>
-                  <a:lnTo>
-                    <a:pt x="4456785" y="2724500"/>
-                  </a:lnTo>
-                  <a:lnTo>
-                    <a:pt x="4534029" y="2720459"/>
-                  </a:lnTo>
-                  <a:lnTo>
-                    <a:pt x="4611272" y="2716400"/>
-                  </a:lnTo>
-                  <a:lnTo>
-                    <a:pt x="4688516" y="2712324"/>
-                  </a:lnTo>
-                  <a:lnTo>
-                    <a:pt x="4765759" y="2708230"/>
-                  </a:lnTo>
-                  <a:lnTo>
-                    <a:pt x="4843003" y="2704118"/>
-                  </a:lnTo>
-                  <a:lnTo>
-                    <a:pt x="4920246" y="2699988"/>
-                  </a:lnTo>
-                  <a:lnTo>
-                    <a:pt x="4997490" y="2695840"/>
-                  </a:lnTo>
-                  <a:lnTo>
-                    <a:pt x="5074734" y="2691675"/>
-                  </a:lnTo>
-                  <a:lnTo>
-                    <a:pt x="5151977" y="2687491"/>
-                  </a:lnTo>
-                  <a:lnTo>
-                    <a:pt x="5229221" y="2683288"/>
-                  </a:lnTo>
-                  <a:lnTo>
-                    <a:pt x="5306464" y="2679068"/>
-                  </a:lnTo>
-                  <a:lnTo>
-                    <a:pt x="5383708" y="2674829"/>
-                  </a:lnTo>
-                  <a:lnTo>
-                    <a:pt x="5460951" y="2670572"/>
-                  </a:lnTo>
-                  <a:lnTo>
-                    <a:pt x="5538195" y="2666296"/>
-                  </a:lnTo>
-                  <a:lnTo>
-                    <a:pt x="5615439" y="2662001"/>
-                  </a:lnTo>
-                  <a:lnTo>
-                    <a:pt x="5692682" y="2657688"/>
-                  </a:lnTo>
-                  <a:lnTo>
-                    <a:pt x="5769926" y="2653356"/>
-                  </a:lnTo>
-                  <a:lnTo>
-                    <a:pt x="5847169" y="2649005"/>
-                  </a:lnTo>
-                  <a:lnTo>
-                    <a:pt x="5924413" y="2644636"/>
-                  </a:lnTo>
-                  <a:lnTo>
-                    <a:pt x="6001656" y="2640247"/>
-                  </a:lnTo>
-                  <a:lnTo>
-                    <a:pt x="6078900" y="2635839"/>
-                  </a:lnTo>
-                  <a:lnTo>
-                    <a:pt x="6156144" y="2631412"/>
-                  </a:lnTo>
-                  <a:lnTo>
-                    <a:pt x="6233387" y="2626965"/>
-                  </a:lnTo>
-                  <a:lnTo>
-                    <a:pt x="6310631" y="2622500"/>
-                  </a:lnTo>
-                  <a:lnTo>
-                    <a:pt x="6387874" y="2618014"/>
-                  </a:lnTo>
-                  <a:lnTo>
-                    <a:pt x="6465118" y="2613510"/>
-                  </a:lnTo>
-                  <a:lnTo>
-                    <a:pt x="6542361" y="2608985"/>
-                  </a:lnTo>
-                  <a:lnTo>
-                    <a:pt x="6619605" y="2604441"/>
-                  </a:lnTo>
-                  <a:lnTo>
-                    <a:pt x="6696849" y="2599878"/>
-                  </a:lnTo>
-                  <a:lnTo>
-                    <a:pt x="6774092" y="2595294"/>
-                  </a:lnTo>
-                  <a:lnTo>
-                    <a:pt x="6851336" y="2590690"/>
-                  </a:lnTo>
-                  <a:lnTo>
-                    <a:pt x="6928579" y="2586067"/>
-                  </a:lnTo>
-                  <a:lnTo>
-                    <a:pt x="7005823" y="2581423"/>
-                  </a:lnTo>
-                  <a:lnTo>
-                    <a:pt x="7083066" y="2576759"/>
-                  </a:lnTo>
-                  <a:lnTo>
-                    <a:pt x="7160310" y="2572075"/>
-                  </a:lnTo>
-                  <a:lnTo>
-                    <a:pt x="7237554" y="2567370"/>
-                  </a:lnTo>
-                  <a:lnTo>
-                    <a:pt x="7314797" y="2562645"/>
-                  </a:lnTo>
-                  <a:lnTo>
-                    <a:pt x="7392041" y="2557899"/>
-                  </a:lnTo>
-                  <a:lnTo>
-                    <a:pt x="7392041" y="3507631"/>
-                  </a:lnTo>
-                  <a:lnTo>
-                    <a:pt x="7314797" y="3502644"/>
-                  </a:lnTo>
-                  <a:lnTo>
-                    <a:pt x="7237554" y="3497485"/>
-                  </a:lnTo>
-                  <a:lnTo>
-                    <a:pt x="7160310" y="3492149"/>
-                  </a:lnTo>
-                  <a:lnTo>
-                    <a:pt x="7083066" y="3486629"/>
-                  </a:lnTo>
-                  <a:lnTo>
-                    <a:pt x="7005823" y="3480920"/>
-                  </a:lnTo>
-                  <a:lnTo>
-                    <a:pt x="6928579" y="3475014"/>
-                  </a:lnTo>
-                  <a:lnTo>
-                    <a:pt x="6851336" y="3468905"/>
-                  </a:lnTo>
-                  <a:lnTo>
-                    <a:pt x="6774092" y="3462586"/>
-                  </a:lnTo>
-                  <a:lnTo>
-                    <a:pt x="6696849" y="3456050"/>
-                  </a:lnTo>
-                  <a:lnTo>
-                    <a:pt x="6619605" y="3449288"/>
-                  </a:lnTo>
-                  <a:lnTo>
-                    <a:pt x="6542361" y="3442295"/>
-                  </a:lnTo>
-                  <a:lnTo>
-                    <a:pt x="6465118" y="3435060"/>
-                  </a:lnTo>
-                  <a:lnTo>
-                    <a:pt x="6387874" y="3427577"/>
-                  </a:lnTo>
-                  <a:lnTo>
-                    <a:pt x="6310631" y="3419837"/>
-                  </a:lnTo>
-                  <a:lnTo>
-                    <a:pt x="6233387" y="3411831"/>
-                  </a:lnTo>
-                  <a:lnTo>
-                    <a:pt x="6156144" y="3403549"/>
-                  </a:lnTo>
-                  <a:lnTo>
-                    <a:pt x="6078900" y="3394982"/>
-                  </a:lnTo>
-                  <a:lnTo>
-                    <a:pt x="6001656" y="3386121"/>
-                  </a:lnTo>
-                  <a:lnTo>
-                    <a:pt x="5924413" y="3376955"/>
-                  </a:lnTo>
-                  <a:lnTo>
-                    <a:pt x="5847169" y="3367473"/>
-                  </a:lnTo>
-                  <a:lnTo>
-                    <a:pt x="5769926" y="3357666"/>
-                  </a:lnTo>
-                  <a:lnTo>
-                    <a:pt x="5692682" y="3347521"/>
-                  </a:lnTo>
-                  <a:lnTo>
-                    <a:pt x="5615439" y="3337027"/>
-                  </a:lnTo>
-                  <a:lnTo>
-                    <a:pt x="5538195" y="3326173"/>
-                  </a:lnTo>
-                  <a:lnTo>
-                    <a:pt x="5460951" y="3314945"/>
-                  </a:lnTo>
-                  <a:lnTo>
-                    <a:pt x="5383708" y="3303331"/>
-                  </a:lnTo>
-                  <a:lnTo>
-                    <a:pt x="5306464" y="3291318"/>
-                  </a:lnTo>
-                  <a:lnTo>
-                    <a:pt x="5229221" y="3278891"/>
-                  </a:lnTo>
-                  <a:lnTo>
-                    <a:pt x="5151977" y="3266037"/>
-                  </a:lnTo>
-                  <a:lnTo>
-                    <a:pt x="5074734" y="3252741"/>
-                  </a:lnTo>
-                  <a:lnTo>
-                    <a:pt x="4997490" y="3238988"/>
-                  </a:lnTo>
-                  <a:lnTo>
-                    <a:pt x="4920246" y="3224762"/>
-                  </a:lnTo>
-                  <a:lnTo>
-                    <a:pt x="4843003" y="3210047"/>
-                  </a:lnTo>
-                  <a:lnTo>
-                    <a:pt x="4765759" y="3194825"/>
-                  </a:lnTo>
-                  <a:lnTo>
-                    <a:pt x="4688516" y="3179080"/>
-                  </a:lnTo>
-                  <a:lnTo>
-                    <a:pt x="4611272" y="3162793"/>
-                  </a:lnTo>
-                  <a:lnTo>
-                    <a:pt x="4534029" y="3145947"/>
-                  </a:lnTo>
-                  <a:lnTo>
-                    <a:pt x="4456785" y="3128521"/>
-                  </a:lnTo>
-                  <a:lnTo>
-                    <a:pt x="4379541" y="3110495"/>
-                  </a:lnTo>
-                  <a:lnTo>
-                    <a:pt x="4302298" y="3091850"/>
-                  </a:lnTo>
-                  <a:lnTo>
-                    <a:pt x="4225054" y="3072564"/>
-                  </a:lnTo>
-                  <a:lnTo>
-                    <a:pt x="4147811" y="3052614"/>
-                  </a:lnTo>
-                  <a:lnTo>
-                    <a:pt x="4070567" y="3031978"/>
-                  </a:lnTo>
-                  <a:lnTo>
-                    <a:pt x="3993324" y="3010632"/>
-                  </a:lnTo>
-                  <a:lnTo>
-                    <a:pt x="3916080" y="2988553"/>
-                  </a:lnTo>
-                  <a:lnTo>
-                    <a:pt x="3838836" y="2965714"/>
-                  </a:lnTo>
-                  <a:lnTo>
-                    <a:pt x="3761593" y="2942089"/>
-                  </a:lnTo>
-                  <a:lnTo>
-                    <a:pt x="3684349" y="2917652"/>
-                  </a:lnTo>
-                  <a:lnTo>
-                    <a:pt x="3607106" y="2892375"/>
-                  </a:lnTo>
-                  <a:lnTo>
-                    <a:pt x="3529862" y="2866228"/>
-                  </a:lnTo>
-                  <a:lnTo>
-                    <a:pt x="3452619" y="2839182"/>
-                  </a:lnTo>
-                  <a:lnTo>
-                    <a:pt x="3375375" y="2811206"/>
-                  </a:lnTo>
-                  <a:lnTo>
-                    <a:pt x="3298131" y="2783056"/>
-                  </a:lnTo>
-                  <a:lnTo>
-                    <a:pt x="3220888" y="2786826"/>
-                  </a:lnTo>
-                  <a:lnTo>
-                    <a:pt x="3143644" y="2790579"/>
-                  </a:lnTo>
-                  <a:lnTo>
-                    <a:pt x="3066401" y="2794316"/>
-                  </a:lnTo>
-                  <a:lnTo>
-                    <a:pt x="2989157" y="2798037"/>
-                  </a:lnTo>
-                  <a:lnTo>
-                    <a:pt x="2911914" y="2801742"/>
-                  </a:lnTo>
-                  <a:lnTo>
-                    <a:pt x="2834670" y="2805430"/>
-                  </a:lnTo>
-                  <a:lnTo>
-                    <a:pt x="2757426" y="2809103"/>
-                  </a:lnTo>
-                  <a:lnTo>
-                    <a:pt x="2680183" y="2812760"/>
-                  </a:lnTo>
-                  <a:lnTo>
-                    <a:pt x="2602939" y="2816401"/>
-                  </a:lnTo>
-                  <a:lnTo>
-                    <a:pt x="2525696" y="2820026"/>
-                  </a:lnTo>
-                  <a:lnTo>
-                    <a:pt x="2448452" y="2823636"/>
-                  </a:lnTo>
-                  <a:lnTo>
-                    <a:pt x="2371209" y="2827229"/>
-                  </a:lnTo>
-                  <a:lnTo>
-                    <a:pt x="2293965" y="2830808"/>
-                  </a:lnTo>
-                  <a:lnTo>
-                    <a:pt x="2216721" y="2834370"/>
-                  </a:lnTo>
-                  <a:lnTo>
-                    <a:pt x="2139478" y="2837918"/>
-                  </a:lnTo>
-                  <a:lnTo>
-                    <a:pt x="2062234" y="2841449"/>
-                  </a:lnTo>
-                  <a:lnTo>
-                    <a:pt x="1984991" y="2844966"/>
-                  </a:lnTo>
-                  <a:lnTo>
-                    <a:pt x="1907747" y="2848467"/>
-                  </a:lnTo>
-                  <a:lnTo>
-                    <a:pt x="1830504" y="2851953"/>
-                  </a:lnTo>
-                  <a:lnTo>
-                    <a:pt x="1753260" y="2855424"/>
-                  </a:lnTo>
-                  <a:lnTo>
-                    <a:pt x="1676016" y="2858880"/>
-                  </a:lnTo>
-                  <a:lnTo>
-                    <a:pt x="1598773" y="2862321"/>
-                  </a:lnTo>
-                  <a:lnTo>
-                    <a:pt x="1521529" y="2865748"/>
-                  </a:lnTo>
-                  <a:lnTo>
-                    <a:pt x="1444286" y="2869159"/>
-                  </a:lnTo>
-                  <a:lnTo>
-                    <a:pt x="1367042" y="2872555"/>
-                  </a:lnTo>
-                  <a:lnTo>
-                    <a:pt x="1289799" y="2875937"/>
-                  </a:lnTo>
-                  <a:lnTo>
-                    <a:pt x="1212555" y="2879304"/>
-                  </a:lnTo>
-                  <a:lnTo>
-                    <a:pt x="1135311" y="2882657"/>
-                  </a:lnTo>
-                  <a:lnTo>
-                    <a:pt x="1058068" y="2885994"/>
-                  </a:lnTo>
-                  <a:lnTo>
-                    <a:pt x="980824" y="2889318"/>
-                  </a:lnTo>
-                  <a:lnTo>
-                    <a:pt x="903581" y="2892627"/>
-                  </a:lnTo>
-                  <a:lnTo>
-                    <a:pt x="826337" y="2895922"/>
-                  </a:lnTo>
-                  <a:lnTo>
-                    <a:pt x="749094" y="2899202"/>
-                  </a:lnTo>
-                  <a:lnTo>
-                    <a:pt x="671850" y="2902468"/>
-                  </a:lnTo>
-                  <a:lnTo>
-                    <a:pt x="594606" y="2905720"/>
-                  </a:lnTo>
-                  <a:lnTo>
-                    <a:pt x="517363" y="2908958"/>
-                  </a:lnTo>
-                  <a:lnTo>
-                    <a:pt x="440119" y="2912182"/>
-                  </a:lnTo>
-                  <a:lnTo>
-                    <a:pt x="362876" y="2915392"/>
-                  </a:lnTo>
-                  <a:lnTo>
-                    <a:pt x="285632" y="2918588"/>
-                  </a:lnTo>
-                  <a:lnTo>
-                    <a:pt x="208389" y="2921770"/>
-                  </a:lnTo>
-                  <a:lnTo>
-                    <a:pt x="131145" y="2924939"/>
-                  </a:lnTo>
-                  <a:lnTo>
-                    <a:pt x="53901" y="2928093"/>
-                  </a:lnTo>
-                  <a:lnTo>
-                    <a:pt x="0" y="2930285"/>
+                    <a:pt x="53901" y="48853"/>
+                  </a:lnTo>
+                  <a:lnTo>
+                    <a:pt x="131145" y="163056"/>
+                  </a:lnTo>
+                  <a:lnTo>
+                    <a:pt x="208389" y="273463"/>
+                  </a:lnTo>
+                  <a:lnTo>
+                    <a:pt x="285632" y="380198"/>
+                  </a:lnTo>
+                  <a:lnTo>
+                    <a:pt x="362876" y="483385"/>
+                  </a:lnTo>
+                  <a:lnTo>
+                    <a:pt x="440119" y="583141"/>
+                  </a:lnTo>
+                  <a:lnTo>
+                    <a:pt x="517363" y="679581"/>
+                  </a:lnTo>
+                  <a:lnTo>
+                    <a:pt x="594606" y="772814"/>
+                  </a:lnTo>
+                  <a:lnTo>
+                    <a:pt x="671850" y="862947"/>
+                  </a:lnTo>
+                  <a:lnTo>
+                    <a:pt x="749094" y="950083"/>
+                  </a:lnTo>
+                  <a:lnTo>
+                    <a:pt x="826337" y="1034322"/>
+                  </a:lnTo>
+                  <a:lnTo>
+                    <a:pt x="903581" y="1115761"/>
+                  </a:lnTo>
+                  <a:lnTo>
+                    <a:pt x="980824" y="1194492"/>
+                  </a:lnTo>
+                  <a:lnTo>
+                    <a:pt x="1058068" y="1270605"/>
+                  </a:lnTo>
+                  <a:lnTo>
+                    <a:pt x="1135311" y="1344188"/>
+                  </a:lnTo>
+                  <a:lnTo>
+                    <a:pt x="1212555" y="1415324"/>
+                  </a:lnTo>
+                  <a:lnTo>
+                    <a:pt x="1289799" y="1484095"/>
+                  </a:lnTo>
+                  <a:lnTo>
+                    <a:pt x="1367042" y="1550579"/>
+                  </a:lnTo>
+                  <a:lnTo>
+                    <a:pt x="1444286" y="1614853"/>
+                  </a:lnTo>
+                  <a:lnTo>
+                    <a:pt x="1521529" y="1676990"/>
+                  </a:lnTo>
+                  <a:lnTo>
+                    <a:pt x="1598773" y="1737061"/>
+                  </a:lnTo>
+                  <a:lnTo>
+                    <a:pt x="1676016" y="1795135"/>
+                  </a:lnTo>
+                  <a:lnTo>
+                    <a:pt x="1753260" y="1851278"/>
+                  </a:lnTo>
+                  <a:lnTo>
+                    <a:pt x="1830504" y="1905554"/>
+                  </a:lnTo>
+                  <a:lnTo>
+                    <a:pt x="1907747" y="1958026"/>
+                  </a:lnTo>
+                  <a:lnTo>
+                    <a:pt x="1984991" y="2008753"/>
+                  </a:lnTo>
+                  <a:lnTo>
+                    <a:pt x="2062234" y="2057794"/>
+                  </a:lnTo>
+                  <a:lnTo>
+                    <a:pt x="2139478" y="2105204"/>
+                  </a:lnTo>
+                  <a:lnTo>
+                    <a:pt x="2216721" y="2151038"/>
+                  </a:lnTo>
+                  <a:lnTo>
+                    <a:pt x="2293965" y="2195348"/>
+                  </a:lnTo>
+                  <a:lnTo>
+                    <a:pt x="2371209" y="2238185"/>
+                  </a:lnTo>
+                  <a:lnTo>
+                    <a:pt x="2448452" y="2279597"/>
+                  </a:lnTo>
+                  <a:lnTo>
+                    <a:pt x="2525696" y="2319633"/>
+                  </a:lnTo>
+                  <a:lnTo>
+                    <a:pt x="2602939" y="2358337"/>
+                  </a:lnTo>
+                  <a:lnTo>
+                    <a:pt x="2680183" y="2395755"/>
+                  </a:lnTo>
+                  <a:lnTo>
+                    <a:pt x="2757426" y="2431928"/>
+                  </a:lnTo>
+                  <a:lnTo>
+                    <a:pt x="2834670" y="2466899"/>
+                  </a:lnTo>
+                  <a:lnTo>
+                    <a:pt x="2911914" y="2500707"/>
+                  </a:lnTo>
+                  <a:lnTo>
+                    <a:pt x="2989157" y="2533391"/>
+                  </a:lnTo>
+                  <a:lnTo>
+                    <a:pt x="3066401" y="2564989"/>
+                  </a:lnTo>
+                  <a:lnTo>
+                    <a:pt x="3143644" y="2595536"/>
+                  </a:lnTo>
+                  <a:lnTo>
+                    <a:pt x="3220888" y="2625067"/>
+                  </a:lnTo>
+                  <a:lnTo>
+                    <a:pt x="3298131" y="2653616"/>
+                  </a:lnTo>
+                  <a:lnTo>
+                    <a:pt x="3375375" y="2650757"/>
+                  </a:lnTo>
+                  <a:lnTo>
+                    <a:pt x="3452619" y="2647131"/>
+                  </a:lnTo>
+                  <a:lnTo>
+                    <a:pt x="3529862" y="2643488"/>
+                  </a:lnTo>
+                  <a:lnTo>
+                    <a:pt x="3607106" y="2639830"/>
+                  </a:lnTo>
+                  <a:lnTo>
+                    <a:pt x="3684349" y="2636155"/>
+                  </a:lnTo>
+                  <a:lnTo>
+                    <a:pt x="3761593" y="2632465"/>
+                  </a:lnTo>
+                  <a:lnTo>
+                    <a:pt x="3838836" y="2628758"/>
+                  </a:lnTo>
+                  <a:lnTo>
+                    <a:pt x="3916080" y="2625036"/>
+                  </a:lnTo>
+                  <a:lnTo>
+                    <a:pt x="3993324" y="2621297"/>
+                  </a:lnTo>
+                  <a:lnTo>
+                    <a:pt x="4070567" y="2617542"/>
+                  </a:lnTo>
+                  <a:lnTo>
+                    <a:pt x="4147811" y="2613771"/>
+                  </a:lnTo>
+                  <a:lnTo>
+                    <a:pt x="4225054" y="2609983"/>
+                  </a:lnTo>
+                  <a:lnTo>
+                    <a:pt x="4302298" y="2606179"/>
+                  </a:lnTo>
+                  <a:lnTo>
+                    <a:pt x="4379541" y="2602358"/>
+                  </a:lnTo>
+                  <a:lnTo>
+                    <a:pt x="4456785" y="2598520"/>
+                  </a:lnTo>
+                  <a:lnTo>
+                    <a:pt x="4534029" y="2594666"/>
+                  </a:lnTo>
+                  <a:lnTo>
+                    <a:pt x="4611272" y="2590795"/>
+                  </a:lnTo>
+                  <a:lnTo>
+                    <a:pt x="4688516" y="2586907"/>
+                  </a:lnTo>
+                  <a:lnTo>
+                    <a:pt x="4765759" y="2583002"/>
+                  </a:lnTo>
+                  <a:lnTo>
+                    <a:pt x="4843003" y="2579081"/>
+                  </a:lnTo>
+                  <a:lnTo>
+                    <a:pt x="4920246" y="2575142"/>
+                  </a:lnTo>
+                  <a:lnTo>
+                    <a:pt x="4997490" y="2571186"/>
+                  </a:lnTo>
+                  <a:lnTo>
+                    <a:pt x="5074734" y="2567213"/>
+                  </a:lnTo>
+                  <a:lnTo>
+                    <a:pt x="5151977" y="2563222"/>
+                  </a:lnTo>
+                  <a:lnTo>
+                    <a:pt x="5229221" y="2559214"/>
+                  </a:lnTo>
+                  <a:lnTo>
+                    <a:pt x="5306464" y="2555189"/>
+                  </a:lnTo>
+                  <a:lnTo>
+                    <a:pt x="5383708" y="2551146"/>
+                  </a:lnTo>
+                  <a:lnTo>
+                    <a:pt x="5460951" y="2547085"/>
+                  </a:lnTo>
+                  <a:lnTo>
+                    <a:pt x="5538195" y="2543007"/>
+                  </a:lnTo>
+                  <a:lnTo>
+                    <a:pt x="5615439" y="2538911"/>
+                  </a:lnTo>
+                  <a:lnTo>
+                    <a:pt x="5692682" y="2534798"/>
+                  </a:lnTo>
+                  <a:lnTo>
+                    <a:pt x="5769926" y="2530666"/>
+                  </a:lnTo>
+                  <a:lnTo>
+                    <a:pt x="5847169" y="2526516"/>
+                  </a:lnTo>
+                  <a:lnTo>
+                    <a:pt x="5924413" y="2522349"/>
+                  </a:lnTo>
+                  <a:lnTo>
+                    <a:pt x="6001656" y="2518163"/>
+                  </a:lnTo>
+                  <a:lnTo>
+                    <a:pt x="6078900" y="2513959"/>
+                  </a:lnTo>
+                  <a:lnTo>
+                    <a:pt x="6156144" y="2509736"/>
+                  </a:lnTo>
+                  <a:lnTo>
+                    <a:pt x="6233387" y="2505495"/>
+                  </a:lnTo>
+                  <a:lnTo>
+                    <a:pt x="6310631" y="2501236"/>
+                  </a:lnTo>
+                  <a:lnTo>
+                    <a:pt x="6387874" y="2496958"/>
+                  </a:lnTo>
+                  <a:lnTo>
+                    <a:pt x="6465118" y="2492662"/>
+                  </a:lnTo>
+                  <a:lnTo>
+                    <a:pt x="6542361" y="2488347"/>
+                  </a:lnTo>
+                  <a:lnTo>
+                    <a:pt x="6619605" y="2484013"/>
+                  </a:lnTo>
+                  <a:lnTo>
+                    <a:pt x="6696849" y="2479660"/>
+                  </a:lnTo>
+                  <a:lnTo>
+                    <a:pt x="6774092" y="2475289"/>
+                  </a:lnTo>
+                  <a:lnTo>
+                    <a:pt x="6851336" y="2470898"/>
+                  </a:lnTo>
+                  <a:lnTo>
+                    <a:pt x="6928579" y="2466488"/>
+                  </a:lnTo>
+                  <a:lnTo>
+                    <a:pt x="7005823" y="2462059"/>
+                  </a:lnTo>
+                  <a:lnTo>
+                    <a:pt x="7083066" y="2457610"/>
+                  </a:lnTo>
+                  <a:lnTo>
+                    <a:pt x="7160310" y="2453143"/>
+                  </a:lnTo>
+                  <a:lnTo>
+                    <a:pt x="7237554" y="2448656"/>
+                  </a:lnTo>
+                  <a:lnTo>
+                    <a:pt x="7314797" y="2444149"/>
+                  </a:lnTo>
+                  <a:lnTo>
+                    <a:pt x="7392041" y="2439623"/>
+                  </a:lnTo>
+                  <a:lnTo>
+                    <a:pt x="7392041" y="3345439"/>
+                  </a:lnTo>
+                  <a:lnTo>
+                    <a:pt x="7314797" y="3340683"/>
+                  </a:lnTo>
+                  <a:lnTo>
+                    <a:pt x="7237554" y="3335762"/>
+                  </a:lnTo>
+                  <a:lnTo>
+                    <a:pt x="7160310" y="3330673"/>
+                  </a:lnTo>
+                  <a:lnTo>
+                    <a:pt x="7083066" y="3325409"/>
+                  </a:lnTo>
+                  <a:lnTo>
+                    <a:pt x="7005823" y="3319963"/>
+                  </a:lnTo>
+                  <a:lnTo>
+                    <a:pt x="6928579" y="3314330"/>
+                  </a:lnTo>
+                  <a:lnTo>
+                    <a:pt x="6851336" y="3308504"/>
+                  </a:lnTo>
+                  <a:lnTo>
+                    <a:pt x="6774092" y="3302477"/>
+                  </a:lnTo>
+                  <a:lnTo>
+                    <a:pt x="6696849" y="3296243"/>
+                  </a:lnTo>
+                  <a:lnTo>
+                    <a:pt x="6619605" y="3289795"/>
+                  </a:lnTo>
+                  <a:lnTo>
+                    <a:pt x="6542361" y="3283124"/>
+                  </a:lnTo>
+                  <a:lnTo>
+                    <a:pt x="6465118" y="3276225"/>
+                  </a:lnTo>
+                  <a:lnTo>
+                    <a:pt x="6387874" y="3269088"/>
+                  </a:lnTo>
+                  <a:lnTo>
+                    <a:pt x="6310631" y="3261705"/>
+                  </a:lnTo>
+                  <a:lnTo>
+                    <a:pt x="6233387" y="3254069"/>
+                  </a:lnTo>
+                  <a:lnTo>
+                    <a:pt x="6156144" y="3246170"/>
+                  </a:lnTo>
+                  <a:lnTo>
+                    <a:pt x="6078900" y="3237999"/>
+                  </a:lnTo>
+                  <a:lnTo>
+                    <a:pt x="6001656" y="3229548"/>
+                  </a:lnTo>
+                  <a:lnTo>
+                    <a:pt x="5924413" y="3220805"/>
+                  </a:lnTo>
+                  <a:lnTo>
+                    <a:pt x="5847169" y="3211762"/>
+                  </a:lnTo>
+                  <a:lnTo>
+                    <a:pt x="5769926" y="3202409"/>
+                  </a:lnTo>
+                  <a:lnTo>
+                    <a:pt x="5692682" y="3192733"/>
+                  </a:lnTo>
+                  <a:lnTo>
+                    <a:pt x="5615439" y="3182724"/>
+                  </a:lnTo>
+                  <a:lnTo>
+                    <a:pt x="5538195" y="3172372"/>
+                  </a:lnTo>
+                  <a:lnTo>
+                    <a:pt x="5460951" y="3161663"/>
+                  </a:lnTo>
+                  <a:lnTo>
+                    <a:pt x="5383708" y="3150586"/>
+                  </a:lnTo>
+                  <a:lnTo>
+                    <a:pt x="5306464" y="3139128"/>
+                  </a:lnTo>
+                  <a:lnTo>
+                    <a:pt x="5229221" y="3127277"/>
+                  </a:lnTo>
+                  <a:lnTo>
+                    <a:pt x="5151977" y="3115017"/>
+                  </a:lnTo>
+                  <a:lnTo>
+                    <a:pt x="5074734" y="3102336"/>
+                  </a:lnTo>
+                  <a:lnTo>
+                    <a:pt x="4997490" y="3089219"/>
+                  </a:lnTo>
+                  <a:lnTo>
+                    <a:pt x="4920246" y="3075650"/>
+                  </a:lnTo>
+                  <a:lnTo>
+                    <a:pt x="4843003" y="3061615"/>
+                  </a:lnTo>
+                  <a:lnTo>
+                    <a:pt x="4765759" y="3047097"/>
+                  </a:lnTo>
+                  <a:lnTo>
+                    <a:pt x="4688516" y="3032080"/>
+                  </a:lnTo>
+                  <a:lnTo>
+                    <a:pt x="4611272" y="3016547"/>
+                  </a:lnTo>
+                  <a:lnTo>
+                    <a:pt x="4534029" y="3000479"/>
+                  </a:lnTo>
+                  <a:lnTo>
+                    <a:pt x="4456785" y="2983859"/>
+                  </a:lnTo>
+                  <a:lnTo>
+                    <a:pt x="4379541" y="2966667"/>
+                  </a:lnTo>
+                  <a:lnTo>
+                    <a:pt x="4302298" y="2948884"/>
+                  </a:lnTo>
+                  <a:lnTo>
+                    <a:pt x="4225054" y="2930489"/>
+                  </a:lnTo>
+                  <a:lnTo>
+                    <a:pt x="4147811" y="2911462"/>
+                  </a:lnTo>
+                  <a:lnTo>
+                    <a:pt x="4070567" y="2891780"/>
+                  </a:lnTo>
+                  <a:lnTo>
+                    <a:pt x="3993324" y="2871422"/>
+                  </a:lnTo>
+                  <a:lnTo>
+                    <a:pt x="3916080" y="2850363"/>
+                  </a:lnTo>
+                  <a:lnTo>
+                    <a:pt x="3838836" y="2828580"/>
+                  </a:lnTo>
+                  <a:lnTo>
+                    <a:pt x="3761593" y="2806048"/>
+                  </a:lnTo>
+                  <a:lnTo>
+                    <a:pt x="3684349" y="2782741"/>
+                  </a:lnTo>
+                  <a:lnTo>
+                    <a:pt x="3607106" y="2758632"/>
+                  </a:lnTo>
+                  <a:lnTo>
+                    <a:pt x="3529862" y="2733695"/>
+                  </a:lnTo>
+                  <a:lnTo>
+                    <a:pt x="3452619" y="2707899"/>
+                  </a:lnTo>
+                  <a:lnTo>
+                    <a:pt x="3375375" y="2681217"/>
+                  </a:lnTo>
+                  <a:lnTo>
+                    <a:pt x="3298131" y="2654368"/>
+                  </a:lnTo>
+                  <a:lnTo>
+                    <a:pt x="3220888" y="2657964"/>
+                  </a:lnTo>
+                  <a:lnTo>
+                    <a:pt x="3143644" y="2661544"/>
+                  </a:lnTo>
+                  <a:lnTo>
+                    <a:pt x="3066401" y="2665108"/>
+                  </a:lnTo>
+                  <a:lnTo>
+                    <a:pt x="2989157" y="2668657"/>
+                  </a:lnTo>
+                  <a:lnTo>
+                    <a:pt x="2911914" y="2672190"/>
+                  </a:lnTo>
+                  <a:lnTo>
+                    <a:pt x="2834670" y="2675708"/>
+                  </a:lnTo>
+                  <a:lnTo>
+                    <a:pt x="2757426" y="2679211"/>
+                  </a:lnTo>
+                  <a:lnTo>
+                    <a:pt x="2680183" y="2682699"/>
+                  </a:lnTo>
+                  <a:lnTo>
+                    <a:pt x="2602939" y="2686172"/>
+                  </a:lnTo>
+                  <a:lnTo>
+                    <a:pt x="2525696" y="2689629"/>
+                  </a:lnTo>
+                  <a:lnTo>
+                    <a:pt x="2448452" y="2693072"/>
+                  </a:lnTo>
+                  <a:lnTo>
+                    <a:pt x="2371209" y="2696499"/>
+                  </a:lnTo>
+                  <a:lnTo>
+                    <a:pt x="2293965" y="2699912"/>
+                  </a:lnTo>
+                  <a:lnTo>
+                    <a:pt x="2216721" y="2703310"/>
+                  </a:lnTo>
+                  <a:lnTo>
+                    <a:pt x="2139478" y="2706693"/>
+                  </a:lnTo>
+                  <a:lnTo>
+                    <a:pt x="2062234" y="2710062"/>
+                  </a:lnTo>
+                  <a:lnTo>
+                    <a:pt x="1984991" y="2713416"/>
+                  </a:lnTo>
+                  <a:lnTo>
+                    <a:pt x="1907747" y="2716755"/>
+                  </a:lnTo>
+                  <a:lnTo>
+                    <a:pt x="1830504" y="2720080"/>
+                  </a:lnTo>
+                  <a:lnTo>
+                    <a:pt x="1753260" y="2723391"/>
+                  </a:lnTo>
+                  <a:lnTo>
+                    <a:pt x="1676016" y="2726687"/>
+                  </a:lnTo>
+                  <a:lnTo>
+                    <a:pt x="1598773" y="2729969"/>
+                  </a:lnTo>
+                  <a:lnTo>
+                    <a:pt x="1521529" y="2733236"/>
+                  </a:lnTo>
+                  <a:lnTo>
+                    <a:pt x="1444286" y="2736490"/>
+                  </a:lnTo>
+                  <a:lnTo>
+                    <a:pt x="1367042" y="2739729"/>
+                  </a:lnTo>
+                  <a:lnTo>
+                    <a:pt x="1289799" y="2742955"/>
+                  </a:lnTo>
+                  <a:lnTo>
+                    <a:pt x="1212555" y="2746166"/>
+                  </a:lnTo>
+                  <a:lnTo>
+                    <a:pt x="1135311" y="2749364"/>
+                  </a:lnTo>
+                  <a:lnTo>
+                    <a:pt x="1058068" y="2752547"/>
+                  </a:lnTo>
+                  <a:lnTo>
+                    <a:pt x="980824" y="2755717"/>
+                  </a:lnTo>
+                  <a:lnTo>
+                    <a:pt x="903581" y="2758873"/>
+                  </a:lnTo>
+                  <a:lnTo>
+                    <a:pt x="826337" y="2762015"/>
+                  </a:lnTo>
+                  <a:lnTo>
+                    <a:pt x="749094" y="2765144"/>
+                  </a:lnTo>
+                  <a:lnTo>
+                    <a:pt x="671850" y="2768259"/>
+                  </a:lnTo>
+                  <a:lnTo>
+                    <a:pt x="594606" y="2771361"/>
+                  </a:lnTo>
+                  <a:lnTo>
+                    <a:pt x="517363" y="2774449"/>
+                  </a:lnTo>
+                  <a:lnTo>
+                    <a:pt x="440119" y="2777524"/>
+                  </a:lnTo>
+                  <a:lnTo>
+                    <a:pt x="362876" y="2780586"/>
+                  </a:lnTo>
+                  <a:lnTo>
+                    <a:pt x="285632" y="2783634"/>
+                  </a:lnTo>
+                  <a:lnTo>
+                    <a:pt x="208389" y="2786669"/>
+                  </a:lnTo>
+                  <a:lnTo>
+                    <a:pt x="131145" y="2789691"/>
+                  </a:lnTo>
+                  <a:lnTo>
+                    <a:pt x="53901" y="2792699"/>
+                  </a:lnTo>
+                  <a:lnTo>
+                    <a:pt x="0" y="2794790"/>
                   </a:lnTo>
                   <a:close/>
                 </a:path>
@@ -3615,303 +3615,303 @@
           </p:nvSpPr>
           <p:spPr>
             <a:xfrm>
-              <a:off x="839475" y="1896563"/>
-              <a:ext cx="7370083" cy="2782267"/>
+              <a:off x="839475" y="2073503"/>
+              <a:ext cx="7370083" cy="2653616"/>
             </a:xfrm>
             <a:custGeom>
               <a:avLst/>
               <a:pathLst>
-                <a:path w="7370083" h="2782267">
+                <a:path w="7370083" h="2653616">
                   <a:moveTo>
                     <a:pt x="0" y="0"/>
                   </a:moveTo>
                   <a:lnTo>
-                    <a:pt x="31944" y="51221"/>
-                  </a:lnTo>
-                  <a:lnTo>
-                    <a:pt x="109187" y="170961"/>
-                  </a:lnTo>
-                  <a:lnTo>
-                    <a:pt x="186431" y="286721"/>
-                  </a:lnTo>
-                  <a:lnTo>
-                    <a:pt x="263674" y="398631"/>
-                  </a:lnTo>
-                  <a:lnTo>
-                    <a:pt x="340918" y="506820"/>
-                  </a:lnTo>
-                  <a:lnTo>
-                    <a:pt x="418162" y="611413"/>
-                  </a:lnTo>
-                  <a:lnTo>
-                    <a:pt x="495405" y="712528"/>
-                  </a:lnTo>
-                  <a:lnTo>
-                    <a:pt x="572649" y="810281"/>
-                  </a:lnTo>
-                  <a:lnTo>
-                    <a:pt x="649892" y="904784"/>
-                  </a:lnTo>
-                  <a:lnTo>
-                    <a:pt x="727136" y="996145"/>
-                  </a:lnTo>
-                  <a:lnTo>
-                    <a:pt x="804379" y="1084468"/>
-                  </a:lnTo>
-                  <a:lnTo>
-                    <a:pt x="881623" y="1169855"/>
-                  </a:lnTo>
-                  <a:lnTo>
-                    <a:pt x="958867" y="1252402"/>
-                  </a:lnTo>
-                  <a:lnTo>
-                    <a:pt x="1036110" y="1332206"/>
-                  </a:lnTo>
-                  <a:lnTo>
-                    <a:pt x="1113354" y="1409356"/>
-                  </a:lnTo>
-                  <a:lnTo>
-                    <a:pt x="1190597" y="1483941"/>
-                  </a:lnTo>
-                  <a:lnTo>
-                    <a:pt x="1267841" y="1556046"/>
-                  </a:lnTo>
-                  <a:lnTo>
-                    <a:pt x="1345084" y="1625753"/>
-                  </a:lnTo>
-                  <a:lnTo>
-                    <a:pt x="1422328" y="1693144"/>
-                  </a:lnTo>
-                  <a:lnTo>
-                    <a:pt x="1499572" y="1758293"/>
-                  </a:lnTo>
-                  <a:lnTo>
-                    <a:pt x="1576815" y="1821276"/>
-                  </a:lnTo>
-                  <a:lnTo>
-                    <a:pt x="1654059" y="1882166"/>
-                  </a:lnTo>
-                  <a:lnTo>
-                    <a:pt x="1731302" y="1941031"/>
-                  </a:lnTo>
-                  <a:lnTo>
-                    <a:pt x="1808546" y="1997938"/>
-                  </a:lnTo>
-                  <a:lnTo>
-                    <a:pt x="1885789" y="2052954"/>
-                  </a:lnTo>
-                  <a:lnTo>
-                    <a:pt x="1963033" y="2106141"/>
-                  </a:lnTo>
-                  <a:lnTo>
-                    <a:pt x="2040277" y="2157559"/>
-                  </a:lnTo>
-                  <a:lnTo>
-                    <a:pt x="2117520" y="2207267"/>
-                  </a:lnTo>
-                  <a:lnTo>
-                    <a:pt x="2194764" y="2255323"/>
-                  </a:lnTo>
-                  <a:lnTo>
-                    <a:pt x="2272007" y="2301781"/>
-                  </a:lnTo>
-                  <a:lnTo>
-                    <a:pt x="2349251" y="2346695"/>
-                  </a:lnTo>
-                  <a:lnTo>
-                    <a:pt x="2426494" y="2390115"/>
-                  </a:lnTo>
-                  <a:lnTo>
-                    <a:pt x="2503738" y="2432092"/>
-                  </a:lnTo>
-                  <a:lnTo>
-                    <a:pt x="2580982" y="2472673"/>
-                  </a:lnTo>
-                  <a:lnTo>
-                    <a:pt x="2658225" y="2511904"/>
-                  </a:lnTo>
-                  <a:lnTo>
-                    <a:pt x="2735469" y="2549832"/>
-                  </a:lnTo>
-                  <a:lnTo>
-                    <a:pt x="2812712" y="2586498"/>
-                  </a:lnTo>
-                  <a:lnTo>
-                    <a:pt x="2889956" y="2621945"/>
-                  </a:lnTo>
-                  <a:lnTo>
-                    <a:pt x="2967199" y="2656214"/>
-                  </a:lnTo>
-                  <a:lnTo>
-                    <a:pt x="3044443" y="2689343"/>
-                  </a:lnTo>
-                  <a:lnTo>
-                    <a:pt x="3121687" y="2721371"/>
-                  </a:lnTo>
-                  <a:lnTo>
-                    <a:pt x="3198930" y="2752334"/>
-                  </a:lnTo>
-                  <a:lnTo>
-                    <a:pt x="3276174" y="2782267"/>
-                  </a:lnTo>
-                  <a:lnTo>
-                    <a:pt x="3353417" y="2779270"/>
-                  </a:lnTo>
-                  <a:lnTo>
-                    <a:pt x="3430661" y="2775467"/>
-                  </a:lnTo>
-                  <a:lnTo>
-                    <a:pt x="3507904" y="2771648"/>
-                  </a:lnTo>
-                  <a:lnTo>
-                    <a:pt x="3585148" y="2767812"/>
-                  </a:lnTo>
-                  <a:lnTo>
-                    <a:pt x="3662392" y="2763960"/>
-                  </a:lnTo>
-                  <a:lnTo>
-                    <a:pt x="3739635" y="2760090"/>
-                  </a:lnTo>
-                  <a:lnTo>
-                    <a:pt x="3816879" y="2756204"/>
-                  </a:lnTo>
-                  <a:lnTo>
-                    <a:pt x="3894122" y="2752301"/>
-                  </a:lnTo>
-                  <a:lnTo>
-                    <a:pt x="3971366" y="2748381"/>
-                  </a:lnTo>
-                  <a:lnTo>
-                    <a:pt x="4048609" y="2744444"/>
-                  </a:lnTo>
-                  <a:lnTo>
-                    <a:pt x="4125853" y="2740490"/>
-                  </a:lnTo>
-                  <a:lnTo>
-                    <a:pt x="4203097" y="2736519"/>
-                  </a:lnTo>
-                  <a:lnTo>
-                    <a:pt x="4280340" y="2732530"/>
-                  </a:lnTo>
-                  <a:lnTo>
-                    <a:pt x="4357584" y="2728524"/>
-                  </a:lnTo>
-                  <a:lnTo>
-                    <a:pt x="4434827" y="2724500"/>
-                  </a:lnTo>
-                  <a:lnTo>
-                    <a:pt x="4512071" y="2720459"/>
-                  </a:lnTo>
-                  <a:lnTo>
-                    <a:pt x="4589314" y="2716400"/>
-                  </a:lnTo>
-                  <a:lnTo>
-                    <a:pt x="4666558" y="2712324"/>
-                  </a:lnTo>
-                  <a:lnTo>
-                    <a:pt x="4743802" y="2708230"/>
-                  </a:lnTo>
-                  <a:lnTo>
-                    <a:pt x="4821045" y="2704118"/>
-                  </a:lnTo>
-                  <a:lnTo>
-                    <a:pt x="4898289" y="2699988"/>
-                  </a:lnTo>
-                  <a:lnTo>
-                    <a:pt x="4975532" y="2695840"/>
-                  </a:lnTo>
-                  <a:lnTo>
-                    <a:pt x="5052776" y="2691675"/>
-                  </a:lnTo>
-                  <a:lnTo>
-                    <a:pt x="5130019" y="2687491"/>
-                  </a:lnTo>
-                  <a:lnTo>
-                    <a:pt x="5207263" y="2683288"/>
-                  </a:lnTo>
-                  <a:lnTo>
-                    <a:pt x="5284507" y="2679068"/>
-                  </a:lnTo>
-                  <a:lnTo>
-                    <a:pt x="5361750" y="2674829"/>
-                  </a:lnTo>
-                  <a:lnTo>
-                    <a:pt x="5438994" y="2670572"/>
-                  </a:lnTo>
-                  <a:lnTo>
-                    <a:pt x="5516237" y="2666296"/>
-                  </a:lnTo>
-                  <a:lnTo>
-                    <a:pt x="5593481" y="2662001"/>
-                  </a:lnTo>
-                  <a:lnTo>
-                    <a:pt x="5670724" y="2657688"/>
-                  </a:lnTo>
-                  <a:lnTo>
-                    <a:pt x="5747968" y="2653356"/>
-                  </a:lnTo>
-                  <a:lnTo>
-                    <a:pt x="5825212" y="2649005"/>
-                  </a:lnTo>
-                  <a:lnTo>
-                    <a:pt x="5902455" y="2644636"/>
-                  </a:lnTo>
-                  <a:lnTo>
-                    <a:pt x="5979699" y="2640247"/>
-                  </a:lnTo>
-                  <a:lnTo>
-                    <a:pt x="6056942" y="2635839"/>
-                  </a:lnTo>
-                  <a:lnTo>
-                    <a:pt x="6134186" y="2631412"/>
-                  </a:lnTo>
-                  <a:lnTo>
-                    <a:pt x="6211429" y="2626965"/>
-                  </a:lnTo>
-                  <a:lnTo>
-                    <a:pt x="6288673" y="2622500"/>
-                  </a:lnTo>
-                  <a:lnTo>
-                    <a:pt x="6365917" y="2618014"/>
-                  </a:lnTo>
-                  <a:lnTo>
-                    <a:pt x="6443160" y="2613510"/>
-                  </a:lnTo>
-                  <a:lnTo>
-                    <a:pt x="6520404" y="2608985"/>
-                  </a:lnTo>
-                  <a:lnTo>
-                    <a:pt x="6597647" y="2604441"/>
-                  </a:lnTo>
-                  <a:lnTo>
-                    <a:pt x="6674891" y="2599878"/>
-                  </a:lnTo>
-                  <a:lnTo>
-                    <a:pt x="6752134" y="2595294"/>
-                  </a:lnTo>
-                  <a:lnTo>
-                    <a:pt x="6829378" y="2590690"/>
-                  </a:lnTo>
-                  <a:lnTo>
-                    <a:pt x="6906622" y="2586067"/>
-                  </a:lnTo>
-                  <a:lnTo>
-                    <a:pt x="6983865" y="2581423"/>
-                  </a:lnTo>
-                  <a:lnTo>
-                    <a:pt x="7061109" y="2576759"/>
-                  </a:lnTo>
-                  <a:lnTo>
-                    <a:pt x="7138352" y="2572075"/>
-                  </a:lnTo>
-                  <a:lnTo>
-                    <a:pt x="7215596" y="2567370"/>
-                  </a:lnTo>
-                  <a:lnTo>
-                    <a:pt x="7292839" y="2562645"/>
-                  </a:lnTo>
-                  <a:lnTo>
-                    <a:pt x="7370083" y="2557899"/>
+                    <a:pt x="31944" y="48853"/>
+                  </a:lnTo>
+                  <a:lnTo>
+                    <a:pt x="109187" y="163056"/>
+                  </a:lnTo>
+                  <a:lnTo>
+                    <a:pt x="186431" y="273463"/>
+                  </a:lnTo>
+                  <a:lnTo>
+                    <a:pt x="263674" y="380198"/>
+                  </a:lnTo>
+                  <a:lnTo>
+                    <a:pt x="340918" y="483385"/>
+                  </a:lnTo>
+                  <a:lnTo>
+                    <a:pt x="418162" y="583141"/>
+                  </a:lnTo>
+                  <a:lnTo>
+                    <a:pt x="495405" y="679581"/>
+                  </a:lnTo>
+                  <a:lnTo>
+                    <a:pt x="572649" y="772814"/>
+                  </a:lnTo>
+                  <a:lnTo>
+                    <a:pt x="649892" y="862947"/>
+                  </a:lnTo>
+                  <a:lnTo>
+                    <a:pt x="727136" y="950083"/>
+                  </a:lnTo>
+                  <a:lnTo>
+                    <a:pt x="804379" y="1034322"/>
+                  </a:lnTo>
+                  <a:lnTo>
+                    <a:pt x="881623" y="1115761"/>
+                  </a:lnTo>
+                  <a:lnTo>
+                    <a:pt x="958867" y="1194492"/>
+                  </a:lnTo>
+                  <a:lnTo>
+                    <a:pt x="1036110" y="1270605"/>
+                  </a:lnTo>
+                  <a:lnTo>
+                    <a:pt x="1113354" y="1344188"/>
+                  </a:lnTo>
+                  <a:lnTo>
+                    <a:pt x="1190597" y="1415324"/>
+                  </a:lnTo>
+                  <a:lnTo>
+                    <a:pt x="1267841" y="1484095"/>
+                  </a:lnTo>
+                  <a:lnTo>
+                    <a:pt x="1345084" y="1550579"/>
+                  </a:lnTo>
+                  <a:lnTo>
+                    <a:pt x="1422328" y="1614853"/>
+                  </a:lnTo>
+                  <a:lnTo>
+                    <a:pt x="1499572" y="1676990"/>
+                  </a:lnTo>
+                  <a:lnTo>
+                    <a:pt x="1576815" y="1737061"/>
+                  </a:lnTo>
+                  <a:lnTo>
+                    <a:pt x="1654059" y="1795135"/>
+                  </a:lnTo>
+                  <a:lnTo>
+                    <a:pt x="1731302" y="1851278"/>
+                  </a:lnTo>
+                  <a:lnTo>
+                    <a:pt x="1808546" y="1905554"/>
+                  </a:lnTo>
+                  <a:lnTo>
+                    <a:pt x="1885789" y="1958026"/>
+                  </a:lnTo>
+                  <a:lnTo>
+                    <a:pt x="1963033" y="2008753"/>
+                  </a:lnTo>
+                  <a:lnTo>
+                    <a:pt x="2040277" y="2057794"/>
+                  </a:lnTo>
+                  <a:lnTo>
+                    <a:pt x="2117520" y="2105204"/>
+                  </a:lnTo>
+                  <a:lnTo>
+                    <a:pt x="2194764" y="2151038"/>
+                  </a:lnTo>
+                  <a:lnTo>
+                    <a:pt x="2272007" y="2195348"/>
+                  </a:lnTo>
+                  <a:lnTo>
+                    <a:pt x="2349251" y="2238185"/>
+                  </a:lnTo>
+                  <a:lnTo>
+                    <a:pt x="2426494" y="2279597"/>
+                  </a:lnTo>
+                  <a:lnTo>
+                    <a:pt x="2503738" y="2319633"/>
+                  </a:lnTo>
+                  <a:lnTo>
+                    <a:pt x="2580982" y="2358337"/>
+                  </a:lnTo>
+                  <a:lnTo>
+                    <a:pt x="2658225" y="2395755"/>
+                  </a:lnTo>
+                  <a:lnTo>
+                    <a:pt x="2735469" y="2431928"/>
+                  </a:lnTo>
+                  <a:lnTo>
+                    <a:pt x="2812712" y="2466899"/>
+                  </a:lnTo>
+                  <a:lnTo>
+                    <a:pt x="2889956" y="2500707"/>
+                  </a:lnTo>
+                  <a:lnTo>
+                    <a:pt x="2967199" y="2533391"/>
+                  </a:lnTo>
+                  <a:lnTo>
+                    <a:pt x="3044443" y="2564989"/>
+                  </a:lnTo>
+                  <a:lnTo>
+                    <a:pt x="3121687" y="2595536"/>
+                  </a:lnTo>
+                  <a:lnTo>
+                    <a:pt x="3198930" y="2625067"/>
+                  </a:lnTo>
+                  <a:lnTo>
+                    <a:pt x="3276174" y="2653616"/>
+                  </a:lnTo>
+                  <a:lnTo>
+                    <a:pt x="3353417" y="2650757"/>
+                  </a:lnTo>
+                  <a:lnTo>
+                    <a:pt x="3430661" y="2647131"/>
+                  </a:lnTo>
+                  <a:lnTo>
+                    <a:pt x="3507904" y="2643488"/>
+                  </a:lnTo>
+                  <a:lnTo>
+                    <a:pt x="3585148" y="2639830"/>
+                  </a:lnTo>
+                  <a:lnTo>
+                    <a:pt x="3662392" y="2636155"/>
+                  </a:lnTo>
+                  <a:lnTo>
+                    <a:pt x="3739635" y="2632465"/>
+                  </a:lnTo>
+                  <a:lnTo>
+                    <a:pt x="3816879" y="2628758"/>
+                  </a:lnTo>
+                  <a:lnTo>
+                    <a:pt x="3894122" y="2625036"/>
+                  </a:lnTo>
+                  <a:lnTo>
+                    <a:pt x="3971366" y="2621297"/>
+                  </a:lnTo>
+                  <a:lnTo>
+                    <a:pt x="4048609" y="2617542"/>
+                  </a:lnTo>
+                  <a:lnTo>
+                    <a:pt x="4125853" y="2613771"/>
+                  </a:lnTo>
+                  <a:lnTo>
+                    <a:pt x="4203097" y="2609983"/>
+                  </a:lnTo>
+                  <a:lnTo>
+                    <a:pt x="4280340" y="2606179"/>
+                  </a:lnTo>
+                  <a:lnTo>
+                    <a:pt x="4357584" y="2602358"/>
+                  </a:lnTo>
+                  <a:lnTo>
+                    <a:pt x="4434827" y="2598520"/>
+                  </a:lnTo>
+                  <a:lnTo>
+                    <a:pt x="4512071" y="2594666"/>
+                  </a:lnTo>
+                  <a:lnTo>
+                    <a:pt x="4589314" y="2590795"/>
+                  </a:lnTo>
+                  <a:lnTo>
+                    <a:pt x="4666558" y="2586907"/>
+                  </a:lnTo>
+                  <a:lnTo>
+                    <a:pt x="4743802" y="2583002"/>
+                  </a:lnTo>
+                  <a:lnTo>
+                    <a:pt x="4821045" y="2579081"/>
+                  </a:lnTo>
+                  <a:lnTo>
+                    <a:pt x="4898289" y="2575142"/>
+                  </a:lnTo>
+                  <a:lnTo>
+                    <a:pt x="4975532" y="2571186"/>
+                  </a:lnTo>
+                  <a:lnTo>
+                    <a:pt x="5052776" y="2567213"/>
+                  </a:lnTo>
+                  <a:lnTo>
+                    <a:pt x="5130019" y="2563222"/>
+                  </a:lnTo>
+                  <a:lnTo>
+                    <a:pt x="5207263" y="2559214"/>
+                  </a:lnTo>
+                  <a:lnTo>
+                    <a:pt x="5284507" y="2555189"/>
+                  </a:lnTo>
+                  <a:lnTo>
+                    <a:pt x="5361750" y="2551146"/>
+                  </a:lnTo>
+                  <a:lnTo>
+                    <a:pt x="5438994" y="2547085"/>
+                  </a:lnTo>
+                  <a:lnTo>
+                    <a:pt x="5516237" y="2543007"/>
+                  </a:lnTo>
+                  <a:lnTo>
+                    <a:pt x="5593481" y="2538911"/>
+                  </a:lnTo>
+                  <a:lnTo>
+                    <a:pt x="5670724" y="2534798"/>
+                  </a:lnTo>
+                  <a:lnTo>
+                    <a:pt x="5747968" y="2530666"/>
+                  </a:lnTo>
+                  <a:lnTo>
+                    <a:pt x="5825212" y="2526516"/>
+                  </a:lnTo>
+                  <a:lnTo>
+                    <a:pt x="5902455" y="2522349"/>
+                  </a:lnTo>
+                  <a:lnTo>
+                    <a:pt x="5979699" y="2518163"/>
+                  </a:lnTo>
+                  <a:lnTo>
+                    <a:pt x="6056942" y="2513959"/>
+                  </a:lnTo>
+                  <a:lnTo>
+                    <a:pt x="6134186" y="2509736"/>
+                  </a:lnTo>
+                  <a:lnTo>
+                    <a:pt x="6211429" y="2505495"/>
+                  </a:lnTo>
+                  <a:lnTo>
+                    <a:pt x="6288673" y="2501236"/>
+                  </a:lnTo>
+                  <a:lnTo>
+                    <a:pt x="6365917" y="2496958"/>
+                  </a:lnTo>
+                  <a:lnTo>
+                    <a:pt x="6443160" y="2492662"/>
+                  </a:lnTo>
+                  <a:lnTo>
+                    <a:pt x="6520404" y="2488347"/>
+                  </a:lnTo>
+                  <a:lnTo>
+                    <a:pt x="6597647" y="2484013"/>
+                  </a:lnTo>
+                  <a:lnTo>
+                    <a:pt x="6674891" y="2479660"/>
+                  </a:lnTo>
+                  <a:lnTo>
+                    <a:pt x="6752134" y="2475289"/>
+                  </a:lnTo>
+                  <a:lnTo>
+                    <a:pt x="6829378" y="2470898"/>
+                  </a:lnTo>
+                  <a:lnTo>
+                    <a:pt x="6906622" y="2466488"/>
+                  </a:lnTo>
+                  <a:lnTo>
+                    <a:pt x="6983865" y="2462059"/>
+                  </a:lnTo>
+                  <a:lnTo>
+                    <a:pt x="7061109" y="2457610"/>
+                  </a:lnTo>
+                  <a:lnTo>
+                    <a:pt x="7138352" y="2453143"/>
+                  </a:lnTo>
+                  <a:lnTo>
+                    <a:pt x="7215596" y="2448656"/>
+                  </a:lnTo>
+                  <a:lnTo>
+                    <a:pt x="7292839" y="2444149"/>
+                  </a:lnTo>
+                  <a:lnTo>
+                    <a:pt x="7370083" y="2439623"/>
                   </a:lnTo>
                 </a:path>
               </a:pathLst>
@@ -3931,303 +3931,303 @@
           </p:nvSpPr>
           <p:spPr>
             <a:xfrm>
-              <a:off x="817517" y="4679619"/>
-              <a:ext cx="7392041" cy="724574"/>
+              <a:off x="817517" y="4727871"/>
+              <a:ext cx="7392041" cy="691070"/>
             </a:xfrm>
             <a:custGeom>
               <a:avLst/>
               <a:pathLst>
-                <a:path w="7392041" h="724574">
+                <a:path w="7392041" h="691070">
                   <a:moveTo>
-                    <a:pt x="7392041" y="724574"/>
+                    <a:pt x="7392041" y="691070"/>
                   </a:moveTo>
                   <a:lnTo>
-                    <a:pt x="7314797" y="719587"/>
-                  </a:lnTo>
-                  <a:lnTo>
-                    <a:pt x="7237554" y="714428"/>
-                  </a:lnTo>
-                  <a:lnTo>
-                    <a:pt x="7160310" y="709092"/>
-                  </a:lnTo>
-                  <a:lnTo>
-                    <a:pt x="7083066" y="703573"/>
-                  </a:lnTo>
-                  <a:lnTo>
-                    <a:pt x="7005823" y="697863"/>
-                  </a:lnTo>
-                  <a:lnTo>
-                    <a:pt x="6928579" y="691957"/>
-                  </a:lnTo>
-                  <a:lnTo>
-                    <a:pt x="6851336" y="685848"/>
-                  </a:lnTo>
-                  <a:lnTo>
-                    <a:pt x="6774092" y="679529"/>
-                  </a:lnTo>
-                  <a:lnTo>
-                    <a:pt x="6696849" y="672993"/>
-                  </a:lnTo>
-                  <a:lnTo>
-                    <a:pt x="6619605" y="666232"/>
-                  </a:lnTo>
-                  <a:lnTo>
-                    <a:pt x="6542361" y="659238"/>
-                  </a:lnTo>
-                  <a:lnTo>
-                    <a:pt x="6465118" y="652004"/>
-                  </a:lnTo>
-                  <a:lnTo>
-                    <a:pt x="6387874" y="644521"/>
-                  </a:lnTo>
-                  <a:lnTo>
-                    <a:pt x="6310631" y="636781"/>
-                  </a:lnTo>
-                  <a:lnTo>
-                    <a:pt x="6233387" y="628774"/>
-                  </a:lnTo>
-                  <a:lnTo>
-                    <a:pt x="6156144" y="620492"/>
-                  </a:lnTo>
-                  <a:lnTo>
-                    <a:pt x="6078900" y="611926"/>
-                  </a:lnTo>
-                  <a:lnTo>
-                    <a:pt x="6001656" y="603064"/>
-                  </a:lnTo>
-                  <a:lnTo>
-                    <a:pt x="5924413" y="593898"/>
-                  </a:lnTo>
-                  <a:lnTo>
-                    <a:pt x="5847169" y="584417"/>
-                  </a:lnTo>
-                  <a:lnTo>
-                    <a:pt x="5769926" y="574609"/>
-                  </a:lnTo>
-                  <a:lnTo>
-                    <a:pt x="5692682" y="564465"/>
-                  </a:lnTo>
-                  <a:lnTo>
-                    <a:pt x="5615439" y="553971"/>
-                  </a:lnTo>
-                  <a:lnTo>
-                    <a:pt x="5538195" y="543116"/>
-                  </a:lnTo>
-                  <a:lnTo>
-                    <a:pt x="5460951" y="531889"/>
-                  </a:lnTo>
-                  <a:lnTo>
-                    <a:pt x="5383708" y="520275"/>
-                  </a:lnTo>
-                  <a:lnTo>
-                    <a:pt x="5306464" y="508261"/>
-                  </a:lnTo>
-                  <a:lnTo>
-                    <a:pt x="5229221" y="495835"/>
-                  </a:lnTo>
-                  <a:lnTo>
-                    <a:pt x="5151977" y="482981"/>
-                  </a:lnTo>
-                  <a:lnTo>
-                    <a:pt x="5074734" y="469685"/>
-                  </a:lnTo>
-                  <a:lnTo>
-                    <a:pt x="4997490" y="455932"/>
-                  </a:lnTo>
-                  <a:lnTo>
-                    <a:pt x="4920246" y="441706"/>
-                  </a:lnTo>
-                  <a:lnTo>
-                    <a:pt x="4843003" y="426990"/>
-                  </a:lnTo>
-                  <a:lnTo>
-                    <a:pt x="4765759" y="411769"/>
-                  </a:lnTo>
-                  <a:lnTo>
-                    <a:pt x="4688516" y="396024"/>
-                  </a:lnTo>
-                  <a:lnTo>
-                    <a:pt x="4611272" y="379737"/>
-                  </a:lnTo>
-                  <a:lnTo>
-                    <a:pt x="4534029" y="362890"/>
-                  </a:lnTo>
-                  <a:lnTo>
-                    <a:pt x="4456785" y="345464"/>
-                  </a:lnTo>
-                  <a:lnTo>
-                    <a:pt x="4379541" y="327439"/>
-                  </a:lnTo>
-                  <a:lnTo>
-                    <a:pt x="4302298" y="308794"/>
-                  </a:lnTo>
-                  <a:lnTo>
-                    <a:pt x="4225054" y="289507"/>
-                  </a:lnTo>
-                  <a:lnTo>
-                    <a:pt x="4147811" y="269557"/>
-                  </a:lnTo>
-                  <a:lnTo>
-                    <a:pt x="4070567" y="248922"/>
-                  </a:lnTo>
-                  <a:lnTo>
-                    <a:pt x="3993324" y="227576"/>
-                  </a:lnTo>
-                  <a:lnTo>
-                    <a:pt x="3916080" y="205496"/>
-                  </a:lnTo>
-                  <a:lnTo>
-                    <a:pt x="3838836" y="182657"/>
-                  </a:lnTo>
-                  <a:lnTo>
-                    <a:pt x="3761593" y="159033"/>
-                  </a:lnTo>
-                  <a:lnTo>
-                    <a:pt x="3684349" y="134596"/>
-                  </a:lnTo>
-                  <a:lnTo>
-                    <a:pt x="3607106" y="109318"/>
-                  </a:lnTo>
-                  <a:lnTo>
-                    <a:pt x="3529862" y="83171"/>
-                  </a:lnTo>
-                  <a:lnTo>
-                    <a:pt x="3452619" y="56125"/>
-                  </a:lnTo>
-                  <a:lnTo>
-                    <a:pt x="3375375" y="28149"/>
+                    <a:pt x="7314797" y="686314"/>
+                  </a:lnTo>
+                  <a:lnTo>
+                    <a:pt x="7237554" y="681394"/>
+                  </a:lnTo>
+                  <a:lnTo>
+                    <a:pt x="7160310" y="676304"/>
+                  </a:lnTo>
+                  <a:lnTo>
+                    <a:pt x="7083066" y="671040"/>
+                  </a:lnTo>
+                  <a:lnTo>
+                    <a:pt x="7005823" y="665594"/>
+                  </a:lnTo>
+                  <a:lnTo>
+                    <a:pt x="6928579" y="659962"/>
+                  </a:lnTo>
+                  <a:lnTo>
+                    <a:pt x="6851336" y="654135"/>
+                  </a:lnTo>
+                  <a:lnTo>
+                    <a:pt x="6774092" y="648108"/>
+                  </a:lnTo>
+                  <a:lnTo>
+                    <a:pt x="6696849" y="641874"/>
+                  </a:lnTo>
+                  <a:lnTo>
+                    <a:pt x="6619605" y="635426"/>
+                  </a:lnTo>
+                  <a:lnTo>
+                    <a:pt x="6542361" y="628755"/>
+                  </a:lnTo>
+                  <a:lnTo>
+                    <a:pt x="6465118" y="621856"/>
+                  </a:lnTo>
+                  <a:lnTo>
+                    <a:pt x="6387874" y="614719"/>
+                  </a:lnTo>
+                  <a:lnTo>
+                    <a:pt x="6310631" y="607336"/>
+                  </a:lnTo>
+                  <a:lnTo>
+                    <a:pt x="6233387" y="599700"/>
+                  </a:lnTo>
+                  <a:lnTo>
+                    <a:pt x="6156144" y="591801"/>
+                  </a:lnTo>
+                  <a:lnTo>
+                    <a:pt x="6078900" y="583630"/>
+                  </a:lnTo>
+                  <a:lnTo>
+                    <a:pt x="6001656" y="575179"/>
+                  </a:lnTo>
+                  <a:lnTo>
+                    <a:pt x="5924413" y="566436"/>
+                  </a:lnTo>
+                  <a:lnTo>
+                    <a:pt x="5847169" y="557393"/>
+                  </a:lnTo>
+                  <a:lnTo>
+                    <a:pt x="5769926" y="548040"/>
+                  </a:lnTo>
+                  <a:lnTo>
+                    <a:pt x="5692682" y="538364"/>
+                  </a:lnTo>
+                  <a:lnTo>
+                    <a:pt x="5615439" y="528356"/>
+                  </a:lnTo>
+                  <a:lnTo>
+                    <a:pt x="5538195" y="518003"/>
+                  </a:lnTo>
+                  <a:lnTo>
+                    <a:pt x="5460951" y="507294"/>
+                  </a:lnTo>
+                  <a:lnTo>
+                    <a:pt x="5383708" y="496217"/>
+                  </a:lnTo>
+                  <a:lnTo>
+                    <a:pt x="5306464" y="484760"/>
+                  </a:lnTo>
+                  <a:lnTo>
+                    <a:pt x="5229221" y="472908"/>
+                  </a:lnTo>
+                  <a:lnTo>
+                    <a:pt x="5151977" y="460648"/>
+                  </a:lnTo>
+                  <a:lnTo>
+                    <a:pt x="5074734" y="447967"/>
+                  </a:lnTo>
+                  <a:lnTo>
+                    <a:pt x="4997490" y="434850"/>
+                  </a:lnTo>
+                  <a:lnTo>
+                    <a:pt x="4920246" y="421281"/>
+                  </a:lnTo>
+                  <a:lnTo>
+                    <a:pt x="4843003" y="407246"/>
+                  </a:lnTo>
+                  <a:lnTo>
+                    <a:pt x="4765759" y="392729"/>
+                  </a:lnTo>
+                  <a:lnTo>
+                    <a:pt x="4688516" y="377712"/>
+                  </a:lnTo>
+                  <a:lnTo>
+                    <a:pt x="4611272" y="362178"/>
+                  </a:lnTo>
+                  <a:lnTo>
+                    <a:pt x="4534029" y="346110"/>
+                  </a:lnTo>
+                  <a:lnTo>
+                    <a:pt x="4456785" y="329490"/>
+                  </a:lnTo>
+                  <a:lnTo>
+                    <a:pt x="4379541" y="312298"/>
+                  </a:lnTo>
+                  <a:lnTo>
+                    <a:pt x="4302298" y="294515"/>
+                  </a:lnTo>
+                  <a:lnTo>
+                    <a:pt x="4225054" y="276120"/>
+                  </a:lnTo>
+                  <a:lnTo>
+                    <a:pt x="4147811" y="257093"/>
+                  </a:lnTo>
+                  <a:lnTo>
+                    <a:pt x="4070567" y="237411"/>
+                  </a:lnTo>
+                  <a:lnTo>
+                    <a:pt x="3993324" y="217053"/>
+                  </a:lnTo>
+                  <a:lnTo>
+                    <a:pt x="3916080" y="195994"/>
+                  </a:lnTo>
+                  <a:lnTo>
+                    <a:pt x="3838836" y="174211"/>
+                  </a:lnTo>
+                  <a:lnTo>
+                    <a:pt x="3761593" y="151679"/>
+                  </a:lnTo>
+                  <a:lnTo>
+                    <a:pt x="3684349" y="128372"/>
+                  </a:lnTo>
+                  <a:lnTo>
+                    <a:pt x="3607106" y="104263"/>
+                  </a:lnTo>
+                  <a:lnTo>
+                    <a:pt x="3529862" y="79326"/>
+                  </a:lnTo>
+                  <a:lnTo>
+                    <a:pt x="3452619" y="53530"/>
+                  </a:lnTo>
+                  <a:lnTo>
+                    <a:pt x="3375375" y="26848"/>
                   </a:lnTo>
                   <a:lnTo>
                     <a:pt x="3298131" y="0"/>
                   </a:lnTo>
                   <a:lnTo>
-                    <a:pt x="3220888" y="3769"/>
-                  </a:lnTo>
-                  <a:lnTo>
-                    <a:pt x="3143644" y="7523"/>
-                  </a:lnTo>
-                  <a:lnTo>
-                    <a:pt x="3066401" y="11260"/>
-                  </a:lnTo>
-                  <a:lnTo>
-                    <a:pt x="2989157" y="14981"/>
-                  </a:lnTo>
-                  <a:lnTo>
-                    <a:pt x="2911914" y="18685"/>
-                  </a:lnTo>
-                  <a:lnTo>
-                    <a:pt x="2834670" y="22374"/>
-                  </a:lnTo>
-                  <a:lnTo>
-                    <a:pt x="2757426" y="26047"/>
-                  </a:lnTo>
-                  <a:lnTo>
-                    <a:pt x="2680183" y="29704"/>
-                  </a:lnTo>
-                  <a:lnTo>
-                    <a:pt x="2602939" y="33344"/>
-                  </a:lnTo>
-                  <a:lnTo>
-                    <a:pt x="2525696" y="36970"/>
-                  </a:lnTo>
-                  <a:lnTo>
-                    <a:pt x="2448452" y="40579"/>
-                  </a:lnTo>
-                  <a:lnTo>
-                    <a:pt x="2371209" y="44173"/>
-                  </a:lnTo>
-                  <a:lnTo>
-                    <a:pt x="2293965" y="47751"/>
-                  </a:lnTo>
-                  <a:lnTo>
-                    <a:pt x="2216721" y="51314"/>
-                  </a:lnTo>
-                  <a:lnTo>
-                    <a:pt x="2139478" y="54861"/>
-                  </a:lnTo>
-                  <a:lnTo>
-                    <a:pt x="2062234" y="58393"/>
-                  </a:lnTo>
-                  <a:lnTo>
-                    <a:pt x="1984991" y="61910"/>
-                  </a:lnTo>
-                  <a:lnTo>
-                    <a:pt x="1907747" y="65411"/>
-                  </a:lnTo>
-                  <a:lnTo>
-                    <a:pt x="1830504" y="68897"/>
-                  </a:lnTo>
-                  <a:lnTo>
-                    <a:pt x="1753260" y="72368"/>
-                  </a:lnTo>
-                  <a:lnTo>
-                    <a:pt x="1676016" y="75824"/>
-                  </a:lnTo>
-                  <a:lnTo>
-                    <a:pt x="1598773" y="79265"/>
-                  </a:lnTo>
-                  <a:lnTo>
-                    <a:pt x="1521529" y="82691"/>
-                  </a:lnTo>
-                  <a:lnTo>
-                    <a:pt x="1444286" y="86102"/>
-                  </a:lnTo>
-                  <a:lnTo>
-                    <a:pt x="1367042" y="89499"/>
-                  </a:lnTo>
-                  <a:lnTo>
-                    <a:pt x="1289799" y="92881"/>
-                  </a:lnTo>
-                  <a:lnTo>
-                    <a:pt x="1212555" y="96248"/>
-                  </a:lnTo>
-                  <a:lnTo>
-                    <a:pt x="1135311" y="99600"/>
-                  </a:lnTo>
-                  <a:lnTo>
-                    <a:pt x="1058068" y="102938"/>
-                  </a:lnTo>
-                  <a:lnTo>
-                    <a:pt x="980824" y="106261"/>
-                  </a:lnTo>
-                  <a:lnTo>
-                    <a:pt x="903581" y="109571"/>
-                  </a:lnTo>
-                  <a:lnTo>
-                    <a:pt x="826337" y="112865"/>
-                  </a:lnTo>
-                  <a:lnTo>
-                    <a:pt x="749094" y="116146"/>
-                  </a:lnTo>
-                  <a:lnTo>
-                    <a:pt x="671850" y="119412"/>
-                  </a:lnTo>
-                  <a:lnTo>
-                    <a:pt x="594606" y="122664"/>
-                  </a:lnTo>
-                  <a:lnTo>
-                    <a:pt x="517363" y="125902"/>
-                  </a:lnTo>
-                  <a:lnTo>
-                    <a:pt x="440119" y="129126"/>
-                  </a:lnTo>
-                  <a:lnTo>
-                    <a:pt x="362876" y="132336"/>
-                  </a:lnTo>
-                  <a:lnTo>
-                    <a:pt x="285632" y="135532"/>
-                  </a:lnTo>
-                  <a:lnTo>
-                    <a:pt x="208389" y="138714"/>
-                  </a:lnTo>
-                  <a:lnTo>
-                    <a:pt x="131145" y="141882"/>
-                  </a:lnTo>
-                  <a:lnTo>
-                    <a:pt x="53901" y="145037"/>
-                  </a:lnTo>
-                  <a:lnTo>
-                    <a:pt x="0" y="147229"/>
+                    <a:pt x="3220888" y="3595"/>
+                  </a:lnTo>
+                  <a:lnTo>
+                    <a:pt x="3143644" y="7175"/>
+                  </a:lnTo>
+                  <a:lnTo>
+                    <a:pt x="3066401" y="10739"/>
+                  </a:lnTo>
+                  <a:lnTo>
+                    <a:pt x="2989157" y="14288"/>
+                  </a:lnTo>
+                  <a:lnTo>
+                    <a:pt x="2911914" y="17821"/>
+                  </a:lnTo>
+                  <a:lnTo>
+                    <a:pt x="2834670" y="21339"/>
+                  </a:lnTo>
+                  <a:lnTo>
+                    <a:pt x="2757426" y="24842"/>
+                  </a:lnTo>
+                  <a:lnTo>
+                    <a:pt x="2680183" y="28330"/>
+                  </a:lnTo>
+                  <a:lnTo>
+                    <a:pt x="2602939" y="31803"/>
+                  </a:lnTo>
+                  <a:lnTo>
+                    <a:pt x="2525696" y="35260"/>
+                  </a:lnTo>
+                  <a:lnTo>
+                    <a:pt x="2448452" y="38703"/>
+                  </a:lnTo>
+                  <a:lnTo>
+                    <a:pt x="2371209" y="42130"/>
+                  </a:lnTo>
+                  <a:lnTo>
+                    <a:pt x="2293965" y="45543"/>
+                  </a:lnTo>
+                  <a:lnTo>
+                    <a:pt x="2216721" y="48941"/>
+                  </a:lnTo>
+                  <a:lnTo>
+                    <a:pt x="2139478" y="52324"/>
+                  </a:lnTo>
+                  <a:lnTo>
+                    <a:pt x="2062234" y="55693"/>
+                  </a:lnTo>
+                  <a:lnTo>
+                    <a:pt x="1984991" y="59047"/>
+                  </a:lnTo>
+                  <a:lnTo>
+                    <a:pt x="1907747" y="62386"/>
+                  </a:lnTo>
+                  <a:lnTo>
+                    <a:pt x="1830504" y="65711"/>
+                  </a:lnTo>
+                  <a:lnTo>
+                    <a:pt x="1753260" y="69022"/>
+                  </a:lnTo>
+                  <a:lnTo>
+                    <a:pt x="1676016" y="72318"/>
+                  </a:lnTo>
+                  <a:lnTo>
+                    <a:pt x="1598773" y="75600"/>
+                  </a:lnTo>
+                  <a:lnTo>
+                    <a:pt x="1521529" y="78867"/>
+                  </a:lnTo>
+                  <a:lnTo>
+                    <a:pt x="1444286" y="82121"/>
+                  </a:lnTo>
+                  <a:lnTo>
+                    <a:pt x="1367042" y="85360"/>
+                  </a:lnTo>
+                  <a:lnTo>
+                    <a:pt x="1289799" y="88586"/>
+                  </a:lnTo>
+                  <a:lnTo>
+                    <a:pt x="1212555" y="91797"/>
+                  </a:lnTo>
+                  <a:lnTo>
+                    <a:pt x="1135311" y="94995"/>
+                  </a:lnTo>
+                  <a:lnTo>
+                    <a:pt x="1058068" y="98178"/>
+                  </a:lnTo>
+                  <a:lnTo>
+                    <a:pt x="980824" y="101348"/>
+                  </a:lnTo>
+                  <a:lnTo>
+                    <a:pt x="903581" y="104504"/>
+                  </a:lnTo>
+                  <a:lnTo>
+                    <a:pt x="826337" y="107646"/>
+                  </a:lnTo>
+                  <a:lnTo>
+                    <a:pt x="749094" y="110775"/>
+                  </a:lnTo>
+                  <a:lnTo>
+                    <a:pt x="671850" y="113890"/>
+                  </a:lnTo>
+                  <a:lnTo>
+                    <a:pt x="594606" y="116992"/>
+                  </a:lnTo>
+                  <a:lnTo>
+                    <a:pt x="517363" y="120080"/>
+                  </a:lnTo>
+                  <a:lnTo>
+                    <a:pt x="440119" y="123155"/>
+                  </a:lnTo>
+                  <a:lnTo>
+                    <a:pt x="362876" y="126217"/>
+                  </a:lnTo>
+                  <a:lnTo>
+                    <a:pt x="285632" y="129265"/>
+                  </a:lnTo>
+                  <a:lnTo>
+                    <a:pt x="208389" y="132300"/>
+                  </a:lnTo>
+                  <a:lnTo>
+                    <a:pt x="131145" y="135322"/>
+                  </a:lnTo>
+                  <a:lnTo>
+                    <a:pt x="53901" y="138330"/>
+                  </a:lnTo>
+                  <a:lnTo>
+                    <a:pt x="0" y="140421"/>
                   </a:lnTo>
                 </a:path>
               </a:pathLst>
@@ -4247,303 +4247,303 @@
           </p:nvSpPr>
           <p:spPr>
             <a:xfrm>
-              <a:off x="817517" y="3917108"/>
-              <a:ext cx="7392041" cy="1233662"/>
+              <a:off x="817517" y="4000618"/>
+              <a:ext cx="7392041" cy="1176618"/>
             </a:xfrm>
             <a:custGeom>
               <a:avLst/>
               <a:pathLst>
-                <a:path w="7392041" h="1233662">
+                <a:path w="7392041" h="1176618">
                   <a:moveTo>
                     <a:pt x="0" y="0"/>
                   </a:moveTo>
                   <a:lnTo>
-                    <a:pt x="53901" y="16732"/>
-                  </a:lnTo>
-                  <a:lnTo>
-                    <a:pt x="131145" y="40359"/>
-                  </a:lnTo>
-                  <a:lnTo>
-                    <a:pt x="208389" y="63640"/>
-                  </a:lnTo>
-                  <a:lnTo>
-                    <a:pt x="285632" y="86581"/>
-                  </a:lnTo>
-                  <a:lnTo>
-                    <a:pt x="362876" y="109186"/>
-                  </a:lnTo>
-                  <a:lnTo>
-                    <a:pt x="440119" y="131461"/>
-                  </a:lnTo>
-                  <a:lnTo>
-                    <a:pt x="517363" y="153410"/>
-                  </a:lnTo>
-                  <a:lnTo>
-                    <a:pt x="594606" y="175038"/>
-                  </a:lnTo>
-                  <a:lnTo>
-                    <a:pt x="671850" y="196349"/>
-                  </a:lnTo>
-                  <a:lnTo>
-                    <a:pt x="749094" y="217349"/>
-                  </a:lnTo>
-                  <a:lnTo>
-                    <a:pt x="826337" y="238042"/>
-                  </a:lnTo>
-                  <a:lnTo>
-                    <a:pt x="903581" y="258432"/>
-                  </a:lnTo>
-                  <a:lnTo>
-                    <a:pt x="980824" y="278524"/>
-                  </a:lnTo>
-                  <a:lnTo>
-                    <a:pt x="1058068" y="298321"/>
-                  </a:lnTo>
-                  <a:lnTo>
-                    <a:pt x="1135311" y="317830"/>
-                  </a:lnTo>
-                  <a:lnTo>
-                    <a:pt x="1212555" y="337053"/>
-                  </a:lnTo>
-                  <a:lnTo>
-                    <a:pt x="1289799" y="355995"/>
-                  </a:lnTo>
-                  <a:lnTo>
-                    <a:pt x="1367042" y="374659"/>
-                  </a:lnTo>
-                  <a:lnTo>
-                    <a:pt x="1444286" y="393051"/>
-                  </a:lnTo>
-                  <a:lnTo>
-                    <a:pt x="1521529" y="411174"/>
-                  </a:lnTo>
-                  <a:lnTo>
-                    <a:pt x="1598773" y="429032"/>
-                  </a:lnTo>
-                  <a:lnTo>
-                    <a:pt x="1676016" y="446628"/>
-                  </a:lnTo>
-                  <a:lnTo>
-                    <a:pt x="1753260" y="463967"/>
-                  </a:lnTo>
-                  <a:lnTo>
-                    <a:pt x="1830504" y="481053"/>
-                  </a:lnTo>
-                  <a:lnTo>
-                    <a:pt x="1907747" y="497889"/>
-                  </a:lnTo>
-                  <a:lnTo>
-                    <a:pt x="1984991" y="514478"/>
-                  </a:lnTo>
-                  <a:lnTo>
-                    <a:pt x="2062234" y="530825"/>
-                  </a:lnTo>
-                  <a:lnTo>
-                    <a:pt x="2139478" y="546932"/>
-                  </a:lnTo>
-                  <a:lnTo>
-                    <a:pt x="2216721" y="562805"/>
-                  </a:lnTo>
-                  <a:lnTo>
-                    <a:pt x="2293965" y="578444"/>
-                  </a:lnTo>
-                  <a:lnTo>
-                    <a:pt x="2371209" y="593856"/>
-                  </a:lnTo>
-                  <a:lnTo>
-                    <a:pt x="2448452" y="609041"/>
-                  </a:lnTo>
-                  <a:lnTo>
-                    <a:pt x="2525696" y="624005"/>
-                  </a:lnTo>
-                  <a:lnTo>
-                    <a:pt x="2602939" y="638750"/>
-                  </a:lnTo>
-                  <a:lnTo>
-                    <a:pt x="2680183" y="653279"/>
-                  </a:lnTo>
-                  <a:lnTo>
-                    <a:pt x="2757426" y="667595"/>
-                  </a:lnTo>
-                  <a:lnTo>
-                    <a:pt x="2834670" y="681703"/>
-                  </a:lnTo>
-                  <a:lnTo>
-                    <a:pt x="2911914" y="695604"/>
-                  </a:lnTo>
-                  <a:lnTo>
-                    <a:pt x="2989157" y="709301"/>
-                  </a:lnTo>
-                  <a:lnTo>
-                    <a:pt x="3066401" y="722798"/>
-                  </a:lnTo>
-                  <a:lnTo>
-                    <a:pt x="3143644" y="736098"/>
-                  </a:lnTo>
-                  <a:lnTo>
-                    <a:pt x="3220888" y="749203"/>
-                  </a:lnTo>
-                  <a:lnTo>
-                    <a:pt x="3298131" y="762117"/>
-                  </a:lnTo>
-                  <a:lnTo>
-                    <a:pt x="3375375" y="774842"/>
-                  </a:lnTo>
-                  <a:lnTo>
-                    <a:pt x="3452619" y="787380"/>
-                  </a:lnTo>
-                  <a:lnTo>
-                    <a:pt x="3529862" y="799735"/>
-                  </a:lnTo>
-                  <a:lnTo>
-                    <a:pt x="3607106" y="811910"/>
-                  </a:lnTo>
-                  <a:lnTo>
-                    <a:pt x="3684349" y="823906"/>
-                  </a:lnTo>
-                  <a:lnTo>
-                    <a:pt x="3761593" y="835727"/>
-                  </a:lnTo>
-                  <a:lnTo>
-                    <a:pt x="3838836" y="847375"/>
-                  </a:lnTo>
-                  <a:lnTo>
-                    <a:pt x="3916080" y="858853"/>
-                  </a:lnTo>
-                  <a:lnTo>
-                    <a:pt x="3993324" y="870163"/>
-                  </a:lnTo>
-                  <a:lnTo>
-                    <a:pt x="4070567" y="881307"/>
-                  </a:lnTo>
-                  <a:lnTo>
-                    <a:pt x="4147811" y="892288"/>
-                  </a:lnTo>
-                  <a:lnTo>
-                    <a:pt x="4225054" y="903109"/>
-                  </a:lnTo>
-                  <a:lnTo>
-                    <a:pt x="4302298" y="913772"/>
-                  </a:lnTo>
-                  <a:lnTo>
-                    <a:pt x="4379541" y="924278"/>
-                  </a:lnTo>
-                  <a:lnTo>
-                    <a:pt x="4456785" y="934631"/>
-                  </a:lnTo>
-                  <a:lnTo>
-                    <a:pt x="4534029" y="944832"/>
-                  </a:lnTo>
-                  <a:lnTo>
-                    <a:pt x="4611272" y="954885"/>
-                  </a:lnTo>
-                  <a:lnTo>
-                    <a:pt x="4688516" y="964790"/>
-                  </a:lnTo>
-                  <a:lnTo>
-                    <a:pt x="4765759" y="974550"/>
-                  </a:lnTo>
-                  <a:lnTo>
-                    <a:pt x="4843003" y="984168"/>
-                  </a:lnTo>
-                  <a:lnTo>
-                    <a:pt x="4920246" y="993645"/>
-                  </a:lnTo>
-                  <a:lnTo>
-                    <a:pt x="4997490" y="1002983"/>
-                  </a:lnTo>
-                  <a:lnTo>
-                    <a:pt x="5074734" y="1012185"/>
-                  </a:lnTo>
-                  <a:lnTo>
-                    <a:pt x="5151977" y="1021252"/>
-                  </a:lnTo>
-                  <a:lnTo>
-                    <a:pt x="5229221" y="1030186"/>
-                  </a:lnTo>
-                  <a:lnTo>
-                    <a:pt x="5306464" y="1038990"/>
-                  </a:lnTo>
-                  <a:lnTo>
-                    <a:pt x="5383708" y="1047665"/>
-                  </a:lnTo>
-                  <a:lnTo>
-                    <a:pt x="5460951" y="1056213"/>
-                  </a:lnTo>
-                  <a:lnTo>
-                    <a:pt x="5538195" y="1064636"/>
-                  </a:lnTo>
-                  <a:lnTo>
-                    <a:pt x="5615439" y="1072936"/>
-                  </a:lnTo>
-                  <a:lnTo>
-                    <a:pt x="5692682" y="1081115"/>
-                  </a:lnTo>
-                  <a:lnTo>
-                    <a:pt x="5769926" y="1089174"/>
-                  </a:lnTo>
-                  <a:lnTo>
-                    <a:pt x="5847169" y="1097115"/>
-                  </a:lnTo>
-                  <a:lnTo>
-                    <a:pt x="5924413" y="1104940"/>
-                  </a:lnTo>
-                  <a:lnTo>
-                    <a:pt x="6001656" y="1112650"/>
-                  </a:lnTo>
-                  <a:lnTo>
-                    <a:pt x="6078900" y="1120248"/>
-                  </a:lnTo>
-                  <a:lnTo>
-                    <a:pt x="6156144" y="1127734"/>
-                  </a:lnTo>
-                  <a:lnTo>
-                    <a:pt x="6233387" y="1135111"/>
-                  </a:lnTo>
-                  <a:lnTo>
-                    <a:pt x="6310631" y="1142380"/>
-                  </a:lnTo>
-                  <a:lnTo>
-                    <a:pt x="6387874" y="1149543"/>
-                  </a:lnTo>
-                  <a:lnTo>
-                    <a:pt x="6465118" y="1156601"/>
-                  </a:lnTo>
-                  <a:lnTo>
-                    <a:pt x="6542361" y="1163556"/>
-                  </a:lnTo>
-                  <a:lnTo>
-                    <a:pt x="6619605" y="1170409"/>
-                  </a:lnTo>
-                  <a:lnTo>
-                    <a:pt x="6696849" y="1177162"/>
-                  </a:lnTo>
-                  <a:lnTo>
-                    <a:pt x="6774092" y="1183816"/>
-                  </a:lnTo>
-                  <a:lnTo>
-                    <a:pt x="6851336" y="1190373"/>
-                  </a:lnTo>
-                  <a:lnTo>
-                    <a:pt x="6928579" y="1196834"/>
-                  </a:lnTo>
-                  <a:lnTo>
-                    <a:pt x="7005823" y="1203200"/>
-                  </a:lnTo>
-                  <a:lnTo>
-                    <a:pt x="7083066" y="1209473"/>
-                  </a:lnTo>
-                  <a:lnTo>
-                    <a:pt x="7160310" y="1215655"/>
-                  </a:lnTo>
-                  <a:lnTo>
-                    <a:pt x="7237554" y="1221746"/>
-                  </a:lnTo>
-                  <a:lnTo>
-                    <a:pt x="7314797" y="1227748"/>
-                  </a:lnTo>
-                  <a:lnTo>
-                    <a:pt x="7392041" y="1233662"/>
+                    <a:pt x="53901" y="15958"/>
+                  </a:lnTo>
+                  <a:lnTo>
+                    <a:pt x="131145" y="38492"/>
+                  </a:lnTo>
+                  <a:lnTo>
+                    <a:pt x="208389" y="60697"/>
+                  </a:lnTo>
+                  <a:lnTo>
+                    <a:pt x="285632" y="82577"/>
+                  </a:lnTo>
+                  <a:lnTo>
+                    <a:pt x="362876" y="104137"/>
+                  </a:lnTo>
+                  <a:lnTo>
+                    <a:pt x="440119" y="125382"/>
+                  </a:lnTo>
+                  <a:lnTo>
+                    <a:pt x="517363" y="146316"/>
+                  </a:lnTo>
+                  <a:lnTo>
+                    <a:pt x="594606" y="166944"/>
+                  </a:lnTo>
+                  <a:lnTo>
+                    <a:pt x="671850" y="187270"/>
+                  </a:lnTo>
+                  <a:lnTo>
+                    <a:pt x="749094" y="207299"/>
+                  </a:lnTo>
+                  <a:lnTo>
+                    <a:pt x="826337" y="227035"/>
+                  </a:lnTo>
+                  <a:lnTo>
+                    <a:pt x="903581" y="246482"/>
+                  </a:lnTo>
+                  <a:lnTo>
+                    <a:pt x="980824" y="265645"/>
+                  </a:lnTo>
+                  <a:lnTo>
+                    <a:pt x="1058068" y="284527"/>
+                  </a:lnTo>
+                  <a:lnTo>
+                    <a:pt x="1135311" y="303133"/>
+                  </a:lnTo>
+                  <a:lnTo>
+                    <a:pt x="1212555" y="321468"/>
+                  </a:lnTo>
+                  <a:lnTo>
+                    <a:pt x="1289799" y="339534"/>
+                  </a:lnTo>
+                  <a:lnTo>
+                    <a:pt x="1367042" y="357335"/>
+                  </a:lnTo>
+                  <a:lnTo>
+                    <a:pt x="1444286" y="374877"/>
+                  </a:lnTo>
+                  <a:lnTo>
+                    <a:pt x="1521529" y="392162"/>
+                  </a:lnTo>
+                  <a:lnTo>
+                    <a:pt x="1598773" y="409193"/>
+                  </a:lnTo>
+                  <a:lnTo>
+                    <a:pt x="1676016" y="425976"/>
+                  </a:lnTo>
+                  <a:lnTo>
+                    <a:pt x="1753260" y="442514"/>
+                  </a:lnTo>
+                  <a:lnTo>
+                    <a:pt x="1830504" y="458809"/>
+                  </a:lnTo>
+                  <a:lnTo>
+                    <a:pt x="1907747" y="474866"/>
+                  </a:lnTo>
+                  <a:lnTo>
+                    <a:pt x="1984991" y="490689"/>
+                  </a:lnTo>
+                  <a:lnTo>
+                    <a:pt x="2062234" y="506280"/>
+                  </a:lnTo>
+                  <a:lnTo>
+                    <a:pt x="2139478" y="521642"/>
+                  </a:lnTo>
+                  <a:lnTo>
+                    <a:pt x="2216721" y="536781"/>
+                  </a:lnTo>
+                  <a:lnTo>
+                    <a:pt x="2293965" y="551697"/>
+                  </a:lnTo>
+                  <a:lnTo>
+                    <a:pt x="2371209" y="566396"/>
+                  </a:lnTo>
+                  <a:lnTo>
+                    <a:pt x="2448452" y="580879"/>
+                  </a:lnTo>
+                  <a:lnTo>
+                    <a:pt x="2525696" y="595151"/>
+                  </a:lnTo>
+                  <a:lnTo>
+                    <a:pt x="2602939" y="609214"/>
+                  </a:lnTo>
+                  <a:lnTo>
+                    <a:pt x="2680183" y="623071"/>
+                  </a:lnTo>
+                  <a:lnTo>
+                    <a:pt x="2757426" y="636726"/>
+                  </a:lnTo>
+                  <a:lnTo>
+                    <a:pt x="2834670" y="650181"/>
+                  </a:lnTo>
+                  <a:lnTo>
+                    <a:pt x="2911914" y="663439"/>
+                  </a:lnTo>
+                  <a:lnTo>
+                    <a:pt x="2989157" y="676503"/>
+                  </a:lnTo>
+                  <a:lnTo>
+                    <a:pt x="3066401" y="689376"/>
+                  </a:lnTo>
+                  <a:lnTo>
+                    <a:pt x="3143644" y="702061"/>
+                  </a:lnTo>
+                  <a:lnTo>
+                    <a:pt x="3220888" y="714560"/>
+                  </a:lnTo>
+                  <a:lnTo>
+                    <a:pt x="3298131" y="726877"/>
+                  </a:lnTo>
+                  <a:lnTo>
+                    <a:pt x="3375375" y="739013"/>
+                  </a:lnTo>
+                  <a:lnTo>
+                    <a:pt x="3452619" y="750972"/>
+                  </a:lnTo>
+                  <a:lnTo>
+                    <a:pt x="3529862" y="762756"/>
+                  </a:lnTo>
+                  <a:lnTo>
+                    <a:pt x="3607106" y="774367"/>
+                  </a:lnTo>
+                  <a:lnTo>
+                    <a:pt x="3684349" y="785809"/>
+                  </a:lnTo>
+                  <a:lnTo>
+                    <a:pt x="3761593" y="797083"/>
+                  </a:lnTo>
+                  <a:lnTo>
+                    <a:pt x="3838836" y="808193"/>
+                  </a:lnTo>
+                  <a:lnTo>
+                    <a:pt x="3916080" y="819140"/>
+                  </a:lnTo>
+                  <a:lnTo>
+                    <a:pt x="3993324" y="829927"/>
+                  </a:lnTo>
+                  <a:lnTo>
+                    <a:pt x="4070567" y="840556"/>
+                  </a:lnTo>
+                  <a:lnTo>
+                    <a:pt x="4147811" y="851029"/>
+                  </a:lnTo>
+                  <a:lnTo>
+                    <a:pt x="4225054" y="861350"/>
+                  </a:lnTo>
+                  <a:lnTo>
+                    <a:pt x="4302298" y="871519"/>
+                  </a:lnTo>
+                  <a:lnTo>
+                    <a:pt x="4379541" y="881540"/>
+                  </a:lnTo>
+                  <a:lnTo>
+                    <a:pt x="4456785" y="891414"/>
+                  </a:lnTo>
+                  <a:lnTo>
+                    <a:pt x="4534029" y="901144"/>
+                  </a:lnTo>
+                  <a:lnTo>
+                    <a:pt x="4611272" y="910731"/>
+                  </a:lnTo>
+                  <a:lnTo>
+                    <a:pt x="4688516" y="920178"/>
+                  </a:lnTo>
+                  <a:lnTo>
+                    <a:pt x="4765759" y="929487"/>
+                  </a:lnTo>
+                  <a:lnTo>
+                    <a:pt x="4843003" y="938660"/>
+                  </a:lnTo>
+                  <a:lnTo>
+                    <a:pt x="4920246" y="947699"/>
+                  </a:lnTo>
+                  <a:lnTo>
+                    <a:pt x="4997490" y="956605"/>
+                  </a:lnTo>
+                  <a:lnTo>
+                    <a:pt x="5074734" y="965381"/>
+                  </a:lnTo>
+                  <a:lnTo>
+                    <a:pt x="5151977" y="974029"/>
+                  </a:lnTo>
+                  <a:lnTo>
+                    <a:pt x="5229221" y="982551"/>
+                  </a:lnTo>
+                  <a:lnTo>
+                    <a:pt x="5306464" y="990947"/>
+                  </a:lnTo>
+                  <a:lnTo>
+                    <a:pt x="5383708" y="999221"/>
+                  </a:lnTo>
+                  <a:lnTo>
+                    <a:pt x="5460951" y="1007374"/>
+                  </a:lnTo>
+                  <a:lnTo>
+                    <a:pt x="5538195" y="1015408"/>
+                  </a:lnTo>
+                  <a:lnTo>
+                    <a:pt x="5615439" y="1023324"/>
+                  </a:lnTo>
+                  <a:lnTo>
+                    <a:pt x="5692682" y="1031124"/>
+                  </a:lnTo>
+                  <a:lnTo>
+                    <a:pt x="5769926" y="1038811"/>
+                  </a:lnTo>
+                  <a:lnTo>
+                    <a:pt x="5847169" y="1046384"/>
+                  </a:lnTo>
+                  <a:lnTo>
+                    <a:pt x="5924413" y="1053848"/>
+                  </a:lnTo>
+                  <a:lnTo>
+                    <a:pt x="6001656" y="1061201"/>
+                  </a:lnTo>
+                  <a:lnTo>
+                    <a:pt x="6078900" y="1068448"/>
+                  </a:lnTo>
+                  <a:lnTo>
+                    <a:pt x="6156144" y="1075588"/>
+                  </a:lnTo>
+                  <a:lnTo>
+                    <a:pt x="6233387" y="1082624"/>
+                  </a:lnTo>
+                  <a:lnTo>
+                    <a:pt x="6310631" y="1089557"/>
+                  </a:lnTo>
+                  <a:lnTo>
+                    <a:pt x="6387874" y="1096389"/>
+                  </a:lnTo>
+                  <a:lnTo>
+                    <a:pt x="6465118" y="1103120"/>
+                  </a:lnTo>
+                  <a:lnTo>
+                    <a:pt x="6542361" y="1109754"/>
+                  </a:lnTo>
+                  <a:lnTo>
+                    <a:pt x="6619605" y="1116290"/>
+                  </a:lnTo>
+                  <a:lnTo>
+                    <a:pt x="6696849" y="1122730"/>
+                  </a:lnTo>
+                  <a:lnTo>
+                    <a:pt x="6774092" y="1129077"/>
+                  </a:lnTo>
+                  <a:lnTo>
+                    <a:pt x="6851336" y="1135330"/>
+                  </a:lnTo>
+                  <a:lnTo>
+                    <a:pt x="6928579" y="1141492"/>
+                  </a:lnTo>
+                  <a:lnTo>
+                    <a:pt x="7005823" y="1147564"/>
+                  </a:lnTo>
+                  <a:lnTo>
+                    <a:pt x="7083066" y="1153548"/>
+                  </a:lnTo>
+                  <a:lnTo>
+                    <a:pt x="7160310" y="1159443"/>
+                  </a:lnTo>
+                  <a:lnTo>
+                    <a:pt x="7237554" y="1165253"/>
+                  </a:lnTo>
+                  <a:lnTo>
+                    <a:pt x="7314797" y="1170977"/>
+                  </a:lnTo>
+                  <a:lnTo>
+                    <a:pt x="7392041" y="1176618"/>
                   </a:lnTo>
                 </a:path>
               </a:pathLst>
@@ -4572,7 +4572,7 @@
           </p:nvSpPr>
           <p:spPr>
             <a:xfrm>
-              <a:off x="817517" y="4679530"/>
+              <a:off x="817517" y="4727786"/>
               <a:ext cx="7799693" cy="0"/>
             </a:xfrm>
             <a:custGeom>
@@ -4615,15 +4615,15 @@
           </p:nvSpPr>
           <p:spPr>
             <a:xfrm>
-              <a:off x="4117484" y="1896563"/>
-              <a:ext cx="0" cy="3826579"/>
+              <a:off x="4117484" y="2073503"/>
+              <a:ext cx="0" cy="3649639"/>
             </a:xfrm>
             <a:custGeom>
               <a:avLst/>
               <a:pathLst>
-                <a:path w="0" h="3826579">
+                <a:path w="0" h="3649639">
                   <a:moveTo>
-                    <a:pt x="0" y="3826579"/>
+                    <a:pt x="0" y="3649639"/>
                   </a:moveTo>
                   <a:lnTo>
                     <a:pt x="0" y="0"/>
@@ -4658,7 +4658,7 @@
           </p:nvSpPr>
           <p:spPr>
             <a:xfrm>
-              <a:off x="692708" y="5509156"/>
+              <a:off x="692708" y="5517199"/>
               <a:ext cx="62179" cy="80101"/>
             </a:xfrm>
             <a:prstGeom prst="rect">
@@ -4704,7 +4704,7 @@
           </p:nvSpPr>
           <p:spPr>
             <a:xfrm>
-              <a:off x="692708" y="4639479"/>
+              <a:off x="692708" y="4687735"/>
               <a:ext cx="62179" cy="80101"/>
             </a:xfrm>
             <a:prstGeom prst="rect">
@@ -4750,7 +4750,7 @@
           </p:nvSpPr>
           <p:spPr>
             <a:xfrm>
-              <a:off x="692708" y="3769802"/>
+              <a:off x="692708" y="3858272"/>
               <a:ext cx="62179" cy="80101"/>
             </a:xfrm>
             <a:prstGeom prst="rect">
@@ -4796,7 +4796,7 @@
           </p:nvSpPr>
           <p:spPr>
             <a:xfrm>
-              <a:off x="692708" y="2900125"/>
+              <a:off x="692708" y="3028808"/>
               <a:ext cx="62179" cy="80101"/>
             </a:xfrm>
             <a:prstGeom prst="rect">
@@ -4842,7 +4842,7 @@
           </p:nvSpPr>
           <p:spPr>
             <a:xfrm>
-              <a:off x="692708" y="2030448"/>
+              <a:off x="692708" y="2199345"/>
               <a:ext cx="62179" cy="80101"/>
             </a:xfrm>
             <a:prstGeom prst="rect">
@@ -5118,7 +5118,7 @@
           </p:nvSpPr>
           <p:spPr>
             <a:xfrm rot="-5400000">
-              <a:off x="68446" y="3759743"/>
+              <a:off x="68446" y="3848213"/>
               <a:ext cx="1016904" cy="100218"/>
             </a:xfrm>
             <a:prstGeom prst="rect">
@@ -5159,6 +5159,52 @@
         <p:sp>
           <p:nvSpPr>
             <p:cNvPr id="38" name="tx38"/>
+            <p:cNvSpPr/>
+            <p:nvPr/>
+          </p:nvSpPr>
+          <p:spPr>
+            <a:xfrm>
+              <a:off x="817517" y="1896563"/>
+              <a:ext cx="5626211" cy="82021"/>
+            </a:xfrm>
+            <a:prstGeom prst="rect">
+              <a:avLst/>
+            </a:prstGeom>
+            <a:noFill/>
+          </p:spPr>
+          <p:txBody>
+            <a:bodyPr lIns="0" rIns="0" tIns="0" bIns="0" anchorCtr="1" anchor="ctr" wrap="none"/>
+            <a:lstStyle/>
+            <a:p>
+              <a:pPr algn="l" marL="0" marR="0" indent="0">
+                <a:lnSpc>
+                  <a:spcPts val="900"/>
+                </a:lnSpc>
+                <a:spcBef>
+                  <a:spcPts val="0"/>
+                </a:spcBef>
+                <a:spcAft>
+                  <a:spcPts val="0"/>
+                </a:spcAft>
+              </a:pPr>
+              <a:r>
+                <a:rPr sz="900">
+                  <a:solidFill>
+                    <a:srgbClr val="404040">
+                      <a:alpha val="100000"/>
+                    </a:srgbClr>
+                  </a:solidFill>
+                  <a:latin typeface="Helvetica"/>
+                  <a:cs typeface="Helvetica"/>
+                </a:rPr>
+                <a:t>subHR per 0.1 ratio decline: 1.18 (0.95-1.47)  |  per IQR decline (Δ = 0.30): 1.65 (0.86-3.15)  |  IQR: [0.84, 1.14]</a:t>
+              </a:r>
+            </a:p>
+          </p:txBody>
+        </p:sp>
+        <p:sp>
+          <p:nvSpPr>
+            <p:cNvPr id="39" name="tx39"/>
             <p:cNvSpPr/>
             <p:nvPr/>
           </p:nvSpPr>

--- a/docs/pptx/auc3/jx-auc3-linsubhr-ratio-hosp8.pptx
+++ b/docs/pptx/auc3/jx-auc3-linsubhr-ratio-hosp8.pptx
@@ -5165,7 +5165,7 @@
           <p:spPr>
             <a:xfrm>
               <a:off x="817517" y="1896563"/>
-              <a:ext cx="5626211" cy="82021"/>
+              <a:ext cx="6169365" cy="82021"/>
             </a:xfrm>
             <a:prstGeom prst="rect">
               <a:avLst/>
@@ -5197,7 +5197,7 @@
                   <a:latin typeface="Helvetica"/>
                   <a:cs typeface="Helvetica"/>
                 </a:rPr>
-                <a:t>subHR per 0.1 ratio decline: 1.18 (0.95-1.47)  |  per IQR decline (Δ = 0.30): 1.65 (0.86-3.15)  |  IQR: [0.84, 1.14]</a:t>
+                <a:t>subHR per 0.1 ratio decline: 1.18 (0.95-1.47), p = 0.130  |  per IQR decline (Δ = 0.30): 1.65 (0.86-3.15)  |  IQR: [0.84, 1.14]</a:t>
               </a:r>
             </a:p>
           </p:txBody>

--- a/docs/pptx/auc3/jx-auc3-linsubhr-ratio-hosp8.pptx
+++ b/docs/pptx/auc3/jx-auc3-linsubhr-ratio-hosp8.pptx
@@ -2443,7 +2443,7 @@
           </p:nvSpPr>
           <p:spPr>
             <a:xfrm>
-              <a:off x="1615213" y="2073503"/>
+              <a:off x="1531834" y="2073503"/>
               <a:ext cx="0" cy="3649639"/>
             </a:xfrm>
             <a:custGeom>
@@ -2486,7 +2486,7 @@
           </p:nvSpPr>
           <p:spPr>
             <a:xfrm>
-              <a:off x="3387871" y="2073503"/>
+              <a:off x="3586410" y="2073503"/>
               <a:ext cx="0" cy="3649639"/>
             </a:xfrm>
             <a:custGeom>
@@ -2529,7 +2529,7 @@
           </p:nvSpPr>
           <p:spPr>
             <a:xfrm>
-              <a:off x="5160528" y="2073503"/>
+              <a:off x="5640985" y="2073503"/>
               <a:ext cx="0" cy="3649639"/>
             </a:xfrm>
             <a:custGeom>
@@ -2572,7 +2572,7 @@
           </p:nvSpPr>
           <p:spPr>
             <a:xfrm>
-              <a:off x="6933186" y="2073503"/>
+              <a:off x="7695561" y="2073503"/>
               <a:ext cx="0" cy="3649639"/>
             </a:xfrm>
             <a:custGeom>
@@ -2830,7 +2830,7 @@
           </p:nvSpPr>
           <p:spPr>
             <a:xfrm>
-              <a:off x="2501542" y="2073503"/>
+              <a:off x="2559122" y="2073503"/>
               <a:ext cx="0" cy="3649639"/>
             </a:xfrm>
             <a:custGeom>
@@ -2873,7 +2873,7 @@
           </p:nvSpPr>
           <p:spPr>
             <a:xfrm>
-              <a:off x="4274200" y="2073503"/>
+              <a:off x="4613698" y="2073503"/>
               <a:ext cx="0" cy="3649639"/>
             </a:xfrm>
             <a:custGeom>
@@ -2916,7 +2916,7 @@
           </p:nvSpPr>
           <p:spPr>
             <a:xfrm>
-              <a:off x="6046857" y="2073503"/>
+              <a:off x="6668273" y="2073503"/>
               <a:ext cx="0" cy="3649639"/>
             </a:xfrm>
             <a:custGeom>
@@ -2953,643 +2953,609 @@
         </p:sp>
         <p:sp>
           <p:nvSpPr>
-            <p:cNvPr id="20" name="pl20"/>
+            <p:cNvPr id="20" name="pg20"/>
             <p:cNvSpPr/>
             <p:nvPr/>
           </p:nvSpPr>
           <p:spPr>
             <a:xfrm>
-              <a:off x="7819515" y="2073503"/>
-              <a:ext cx="0" cy="3649639"/>
+              <a:off x="1172049" y="2073503"/>
+              <a:ext cx="7090630" cy="3345439"/>
             </a:xfrm>
             <a:custGeom>
               <a:avLst/>
               <a:pathLst>
-                <a:path w="0" h="3649639">
+                <a:path w="7090630" h="3345439">
                   <a:moveTo>
-                    <a:pt x="0" y="3649639"/>
+                    <a:pt x="256870" y="0"/>
                   </a:moveTo>
                   <a:lnTo>
-                    <a:pt x="0" y="0"/>
-                  </a:lnTo>
-                  <a:lnTo>
-                    <a:pt x="0" y="0"/>
-                  </a:lnTo>
-                </a:path>
-              </a:pathLst>
-            </a:custGeom>
-            <a:ln w="13550" cap="flat">
-              <a:solidFill>
-                <a:srgbClr val="EBEBEB">
-                  <a:alpha val="100000"/>
-                </a:srgbClr>
-              </a:solidFill>
-              <a:prstDash val="solid"/>
-              <a:round/>
-            </a:ln>
-          </p:spPr>
-          <p:txBody>
-            <a:bodyPr/>
-            <a:lstStyle/>
-            <a:p/>
-          </p:txBody>
-        </p:sp>
-        <p:sp>
-          <p:nvSpPr>
-            <p:cNvPr id="21" name="pg21"/>
-            <p:cNvSpPr/>
-            <p:nvPr/>
-          </p:nvSpPr>
-          <p:spPr>
-            <a:xfrm>
-              <a:off x="817517" y="2073503"/>
-              <a:ext cx="7392041" cy="3345439"/>
-            </a:xfrm>
-            <a:custGeom>
-              <a:avLst/>
-              <a:pathLst>
-                <a:path w="7392041" h="3345439">
-                  <a:moveTo>
-                    <a:pt x="21957" y="0"/>
-                  </a:moveTo>
-                  <a:lnTo>
-                    <a:pt x="53901" y="48853"/>
-                  </a:lnTo>
-                  <a:lnTo>
-                    <a:pt x="131145" y="163056"/>
-                  </a:lnTo>
-                  <a:lnTo>
-                    <a:pt x="208389" y="273463"/>
-                  </a:lnTo>
-                  <a:lnTo>
-                    <a:pt x="285632" y="380198"/>
-                  </a:lnTo>
-                  <a:lnTo>
-                    <a:pt x="362876" y="483385"/>
-                  </a:lnTo>
-                  <a:lnTo>
-                    <a:pt x="440119" y="583141"/>
-                  </a:lnTo>
-                  <a:lnTo>
-                    <a:pt x="517363" y="679581"/>
-                  </a:lnTo>
-                  <a:lnTo>
-                    <a:pt x="594606" y="772814"/>
-                  </a:lnTo>
-                  <a:lnTo>
-                    <a:pt x="671850" y="862947"/>
-                  </a:lnTo>
-                  <a:lnTo>
-                    <a:pt x="749094" y="950083"/>
-                  </a:lnTo>
-                  <a:lnTo>
-                    <a:pt x="826337" y="1034322"/>
-                  </a:lnTo>
-                  <a:lnTo>
-                    <a:pt x="903581" y="1115761"/>
-                  </a:lnTo>
-                  <a:lnTo>
-                    <a:pt x="980824" y="1194492"/>
-                  </a:lnTo>
-                  <a:lnTo>
-                    <a:pt x="1058068" y="1270605"/>
-                  </a:lnTo>
-                  <a:lnTo>
-                    <a:pt x="1135311" y="1344188"/>
-                  </a:lnTo>
-                  <a:lnTo>
-                    <a:pt x="1212555" y="1415324"/>
-                  </a:lnTo>
-                  <a:lnTo>
-                    <a:pt x="1289799" y="1484095"/>
-                  </a:lnTo>
-                  <a:lnTo>
-                    <a:pt x="1367042" y="1550579"/>
-                  </a:lnTo>
-                  <a:lnTo>
-                    <a:pt x="1444286" y="1614853"/>
-                  </a:lnTo>
-                  <a:lnTo>
-                    <a:pt x="1521529" y="1676990"/>
-                  </a:lnTo>
-                  <a:lnTo>
-                    <a:pt x="1598773" y="1737061"/>
-                  </a:lnTo>
-                  <a:lnTo>
-                    <a:pt x="1676016" y="1795135"/>
-                  </a:lnTo>
-                  <a:lnTo>
-                    <a:pt x="1753260" y="1851278"/>
-                  </a:lnTo>
-                  <a:lnTo>
-                    <a:pt x="1830504" y="1905554"/>
-                  </a:lnTo>
-                  <a:lnTo>
-                    <a:pt x="1907747" y="1958026"/>
-                  </a:lnTo>
-                  <a:lnTo>
-                    <a:pt x="1984991" y="2008753"/>
-                  </a:lnTo>
-                  <a:lnTo>
-                    <a:pt x="2062234" y="2057794"/>
-                  </a:lnTo>
-                  <a:lnTo>
-                    <a:pt x="2139478" y="2105204"/>
-                  </a:lnTo>
-                  <a:lnTo>
-                    <a:pt x="2216721" y="2151038"/>
-                  </a:lnTo>
-                  <a:lnTo>
-                    <a:pt x="2293965" y="2195348"/>
-                  </a:lnTo>
-                  <a:lnTo>
-                    <a:pt x="2371209" y="2238185"/>
-                  </a:lnTo>
-                  <a:lnTo>
-                    <a:pt x="2448452" y="2279597"/>
-                  </a:lnTo>
-                  <a:lnTo>
-                    <a:pt x="2525696" y="2319633"/>
-                  </a:lnTo>
-                  <a:lnTo>
-                    <a:pt x="2602939" y="2358337"/>
-                  </a:lnTo>
-                  <a:lnTo>
-                    <a:pt x="2680183" y="2395755"/>
-                  </a:lnTo>
-                  <a:lnTo>
-                    <a:pt x="2757426" y="2431928"/>
-                  </a:lnTo>
-                  <a:lnTo>
-                    <a:pt x="2834670" y="2466899"/>
-                  </a:lnTo>
-                  <a:lnTo>
-                    <a:pt x="2911914" y="2500707"/>
-                  </a:lnTo>
-                  <a:lnTo>
-                    <a:pt x="2989157" y="2533391"/>
-                  </a:lnTo>
-                  <a:lnTo>
-                    <a:pt x="3066401" y="2564989"/>
-                  </a:lnTo>
-                  <a:lnTo>
-                    <a:pt x="3143644" y="2595536"/>
-                  </a:lnTo>
-                  <a:lnTo>
-                    <a:pt x="3220888" y="2625067"/>
-                  </a:lnTo>
-                  <a:lnTo>
-                    <a:pt x="3298131" y="2653616"/>
-                  </a:lnTo>
-                  <a:lnTo>
-                    <a:pt x="3375375" y="2650757"/>
-                  </a:lnTo>
-                  <a:lnTo>
-                    <a:pt x="3452619" y="2647131"/>
-                  </a:lnTo>
-                  <a:lnTo>
-                    <a:pt x="3529862" y="2643488"/>
-                  </a:lnTo>
-                  <a:lnTo>
-                    <a:pt x="3607106" y="2639830"/>
-                  </a:lnTo>
-                  <a:lnTo>
-                    <a:pt x="3684349" y="2636155"/>
-                  </a:lnTo>
-                  <a:lnTo>
-                    <a:pt x="3761593" y="2632465"/>
-                  </a:lnTo>
-                  <a:lnTo>
-                    <a:pt x="3838836" y="2628758"/>
-                  </a:lnTo>
-                  <a:lnTo>
-                    <a:pt x="3916080" y="2625036"/>
-                  </a:lnTo>
-                  <a:lnTo>
-                    <a:pt x="3993324" y="2621297"/>
-                  </a:lnTo>
-                  <a:lnTo>
-                    <a:pt x="4070567" y="2617542"/>
-                  </a:lnTo>
-                  <a:lnTo>
-                    <a:pt x="4147811" y="2613771"/>
-                  </a:lnTo>
-                  <a:lnTo>
-                    <a:pt x="4225054" y="2609983"/>
-                  </a:lnTo>
-                  <a:lnTo>
-                    <a:pt x="4302298" y="2606179"/>
-                  </a:lnTo>
-                  <a:lnTo>
-                    <a:pt x="4379541" y="2602358"/>
-                  </a:lnTo>
-                  <a:lnTo>
-                    <a:pt x="4456785" y="2598520"/>
-                  </a:lnTo>
-                  <a:lnTo>
-                    <a:pt x="4534029" y="2594666"/>
-                  </a:lnTo>
-                  <a:lnTo>
-                    <a:pt x="4611272" y="2590795"/>
-                  </a:lnTo>
-                  <a:lnTo>
-                    <a:pt x="4688516" y="2586907"/>
-                  </a:lnTo>
-                  <a:lnTo>
-                    <a:pt x="4765759" y="2583002"/>
-                  </a:lnTo>
-                  <a:lnTo>
-                    <a:pt x="4843003" y="2579081"/>
-                  </a:lnTo>
-                  <a:lnTo>
-                    <a:pt x="4920246" y="2575142"/>
-                  </a:lnTo>
-                  <a:lnTo>
-                    <a:pt x="4997490" y="2571186"/>
-                  </a:lnTo>
-                  <a:lnTo>
-                    <a:pt x="5074734" y="2567213"/>
-                  </a:lnTo>
-                  <a:lnTo>
-                    <a:pt x="5151977" y="2563222"/>
-                  </a:lnTo>
-                  <a:lnTo>
-                    <a:pt x="5229221" y="2559214"/>
-                  </a:lnTo>
-                  <a:lnTo>
-                    <a:pt x="5306464" y="2555189"/>
-                  </a:lnTo>
-                  <a:lnTo>
-                    <a:pt x="5383708" y="2551146"/>
-                  </a:lnTo>
-                  <a:lnTo>
-                    <a:pt x="5460951" y="2547085"/>
-                  </a:lnTo>
-                  <a:lnTo>
-                    <a:pt x="5538195" y="2543007"/>
-                  </a:lnTo>
-                  <a:lnTo>
-                    <a:pt x="5615439" y="2538911"/>
-                  </a:lnTo>
-                  <a:lnTo>
-                    <a:pt x="5692682" y="2534798"/>
-                  </a:lnTo>
-                  <a:lnTo>
-                    <a:pt x="5769926" y="2530666"/>
-                  </a:lnTo>
-                  <a:lnTo>
-                    <a:pt x="5847169" y="2526516"/>
-                  </a:lnTo>
-                  <a:lnTo>
-                    <a:pt x="5924413" y="2522349"/>
-                  </a:lnTo>
-                  <a:lnTo>
-                    <a:pt x="6001656" y="2518163"/>
-                  </a:lnTo>
-                  <a:lnTo>
-                    <a:pt x="6078900" y="2513959"/>
-                  </a:lnTo>
-                  <a:lnTo>
-                    <a:pt x="6156144" y="2509736"/>
-                  </a:lnTo>
-                  <a:lnTo>
-                    <a:pt x="6233387" y="2505495"/>
-                  </a:lnTo>
-                  <a:lnTo>
-                    <a:pt x="6310631" y="2501236"/>
-                  </a:lnTo>
-                  <a:lnTo>
-                    <a:pt x="6387874" y="2496958"/>
-                  </a:lnTo>
-                  <a:lnTo>
-                    <a:pt x="6465118" y="2492662"/>
-                  </a:lnTo>
-                  <a:lnTo>
-                    <a:pt x="6542361" y="2488347"/>
-                  </a:lnTo>
-                  <a:lnTo>
-                    <a:pt x="6619605" y="2484013"/>
-                  </a:lnTo>
-                  <a:lnTo>
-                    <a:pt x="6696849" y="2479660"/>
-                  </a:lnTo>
-                  <a:lnTo>
-                    <a:pt x="6774092" y="2475289"/>
-                  </a:lnTo>
-                  <a:lnTo>
-                    <a:pt x="6851336" y="2470898"/>
-                  </a:lnTo>
-                  <a:lnTo>
-                    <a:pt x="6928579" y="2466488"/>
-                  </a:lnTo>
-                  <a:lnTo>
-                    <a:pt x="7005823" y="2462059"/>
-                  </a:lnTo>
-                  <a:lnTo>
-                    <a:pt x="7083066" y="2457610"/>
-                  </a:lnTo>
-                  <a:lnTo>
-                    <a:pt x="7160310" y="2453143"/>
-                  </a:lnTo>
-                  <a:lnTo>
-                    <a:pt x="7237554" y="2448656"/>
-                  </a:lnTo>
-                  <a:lnTo>
-                    <a:pt x="7314797" y="2444149"/>
-                  </a:lnTo>
-                  <a:lnTo>
-                    <a:pt x="7392041" y="2439623"/>
-                  </a:lnTo>
-                  <a:lnTo>
-                    <a:pt x="7392041" y="3345439"/>
-                  </a:lnTo>
-                  <a:lnTo>
-                    <a:pt x="7314797" y="3340683"/>
-                  </a:lnTo>
-                  <a:lnTo>
-                    <a:pt x="7237554" y="3335762"/>
-                  </a:lnTo>
-                  <a:lnTo>
-                    <a:pt x="7160310" y="3330673"/>
-                  </a:lnTo>
-                  <a:lnTo>
-                    <a:pt x="7083066" y="3325409"/>
-                  </a:lnTo>
-                  <a:lnTo>
-                    <a:pt x="7005823" y="3319963"/>
-                  </a:lnTo>
-                  <a:lnTo>
-                    <a:pt x="6928579" y="3314330"/>
-                  </a:lnTo>
-                  <a:lnTo>
-                    <a:pt x="6851336" y="3308504"/>
-                  </a:lnTo>
-                  <a:lnTo>
-                    <a:pt x="6774092" y="3302477"/>
-                  </a:lnTo>
-                  <a:lnTo>
-                    <a:pt x="6696849" y="3296243"/>
-                  </a:lnTo>
-                  <a:lnTo>
-                    <a:pt x="6619605" y="3289795"/>
-                  </a:lnTo>
-                  <a:lnTo>
-                    <a:pt x="6542361" y="3283124"/>
-                  </a:lnTo>
-                  <a:lnTo>
-                    <a:pt x="6465118" y="3276225"/>
-                  </a:lnTo>
-                  <a:lnTo>
-                    <a:pt x="6387874" y="3269088"/>
-                  </a:lnTo>
-                  <a:lnTo>
-                    <a:pt x="6310631" y="3261705"/>
-                  </a:lnTo>
-                  <a:lnTo>
-                    <a:pt x="6233387" y="3254069"/>
-                  </a:lnTo>
-                  <a:lnTo>
-                    <a:pt x="6156144" y="3246170"/>
-                  </a:lnTo>
-                  <a:lnTo>
-                    <a:pt x="6078900" y="3237999"/>
-                  </a:lnTo>
-                  <a:lnTo>
-                    <a:pt x="6001656" y="3229548"/>
-                  </a:lnTo>
-                  <a:lnTo>
-                    <a:pt x="5924413" y="3220805"/>
-                  </a:lnTo>
-                  <a:lnTo>
-                    <a:pt x="5847169" y="3211762"/>
-                  </a:lnTo>
-                  <a:lnTo>
-                    <a:pt x="5769926" y="3202409"/>
-                  </a:lnTo>
-                  <a:lnTo>
-                    <a:pt x="5692682" y="3192733"/>
-                  </a:lnTo>
-                  <a:lnTo>
-                    <a:pt x="5615439" y="3182724"/>
-                  </a:lnTo>
-                  <a:lnTo>
-                    <a:pt x="5538195" y="3172372"/>
-                  </a:lnTo>
-                  <a:lnTo>
-                    <a:pt x="5460951" y="3161663"/>
-                  </a:lnTo>
-                  <a:lnTo>
-                    <a:pt x="5383708" y="3150586"/>
-                  </a:lnTo>
-                  <a:lnTo>
-                    <a:pt x="5306464" y="3139128"/>
-                  </a:lnTo>
-                  <a:lnTo>
-                    <a:pt x="5229221" y="3127277"/>
-                  </a:lnTo>
-                  <a:lnTo>
-                    <a:pt x="5151977" y="3115017"/>
-                  </a:lnTo>
-                  <a:lnTo>
-                    <a:pt x="5074734" y="3102336"/>
-                  </a:lnTo>
-                  <a:lnTo>
-                    <a:pt x="4997490" y="3089219"/>
-                  </a:lnTo>
-                  <a:lnTo>
-                    <a:pt x="4920246" y="3075650"/>
-                  </a:lnTo>
-                  <a:lnTo>
-                    <a:pt x="4843003" y="3061615"/>
-                  </a:lnTo>
-                  <a:lnTo>
-                    <a:pt x="4765759" y="3047097"/>
-                  </a:lnTo>
-                  <a:lnTo>
-                    <a:pt x="4688516" y="3032080"/>
-                  </a:lnTo>
-                  <a:lnTo>
-                    <a:pt x="4611272" y="3016547"/>
-                  </a:lnTo>
-                  <a:lnTo>
-                    <a:pt x="4534029" y="3000479"/>
-                  </a:lnTo>
-                  <a:lnTo>
-                    <a:pt x="4456785" y="2983859"/>
-                  </a:lnTo>
-                  <a:lnTo>
-                    <a:pt x="4379541" y="2966667"/>
-                  </a:lnTo>
-                  <a:lnTo>
-                    <a:pt x="4302298" y="2948884"/>
-                  </a:lnTo>
-                  <a:lnTo>
-                    <a:pt x="4225054" y="2930489"/>
-                  </a:lnTo>
-                  <a:lnTo>
-                    <a:pt x="4147811" y="2911462"/>
-                  </a:lnTo>
-                  <a:lnTo>
-                    <a:pt x="4070567" y="2891780"/>
-                  </a:lnTo>
-                  <a:lnTo>
-                    <a:pt x="3993324" y="2871422"/>
-                  </a:lnTo>
-                  <a:lnTo>
-                    <a:pt x="3916080" y="2850363"/>
-                  </a:lnTo>
-                  <a:lnTo>
-                    <a:pt x="3838836" y="2828580"/>
-                  </a:lnTo>
-                  <a:lnTo>
-                    <a:pt x="3761593" y="2806048"/>
-                  </a:lnTo>
-                  <a:lnTo>
-                    <a:pt x="3684349" y="2782741"/>
-                  </a:lnTo>
-                  <a:lnTo>
-                    <a:pt x="3607106" y="2758632"/>
-                  </a:lnTo>
-                  <a:lnTo>
-                    <a:pt x="3529862" y="2733695"/>
-                  </a:lnTo>
-                  <a:lnTo>
-                    <a:pt x="3452619" y="2707899"/>
-                  </a:lnTo>
-                  <a:lnTo>
-                    <a:pt x="3375375" y="2681217"/>
-                  </a:lnTo>
-                  <a:lnTo>
-                    <a:pt x="3298131" y="2654368"/>
-                  </a:lnTo>
-                  <a:lnTo>
-                    <a:pt x="3220888" y="2657964"/>
-                  </a:lnTo>
-                  <a:lnTo>
-                    <a:pt x="3143644" y="2661544"/>
-                  </a:lnTo>
-                  <a:lnTo>
-                    <a:pt x="3066401" y="2665108"/>
-                  </a:lnTo>
-                  <a:lnTo>
-                    <a:pt x="2989157" y="2668657"/>
-                  </a:lnTo>
-                  <a:lnTo>
-                    <a:pt x="2911914" y="2672190"/>
-                  </a:lnTo>
-                  <a:lnTo>
-                    <a:pt x="2834670" y="2675708"/>
-                  </a:lnTo>
-                  <a:lnTo>
-                    <a:pt x="2757426" y="2679211"/>
-                  </a:lnTo>
-                  <a:lnTo>
-                    <a:pt x="2680183" y="2682699"/>
-                  </a:lnTo>
-                  <a:lnTo>
-                    <a:pt x="2602939" y="2686172"/>
-                  </a:lnTo>
-                  <a:lnTo>
-                    <a:pt x="2525696" y="2689629"/>
-                  </a:lnTo>
-                  <a:lnTo>
-                    <a:pt x="2448452" y="2693072"/>
-                  </a:lnTo>
-                  <a:lnTo>
-                    <a:pt x="2371209" y="2696499"/>
-                  </a:lnTo>
-                  <a:lnTo>
-                    <a:pt x="2293965" y="2699912"/>
-                  </a:lnTo>
-                  <a:lnTo>
-                    <a:pt x="2216721" y="2703310"/>
-                  </a:lnTo>
-                  <a:lnTo>
-                    <a:pt x="2139478" y="2706693"/>
-                  </a:lnTo>
-                  <a:lnTo>
-                    <a:pt x="2062234" y="2710062"/>
-                  </a:lnTo>
-                  <a:lnTo>
-                    <a:pt x="1984991" y="2713416"/>
-                  </a:lnTo>
-                  <a:lnTo>
-                    <a:pt x="1907747" y="2716755"/>
-                  </a:lnTo>
-                  <a:lnTo>
-                    <a:pt x="1830504" y="2720080"/>
-                  </a:lnTo>
-                  <a:lnTo>
-                    <a:pt x="1753260" y="2723391"/>
-                  </a:lnTo>
-                  <a:lnTo>
-                    <a:pt x="1676016" y="2726687"/>
-                  </a:lnTo>
-                  <a:lnTo>
-                    <a:pt x="1598773" y="2729969"/>
-                  </a:lnTo>
-                  <a:lnTo>
-                    <a:pt x="1521529" y="2733236"/>
-                  </a:lnTo>
-                  <a:lnTo>
-                    <a:pt x="1444286" y="2736490"/>
-                  </a:lnTo>
-                  <a:lnTo>
-                    <a:pt x="1367042" y="2739729"/>
-                  </a:lnTo>
-                  <a:lnTo>
-                    <a:pt x="1289799" y="2742955"/>
-                  </a:lnTo>
-                  <a:lnTo>
-                    <a:pt x="1212555" y="2746166"/>
-                  </a:lnTo>
-                  <a:lnTo>
-                    <a:pt x="1135311" y="2749364"/>
-                  </a:lnTo>
-                  <a:lnTo>
-                    <a:pt x="1058068" y="2752547"/>
-                  </a:lnTo>
-                  <a:lnTo>
-                    <a:pt x="980824" y="2755717"/>
-                  </a:lnTo>
-                  <a:lnTo>
-                    <a:pt x="903581" y="2758873"/>
-                  </a:lnTo>
-                  <a:lnTo>
-                    <a:pt x="826337" y="2762015"/>
-                  </a:lnTo>
-                  <a:lnTo>
-                    <a:pt x="749094" y="2765144"/>
-                  </a:lnTo>
-                  <a:lnTo>
-                    <a:pt x="671850" y="2768259"/>
-                  </a:lnTo>
-                  <a:lnTo>
-                    <a:pt x="594606" y="2771361"/>
-                  </a:lnTo>
-                  <a:lnTo>
-                    <a:pt x="517363" y="2774449"/>
-                  </a:lnTo>
-                  <a:lnTo>
-                    <a:pt x="440119" y="2777524"/>
-                  </a:lnTo>
-                  <a:lnTo>
-                    <a:pt x="362876" y="2780586"/>
-                  </a:lnTo>
-                  <a:lnTo>
-                    <a:pt x="285632" y="2783634"/>
-                  </a:lnTo>
-                  <a:lnTo>
-                    <a:pt x="208389" y="2786669"/>
-                  </a:lnTo>
-                  <a:lnTo>
-                    <a:pt x="131145" y="2789691"/>
-                  </a:lnTo>
-                  <a:lnTo>
-                    <a:pt x="53901" y="2792699"/>
-                  </a:lnTo>
-                  <a:lnTo>
-                    <a:pt x="0" y="2794790"/>
+                    <a:pt x="286490" y="48853"/>
+                  </a:lnTo>
+                  <a:lnTo>
+                    <a:pt x="358112" y="163056"/>
+                  </a:lnTo>
+                  <a:lnTo>
+                    <a:pt x="429735" y="273463"/>
+                  </a:lnTo>
+                  <a:lnTo>
+                    <a:pt x="501357" y="380198"/>
+                  </a:lnTo>
+                  <a:lnTo>
+                    <a:pt x="572980" y="483385"/>
+                  </a:lnTo>
+                  <a:lnTo>
+                    <a:pt x="644602" y="583141"/>
+                  </a:lnTo>
+                  <a:lnTo>
+                    <a:pt x="716225" y="679581"/>
+                  </a:lnTo>
+                  <a:lnTo>
+                    <a:pt x="787847" y="772814"/>
+                  </a:lnTo>
+                  <a:lnTo>
+                    <a:pt x="859470" y="862947"/>
+                  </a:lnTo>
+                  <a:lnTo>
+                    <a:pt x="931092" y="950083"/>
+                  </a:lnTo>
+                  <a:lnTo>
+                    <a:pt x="1002715" y="1034322"/>
+                  </a:lnTo>
+                  <a:lnTo>
+                    <a:pt x="1074337" y="1115761"/>
+                  </a:lnTo>
+                  <a:lnTo>
+                    <a:pt x="1145960" y="1194492"/>
+                  </a:lnTo>
+                  <a:lnTo>
+                    <a:pt x="1217582" y="1270605"/>
+                  </a:lnTo>
+                  <a:lnTo>
+                    <a:pt x="1289205" y="1344188"/>
+                  </a:lnTo>
+                  <a:lnTo>
+                    <a:pt x="1360827" y="1415324"/>
+                  </a:lnTo>
+                  <a:lnTo>
+                    <a:pt x="1432450" y="1484095"/>
+                  </a:lnTo>
+                  <a:lnTo>
+                    <a:pt x="1504073" y="1550579"/>
+                  </a:lnTo>
+                  <a:lnTo>
+                    <a:pt x="1575695" y="1614853"/>
+                  </a:lnTo>
+                  <a:lnTo>
+                    <a:pt x="1647318" y="1676990"/>
+                  </a:lnTo>
+                  <a:lnTo>
+                    <a:pt x="1718940" y="1737061"/>
+                  </a:lnTo>
+                  <a:lnTo>
+                    <a:pt x="1790563" y="1795135"/>
+                  </a:lnTo>
+                  <a:lnTo>
+                    <a:pt x="1862185" y="1851278"/>
+                  </a:lnTo>
+                  <a:lnTo>
+                    <a:pt x="1933808" y="1905554"/>
+                  </a:lnTo>
+                  <a:lnTo>
+                    <a:pt x="2005430" y="1958026"/>
+                  </a:lnTo>
+                  <a:lnTo>
+                    <a:pt x="2077053" y="2008753"/>
+                  </a:lnTo>
+                  <a:lnTo>
+                    <a:pt x="2148675" y="2057794"/>
+                  </a:lnTo>
+                  <a:lnTo>
+                    <a:pt x="2220298" y="2105204"/>
+                  </a:lnTo>
+                  <a:lnTo>
+                    <a:pt x="2291920" y="2151038"/>
+                  </a:lnTo>
+                  <a:lnTo>
+                    <a:pt x="2363543" y="2195348"/>
+                  </a:lnTo>
+                  <a:lnTo>
+                    <a:pt x="2435165" y="2238185"/>
+                  </a:lnTo>
+                  <a:lnTo>
+                    <a:pt x="2506788" y="2279597"/>
+                  </a:lnTo>
+                  <a:lnTo>
+                    <a:pt x="2578410" y="2319633"/>
+                  </a:lnTo>
+                  <a:lnTo>
+                    <a:pt x="2650033" y="2358337"/>
+                  </a:lnTo>
+                  <a:lnTo>
+                    <a:pt x="2721655" y="2395755"/>
+                  </a:lnTo>
+                  <a:lnTo>
+                    <a:pt x="2793278" y="2431928"/>
+                  </a:lnTo>
+                  <a:lnTo>
+                    <a:pt x="2864901" y="2466899"/>
+                  </a:lnTo>
+                  <a:lnTo>
+                    <a:pt x="2936523" y="2500707"/>
+                  </a:lnTo>
+                  <a:lnTo>
+                    <a:pt x="3008146" y="2533391"/>
+                  </a:lnTo>
+                  <a:lnTo>
+                    <a:pt x="3079768" y="2564989"/>
+                  </a:lnTo>
+                  <a:lnTo>
+                    <a:pt x="3151391" y="2595536"/>
+                  </a:lnTo>
+                  <a:lnTo>
+                    <a:pt x="3223013" y="2625067"/>
+                  </a:lnTo>
+                  <a:lnTo>
+                    <a:pt x="3294636" y="2653616"/>
+                  </a:lnTo>
+                  <a:lnTo>
+                    <a:pt x="3366258" y="2650757"/>
+                  </a:lnTo>
+                  <a:lnTo>
+                    <a:pt x="3437881" y="2647131"/>
+                  </a:lnTo>
+                  <a:lnTo>
+                    <a:pt x="3509503" y="2643488"/>
+                  </a:lnTo>
+                  <a:lnTo>
+                    <a:pt x="3581126" y="2639830"/>
+                  </a:lnTo>
+                  <a:lnTo>
+                    <a:pt x="3652748" y="2636155"/>
+                  </a:lnTo>
+                  <a:lnTo>
+                    <a:pt x="3724371" y="2632465"/>
+                  </a:lnTo>
+                  <a:lnTo>
+                    <a:pt x="3795993" y="2628758"/>
+                  </a:lnTo>
+                  <a:lnTo>
+                    <a:pt x="3867616" y="2625036"/>
+                  </a:lnTo>
+                  <a:lnTo>
+                    <a:pt x="3939238" y="2621297"/>
+                  </a:lnTo>
+                  <a:lnTo>
+                    <a:pt x="4010861" y="2617542"/>
+                  </a:lnTo>
+                  <a:lnTo>
+                    <a:pt x="4082483" y="2613771"/>
+                  </a:lnTo>
+                  <a:lnTo>
+                    <a:pt x="4154106" y="2609983"/>
+                  </a:lnTo>
+                  <a:lnTo>
+                    <a:pt x="4225729" y="2606179"/>
+                  </a:lnTo>
+                  <a:lnTo>
+                    <a:pt x="4297351" y="2602358"/>
+                  </a:lnTo>
+                  <a:lnTo>
+                    <a:pt x="4368974" y="2598520"/>
+                  </a:lnTo>
+                  <a:lnTo>
+                    <a:pt x="4440596" y="2594666"/>
+                  </a:lnTo>
+                  <a:lnTo>
+                    <a:pt x="4512219" y="2590795"/>
+                  </a:lnTo>
+                  <a:lnTo>
+                    <a:pt x="4583841" y="2586907"/>
+                  </a:lnTo>
+                  <a:lnTo>
+                    <a:pt x="4655464" y="2583002"/>
+                  </a:lnTo>
+                  <a:lnTo>
+                    <a:pt x="4727086" y="2579081"/>
+                  </a:lnTo>
+                  <a:lnTo>
+                    <a:pt x="4798709" y="2575142"/>
+                  </a:lnTo>
+                  <a:lnTo>
+                    <a:pt x="4870331" y="2571186"/>
+                  </a:lnTo>
+                  <a:lnTo>
+                    <a:pt x="4941954" y="2567213"/>
+                  </a:lnTo>
+                  <a:lnTo>
+                    <a:pt x="5013576" y="2563222"/>
+                  </a:lnTo>
+                  <a:lnTo>
+                    <a:pt x="5085199" y="2559214"/>
+                  </a:lnTo>
+                  <a:lnTo>
+                    <a:pt x="5156821" y="2555189"/>
+                  </a:lnTo>
+                  <a:lnTo>
+                    <a:pt x="5228444" y="2551146"/>
+                  </a:lnTo>
+                  <a:lnTo>
+                    <a:pt x="5300066" y="2547085"/>
+                  </a:lnTo>
+                  <a:lnTo>
+                    <a:pt x="5371689" y="2543007"/>
+                  </a:lnTo>
+                  <a:lnTo>
+                    <a:pt x="5443311" y="2538911"/>
+                  </a:lnTo>
+                  <a:lnTo>
+                    <a:pt x="5514934" y="2534798"/>
+                  </a:lnTo>
+                  <a:lnTo>
+                    <a:pt x="5586557" y="2530666"/>
+                  </a:lnTo>
+                  <a:lnTo>
+                    <a:pt x="5658179" y="2526516"/>
+                  </a:lnTo>
+                  <a:lnTo>
+                    <a:pt x="5729802" y="2522349"/>
+                  </a:lnTo>
+                  <a:lnTo>
+                    <a:pt x="5801424" y="2518163"/>
+                  </a:lnTo>
+                  <a:lnTo>
+                    <a:pt x="5873047" y="2513959"/>
+                  </a:lnTo>
+                  <a:lnTo>
+                    <a:pt x="5944669" y="2509736"/>
+                  </a:lnTo>
+                  <a:lnTo>
+                    <a:pt x="6016292" y="2505495"/>
+                  </a:lnTo>
+                  <a:lnTo>
+                    <a:pt x="6087914" y="2501236"/>
+                  </a:lnTo>
+                  <a:lnTo>
+                    <a:pt x="6159537" y="2496958"/>
+                  </a:lnTo>
+                  <a:lnTo>
+                    <a:pt x="6231159" y="2492662"/>
+                  </a:lnTo>
+                  <a:lnTo>
+                    <a:pt x="6302782" y="2488347"/>
+                  </a:lnTo>
+                  <a:lnTo>
+                    <a:pt x="6374404" y="2484013"/>
+                  </a:lnTo>
+                  <a:lnTo>
+                    <a:pt x="6446027" y="2479660"/>
+                  </a:lnTo>
+                  <a:lnTo>
+                    <a:pt x="6517649" y="2475289"/>
+                  </a:lnTo>
+                  <a:lnTo>
+                    <a:pt x="6589272" y="2470898"/>
+                  </a:lnTo>
+                  <a:lnTo>
+                    <a:pt x="6660894" y="2466488"/>
+                  </a:lnTo>
+                  <a:lnTo>
+                    <a:pt x="6732517" y="2462059"/>
+                  </a:lnTo>
+                  <a:lnTo>
+                    <a:pt x="6804139" y="2457610"/>
+                  </a:lnTo>
+                  <a:lnTo>
+                    <a:pt x="6875762" y="2453143"/>
+                  </a:lnTo>
+                  <a:lnTo>
+                    <a:pt x="6947385" y="2448656"/>
+                  </a:lnTo>
+                  <a:lnTo>
+                    <a:pt x="7019007" y="2444149"/>
+                  </a:lnTo>
+                  <a:lnTo>
+                    <a:pt x="7090630" y="2439623"/>
+                  </a:lnTo>
+                  <a:lnTo>
+                    <a:pt x="7090630" y="3345439"/>
+                  </a:lnTo>
+                  <a:lnTo>
+                    <a:pt x="7019007" y="3340683"/>
+                  </a:lnTo>
+                  <a:lnTo>
+                    <a:pt x="6947385" y="3335762"/>
+                  </a:lnTo>
+                  <a:lnTo>
+                    <a:pt x="6875762" y="3330673"/>
+                  </a:lnTo>
+                  <a:lnTo>
+                    <a:pt x="6804139" y="3325409"/>
+                  </a:lnTo>
+                  <a:lnTo>
+                    <a:pt x="6732517" y="3319963"/>
+                  </a:lnTo>
+                  <a:lnTo>
+                    <a:pt x="6660894" y="3314330"/>
+                  </a:lnTo>
+                  <a:lnTo>
+                    <a:pt x="6589272" y="3308504"/>
+                  </a:lnTo>
+                  <a:lnTo>
+                    <a:pt x="6517649" y="3302477"/>
+                  </a:lnTo>
+                  <a:lnTo>
+                    <a:pt x="6446027" y="3296243"/>
+                  </a:lnTo>
+                  <a:lnTo>
+                    <a:pt x="6374404" y="3289795"/>
+                  </a:lnTo>
+                  <a:lnTo>
+                    <a:pt x="6302782" y="3283124"/>
+                  </a:lnTo>
+                  <a:lnTo>
+                    <a:pt x="6231159" y="3276225"/>
+                  </a:lnTo>
+                  <a:lnTo>
+                    <a:pt x="6159537" y="3269088"/>
+                  </a:lnTo>
+                  <a:lnTo>
+                    <a:pt x="6087914" y="3261705"/>
+                  </a:lnTo>
+                  <a:lnTo>
+                    <a:pt x="6016292" y="3254069"/>
+                  </a:lnTo>
+                  <a:lnTo>
+                    <a:pt x="5944669" y="3246170"/>
+                  </a:lnTo>
+                  <a:lnTo>
+                    <a:pt x="5873047" y="3237999"/>
+                  </a:lnTo>
+                  <a:lnTo>
+                    <a:pt x="5801424" y="3229548"/>
+                  </a:lnTo>
+                  <a:lnTo>
+                    <a:pt x="5729802" y="3220805"/>
+                  </a:lnTo>
+                  <a:lnTo>
+                    <a:pt x="5658179" y="3211762"/>
+                  </a:lnTo>
+                  <a:lnTo>
+                    <a:pt x="5586557" y="3202409"/>
+                  </a:lnTo>
+                  <a:lnTo>
+                    <a:pt x="5514934" y="3192733"/>
+                  </a:lnTo>
+                  <a:lnTo>
+                    <a:pt x="5443311" y="3182724"/>
+                  </a:lnTo>
+                  <a:lnTo>
+                    <a:pt x="5371689" y="3172372"/>
+                  </a:lnTo>
+                  <a:lnTo>
+                    <a:pt x="5300066" y="3161663"/>
+                  </a:lnTo>
+                  <a:lnTo>
+                    <a:pt x="5228444" y="3150586"/>
+                  </a:lnTo>
+                  <a:lnTo>
+                    <a:pt x="5156821" y="3139128"/>
+                  </a:lnTo>
+                  <a:lnTo>
+                    <a:pt x="5085199" y="3127277"/>
+                  </a:lnTo>
+                  <a:lnTo>
+                    <a:pt x="5013576" y="3115017"/>
+                  </a:lnTo>
+                  <a:lnTo>
+                    <a:pt x="4941954" y="3102336"/>
+                  </a:lnTo>
+                  <a:lnTo>
+                    <a:pt x="4870331" y="3089219"/>
+                  </a:lnTo>
+                  <a:lnTo>
+                    <a:pt x="4798709" y="3075650"/>
+                  </a:lnTo>
+                  <a:lnTo>
+                    <a:pt x="4727086" y="3061615"/>
+                  </a:lnTo>
+                  <a:lnTo>
+                    <a:pt x="4655464" y="3047097"/>
+                  </a:lnTo>
+                  <a:lnTo>
+                    <a:pt x="4583841" y="3032080"/>
+                  </a:lnTo>
+                  <a:lnTo>
+                    <a:pt x="4512219" y="3016547"/>
+                  </a:lnTo>
+                  <a:lnTo>
+                    <a:pt x="4440596" y="3000479"/>
+                  </a:lnTo>
+                  <a:lnTo>
+                    <a:pt x="4368974" y="2983859"/>
+                  </a:lnTo>
+                  <a:lnTo>
+                    <a:pt x="4297351" y="2966667"/>
+                  </a:lnTo>
+                  <a:lnTo>
+                    <a:pt x="4225729" y="2948884"/>
+                  </a:lnTo>
+                  <a:lnTo>
+                    <a:pt x="4154106" y="2930489"/>
+                  </a:lnTo>
+                  <a:lnTo>
+                    <a:pt x="4082483" y="2911462"/>
+                  </a:lnTo>
+                  <a:lnTo>
+                    <a:pt x="4010861" y="2891780"/>
+                  </a:lnTo>
+                  <a:lnTo>
+                    <a:pt x="3939238" y="2871422"/>
+                  </a:lnTo>
+                  <a:lnTo>
+                    <a:pt x="3867616" y="2850363"/>
+                  </a:lnTo>
+                  <a:lnTo>
+                    <a:pt x="3795993" y="2828580"/>
+                  </a:lnTo>
+                  <a:lnTo>
+                    <a:pt x="3724371" y="2806048"/>
+                  </a:lnTo>
+                  <a:lnTo>
+                    <a:pt x="3652748" y="2782741"/>
+                  </a:lnTo>
+                  <a:lnTo>
+                    <a:pt x="3581126" y="2758632"/>
+                  </a:lnTo>
+                  <a:lnTo>
+                    <a:pt x="3509503" y="2733695"/>
+                  </a:lnTo>
+                  <a:lnTo>
+                    <a:pt x="3437881" y="2707899"/>
+                  </a:lnTo>
+                  <a:lnTo>
+                    <a:pt x="3366258" y="2681217"/>
+                  </a:lnTo>
+                  <a:lnTo>
+                    <a:pt x="3294636" y="2654368"/>
+                  </a:lnTo>
+                  <a:lnTo>
+                    <a:pt x="3223013" y="2657964"/>
+                  </a:lnTo>
+                  <a:lnTo>
+                    <a:pt x="3151391" y="2661544"/>
+                  </a:lnTo>
+                  <a:lnTo>
+                    <a:pt x="3079768" y="2665108"/>
+                  </a:lnTo>
+                  <a:lnTo>
+                    <a:pt x="3008146" y="2668657"/>
+                  </a:lnTo>
+                  <a:lnTo>
+                    <a:pt x="2936523" y="2672190"/>
+                  </a:lnTo>
+                  <a:lnTo>
+                    <a:pt x="2864901" y="2675708"/>
+                  </a:lnTo>
+                  <a:lnTo>
+                    <a:pt x="2793278" y="2679211"/>
+                  </a:lnTo>
+                  <a:lnTo>
+                    <a:pt x="2721655" y="2682699"/>
+                  </a:lnTo>
+                  <a:lnTo>
+                    <a:pt x="2650033" y="2686172"/>
+                  </a:lnTo>
+                  <a:lnTo>
+                    <a:pt x="2578410" y="2689629"/>
+                  </a:lnTo>
+                  <a:lnTo>
+                    <a:pt x="2506788" y="2693072"/>
+                  </a:lnTo>
+                  <a:lnTo>
+                    <a:pt x="2435165" y="2696499"/>
+                  </a:lnTo>
+                  <a:lnTo>
+                    <a:pt x="2363543" y="2699912"/>
+                  </a:lnTo>
+                  <a:lnTo>
+                    <a:pt x="2291920" y="2703310"/>
+                  </a:lnTo>
+                  <a:lnTo>
+                    <a:pt x="2220298" y="2706693"/>
+                  </a:lnTo>
+                  <a:lnTo>
+                    <a:pt x="2148675" y="2710062"/>
+                  </a:lnTo>
+                  <a:lnTo>
+                    <a:pt x="2077053" y="2713416"/>
+                  </a:lnTo>
+                  <a:lnTo>
+                    <a:pt x="2005430" y="2716755"/>
+                  </a:lnTo>
+                  <a:lnTo>
+                    <a:pt x="1933808" y="2720080"/>
+                  </a:lnTo>
+                  <a:lnTo>
+                    <a:pt x="1862185" y="2723391"/>
+                  </a:lnTo>
+                  <a:lnTo>
+                    <a:pt x="1790563" y="2726687"/>
+                  </a:lnTo>
+                  <a:lnTo>
+                    <a:pt x="1718940" y="2729969"/>
+                  </a:lnTo>
+                  <a:lnTo>
+                    <a:pt x="1647318" y="2733236"/>
+                  </a:lnTo>
+                  <a:lnTo>
+                    <a:pt x="1575695" y="2736490"/>
+                  </a:lnTo>
+                  <a:lnTo>
+                    <a:pt x="1504073" y="2739729"/>
+                  </a:lnTo>
+                  <a:lnTo>
+                    <a:pt x="1432450" y="2742955"/>
+                  </a:lnTo>
+                  <a:lnTo>
+                    <a:pt x="1360827" y="2746166"/>
+                  </a:lnTo>
+                  <a:lnTo>
+                    <a:pt x="1289205" y="2749364"/>
+                  </a:lnTo>
+                  <a:lnTo>
+                    <a:pt x="1217582" y="2752547"/>
+                  </a:lnTo>
+                  <a:lnTo>
+                    <a:pt x="1145960" y="2755717"/>
+                  </a:lnTo>
+                  <a:lnTo>
+                    <a:pt x="1074337" y="2758873"/>
+                  </a:lnTo>
+                  <a:lnTo>
+                    <a:pt x="1002715" y="2762015"/>
+                  </a:lnTo>
+                  <a:lnTo>
+                    <a:pt x="931092" y="2765144"/>
+                  </a:lnTo>
+                  <a:lnTo>
+                    <a:pt x="859470" y="2768259"/>
+                  </a:lnTo>
+                  <a:lnTo>
+                    <a:pt x="787847" y="2771361"/>
+                  </a:lnTo>
+                  <a:lnTo>
+                    <a:pt x="716225" y="2774449"/>
+                  </a:lnTo>
+                  <a:lnTo>
+                    <a:pt x="644602" y="2777524"/>
+                  </a:lnTo>
+                  <a:lnTo>
+                    <a:pt x="572980" y="2780586"/>
+                  </a:lnTo>
+                  <a:lnTo>
+                    <a:pt x="501357" y="2783634"/>
+                  </a:lnTo>
+                  <a:lnTo>
+                    <a:pt x="429735" y="2786669"/>
+                  </a:lnTo>
+                  <a:lnTo>
+                    <a:pt x="358112" y="2789691"/>
+                  </a:lnTo>
+                  <a:lnTo>
+                    <a:pt x="286490" y="2792699"/>
+                  </a:lnTo>
+                  <a:lnTo>
+                    <a:pt x="214867" y="2795695"/>
+                  </a:lnTo>
+                  <a:lnTo>
+                    <a:pt x="143245" y="2798678"/>
+                  </a:lnTo>
+                  <a:lnTo>
+                    <a:pt x="71622" y="2801648"/>
+                  </a:lnTo>
+                  <a:lnTo>
+                    <a:pt x="0" y="2804605"/>
                   </a:lnTo>
                   <a:close/>
                 </a:path>
@@ -3609,309 +3575,634 @@
         </p:sp>
         <p:sp>
           <p:nvSpPr>
+            <p:cNvPr id="21" name="pl21"/>
+            <p:cNvSpPr/>
+            <p:nvPr/>
+          </p:nvSpPr>
+          <p:spPr>
+            <a:xfrm>
+              <a:off x="1428919" y="2073503"/>
+              <a:ext cx="6833759" cy="2653616"/>
+            </a:xfrm>
+            <a:custGeom>
+              <a:avLst/>
+              <a:pathLst>
+                <a:path w="6833759" h="2653616">
+                  <a:moveTo>
+                    <a:pt x="0" y="0"/>
+                  </a:moveTo>
+                  <a:lnTo>
+                    <a:pt x="29619" y="48853"/>
+                  </a:lnTo>
+                  <a:lnTo>
+                    <a:pt x="101242" y="163056"/>
+                  </a:lnTo>
+                  <a:lnTo>
+                    <a:pt x="172864" y="273463"/>
+                  </a:lnTo>
+                  <a:lnTo>
+                    <a:pt x="244487" y="380198"/>
+                  </a:lnTo>
+                  <a:lnTo>
+                    <a:pt x="316109" y="483385"/>
+                  </a:lnTo>
+                  <a:lnTo>
+                    <a:pt x="387732" y="583141"/>
+                  </a:lnTo>
+                  <a:lnTo>
+                    <a:pt x="459354" y="679581"/>
+                  </a:lnTo>
+                  <a:lnTo>
+                    <a:pt x="530977" y="772814"/>
+                  </a:lnTo>
+                  <a:lnTo>
+                    <a:pt x="602599" y="862947"/>
+                  </a:lnTo>
+                  <a:lnTo>
+                    <a:pt x="674222" y="950083"/>
+                  </a:lnTo>
+                  <a:lnTo>
+                    <a:pt x="745844" y="1034322"/>
+                  </a:lnTo>
+                  <a:lnTo>
+                    <a:pt x="817467" y="1115761"/>
+                  </a:lnTo>
+                  <a:lnTo>
+                    <a:pt x="889089" y="1194492"/>
+                  </a:lnTo>
+                  <a:lnTo>
+                    <a:pt x="960712" y="1270605"/>
+                  </a:lnTo>
+                  <a:lnTo>
+                    <a:pt x="1032335" y="1344188"/>
+                  </a:lnTo>
+                  <a:lnTo>
+                    <a:pt x="1103957" y="1415324"/>
+                  </a:lnTo>
+                  <a:lnTo>
+                    <a:pt x="1175580" y="1484095"/>
+                  </a:lnTo>
+                  <a:lnTo>
+                    <a:pt x="1247202" y="1550579"/>
+                  </a:lnTo>
+                  <a:lnTo>
+                    <a:pt x="1318825" y="1614853"/>
+                  </a:lnTo>
+                  <a:lnTo>
+                    <a:pt x="1390447" y="1676990"/>
+                  </a:lnTo>
+                  <a:lnTo>
+                    <a:pt x="1462070" y="1737061"/>
+                  </a:lnTo>
+                  <a:lnTo>
+                    <a:pt x="1533692" y="1795135"/>
+                  </a:lnTo>
+                  <a:lnTo>
+                    <a:pt x="1605315" y="1851278"/>
+                  </a:lnTo>
+                  <a:lnTo>
+                    <a:pt x="1676937" y="1905554"/>
+                  </a:lnTo>
+                  <a:lnTo>
+                    <a:pt x="1748560" y="1958026"/>
+                  </a:lnTo>
+                  <a:lnTo>
+                    <a:pt x="1820182" y="2008753"/>
+                  </a:lnTo>
+                  <a:lnTo>
+                    <a:pt x="1891805" y="2057794"/>
+                  </a:lnTo>
+                  <a:lnTo>
+                    <a:pt x="1963427" y="2105204"/>
+                  </a:lnTo>
+                  <a:lnTo>
+                    <a:pt x="2035050" y="2151038"/>
+                  </a:lnTo>
+                  <a:lnTo>
+                    <a:pt x="2106672" y="2195348"/>
+                  </a:lnTo>
+                  <a:lnTo>
+                    <a:pt x="2178295" y="2238185"/>
+                  </a:lnTo>
+                  <a:lnTo>
+                    <a:pt x="2249917" y="2279597"/>
+                  </a:lnTo>
+                  <a:lnTo>
+                    <a:pt x="2321540" y="2319633"/>
+                  </a:lnTo>
+                  <a:lnTo>
+                    <a:pt x="2393162" y="2358337"/>
+                  </a:lnTo>
+                  <a:lnTo>
+                    <a:pt x="2464785" y="2395755"/>
+                  </a:lnTo>
+                  <a:lnTo>
+                    <a:pt x="2536408" y="2431928"/>
+                  </a:lnTo>
+                  <a:lnTo>
+                    <a:pt x="2608030" y="2466899"/>
+                  </a:lnTo>
+                  <a:lnTo>
+                    <a:pt x="2679653" y="2500707"/>
+                  </a:lnTo>
+                  <a:lnTo>
+                    <a:pt x="2751275" y="2533391"/>
+                  </a:lnTo>
+                  <a:lnTo>
+                    <a:pt x="2822898" y="2564989"/>
+                  </a:lnTo>
+                  <a:lnTo>
+                    <a:pt x="2894520" y="2595536"/>
+                  </a:lnTo>
+                  <a:lnTo>
+                    <a:pt x="2966143" y="2625067"/>
+                  </a:lnTo>
+                  <a:lnTo>
+                    <a:pt x="3037765" y="2653616"/>
+                  </a:lnTo>
+                  <a:lnTo>
+                    <a:pt x="3109388" y="2650757"/>
+                  </a:lnTo>
+                  <a:lnTo>
+                    <a:pt x="3181010" y="2647131"/>
+                  </a:lnTo>
+                  <a:lnTo>
+                    <a:pt x="3252633" y="2643488"/>
+                  </a:lnTo>
+                  <a:lnTo>
+                    <a:pt x="3324255" y="2639830"/>
+                  </a:lnTo>
+                  <a:lnTo>
+                    <a:pt x="3395878" y="2636155"/>
+                  </a:lnTo>
+                  <a:lnTo>
+                    <a:pt x="3467500" y="2632465"/>
+                  </a:lnTo>
+                  <a:lnTo>
+                    <a:pt x="3539123" y="2628758"/>
+                  </a:lnTo>
+                  <a:lnTo>
+                    <a:pt x="3610745" y="2625036"/>
+                  </a:lnTo>
+                  <a:lnTo>
+                    <a:pt x="3682368" y="2621297"/>
+                  </a:lnTo>
+                  <a:lnTo>
+                    <a:pt x="3753990" y="2617542"/>
+                  </a:lnTo>
+                  <a:lnTo>
+                    <a:pt x="3825613" y="2613771"/>
+                  </a:lnTo>
+                  <a:lnTo>
+                    <a:pt x="3897236" y="2609983"/>
+                  </a:lnTo>
+                  <a:lnTo>
+                    <a:pt x="3968858" y="2606179"/>
+                  </a:lnTo>
+                  <a:lnTo>
+                    <a:pt x="4040481" y="2602358"/>
+                  </a:lnTo>
+                  <a:lnTo>
+                    <a:pt x="4112103" y="2598520"/>
+                  </a:lnTo>
+                  <a:lnTo>
+                    <a:pt x="4183726" y="2594666"/>
+                  </a:lnTo>
+                  <a:lnTo>
+                    <a:pt x="4255348" y="2590795"/>
+                  </a:lnTo>
+                  <a:lnTo>
+                    <a:pt x="4326971" y="2586907"/>
+                  </a:lnTo>
+                  <a:lnTo>
+                    <a:pt x="4398593" y="2583002"/>
+                  </a:lnTo>
+                  <a:lnTo>
+                    <a:pt x="4470216" y="2579081"/>
+                  </a:lnTo>
+                  <a:lnTo>
+                    <a:pt x="4541838" y="2575142"/>
+                  </a:lnTo>
+                  <a:lnTo>
+                    <a:pt x="4613461" y="2571186"/>
+                  </a:lnTo>
+                  <a:lnTo>
+                    <a:pt x="4685083" y="2567213"/>
+                  </a:lnTo>
+                  <a:lnTo>
+                    <a:pt x="4756706" y="2563222"/>
+                  </a:lnTo>
+                  <a:lnTo>
+                    <a:pt x="4828328" y="2559214"/>
+                  </a:lnTo>
+                  <a:lnTo>
+                    <a:pt x="4899951" y="2555189"/>
+                  </a:lnTo>
+                  <a:lnTo>
+                    <a:pt x="4971573" y="2551146"/>
+                  </a:lnTo>
+                  <a:lnTo>
+                    <a:pt x="5043196" y="2547085"/>
+                  </a:lnTo>
+                  <a:lnTo>
+                    <a:pt x="5114818" y="2543007"/>
+                  </a:lnTo>
+                  <a:lnTo>
+                    <a:pt x="5186441" y="2538911"/>
+                  </a:lnTo>
+                  <a:lnTo>
+                    <a:pt x="5258064" y="2534798"/>
+                  </a:lnTo>
+                  <a:lnTo>
+                    <a:pt x="5329686" y="2530666"/>
+                  </a:lnTo>
+                  <a:lnTo>
+                    <a:pt x="5401309" y="2526516"/>
+                  </a:lnTo>
+                  <a:lnTo>
+                    <a:pt x="5472931" y="2522349"/>
+                  </a:lnTo>
+                  <a:lnTo>
+                    <a:pt x="5544554" y="2518163"/>
+                  </a:lnTo>
+                  <a:lnTo>
+                    <a:pt x="5616176" y="2513959"/>
+                  </a:lnTo>
+                  <a:lnTo>
+                    <a:pt x="5687799" y="2509736"/>
+                  </a:lnTo>
+                  <a:lnTo>
+                    <a:pt x="5759421" y="2505495"/>
+                  </a:lnTo>
+                  <a:lnTo>
+                    <a:pt x="5831044" y="2501236"/>
+                  </a:lnTo>
+                  <a:lnTo>
+                    <a:pt x="5902666" y="2496958"/>
+                  </a:lnTo>
+                  <a:lnTo>
+                    <a:pt x="5974289" y="2492662"/>
+                  </a:lnTo>
+                  <a:lnTo>
+                    <a:pt x="6045911" y="2488347"/>
+                  </a:lnTo>
+                  <a:lnTo>
+                    <a:pt x="6117534" y="2484013"/>
+                  </a:lnTo>
+                  <a:lnTo>
+                    <a:pt x="6189156" y="2479660"/>
+                  </a:lnTo>
+                  <a:lnTo>
+                    <a:pt x="6260779" y="2475289"/>
+                  </a:lnTo>
+                  <a:lnTo>
+                    <a:pt x="6332401" y="2470898"/>
+                  </a:lnTo>
+                  <a:lnTo>
+                    <a:pt x="6404024" y="2466488"/>
+                  </a:lnTo>
+                  <a:lnTo>
+                    <a:pt x="6475646" y="2462059"/>
+                  </a:lnTo>
+                  <a:lnTo>
+                    <a:pt x="6547269" y="2457610"/>
+                  </a:lnTo>
+                  <a:lnTo>
+                    <a:pt x="6618892" y="2453143"/>
+                  </a:lnTo>
+                  <a:lnTo>
+                    <a:pt x="6690514" y="2448656"/>
+                  </a:lnTo>
+                  <a:lnTo>
+                    <a:pt x="6762137" y="2444149"/>
+                  </a:lnTo>
+                  <a:lnTo>
+                    <a:pt x="6833759" y="2439623"/>
+                  </a:lnTo>
+                </a:path>
+              </a:pathLst>
+            </a:custGeom>
+          </p:spPr>
+          <p:txBody>
+            <a:bodyPr/>
+            <a:lstStyle/>
+            <a:p/>
+          </p:txBody>
+        </p:sp>
+        <p:sp>
+          <p:nvSpPr>
             <p:cNvPr id="22" name="pl22"/>
             <p:cNvSpPr/>
             <p:nvPr/>
           </p:nvSpPr>
           <p:spPr>
             <a:xfrm>
-              <a:off x="839475" y="2073503"/>
-              <a:ext cx="7370083" cy="2653616"/>
+              <a:off x="1172049" y="4727871"/>
+              <a:ext cx="7090630" cy="691070"/>
             </a:xfrm>
             <a:custGeom>
               <a:avLst/>
               <a:pathLst>
-                <a:path w="7370083" h="2653616">
+                <a:path w="7090630" h="691070">
                   <a:moveTo>
-                    <a:pt x="0" y="0"/>
+                    <a:pt x="7090630" y="691070"/>
                   </a:moveTo>
                   <a:lnTo>
-                    <a:pt x="31944" y="48853"/>
-                  </a:lnTo>
-                  <a:lnTo>
-                    <a:pt x="109187" y="163056"/>
-                  </a:lnTo>
-                  <a:lnTo>
-                    <a:pt x="186431" y="273463"/>
-                  </a:lnTo>
-                  <a:lnTo>
-                    <a:pt x="263674" y="380198"/>
-                  </a:lnTo>
-                  <a:lnTo>
-                    <a:pt x="340918" y="483385"/>
-                  </a:lnTo>
-                  <a:lnTo>
-                    <a:pt x="418162" y="583141"/>
-                  </a:lnTo>
-                  <a:lnTo>
-                    <a:pt x="495405" y="679581"/>
-                  </a:lnTo>
-                  <a:lnTo>
-                    <a:pt x="572649" y="772814"/>
-                  </a:lnTo>
-                  <a:lnTo>
-                    <a:pt x="649892" y="862947"/>
-                  </a:lnTo>
-                  <a:lnTo>
-                    <a:pt x="727136" y="950083"/>
-                  </a:lnTo>
-                  <a:lnTo>
-                    <a:pt x="804379" y="1034322"/>
-                  </a:lnTo>
-                  <a:lnTo>
-                    <a:pt x="881623" y="1115761"/>
-                  </a:lnTo>
-                  <a:lnTo>
-                    <a:pt x="958867" y="1194492"/>
-                  </a:lnTo>
-                  <a:lnTo>
-                    <a:pt x="1036110" y="1270605"/>
-                  </a:lnTo>
-                  <a:lnTo>
-                    <a:pt x="1113354" y="1344188"/>
-                  </a:lnTo>
-                  <a:lnTo>
-                    <a:pt x="1190597" y="1415324"/>
-                  </a:lnTo>
-                  <a:lnTo>
-                    <a:pt x="1267841" y="1484095"/>
-                  </a:lnTo>
-                  <a:lnTo>
-                    <a:pt x="1345084" y="1550579"/>
-                  </a:lnTo>
-                  <a:lnTo>
-                    <a:pt x="1422328" y="1614853"/>
-                  </a:lnTo>
-                  <a:lnTo>
-                    <a:pt x="1499572" y="1676990"/>
-                  </a:lnTo>
-                  <a:lnTo>
-                    <a:pt x="1576815" y="1737061"/>
-                  </a:lnTo>
-                  <a:lnTo>
-                    <a:pt x="1654059" y="1795135"/>
-                  </a:lnTo>
-                  <a:lnTo>
-                    <a:pt x="1731302" y="1851278"/>
-                  </a:lnTo>
-                  <a:lnTo>
-                    <a:pt x="1808546" y="1905554"/>
-                  </a:lnTo>
-                  <a:lnTo>
-                    <a:pt x="1885789" y="1958026"/>
-                  </a:lnTo>
-                  <a:lnTo>
-                    <a:pt x="1963033" y="2008753"/>
-                  </a:lnTo>
-                  <a:lnTo>
-                    <a:pt x="2040277" y="2057794"/>
-                  </a:lnTo>
-                  <a:lnTo>
-                    <a:pt x="2117520" y="2105204"/>
-                  </a:lnTo>
-                  <a:lnTo>
-                    <a:pt x="2194764" y="2151038"/>
-                  </a:lnTo>
-                  <a:lnTo>
-                    <a:pt x="2272007" y="2195348"/>
-                  </a:lnTo>
-                  <a:lnTo>
-                    <a:pt x="2349251" y="2238185"/>
-                  </a:lnTo>
-                  <a:lnTo>
-                    <a:pt x="2426494" y="2279597"/>
-                  </a:lnTo>
-                  <a:lnTo>
-                    <a:pt x="2503738" y="2319633"/>
-                  </a:lnTo>
-                  <a:lnTo>
-                    <a:pt x="2580982" y="2358337"/>
-                  </a:lnTo>
-                  <a:lnTo>
-                    <a:pt x="2658225" y="2395755"/>
-                  </a:lnTo>
-                  <a:lnTo>
-                    <a:pt x="2735469" y="2431928"/>
-                  </a:lnTo>
-                  <a:lnTo>
-                    <a:pt x="2812712" y="2466899"/>
-                  </a:lnTo>
-                  <a:lnTo>
-                    <a:pt x="2889956" y="2500707"/>
-                  </a:lnTo>
-                  <a:lnTo>
-                    <a:pt x="2967199" y="2533391"/>
-                  </a:lnTo>
-                  <a:lnTo>
-                    <a:pt x="3044443" y="2564989"/>
-                  </a:lnTo>
-                  <a:lnTo>
-                    <a:pt x="3121687" y="2595536"/>
-                  </a:lnTo>
-                  <a:lnTo>
-                    <a:pt x="3198930" y="2625067"/>
-                  </a:lnTo>
-                  <a:lnTo>
-                    <a:pt x="3276174" y="2653616"/>
-                  </a:lnTo>
-                  <a:lnTo>
-                    <a:pt x="3353417" y="2650757"/>
-                  </a:lnTo>
-                  <a:lnTo>
-                    <a:pt x="3430661" y="2647131"/>
-                  </a:lnTo>
-                  <a:lnTo>
-                    <a:pt x="3507904" y="2643488"/>
-                  </a:lnTo>
-                  <a:lnTo>
-                    <a:pt x="3585148" y="2639830"/>
-                  </a:lnTo>
-                  <a:lnTo>
-                    <a:pt x="3662392" y="2636155"/>
-                  </a:lnTo>
-                  <a:lnTo>
-                    <a:pt x="3739635" y="2632465"/>
-                  </a:lnTo>
-                  <a:lnTo>
-                    <a:pt x="3816879" y="2628758"/>
-                  </a:lnTo>
-                  <a:lnTo>
-                    <a:pt x="3894122" y="2625036"/>
-                  </a:lnTo>
-                  <a:lnTo>
-                    <a:pt x="3971366" y="2621297"/>
-                  </a:lnTo>
-                  <a:lnTo>
-                    <a:pt x="4048609" y="2617542"/>
-                  </a:lnTo>
-                  <a:lnTo>
-                    <a:pt x="4125853" y="2613771"/>
-                  </a:lnTo>
-                  <a:lnTo>
-                    <a:pt x="4203097" y="2609983"/>
-                  </a:lnTo>
-                  <a:lnTo>
-                    <a:pt x="4280340" y="2606179"/>
-                  </a:lnTo>
-                  <a:lnTo>
-                    <a:pt x="4357584" y="2602358"/>
-                  </a:lnTo>
-                  <a:lnTo>
-                    <a:pt x="4434827" y="2598520"/>
-                  </a:lnTo>
-                  <a:lnTo>
-                    <a:pt x="4512071" y="2594666"/>
-                  </a:lnTo>
-                  <a:lnTo>
-                    <a:pt x="4589314" y="2590795"/>
-                  </a:lnTo>
-                  <a:lnTo>
-                    <a:pt x="4666558" y="2586907"/>
-                  </a:lnTo>
-                  <a:lnTo>
-                    <a:pt x="4743802" y="2583002"/>
-                  </a:lnTo>
-                  <a:lnTo>
-                    <a:pt x="4821045" y="2579081"/>
-                  </a:lnTo>
-                  <a:lnTo>
-                    <a:pt x="4898289" y="2575142"/>
-                  </a:lnTo>
-                  <a:lnTo>
-                    <a:pt x="4975532" y="2571186"/>
-                  </a:lnTo>
-                  <a:lnTo>
-                    <a:pt x="5052776" y="2567213"/>
-                  </a:lnTo>
-                  <a:lnTo>
-                    <a:pt x="5130019" y="2563222"/>
-                  </a:lnTo>
-                  <a:lnTo>
-                    <a:pt x="5207263" y="2559214"/>
-                  </a:lnTo>
-                  <a:lnTo>
-                    <a:pt x="5284507" y="2555189"/>
-                  </a:lnTo>
-                  <a:lnTo>
-                    <a:pt x="5361750" y="2551146"/>
-                  </a:lnTo>
-                  <a:lnTo>
-                    <a:pt x="5438994" y="2547085"/>
-                  </a:lnTo>
-                  <a:lnTo>
-                    <a:pt x="5516237" y="2543007"/>
-                  </a:lnTo>
-                  <a:lnTo>
-                    <a:pt x="5593481" y="2538911"/>
-                  </a:lnTo>
-                  <a:lnTo>
-                    <a:pt x="5670724" y="2534798"/>
-                  </a:lnTo>
-                  <a:lnTo>
-                    <a:pt x="5747968" y="2530666"/>
-                  </a:lnTo>
-                  <a:lnTo>
-                    <a:pt x="5825212" y="2526516"/>
-                  </a:lnTo>
-                  <a:lnTo>
-                    <a:pt x="5902455" y="2522349"/>
-                  </a:lnTo>
-                  <a:lnTo>
-                    <a:pt x="5979699" y="2518163"/>
-                  </a:lnTo>
-                  <a:lnTo>
-                    <a:pt x="6056942" y="2513959"/>
-                  </a:lnTo>
-                  <a:lnTo>
-                    <a:pt x="6134186" y="2509736"/>
-                  </a:lnTo>
-                  <a:lnTo>
-                    <a:pt x="6211429" y="2505495"/>
-                  </a:lnTo>
-                  <a:lnTo>
-                    <a:pt x="6288673" y="2501236"/>
-                  </a:lnTo>
-                  <a:lnTo>
-                    <a:pt x="6365917" y="2496958"/>
-                  </a:lnTo>
-                  <a:lnTo>
-                    <a:pt x="6443160" y="2492662"/>
-                  </a:lnTo>
-                  <a:lnTo>
-                    <a:pt x="6520404" y="2488347"/>
-                  </a:lnTo>
-                  <a:lnTo>
-                    <a:pt x="6597647" y="2484013"/>
-                  </a:lnTo>
-                  <a:lnTo>
-                    <a:pt x="6674891" y="2479660"/>
-                  </a:lnTo>
-                  <a:lnTo>
-                    <a:pt x="6752134" y="2475289"/>
-                  </a:lnTo>
-                  <a:lnTo>
-                    <a:pt x="6829378" y="2470898"/>
-                  </a:lnTo>
-                  <a:lnTo>
-                    <a:pt x="6906622" y="2466488"/>
-                  </a:lnTo>
-                  <a:lnTo>
-                    <a:pt x="6983865" y="2462059"/>
-                  </a:lnTo>
-                  <a:lnTo>
-                    <a:pt x="7061109" y="2457610"/>
-                  </a:lnTo>
-                  <a:lnTo>
-                    <a:pt x="7138352" y="2453143"/>
-                  </a:lnTo>
-                  <a:lnTo>
-                    <a:pt x="7215596" y="2448656"/>
-                  </a:lnTo>
-                  <a:lnTo>
-                    <a:pt x="7292839" y="2444149"/>
-                  </a:lnTo>
-                  <a:lnTo>
-                    <a:pt x="7370083" y="2439623"/>
+                    <a:pt x="7019007" y="686314"/>
+                  </a:lnTo>
+                  <a:lnTo>
+                    <a:pt x="6947385" y="681394"/>
+                  </a:lnTo>
+                  <a:lnTo>
+                    <a:pt x="6875762" y="676304"/>
+                  </a:lnTo>
+                  <a:lnTo>
+                    <a:pt x="6804139" y="671040"/>
+                  </a:lnTo>
+                  <a:lnTo>
+                    <a:pt x="6732517" y="665594"/>
+                  </a:lnTo>
+                  <a:lnTo>
+                    <a:pt x="6660894" y="659962"/>
+                  </a:lnTo>
+                  <a:lnTo>
+                    <a:pt x="6589272" y="654135"/>
+                  </a:lnTo>
+                  <a:lnTo>
+                    <a:pt x="6517649" y="648108"/>
+                  </a:lnTo>
+                  <a:lnTo>
+                    <a:pt x="6446027" y="641874"/>
+                  </a:lnTo>
+                  <a:lnTo>
+                    <a:pt x="6374404" y="635426"/>
+                  </a:lnTo>
+                  <a:lnTo>
+                    <a:pt x="6302782" y="628755"/>
+                  </a:lnTo>
+                  <a:lnTo>
+                    <a:pt x="6231159" y="621856"/>
+                  </a:lnTo>
+                  <a:lnTo>
+                    <a:pt x="6159537" y="614719"/>
+                  </a:lnTo>
+                  <a:lnTo>
+                    <a:pt x="6087914" y="607336"/>
+                  </a:lnTo>
+                  <a:lnTo>
+                    <a:pt x="6016292" y="599700"/>
+                  </a:lnTo>
+                  <a:lnTo>
+                    <a:pt x="5944669" y="591801"/>
+                  </a:lnTo>
+                  <a:lnTo>
+                    <a:pt x="5873047" y="583630"/>
+                  </a:lnTo>
+                  <a:lnTo>
+                    <a:pt x="5801424" y="575179"/>
+                  </a:lnTo>
+                  <a:lnTo>
+                    <a:pt x="5729802" y="566436"/>
+                  </a:lnTo>
+                  <a:lnTo>
+                    <a:pt x="5658179" y="557393"/>
+                  </a:lnTo>
+                  <a:lnTo>
+                    <a:pt x="5586557" y="548040"/>
+                  </a:lnTo>
+                  <a:lnTo>
+                    <a:pt x="5514934" y="538364"/>
+                  </a:lnTo>
+                  <a:lnTo>
+                    <a:pt x="5443311" y="528356"/>
+                  </a:lnTo>
+                  <a:lnTo>
+                    <a:pt x="5371689" y="518003"/>
+                  </a:lnTo>
+                  <a:lnTo>
+                    <a:pt x="5300066" y="507294"/>
+                  </a:lnTo>
+                  <a:lnTo>
+                    <a:pt x="5228444" y="496217"/>
+                  </a:lnTo>
+                  <a:lnTo>
+                    <a:pt x="5156821" y="484760"/>
+                  </a:lnTo>
+                  <a:lnTo>
+                    <a:pt x="5085199" y="472908"/>
+                  </a:lnTo>
+                  <a:lnTo>
+                    <a:pt x="5013576" y="460648"/>
+                  </a:lnTo>
+                  <a:lnTo>
+                    <a:pt x="4941954" y="447967"/>
+                  </a:lnTo>
+                  <a:lnTo>
+                    <a:pt x="4870331" y="434850"/>
+                  </a:lnTo>
+                  <a:lnTo>
+                    <a:pt x="4798709" y="421281"/>
+                  </a:lnTo>
+                  <a:lnTo>
+                    <a:pt x="4727086" y="407246"/>
+                  </a:lnTo>
+                  <a:lnTo>
+                    <a:pt x="4655464" y="392729"/>
+                  </a:lnTo>
+                  <a:lnTo>
+                    <a:pt x="4583841" y="377712"/>
+                  </a:lnTo>
+                  <a:lnTo>
+                    <a:pt x="4512219" y="362178"/>
+                  </a:lnTo>
+                  <a:lnTo>
+                    <a:pt x="4440596" y="346110"/>
+                  </a:lnTo>
+                  <a:lnTo>
+                    <a:pt x="4368974" y="329490"/>
+                  </a:lnTo>
+                  <a:lnTo>
+                    <a:pt x="4297351" y="312298"/>
+                  </a:lnTo>
+                  <a:lnTo>
+                    <a:pt x="4225729" y="294515"/>
+                  </a:lnTo>
+                  <a:lnTo>
+                    <a:pt x="4154106" y="276120"/>
+                  </a:lnTo>
+                  <a:lnTo>
+                    <a:pt x="4082483" y="257093"/>
+                  </a:lnTo>
+                  <a:lnTo>
+                    <a:pt x="4010861" y="237411"/>
+                  </a:lnTo>
+                  <a:lnTo>
+                    <a:pt x="3939238" y="217053"/>
+                  </a:lnTo>
+                  <a:lnTo>
+                    <a:pt x="3867616" y="195994"/>
+                  </a:lnTo>
+                  <a:lnTo>
+                    <a:pt x="3795993" y="174211"/>
+                  </a:lnTo>
+                  <a:lnTo>
+                    <a:pt x="3724371" y="151679"/>
+                  </a:lnTo>
+                  <a:lnTo>
+                    <a:pt x="3652748" y="128372"/>
+                  </a:lnTo>
+                  <a:lnTo>
+                    <a:pt x="3581126" y="104263"/>
+                  </a:lnTo>
+                  <a:lnTo>
+                    <a:pt x="3509503" y="79326"/>
+                  </a:lnTo>
+                  <a:lnTo>
+                    <a:pt x="3437881" y="53530"/>
+                  </a:lnTo>
+                  <a:lnTo>
+                    <a:pt x="3366258" y="26848"/>
+                  </a:lnTo>
+                  <a:lnTo>
+                    <a:pt x="3294636" y="0"/>
+                  </a:lnTo>
+                  <a:lnTo>
+                    <a:pt x="3223013" y="3595"/>
+                  </a:lnTo>
+                  <a:lnTo>
+                    <a:pt x="3151391" y="7175"/>
+                  </a:lnTo>
+                  <a:lnTo>
+                    <a:pt x="3079768" y="10739"/>
+                  </a:lnTo>
+                  <a:lnTo>
+                    <a:pt x="3008146" y="14288"/>
+                  </a:lnTo>
+                  <a:lnTo>
+                    <a:pt x="2936523" y="17821"/>
+                  </a:lnTo>
+                  <a:lnTo>
+                    <a:pt x="2864901" y="21339"/>
+                  </a:lnTo>
+                  <a:lnTo>
+                    <a:pt x="2793278" y="24842"/>
+                  </a:lnTo>
+                  <a:lnTo>
+                    <a:pt x="2721655" y="28330"/>
+                  </a:lnTo>
+                  <a:lnTo>
+                    <a:pt x="2650033" y="31803"/>
+                  </a:lnTo>
+                  <a:lnTo>
+                    <a:pt x="2578410" y="35260"/>
+                  </a:lnTo>
+                  <a:lnTo>
+                    <a:pt x="2506788" y="38703"/>
+                  </a:lnTo>
+                  <a:lnTo>
+                    <a:pt x="2435165" y="42130"/>
+                  </a:lnTo>
+                  <a:lnTo>
+                    <a:pt x="2363543" y="45543"/>
+                  </a:lnTo>
+                  <a:lnTo>
+                    <a:pt x="2291920" y="48941"/>
+                  </a:lnTo>
+                  <a:lnTo>
+                    <a:pt x="2220298" y="52324"/>
+                  </a:lnTo>
+                  <a:lnTo>
+                    <a:pt x="2148675" y="55693"/>
+                  </a:lnTo>
+                  <a:lnTo>
+                    <a:pt x="2077053" y="59047"/>
+                  </a:lnTo>
+                  <a:lnTo>
+                    <a:pt x="2005430" y="62386"/>
+                  </a:lnTo>
+                  <a:lnTo>
+                    <a:pt x="1933808" y="65711"/>
+                  </a:lnTo>
+                  <a:lnTo>
+                    <a:pt x="1862185" y="69022"/>
+                  </a:lnTo>
+                  <a:lnTo>
+                    <a:pt x="1790563" y="72318"/>
+                  </a:lnTo>
+                  <a:lnTo>
+                    <a:pt x="1718940" y="75600"/>
+                  </a:lnTo>
+                  <a:lnTo>
+                    <a:pt x="1647318" y="78867"/>
+                  </a:lnTo>
+                  <a:lnTo>
+                    <a:pt x="1575695" y="82121"/>
+                  </a:lnTo>
+                  <a:lnTo>
+                    <a:pt x="1504073" y="85360"/>
+                  </a:lnTo>
+                  <a:lnTo>
+                    <a:pt x="1432450" y="88586"/>
+                  </a:lnTo>
+                  <a:lnTo>
+                    <a:pt x="1360827" y="91797"/>
+                  </a:lnTo>
+                  <a:lnTo>
+                    <a:pt x="1289205" y="94995"/>
+                  </a:lnTo>
+                  <a:lnTo>
+                    <a:pt x="1217582" y="98178"/>
+                  </a:lnTo>
+                  <a:lnTo>
+                    <a:pt x="1145960" y="101348"/>
+                  </a:lnTo>
+                  <a:lnTo>
+                    <a:pt x="1074337" y="104504"/>
+                  </a:lnTo>
+                  <a:lnTo>
+                    <a:pt x="1002715" y="107646"/>
+                  </a:lnTo>
+                  <a:lnTo>
+                    <a:pt x="931092" y="110775"/>
+                  </a:lnTo>
+                  <a:lnTo>
+                    <a:pt x="859470" y="113890"/>
+                  </a:lnTo>
+                  <a:lnTo>
+                    <a:pt x="787847" y="116992"/>
+                  </a:lnTo>
+                  <a:lnTo>
+                    <a:pt x="716225" y="120080"/>
+                  </a:lnTo>
+                  <a:lnTo>
+                    <a:pt x="644602" y="123155"/>
+                  </a:lnTo>
+                  <a:lnTo>
+                    <a:pt x="572980" y="126217"/>
+                  </a:lnTo>
+                  <a:lnTo>
+                    <a:pt x="501357" y="129265"/>
+                  </a:lnTo>
+                  <a:lnTo>
+                    <a:pt x="429735" y="132300"/>
+                  </a:lnTo>
+                  <a:lnTo>
+                    <a:pt x="358112" y="135322"/>
+                  </a:lnTo>
+                  <a:lnTo>
+                    <a:pt x="286490" y="138330"/>
+                  </a:lnTo>
+                  <a:lnTo>
+                    <a:pt x="214867" y="141326"/>
+                  </a:lnTo>
+                  <a:lnTo>
+                    <a:pt x="143245" y="144309"/>
+                  </a:lnTo>
+                  <a:lnTo>
+                    <a:pt x="71622" y="147279"/>
+                  </a:lnTo>
+                  <a:lnTo>
+                    <a:pt x="0" y="150236"/>
                   </a:lnTo>
                 </a:path>
               </a:pathLst>
@@ -3931,619 +4222,312 @@
           </p:nvSpPr>
           <p:spPr>
             <a:xfrm>
-              <a:off x="817517" y="4727871"/>
-              <a:ext cx="7392041" cy="691070"/>
+              <a:off x="1172049" y="3923044"/>
+              <a:ext cx="7090630" cy="1254192"/>
             </a:xfrm>
             <a:custGeom>
               <a:avLst/>
               <a:pathLst>
-                <a:path w="7392041" h="691070">
-                  <a:moveTo>
-                    <a:pt x="7392041" y="691070"/>
-                  </a:moveTo>
-                  <a:lnTo>
-                    <a:pt x="7314797" y="686314"/>
-                  </a:lnTo>
-                  <a:lnTo>
-                    <a:pt x="7237554" y="681394"/>
-                  </a:lnTo>
-                  <a:lnTo>
-                    <a:pt x="7160310" y="676304"/>
-                  </a:lnTo>
-                  <a:lnTo>
-                    <a:pt x="7083066" y="671040"/>
-                  </a:lnTo>
-                  <a:lnTo>
-                    <a:pt x="7005823" y="665594"/>
-                  </a:lnTo>
-                  <a:lnTo>
-                    <a:pt x="6928579" y="659962"/>
-                  </a:lnTo>
-                  <a:lnTo>
-                    <a:pt x="6851336" y="654135"/>
-                  </a:lnTo>
-                  <a:lnTo>
-                    <a:pt x="6774092" y="648108"/>
-                  </a:lnTo>
-                  <a:lnTo>
-                    <a:pt x="6696849" y="641874"/>
-                  </a:lnTo>
-                  <a:lnTo>
-                    <a:pt x="6619605" y="635426"/>
-                  </a:lnTo>
-                  <a:lnTo>
-                    <a:pt x="6542361" y="628755"/>
-                  </a:lnTo>
-                  <a:lnTo>
-                    <a:pt x="6465118" y="621856"/>
-                  </a:lnTo>
-                  <a:lnTo>
-                    <a:pt x="6387874" y="614719"/>
-                  </a:lnTo>
-                  <a:lnTo>
-                    <a:pt x="6310631" y="607336"/>
-                  </a:lnTo>
-                  <a:lnTo>
-                    <a:pt x="6233387" y="599700"/>
-                  </a:lnTo>
-                  <a:lnTo>
-                    <a:pt x="6156144" y="591801"/>
-                  </a:lnTo>
-                  <a:lnTo>
-                    <a:pt x="6078900" y="583630"/>
-                  </a:lnTo>
-                  <a:lnTo>
-                    <a:pt x="6001656" y="575179"/>
-                  </a:lnTo>
-                  <a:lnTo>
-                    <a:pt x="5924413" y="566436"/>
-                  </a:lnTo>
-                  <a:lnTo>
-                    <a:pt x="5847169" y="557393"/>
-                  </a:lnTo>
-                  <a:lnTo>
-                    <a:pt x="5769926" y="548040"/>
-                  </a:lnTo>
-                  <a:lnTo>
-                    <a:pt x="5692682" y="538364"/>
-                  </a:lnTo>
-                  <a:lnTo>
-                    <a:pt x="5615439" y="528356"/>
-                  </a:lnTo>
-                  <a:lnTo>
-                    <a:pt x="5538195" y="518003"/>
-                  </a:lnTo>
-                  <a:lnTo>
-                    <a:pt x="5460951" y="507294"/>
-                  </a:lnTo>
-                  <a:lnTo>
-                    <a:pt x="5383708" y="496217"/>
-                  </a:lnTo>
-                  <a:lnTo>
-                    <a:pt x="5306464" y="484760"/>
-                  </a:lnTo>
-                  <a:lnTo>
-                    <a:pt x="5229221" y="472908"/>
-                  </a:lnTo>
-                  <a:lnTo>
-                    <a:pt x="5151977" y="460648"/>
-                  </a:lnTo>
-                  <a:lnTo>
-                    <a:pt x="5074734" y="447967"/>
-                  </a:lnTo>
-                  <a:lnTo>
-                    <a:pt x="4997490" y="434850"/>
-                  </a:lnTo>
-                  <a:lnTo>
-                    <a:pt x="4920246" y="421281"/>
-                  </a:lnTo>
-                  <a:lnTo>
-                    <a:pt x="4843003" y="407246"/>
-                  </a:lnTo>
-                  <a:lnTo>
-                    <a:pt x="4765759" y="392729"/>
-                  </a:lnTo>
-                  <a:lnTo>
-                    <a:pt x="4688516" y="377712"/>
-                  </a:lnTo>
-                  <a:lnTo>
-                    <a:pt x="4611272" y="362178"/>
-                  </a:lnTo>
-                  <a:lnTo>
-                    <a:pt x="4534029" y="346110"/>
-                  </a:lnTo>
-                  <a:lnTo>
-                    <a:pt x="4456785" y="329490"/>
-                  </a:lnTo>
-                  <a:lnTo>
-                    <a:pt x="4379541" y="312298"/>
-                  </a:lnTo>
-                  <a:lnTo>
-                    <a:pt x="4302298" y="294515"/>
-                  </a:lnTo>
-                  <a:lnTo>
-                    <a:pt x="4225054" y="276120"/>
-                  </a:lnTo>
-                  <a:lnTo>
-                    <a:pt x="4147811" y="257093"/>
-                  </a:lnTo>
-                  <a:lnTo>
-                    <a:pt x="4070567" y="237411"/>
-                  </a:lnTo>
-                  <a:lnTo>
-                    <a:pt x="3993324" y="217053"/>
-                  </a:lnTo>
-                  <a:lnTo>
-                    <a:pt x="3916080" y="195994"/>
-                  </a:lnTo>
-                  <a:lnTo>
-                    <a:pt x="3838836" y="174211"/>
-                  </a:lnTo>
-                  <a:lnTo>
-                    <a:pt x="3761593" y="151679"/>
-                  </a:lnTo>
-                  <a:lnTo>
-                    <a:pt x="3684349" y="128372"/>
-                  </a:lnTo>
-                  <a:lnTo>
-                    <a:pt x="3607106" y="104263"/>
-                  </a:lnTo>
-                  <a:lnTo>
-                    <a:pt x="3529862" y="79326"/>
-                  </a:lnTo>
-                  <a:lnTo>
-                    <a:pt x="3452619" y="53530"/>
-                  </a:lnTo>
-                  <a:lnTo>
-                    <a:pt x="3375375" y="26848"/>
-                  </a:lnTo>
-                  <a:lnTo>
-                    <a:pt x="3298131" y="0"/>
-                  </a:lnTo>
-                  <a:lnTo>
-                    <a:pt x="3220888" y="3595"/>
-                  </a:lnTo>
-                  <a:lnTo>
-                    <a:pt x="3143644" y="7175"/>
-                  </a:lnTo>
-                  <a:lnTo>
-                    <a:pt x="3066401" y="10739"/>
-                  </a:lnTo>
-                  <a:lnTo>
-                    <a:pt x="2989157" y="14288"/>
-                  </a:lnTo>
-                  <a:lnTo>
-                    <a:pt x="2911914" y="17821"/>
-                  </a:lnTo>
-                  <a:lnTo>
-                    <a:pt x="2834670" y="21339"/>
-                  </a:lnTo>
-                  <a:lnTo>
-                    <a:pt x="2757426" y="24842"/>
-                  </a:lnTo>
-                  <a:lnTo>
-                    <a:pt x="2680183" y="28330"/>
-                  </a:lnTo>
-                  <a:lnTo>
-                    <a:pt x="2602939" y="31803"/>
-                  </a:lnTo>
-                  <a:lnTo>
-                    <a:pt x="2525696" y="35260"/>
-                  </a:lnTo>
-                  <a:lnTo>
-                    <a:pt x="2448452" y="38703"/>
-                  </a:lnTo>
-                  <a:lnTo>
-                    <a:pt x="2371209" y="42130"/>
-                  </a:lnTo>
-                  <a:lnTo>
-                    <a:pt x="2293965" y="45543"/>
-                  </a:lnTo>
-                  <a:lnTo>
-                    <a:pt x="2216721" y="48941"/>
-                  </a:lnTo>
-                  <a:lnTo>
-                    <a:pt x="2139478" y="52324"/>
-                  </a:lnTo>
-                  <a:lnTo>
-                    <a:pt x="2062234" y="55693"/>
-                  </a:lnTo>
-                  <a:lnTo>
-                    <a:pt x="1984991" y="59047"/>
-                  </a:lnTo>
-                  <a:lnTo>
-                    <a:pt x="1907747" y="62386"/>
-                  </a:lnTo>
-                  <a:lnTo>
-                    <a:pt x="1830504" y="65711"/>
-                  </a:lnTo>
-                  <a:lnTo>
-                    <a:pt x="1753260" y="69022"/>
-                  </a:lnTo>
-                  <a:lnTo>
-                    <a:pt x="1676016" y="72318"/>
-                  </a:lnTo>
-                  <a:lnTo>
-                    <a:pt x="1598773" y="75600"/>
-                  </a:lnTo>
-                  <a:lnTo>
-                    <a:pt x="1521529" y="78867"/>
-                  </a:lnTo>
-                  <a:lnTo>
-                    <a:pt x="1444286" y="82121"/>
-                  </a:lnTo>
-                  <a:lnTo>
-                    <a:pt x="1367042" y="85360"/>
-                  </a:lnTo>
-                  <a:lnTo>
-                    <a:pt x="1289799" y="88586"/>
-                  </a:lnTo>
-                  <a:lnTo>
-                    <a:pt x="1212555" y="91797"/>
-                  </a:lnTo>
-                  <a:lnTo>
-                    <a:pt x="1135311" y="94995"/>
-                  </a:lnTo>
-                  <a:lnTo>
-                    <a:pt x="1058068" y="98178"/>
-                  </a:lnTo>
-                  <a:lnTo>
-                    <a:pt x="980824" y="101348"/>
-                  </a:lnTo>
-                  <a:lnTo>
-                    <a:pt x="903581" y="104504"/>
-                  </a:lnTo>
-                  <a:lnTo>
-                    <a:pt x="826337" y="107646"/>
-                  </a:lnTo>
-                  <a:lnTo>
-                    <a:pt x="749094" y="110775"/>
-                  </a:lnTo>
-                  <a:lnTo>
-                    <a:pt x="671850" y="113890"/>
-                  </a:lnTo>
-                  <a:lnTo>
-                    <a:pt x="594606" y="116992"/>
-                  </a:lnTo>
-                  <a:lnTo>
-                    <a:pt x="517363" y="120080"/>
-                  </a:lnTo>
-                  <a:lnTo>
-                    <a:pt x="440119" y="123155"/>
-                  </a:lnTo>
-                  <a:lnTo>
-                    <a:pt x="362876" y="126217"/>
-                  </a:lnTo>
-                  <a:lnTo>
-                    <a:pt x="285632" y="129265"/>
-                  </a:lnTo>
-                  <a:lnTo>
-                    <a:pt x="208389" y="132300"/>
-                  </a:lnTo>
-                  <a:lnTo>
-                    <a:pt x="131145" y="135322"/>
-                  </a:lnTo>
-                  <a:lnTo>
-                    <a:pt x="53901" y="138330"/>
-                  </a:lnTo>
-                  <a:lnTo>
-                    <a:pt x="0" y="140421"/>
-                  </a:lnTo>
-                </a:path>
-              </a:pathLst>
-            </a:custGeom>
-          </p:spPr>
-          <p:txBody>
-            <a:bodyPr/>
-            <a:lstStyle/>
-            <a:p/>
-          </p:txBody>
-        </p:sp>
-        <p:sp>
-          <p:nvSpPr>
-            <p:cNvPr id="24" name="pl24"/>
-            <p:cNvSpPr/>
-            <p:nvPr/>
-          </p:nvSpPr>
-          <p:spPr>
-            <a:xfrm>
-              <a:off x="817517" y="4000618"/>
-              <a:ext cx="7392041" cy="1176618"/>
-            </a:xfrm>
-            <a:custGeom>
-              <a:avLst/>
-              <a:pathLst>
-                <a:path w="7392041" h="1176618">
+                <a:path w="7090630" h="1254192">
                   <a:moveTo>
                     <a:pt x="0" y="0"/>
                   </a:moveTo>
                   <a:lnTo>
-                    <a:pt x="53901" y="15958"/>
-                  </a:lnTo>
-                  <a:lnTo>
-                    <a:pt x="131145" y="38492"/>
-                  </a:lnTo>
-                  <a:lnTo>
-                    <a:pt x="208389" y="60697"/>
-                  </a:lnTo>
-                  <a:lnTo>
-                    <a:pt x="285632" y="82577"/>
-                  </a:lnTo>
-                  <a:lnTo>
-                    <a:pt x="362876" y="104137"/>
-                  </a:lnTo>
-                  <a:lnTo>
-                    <a:pt x="440119" y="125382"/>
-                  </a:lnTo>
-                  <a:lnTo>
-                    <a:pt x="517363" y="146316"/>
-                  </a:lnTo>
-                  <a:lnTo>
-                    <a:pt x="594606" y="166944"/>
-                  </a:lnTo>
-                  <a:lnTo>
-                    <a:pt x="671850" y="187270"/>
-                  </a:lnTo>
-                  <a:lnTo>
-                    <a:pt x="749094" y="207299"/>
-                  </a:lnTo>
-                  <a:lnTo>
-                    <a:pt x="826337" y="227035"/>
-                  </a:lnTo>
-                  <a:lnTo>
-                    <a:pt x="903581" y="246482"/>
-                  </a:lnTo>
-                  <a:lnTo>
-                    <a:pt x="980824" y="265645"/>
-                  </a:lnTo>
-                  <a:lnTo>
-                    <a:pt x="1058068" y="284527"/>
-                  </a:lnTo>
-                  <a:lnTo>
-                    <a:pt x="1135311" y="303133"/>
-                  </a:lnTo>
-                  <a:lnTo>
-                    <a:pt x="1212555" y="321468"/>
-                  </a:lnTo>
-                  <a:lnTo>
-                    <a:pt x="1289799" y="339534"/>
-                  </a:lnTo>
-                  <a:lnTo>
-                    <a:pt x="1367042" y="357335"/>
-                  </a:lnTo>
-                  <a:lnTo>
-                    <a:pt x="1444286" y="374877"/>
-                  </a:lnTo>
-                  <a:lnTo>
-                    <a:pt x="1521529" y="392162"/>
-                  </a:lnTo>
-                  <a:lnTo>
-                    <a:pt x="1598773" y="409193"/>
-                  </a:lnTo>
-                  <a:lnTo>
-                    <a:pt x="1676016" y="425976"/>
-                  </a:lnTo>
-                  <a:lnTo>
-                    <a:pt x="1753260" y="442514"/>
-                  </a:lnTo>
-                  <a:lnTo>
-                    <a:pt x="1830504" y="458809"/>
-                  </a:lnTo>
-                  <a:lnTo>
-                    <a:pt x="1907747" y="474866"/>
-                  </a:lnTo>
-                  <a:lnTo>
-                    <a:pt x="1984991" y="490689"/>
-                  </a:lnTo>
-                  <a:lnTo>
-                    <a:pt x="2062234" y="506280"/>
-                  </a:lnTo>
-                  <a:lnTo>
-                    <a:pt x="2139478" y="521642"/>
-                  </a:lnTo>
-                  <a:lnTo>
-                    <a:pt x="2216721" y="536781"/>
-                  </a:lnTo>
-                  <a:lnTo>
-                    <a:pt x="2293965" y="551697"/>
-                  </a:lnTo>
-                  <a:lnTo>
-                    <a:pt x="2371209" y="566396"/>
-                  </a:lnTo>
-                  <a:lnTo>
-                    <a:pt x="2448452" y="580879"/>
-                  </a:lnTo>
-                  <a:lnTo>
-                    <a:pt x="2525696" y="595151"/>
-                  </a:lnTo>
-                  <a:lnTo>
-                    <a:pt x="2602939" y="609214"/>
-                  </a:lnTo>
-                  <a:lnTo>
-                    <a:pt x="2680183" y="623071"/>
-                  </a:lnTo>
-                  <a:lnTo>
-                    <a:pt x="2757426" y="636726"/>
-                  </a:lnTo>
-                  <a:lnTo>
-                    <a:pt x="2834670" y="650181"/>
-                  </a:lnTo>
-                  <a:lnTo>
-                    <a:pt x="2911914" y="663439"/>
-                  </a:lnTo>
-                  <a:lnTo>
-                    <a:pt x="2989157" y="676503"/>
-                  </a:lnTo>
-                  <a:lnTo>
-                    <a:pt x="3066401" y="689376"/>
-                  </a:lnTo>
-                  <a:lnTo>
-                    <a:pt x="3143644" y="702061"/>
-                  </a:lnTo>
-                  <a:lnTo>
-                    <a:pt x="3220888" y="714560"/>
-                  </a:lnTo>
-                  <a:lnTo>
-                    <a:pt x="3298131" y="726877"/>
-                  </a:lnTo>
-                  <a:lnTo>
-                    <a:pt x="3375375" y="739013"/>
-                  </a:lnTo>
-                  <a:lnTo>
-                    <a:pt x="3452619" y="750972"/>
-                  </a:lnTo>
-                  <a:lnTo>
-                    <a:pt x="3529862" y="762756"/>
-                  </a:lnTo>
-                  <a:lnTo>
-                    <a:pt x="3607106" y="774367"/>
-                  </a:lnTo>
-                  <a:lnTo>
-                    <a:pt x="3684349" y="785809"/>
-                  </a:lnTo>
-                  <a:lnTo>
-                    <a:pt x="3761593" y="797083"/>
-                  </a:lnTo>
-                  <a:lnTo>
-                    <a:pt x="3838836" y="808193"/>
-                  </a:lnTo>
-                  <a:lnTo>
-                    <a:pt x="3916080" y="819140"/>
-                  </a:lnTo>
-                  <a:lnTo>
-                    <a:pt x="3993324" y="829927"/>
-                  </a:lnTo>
-                  <a:lnTo>
-                    <a:pt x="4070567" y="840556"/>
-                  </a:lnTo>
-                  <a:lnTo>
-                    <a:pt x="4147811" y="851029"/>
-                  </a:lnTo>
-                  <a:lnTo>
-                    <a:pt x="4225054" y="861350"/>
-                  </a:lnTo>
-                  <a:lnTo>
-                    <a:pt x="4302298" y="871519"/>
-                  </a:lnTo>
-                  <a:lnTo>
-                    <a:pt x="4379541" y="881540"/>
-                  </a:lnTo>
-                  <a:lnTo>
-                    <a:pt x="4456785" y="891414"/>
-                  </a:lnTo>
-                  <a:lnTo>
-                    <a:pt x="4534029" y="901144"/>
-                  </a:lnTo>
-                  <a:lnTo>
-                    <a:pt x="4611272" y="910731"/>
-                  </a:lnTo>
-                  <a:lnTo>
-                    <a:pt x="4688516" y="920178"/>
-                  </a:lnTo>
-                  <a:lnTo>
-                    <a:pt x="4765759" y="929487"/>
-                  </a:lnTo>
-                  <a:lnTo>
-                    <a:pt x="4843003" y="938660"/>
-                  </a:lnTo>
-                  <a:lnTo>
-                    <a:pt x="4920246" y="947699"/>
-                  </a:lnTo>
-                  <a:lnTo>
-                    <a:pt x="4997490" y="956605"/>
-                  </a:lnTo>
-                  <a:lnTo>
-                    <a:pt x="5074734" y="965381"/>
-                  </a:lnTo>
-                  <a:lnTo>
-                    <a:pt x="5151977" y="974029"/>
-                  </a:lnTo>
-                  <a:lnTo>
-                    <a:pt x="5229221" y="982551"/>
-                  </a:lnTo>
-                  <a:lnTo>
-                    <a:pt x="5306464" y="990947"/>
-                  </a:lnTo>
-                  <a:lnTo>
-                    <a:pt x="5383708" y="999221"/>
-                  </a:lnTo>
-                  <a:lnTo>
-                    <a:pt x="5460951" y="1007374"/>
-                  </a:lnTo>
-                  <a:lnTo>
-                    <a:pt x="5538195" y="1015408"/>
-                  </a:lnTo>
-                  <a:lnTo>
-                    <a:pt x="5615439" y="1023324"/>
-                  </a:lnTo>
-                  <a:lnTo>
-                    <a:pt x="5692682" y="1031124"/>
-                  </a:lnTo>
-                  <a:lnTo>
-                    <a:pt x="5769926" y="1038811"/>
-                  </a:lnTo>
-                  <a:lnTo>
-                    <a:pt x="5847169" y="1046384"/>
-                  </a:lnTo>
-                  <a:lnTo>
-                    <a:pt x="5924413" y="1053848"/>
-                  </a:lnTo>
-                  <a:lnTo>
-                    <a:pt x="6001656" y="1061201"/>
-                  </a:lnTo>
-                  <a:lnTo>
-                    <a:pt x="6078900" y="1068448"/>
-                  </a:lnTo>
-                  <a:lnTo>
-                    <a:pt x="6156144" y="1075588"/>
-                  </a:lnTo>
-                  <a:lnTo>
-                    <a:pt x="6233387" y="1082624"/>
-                  </a:lnTo>
-                  <a:lnTo>
-                    <a:pt x="6310631" y="1089557"/>
-                  </a:lnTo>
-                  <a:lnTo>
-                    <a:pt x="6387874" y="1096389"/>
-                  </a:lnTo>
-                  <a:lnTo>
-                    <a:pt x="6465118" y="1103120"/>
-                  </a:lnTo>
-                  <a:lnTo>
-                    <a:pt x="6542361" y="1109754"/>
-                  </a:lnTo>
-                  <a:lnTo>
-                    <a:pt x="6619605" y="1116290"/>
-                  </a:lnTo>
-                  <a:lnTo>
-                    <a:pt x="6696849" y="1122730"/>
-                  </a:lnTo>
-                  <a:lnTo>
-                    <a:pt x="6774092" y="1129077"/>
-                  </a:lnTo>
-                  <a:lnTo>
-                    <a:pt x="6851336" y="1135330"/>
-                  </a:lnTo>
-                  <a:lnTo>
-                    <a:pt x="6928579" y="1141492"/>
-                  </a:lnTo>
-                  <a:lnTo>
-                    <a:pt x="7005823" y="1147564"/>
-                  </a:lnTo>
-                  <a:lnTo>
-                    <a:pt x="7083066" y="1153548"/>
-                  </a:lnTo>
-                  <a:lnTo>
-                    <a:pt x="7160310" y="1159443"/>
-                  </a:lnTo>
-                  <a:lnTo>
-                    <a:pt x="7237554" y="1165253"/>
-                  </a:lnTo>
-                  <a:lnTo>
-                    <a:pt x="7314797" y="1170977"/>
-                  </a:lnTo>
-                  <a:lnTo>
-                    <a:pt x="7392041" y="1176618"/>
+                    <a:pt x="71622" y="23902"/>
+                  </a:lnTo>
+                  <a:lnTo>
+                    <a:pt x="143245" y="47455"/>
+                  </a:lnTo>
+                  <a:lnTo>
+                    <a:pt x="214867" y="70663"/>
+                  </a:lnTo>
+                  <a:lnTo>
+                    <a:pt x="286490" y="93532"/>
+                  </a:lnTo>
+                  <a:lnTo>
+                    <a:pt x="358112" y="116067"/>
+                  </a:lnTo>
+                  <a:lnTo>
+                    <a:pt x="429735" y="138272"/>
+                  </a:lnTo>
+                  <a:lnTo>
+                    <a:pt x="501357" y="160152"/>
+                  </a:lnTo>
+                  <a:lnTo>
+                    <a:pt x="572980" y="181712"/>
+                  </a:lnTo>
+                  <a:lnTo>
+                    <a:pt x="644602" y="202957"/>
+                  </a:lnTo>
+                  <a:lnTo>
+                    <a:pt x="716225" y="223891"/>
+                  </a:lnTo>
+                  <a:lnTo>
+                    <a:pt x="787847" y="244519"/>
+                  </a:lnTo>
+                  <a:lnTo>
+                    <a:pt x="859470" y="264845"/>
+                  </a:lnTo>
+                  <a:lnTo>
+                    <a:pt x="931092" y="284873"/>
+                  </a:lnTo>
+                  <a:lnTo>
+                    <a:pt x="1002715" y="304609"/>
+                  </a:lnTo>
+                  <a:lnTo>
+                    <a:pt x="1074337" y="324056"/>
+                  </a:lnTo>
+                  <a:lnTo>
+                    <a:pt x="1145960" y="343219"/>
+                  </a:lnTo>
+                  <a:lnTo>
+                    <a:pt x="1217582" y="362102"/>
+                  </a:lnTo>
+                  <a:lnTo>
+                    <a:pt x="1289205" y="380708"/>
+                  </a:lnTo>
+                  <a:lnTo>
+                    <a:pt x="1360827" y="399042"/>
+                  </a:lnTo>
+                  <a:lnTo>
+                    <a:pt x="1432450" y="417108"/>
+                  </a:lnTo>
+                  <a:lnTo>
+                    <a:pt x="1504073" y="434910"/>
+                  </a:lnTo>
+                  <a:lnTo>
+                    <a:pt x="1575695" y="452451"/>
+                  </a:lnTo>
+                  <a:lnTo>
+                    <a:pt x="1647318" y="469736"/>
+                  </a:lnTo>
+                  <a:lnTo>
+                    <a:pt x="1718940" y="486768"/>
+                  </a:lnTo>
+                  <a:lnTo>
+                    <a:pt x="1790563" y="503551"/>
+                  </a:lnTo>
+                  <a:lnTo>
+                    <a:pt x="1862185" y="520088"/>
+                  </a:lnTo>
+                  <a:lnTo>
+                    <a:pt x="1933808" y="536384"/>
+                  </a:lnTo>
+                  <a:lnTo>
+                    <a:pt x="2005430" y="552441"/>
+                  </a:lnTo>
+                  <a:lnTo>
+                    <a:pt x="2077053" y="568263"/>
+                  </a:lnTo>
+                  <a:lnTo>
+                    <a:pt x="2148675" y="583854"/>
+                  </a:lnTo>
+                  <a:lnTo>
+                    <a:pt x="2220298" y="599217"/>
+                  </a:lnTo>
+                  <a:lnTo>
+                    <a:pt x="2291920" y="614355"/>
+                  </a:lnTo>
+                  <a:lnTo>
+                    <a:pt x="2363543" y="629272"/>
+                  </a:lnTo>
+                  <a:lnTo>
+                    <a:pt x="2435165" y="643970"/>
+                  </a:lnTo>
+                  <a:lnTo>
+                    <a:pt x="2506788" y="658454"/>
+                  </a:lnTo>
+                  <a:lnTo>
+                    <a:pt x="2578410" y="672726"/>
+                  </a:lnTo>
+                  <a:lnTo>
+                    <a:pt x="2650033" y="686789"/>
+                  </a:lnTo>
+                  <a:lnTo>
+                    <a:pt x="2721655" y="700646"/>
+                  </a:lnTo>
+                  <a:lnTo>
+                    <a:pt x="2793278" y="714301"/>
+                  </a:lnTo>
+                  <a:lnTo>
+                    <a:pt x="2864901" y="727755"/>
+                  </a:lnTo>
+                  <a:lnTo>
+                    <a:pt x="2936523" y="741014"/>
+                  </a:lnTo>
+                  <a:lnTo>
+                    <a:pt x="3008146" y="754078"/>
+                  </a:lnTo>
+                  <a:lnTo>
+                    <a:pt x="3079768" y="766951"/>
+                  </a:lnTo>
+                  <a:lnTo>
+                    <a:pt x="3151391" y="779636"/>
+                  </a:lnTo>
+                  <a:lnTo>
+                    <a:pt x="3223013" y="792135"/>
+                  </a:lnTo>
+                  <a:lnTo>
+                    <a:pt x="3294636" y="804451"/>
+                  </a:lnTo>
+                  <a:lnTo>
+                    <a:pt x="3366258" y="816588"/>
+                  </a:lnTo>
+                  <a:lnTo>
+                    <a:pt x="3437881" y="828546"/>
+                  </a:lnTo>
+                  <a:lnTo>
+                    <a:pt x="3509503" y="840330"/>
+                  </a:lnTo>
+                  <a:lnTo>
+                    <a:pt x="3581126" y="851942"/>
+                  </a:lnTo>
+                  <a:lnTo>
+                    <a:pt x="3652748" y="863384"/>
+                  </a:lnTo>
+                  <a:lnTo>
+                    <a:pt x="3724371" y="874658"/>
+                  </a:lnTo>
+                  <a:lnTo>
+                    <a:pt x="3795993" y="885767"/>
+                  </a:lnTo>
+                  <a:lnTo>
+                    <a:pt x="3867616" y="896714"/>
+                  </a:lnTo>
+                  <a:lnTo>
+                    <a:pt x="3939238" y="907501"/>
+                  </a:lnTo>
+                  <a:lnTo>
+                    <a:pt x="4010861" y="918130"/>
+                  </a:lnTo>
+                  <a:lnTo>
+                    <a:pt x="4082483" y="928604"/>
+                  </a:lnTo>
+                  <a:lnTo>
+                    <a:pt x="4154106" y="938924"/>
+                  </a:lnTo>
+                  <a:lnTo>
+                    <a:pt x="4225729" y="949094"/>
+                  </a:lnTo>
+                  <a:lnTo>
+                    <a:pt x="4297351" y="959114"/>
+                  </a:lnTo>
+                  <a:lnTo>
+                    <a:pt x="4368974" y="968988"/>
+                  </a:lnTo>
+                  <a:lnTo>
+                    <a:pt x="4440596" y="978718"/>
+                  </a:lnTo>
+                  <a:lnTo>
+                    <a:pt x="4512219" y="988306"/>
+                  </a:lnTo>
+                  <a:lnTo>
+                    <a:pt x="4583841" y="997753"/>
+                  </a:lnTo>
+                  <a:lnTo>
+                    <a:pt x="4655464" y="1007062"/>
+                  </a:lnTo>
+                  <a:lnTo>
+                    <a:pt x="4727086" y="1016235"/>
+                  </a:lnTo>
+                  <a:lnTo>
+                    <a:pt x="4798709" y="1025273"/>
+                  </a:lnTo>
+                  <a:lnTo>
+                    <a:pt x="4870331" y="1034180"/>
+                  </a:lnTo>
+                  <a:lnTo>
+                    <a:pt x="4941954" y="1042956"/>
+                  </a:lnTo>
+                  <a:lnTo>
+                    <a:pt x="5013576" y="1051604"/>
+                  </a:lnTo>
+                  <a:lnTo>
+                    <a:pt x="5085199" y="1060125"/>
+                  </a:lnTo>
+                  <a:lnTo>
+                    <a:pt x="5156821" y="1068522"/>
+                  </a:lnTo>
+                  <a:lnTo>
+                    <a:pt x="5228444" y="1076796"/>
+                  </a:lnTo>
+                  <a:lnTo>
+                    <a:pt x="5300066" y="1084949"/>
+                  </a:lnTo>
+                  <a:lnTo>
+                    <a:pt x="5371689" y="1092982"/>
+                  </a:lnTo>
+                  <a:lnTo>
+                    <a:pt x="5443311" y="1100898"/>
+                  </a:lnTo>
+                  <a:lnTo>
+                    <a:pt x="5514934" y="1108699"/>
+                  </a:lnTo>
+                  <a:lnTo>
+                    <a:pt x="5586557" y="1116385"/>
+                  </a:lnTo>
+                  <a:lnTo>
+                    <a:pt x="5658179" y="1123959"/>
+                  </a:lnTo>
+                  <a:lnTo>
+                    <a:pt x="5729802" y="1131422"/>
+                  </a:lnTo>
+                  <a:lnTo>
+                    <a:pt x="5801424" y="1138776"/>
+                  </a:lnTo>
+                  <a:lnTo>
+                    <a:pt x="5873047" y="1146022"/>
+                  </a:lnTo>
+                  <a:lnTo>
+                    <a:pt x="5944669" y="1153163"/>
+                  </a:lnTo>
+                  <a:lnTo>
+                    <a:pt x="6016292" y="1160199"/>
+                  </a:lnTo>
+                  <a:lnTo>
+                    <a:pt x="6087914" y="1167132"/>
+                  </a:lnTo>
+                  <a:lnTo>
+                    <a:pt x="6159537" y="1173963"/>
+                  </a:lnTo>
+                  <a:lnTo>
+                    <a:pt x="6231159" y="1180695"/>
+                  </a:lnTo>
+                  <a:lnTo>
+                    <a:pt x="6302782" y="1187328"/>
+                  </a:lnTo>
+                  <a:lnTo>
+                    <a:pt x="6374404" y="1193864"/>
+                  </a:lnTo>
+                  <a:lnTo>
+                    <a:pt x="6446027" y="1200305"/>
+                  </a:lnTo>
+                  <a:lnTo>
+                    <a:pt x="6517649" y="1206651"/>
+                  </a:lnTo>
+                  <a:lnTo>
+                    <a:pt x="6589272" y="1212905"/>
+                  </a:lnTo>
+                  <a:lnTo>
+                    <a:pt x="6660894" y="1219067"/>
+                  </a:lnTo>
+                  <a:lnTo>
+                    <a:pt x="6732517" y="1225139"/>
+                  </a:lnTo>
+                  <a:lnTo>
+                    <a:pt x="6804139" y="1231122"/>
+                  </a:lnTo>
+                  <a:lnTo>
+                    <a:pt x="6875762" y="1237018"/>
+                  </a:lnTo>
+                  <a:lnTo>
+                    <a:pt x="6947385" y="1242827"/>
+                  </a:lnTo>
+                  <a:lnTo>
+                    <a:pt x="7019007" y="1248552"/>
+                  </a:lnTo>
+                  <a:lnTo>
+                    <a:pt x="7090630" y="1254192"/>
                   </a:lnTo>
                 </a:path>
               </a:pathLst>
@@ -4566,7 +4550,7 @@
         </p:sp>
         <p:sp>
           <p:nvSpPr>
-            <p:cNvPr id="25" name="pl25"/>
+            <p:cNvPr id="24" name="pl24"/>
             <p:cNvSpPr/>
             <p:nvPr/>
           </p:nvSpPr>
@@ -4609,13 +4593,13 @@
         </p:sp>
         <p:sp>
           <p:nvSpPr>
-            <p:cNvPr id="26" name="pl26"/>
+            <p:cNvPr id="25" name="pl25"/>
             <p:cNvSpPr/>
             <p:nvPr/>
           </p:nvSpPr>
           <p:spPr>
             <a:xfrm>
-              <a:off x="4117484" y="2073503"/>
+              <a:off x="4468386" y="2073503"/>
               <a:ext cx="0" cy="3649639"/>
             </a:xfrm>
             <a:custGeom>
@@ -4652,7 +4636,7 @@
         </p:sp>
         <p:sp>
           <p:nvSpPr>
-            <p:cNvPr id="27" name="tx27"/>
+            <p:cNvPr id="26" name="tx26"/>
             <p:cNvSpPr/>
             <p:nvPr/>
           </p:nvSpPr>
@@ -4698,7 +4682,7 @@
         </p:sp>
         <p:sp>
           <p:nvSpPr>
-            <p:cNvPr id="28" name="tx28"/>
+            <p:cNvPr id="27" name="tx27"/>
             <p:cNvSpPr/>
             <p:nvPr/>
           </p:nvSpPr>
@@ -4744,7 +4728,7 @@
         </p:sp>
         <p:sp>
           <p:nvSpPr>
-            <p:cNvPr id="29" name="tx29"/>
+            <p:cNvPr id="28" name="tx28"/>
             <p:cNvSpPr/>
             <p:nvPr/>
           </p:nvSpPr>
@@ -4790,7 +4774,7 @@
         </p:sp>
         <p:sp>
           <p:nvSpPr>
-            <p:cNvPr id="30" name="tx30"/>
+            <p:cNvPr id="29" name="tx29"/>
             <p:cNvSpPr/>
             <p:nvPr/>
           </p:nvSpPr>
@@ -4836,7 +4820,7 @@
         </p:sp>
         <p:sp>
           <p:nvSpPr>
-            <p:cNvPr id="31" name="tx31"/>
+            <p:cNvPr id="30" name="tx30"/>
             <p:cNvSpPr/>
             <p:nvPr/>
           </p:nvSpPr>
@@ -4882,14 +4866,14 @@
         </p:sp>
         <p:sp>
           <p:nvSpPr>
-            <p:cNvPr id="32" name="tx32"/>
+            <p:cNvPr id="31" name="tx31"/>
             <p:cNvSpPr/>
             <p:nvPr/>
           </p:nvSpPr>
           <p:spPr>
             <a:xfrm>
-              <a:off x="2423864" y="5785772"/>
-              <a:ext cx="155356" cy="80101"/>
+              <a:off x="2478335" y="5785772"/>
+              <a:ext cx="161574" cy="80101"/>
             </a:xfrm>
             <a:prstGeom prst="rect">
               <a:avLst/>
@@ -4921,21 +4905,21 @@
                   <a:latin typeface="Helvetica"/>
                   <a:cs typeface="Helvetica"/>
                 </a:rPr>
-                <a:t>0.8</a:t>
+                <a:t>-25</a:t>
               </a:r>
             </a:p>
           </p:txBody>
         </p:sp>
         <p:sp>
           <p:nvSpPr>
-            <p:cNvPr id="33" name="tx33"/>
+            <p:cNvPr id="32" name="tx32"/>
             <p:cNvSpPr/>
             <p:nvPr/>
           </p:nvSpPr>
           <p:spPr>
             <a:xfrm>
-              <a:off x="4196521" y="5785772"/>
-              <a:ext cx="155356" cy="80101"/>
+              <a:off x="4582608" y="5785772"/>
+              <a:ext cx="62179" cy="80101"/>
             </a:xfrm>
             <a:prstGeom prst="rect">
               <a:avLst/>
@@ -4967,21 +4951,21 @@
                   <a:latin typeface="Helvetica"/>
                   <a:cs typeface="Helvetica"/>
                 </a:rPr>
-                <a:t>1.0</a:t>
+                <a:t>0</a:t>
               </a:r>
             </a:p>
           </p:txBody>
         </p:sp>
         <p:sp>
           <p:nvSpPr>
-            <p:cNvPr id="34" name="tx34"/>
+            <p:cNvPr id="33" name="tx33"/>
             <p:cNvSpPr/>
             <p:nvPr/>
           </p:nvSpPr>
           <p:spPr>
             <a:xfrm>
-              <a:off x="5969179" y="5785772"/>
-              <a:ext cx="155356" cy="80101"/>
+              <a:off x="6606094" y="5785772"/>
+              <a:ext cx="124358" cy="80101"/>
             </a:xfrm>
             <a:prstGeom prst="rect">
               <a:avLst/>
@@ -5013,67 +4997,21 @@
                   <a:latin typeface="Helvetica"/>
                   <a:cs typeface="Helvetica"/>
                 </a:rPr>
-                <a:t>1.2</a:t>
+                <a:t>25</a:t>
               </a:r>
             </a:p>
           </p:txBody>
         </p:sp>
         <p:sp>
           <p:nvSpPr>
-            <p:cNvPr id="35" name="tx35"/>
+            <p:cNvPr id="34" name="tx34"/>
             <p:cNvSpPr/>
             <p:nvPr/>
           </p:nvSpPr>
           <p:spPr>
             <a:xfrm>
-              <a:off x="7741836" y="5785772"/>
-              <a:ext cx="155356" cy="80101"/>
-            </a:xfrm>
-            <a:prstGeom prst="rect">
-              <a:avLst/>
-            </a:prstGeom>
-            <a:noFill/>
-          </p:spPr>
-          <p:txBody>
-            <a:bodyPr lIns="0" rIns="0" tIns="0" bIns="0" anchorCtr="1" anchor="ctr" wrap="none"/>
-            <a:lstStyle/>
-            <a:p>
-              <a:pPr algn="l" marL="0" marR="0" indent="0">
-                <a:lnSpc>
-                  <a:spcPts val="880"/>
-                </a:lnSpc>
-                <a:spcBef>
-                  <a:spcPts val="0"/>
-                </a:spcBef>
-                <a:spcAft>
-                  <a:spcPts val="0"/>
-                </a:spcAft>
-              </a:pPr>
-              <a:r>
-                <a:rPr sz="880">
-                  <a:solidFill>
-                    <a:srgbClr val="4D4D4D">
-                      <a:alpha val="100000"/>
-                    </a:srgbClr>
-                  </a:solidFill>
-                  <a:latin typeface="Helvetica"/>
-                  <a:cs typeface="Helvetica"/>
-                </a:rPr>
-                <a:t>1.4</a:t>
-              </a:r>
-            </a:p>
-          </p:txBody>
-        </p:sp>
-        <p:sp>
-          <p:nvSpPr>
-            <p:cNvPr id="36" name="tx36"/>
-            <p:cNvSpPr/>
-            <p:nvPr/>
-          </p:nvSpPr>
-          <p:spPr>
-            <a:xfrm>
-              <a:off x="3879271" y="5925448"/>
-              <a:ext cx="1676186" cy="100218"/>
+              <a:off x="2928340" y="5925448"/>
+              <a:ext cx="3578047" cy="100218"/>
             </a:xfrm>
             <a:prstGeom prst="rect">
               <a:avLst/>
@@ -5105,14 +5043,14 @@
                   <a:latin typeface="Helvetica"/>
                   <a:cs typeface="Helvetica"/>
                 </a:rPr>
-                <a:t>CKD-EPI Cr-Cys / CG ratio</a:t>
+                <a:t>eGFR difference (%): 100 × (CKD-EPI Cr-Cys − CG) / CG</a:t>
               </a:r>
             </a:p>
           </p:txBody>
         </p:sp>
         <p:sp>
           <p:nvSpPr>
-            <p:cNvPr id="37" name="tx37"/>
+            <p:cNvPr id="35" name="tx35"/>
             <p:cNvSpPr/>
             <p:nvPr/>
           </p:nvSpPr>
@@ -5158,14 +5096,14 @@
         </p:sp>
         <p:sp>
           <p:nvSpPr>
-            <p:cNvPr id="38" name="tx38"/>
+            <p:cNvPr id="36" name="tx36"/>
             <p:cNvSpPr/>
             <p:nvPr/>
           </p:nvSpPr>
           <p:spPr>
             <a:xfrm>
               <a:off x="817517" y="1896563"/>
-              <a:ext cx="6169365" cy="82021"/>
+              <a:ext cx="6321612" cy="82021"/>
             </a:xfrm>
             <a:prstGeom prst="rect">
               <a:avLst/>
@@ -5197,14 +5135,14 @@
                   <a:latin typeface="Helvetica"/>
                   <a:cs typeface="Helvetica"/>
                 </a:rPr>
-                <a:t>subHR per 0.1 ratio decline: 1.18 (0.95-1.47), p = 0.130  |  per IQR decline (Δ = 0.30): 1.65 (0.86-3.15)  |  IQR: [0.84, 1.14]</a:t>
+                <a:t>subHR per 10 % decline: 1.18 (0.95-1.47), p = 0.130  |  per IQR decline (Δ = 29.5 %): 1.65 (0.86-3.15)  |  IQR: [-15.6, 13.9] %</a:t>
               </a:r>
             </a:p>
           </p:txBody>
         </p:sp>
         <p:sp>
           <p:nvSpPr>
-            <p:cNvPr id="39" name="tx39"/>
+            <p:cNvPr id="37" name="tx37"/>
             <p:cNvSpPr/>
             <p:nvPr/>
           </p:nvSpPr>

--- a/docs/pptx/auc3/jx-auc3-linsubhr-ratio-hosp8.pptx
+++ b/docs/pptx/auc3/jx-auc3-linsubhr-ratio-hosp8.pptx
@@ -2265,34 +2265,26 @@
         </p:sp>
         <p:sp>
           <p:nvSpPr>
-            <p:cNvPr id="4" name="pl4"/>
+            <p:cNvPr id="4" name="rc4"/>
             <p:cNvSpPr/>
             <p:nvPr/>
           </p:nvSpPr>
           <p:spPr>
             <a:xfrm>
-              <a:off x="817517" y="5142518"/>
-              <a:ext cx="7799693" cy="0"/>
+              <a:off x="457200" y="1600200"/>
+              <a:ext cx="8229600" cy="4525962"/>
             </a:xfrm>
-            <a:custGeom>
+            <a:prstGeom prst="rect">
               <a:avLst/>
-              <a:pathLst>
-                <a:path w="7799693" h="0">
-                  <a:moveTo>
-                    <a:pt x="0" y="0"/>
-                  </a:moveTo>
-                  <a:lnTo>
-                    <a:pt x="7799693" y="0"/>
-                  </a:lnTo>
-                  <a:lnTo>
-                    <a:pt x="7799693" y="0"/>
-                  </a:lnTo>
-                </a:path>
-              </a:pathLst>
-            </a:custGeom>
-            <a:ln w="6775" cap="flat">
+            </a:prstGeom>
+            <a:solidFill>
+              <a:srgbClr val="FFFFFF">
+                <a:alpha val="100000"/>
+              </a:srgbClr>
+            </a:solidFill>
+            <a:ln w="13550" cap="rnd">
               <a:solidFill>
-                <a:srgbClr val="EBEBEB">
+                <a:srgbClr val="FFFFFF">
                   <a:alpha val="100000"/>
                 </a:srgbClr>
               </a:solidFill>
@@ -2314,21 +2306,21 @@
           </p:nvSpPr>
           <p:spPr>
             <a:xfrm>
-              <a:off x="817517" y="4313054"/>
-              <a:ext cx="7799693" cy="0"/>
+              <a:off x="887106" y="3250627"/>
+              <a:ext cx="7660515" cy="0"/>
             </a:xfrm>
             <a:custGeom>
               <a:avLst/>
               <a:pathLst>
-                <a:path w="7799693" h="0">
+                <a:path w="7660515" h="0">
                   <a:moveTo>
                     <a:pt x="0" y="0"/>
                   </a:moveTo>
                   <a:lnTo>
-                    <a:pt x="7799693" y="0"/>
-                  </a:lnTo>
-                  <a:lnTo>
-                    <a:pt x="7799693" y="0"/>
+                    <a:pt x="7660515" y="0"/>
+                  </a:lnTo>
+                  <a:lnTo>
+                    <a:pt x="7660515" y="0"/>
                   </a:lnTo>
                 </a:path>
               </a:pathLst>
@@ -2357,21 +2349,21 @@
           </p:nvSpPr>
           <p:spPr>
             <a:xfrm>
-              <a:off x="817517" y="3483591"/>
-              <a:ext cx="7799693" cy="0"/>
+              <a:off x="887106" y="2951293"/>
+              <a:ext cx="7660515" cy="0"/>
             </a:xfrm>
             <a:custGeom>
               <a:avLst/>
               <a:pathLst>
-                <a:path w="7799693" h="0">
+                <a:path w="7660515" h="0">
                   <a:moveTo>
                     <a:pt x="0" y="0"/>
                   </a:moveTo>
                   <a:lnTo>
-                    <a:pt x="7799693" y="0"/>
-                  </a:lnTo>
-                  <a:lnTo>
-                    <a:pt x="7799693" y="0"/>
+                    <a:pt x="7660515" y="0"/>
+                  </a:lnTo>
+                  <a:lnTo>
+                    <a:pt x="7660515" y="0"/>
                   </a:lnTo>
                 </a:path>
               </a:pathLst>
@@ -2400,21 +2392,21 @@
           </p:nvSpPr>
           <p:spPr>
             <a:xfrm>
-              <a:off x="817517" y="2654127"/>
-              <a:ext cx="7799693" cy="0"/>
+              <a:off x="887106" y="2651959"/>
+              <a:ext cx="7660515" cy="0"/>
             </a:xfrm>
             <a:custGeom>
               <a:avLst/>
               <a:pathLst>
-                <a:path w="7799693" h="0">
+                <a:path w="7660515" h="0">
                   <a:moveTo>
                     <a:pt x="0" y="0"/>
                   </a:moveTo>
                   <a:lnTo>
-                    <a:pt x="7799693" y="0"/>
-                  </a:lnTo>
-                  <a:lnTo>
-                    <a:pt x="7799693" y="0"/>
+                    <a:pt x="7660515" y="0"/>
+                  </a:lnTo>
+                  <a:lnTo>
+                    <a:pt x="7660515" y="0"/>
                   </a:lnTo>
                 </a:path>
               </a:pathLst>
@@ -2443,21 +2435,21 @@
           </p:nvSpPr>
           <p:spPr>
             <a:xfrm>
-              <a:off x="1531834" y="2073503"/>
-              <a:ext cx="0" cy="3649639"/>
+              <a:off x="887106" y="2352625"/>
+              <a:ext cx="7660515" cy="0"/>
             </a:xfrm>
             <a:custGeom>
               <a:avLst/>
               <a:pathLst>
-                <a:path w="0" h="3649639">
+                <a:path w="7660515" h="0">
                   <a:moveTo>
-                    <a:pt x="0" y="3649639"/>
+                    <a:pt x="0" y="0"/>
                   </a:moveTo>
                   <a:lnTo>
-                    <a:pt x="0" y="0"/>
-                  </a:lnTo>
-                  <a:lnTo>
-                    <a:pt x="0" y="0"/>
+                    <a:pt x="7660515" y="0"/>
+                  </a:lnTo>
+                  <a:lnTo>
+                    <a:pt x="7660515" y="0"/>
                   </a:lnTo>
                 </a:path>
               </a:pathLst>
@@ -2486,15 +2478,15 @@
           </p:nvSpPr>
           <p:spPr>
             <a:xfrm>
-              <a:off x="3586410" y="2073503"/>
-              <a:ext cx="0" cy="3649639"/>
+              <a:off x="1588677" y="2143092"/>
+              <a:ext cx="0" cy="1317069"/>
             </a:xfrm>
             <a:custGeom>
               <a:avLst/>
               <a:pathLst>
-                <a:path w="0" h="3649639">
+                <a:path w="0" h="1317069">
                   <a:moveTo>
-                    <a:pt x="0" y="3649639"/>
+                    <a:pt x="0" y="1317069"/>
                   </a:moveTo>
                   <a:lnTo>
                     <a:pt x="0" y="0"/>
@@ -2529,15 +2521,15 @@
           </p:nvSpPr>
           <p:spPr>
             <a:xfrm>
-              <a:off x="5640985" y="2073503"/>
-              <a:ext cx="0" cy="3649639"/>
+              <a:off x="3606590" y="2143092"/>
+              <a:ext cx="0" cy="1317069"/>
             </a:xfrm>
             <a:custGeom>
               <a:avLst/>
               <a:pathLst>
-                <a:path w="0" h="3649639">
+                <a:path w="0" h="1317069">
                   <a:moveTo>
-                    <a:pt x="0" y="3649639"/>
+                    <a:pt x="0" y="1317069"/>
                   </a:moveTo>
                   <a:lnTo>
                     <a:pt x="0" y="0"/>
@@ -2572,15 +2564,15 @@
           </p:nvSpPr>
           <p:spPr>
             <a:xfrm>
-              <a:off x="7695561" y="2073503"/>
-              <a:ext cx="0" cy="3649639"/>
+              <a:off x="5624504" y="2143092"/>
+              <a:ext cx="0" cy="1317069"/>
             </a:xfrm>
             <a:custGeom>
               <a:avLst/>
               <a:pathLst>
-                <a:path w="0" h="3649639">
+                <a:path w="0" h="1317069">
                   <a:moveTo>
-                    <a:pt x="0" y="3649639"/>
+                    <a:pt x="0" y="1317069"/>
                   </a:moveTo>
                   <a:lnTo>
                     <a:pt x="0" y="0"/>
@@ -2615,26 +2607,26 @@
           </p:nvSpPr>
           <p:spPr>
             <a:xfrm>
-              <a:off x="817517" y="5557249"/>
-              <a:ext cx="7799693" cy="0"/>
+              <a:off x="7642418" y="2143092"/>
+              <a:ext cx="0" cy="1317069"/>
             </a:xfrm>
             <a:custGeom>
               <a:avLst/>
               <a:pathLst>
-                <a:path w="7799693" h="0">
+                <a:path w="0" h="1317069">
                   <a:moveTo>
+                    <a:pt x="0" y="1317069"/>
+                  </a:moveTo>
+                  <a:lnTo>
                     <a:pt x="0" y="0"/>
-                  </a:moveTo>
-                  <a:lnTo>
-                    <a:pt x="7799693" y="0"/>
-                  </a:lnTo>
-                  <a:lnTo>
-                    <a:pt x="7799693" y="0"/>
+                  </a:lnTo>
+                  <a:lnTo>
+                    <a:pt x="0" y="0"/>
                   </a:lnTo>
                 </a:path>
               </a:pathLst>
             </a:custGeom>
-            <a:ln w="13550" cap="flat">
+            <a:ln w="6775" cap="flat">
               <a:solidFill>
                 <a:srgbClr val="EBEBEB">
                   <a:alpha val="100000"/>
@@ -2658,21 +2650,21 @@
           </p:nvSpPr>
           <p:spPr>
             <a:xfrm>
-              <a:off x="817517" y="4727786"/>
-              <a:ext cx="7799693" cy="0"/>
+              <a:off x="887106" y="3400294"/>
+              <a:ext cx="7660515" cy="0"/>
             </a:xfrm>
             <a:custGeom>
               <a:avLst/>
               <a:pathLst>
-                <a:path w="7799693" h="0">
+                <a:path w="7660515" h="0">
                   <a:moveTo>
                     <a:pt x="0" y="0"/>
                   </a:moveTo>
                   <a:lnTo>
-                    <a:pt x="7799693" y="0"/>
-                  </a:lnTo>
-                  <a:lnTo>
-                    <a:pt x="7799693" y="0"/>
+                    <a:pt x="7660515" y="0"/>
+                  </a:lnTo>
+                  <a:lnTo>
+                    <a:pt x="7660515" y="0"/>
                   </a:lnTo>
                 </a:path>
               </a:pathLst>
@@ -2701,21 +2693,21 @@
           </p:nvSpPr>
           <p:spPr>
             <a:xfrm>
-              <a:off x="817517" y="3898322"/>
-              <a:ext cx="7799693" cy="0"/>
+              <a:off x="887106" y="3100960"/>
+              <a:ext cx="7660515" cy="0"/>
             </a:xfrm>
             <a:custGeom>
               <a:avLst/>
               <a:pathLst>
-                <a:path w="7799693" h="0">
+                <a:path w="7660515" h="0">
                   <a:moveTo>
                     <a:pt x="0" y="0"/>
                   </a:moveTo>
                   <a:lnTo>
-                    <a:pt x="7799693" y="0"/>
-                  </a:lnTo>
-                  <a:lnTo>
-                    <a:pt x="7799693" y="0"/>
+                    <a:pt x="7660515" y="0"/>
+                  </a:lnTo>
+                  <a:lnTo>
+                    <a:pt x="7660515" y="0"/>
                   </a:lnTo>
                 </a:path>
               </a:pathLst>
@@ -2744,21 +2736,21 @@
           </p:nvSpPr>
           <p:spPr>
             <a:xfrm>
-              <a:off x="817517" y="3068859"/>
-              <a:ext cx="7799693" cy="0"/>
+              <a:off x="887106" y="2801626"/>
+              <a:ext cx="7660515" cy="0"/>
             </a:xfrm>
             <a:custGeom>
               <a:avLst/>
               <a:pathLst>
-                <a:path w="7799693" h="0">
+                <a:path w="7660515" h="0">
                   <a:moveTo>
                     <a:pt x="0" y="0"/>
                   </a:moveTo>
                   <a:lnTo>
-                    <a:pt x="7799693" y="0"/>
-                  </a:lnTo>
-                  <a:lnTo>
-                    <a:pt x="7799693" y="0"/>
+                    <a:pt x="7660515" y="0"/>
+                  </a:lnTo>
+                  <a:lnTo>
+                    <a:pt x="7660515" y="0"/>
                   </a:lnTo>
                 </a:path>
               </a:pathLst>
@@ -2787,21 +2779,21 @@
           </p:nvSpPr>
           <p:spPr>
             <a:xfrm>
-              <a:off x="817517" y="2239395"/>
-              <a:ext cx="7799693" cy="0"/>
+              <a:off x="887106" y="2502292"/>
+              <a:ext cx="7660515" cy="0"/>
             </a:xfrm>
             <a:custGeom>
               <a:avLst/>
               <a:pathLst>
-                <a:path w="7799693" h="0">
+                <a:path w="7660515" h="0">
                   <a:moveTo>
                     <a:pt x="0" y="0"/>
                   </a:moveTo>
                   <a:lnTo>
-                    <a:pt x="7799693" y="0"/>
-                  </a:lnTo>
-                  <a:lnTo>
-                    <a:pt x="7799693" y="0"/>
+                    <a:pt x="7660515" y="0"/>
+                  </a:lnTo>
+                  <a:lnTo>
+                    <a:pt x="7660515" y="0"/>
                   </a:lnTo>
                 </a:path>
               </a:pathLst>
@@ -2830,21 +2822,21 @@
           </p:nvSpPr>
           <p:spPr>
             <a:xfrm>
-              <a:off x="2559122" y="2073503"/>
-              <a:ext cx="0" cy="3649639"/>
+              <a:off x="887106" y="2202958"/>
+              <a:ext cx="7660515" cy="0"/>
             </a:xfrm>
             <a:custGeom>
               <a:avLst/>
               <a:pathLst>
-                <a:path w="0" h="3649639">
+                <a:path w="7660515" h="0">
                   <a:moveTo>
-                    <a:pt x="0" y="3649639"/>
+                    <a:pt x="0" y="0"/>
                   </a:moveTo>
                   <a:lnTo>
-                    <a:pt x="0" y="0"/>
-                  </a:lnTo>
-                  <a:lnTo>
-                    <a:pt x="0" y="0"/>
+                    <a:pt x="7660515" y="0"/>
+                  </a:lnTo>
+                  <a:lnTo>
+                    <a:pt x="7660515" y="0"/>
                   </a:lnTo>
                 </a:path>
               </a:pathLst>
@@ -2873,15 +2865,15 @@
           </p:nvSpPr>
           <p:spPr>
             <a:xfrm>
-              <a:off x="4613698" y="2073503"/>
-              <a:ext cx="0" cy="3649639"/>
+              <a:off x="2597634" y="2143092"/>
+              <a:ext cx="0" cy="1317069"/>
             </a:xfrm>
             <a:custGeom>
               <a:avLst/>
               <a:pathLst>
-                <a:path w="0" h="3649639">
+                <a:path w="0" h="1317069">
                   <a:moveTo>
-                    <a:pt x="0" y="3649639"/>
+                    <a:pt x="0" y="1317069"/>
                   </a:moveTo>
                   <a:lnTo>
                     <a:pt x="0" y="0"/>
@@ -2916,15 +2908,15 @@
           </p:nvSpPr>
           <p:spPr>
             <a:xfrm>
-              <a:off x="6668273" y="2073503"/>
-              <a:ext cx="0" cy="3649639"/>
+              <a:off x="4615547" y="2143092"/>
+              <a:ext cx="0" cy="1317069"/>
             </a:xfrm>
             <a:custGeom>
               <a:avLst/>
               <a:pathLst>
-                <a:path w="0" h="3649639">
+                <a:path w="0" h="1317069">
                   <a:moveTo>
-                    <a:pt x="0" y="3649639"/>
+                    <a:pt x="0" y="1317069"/>
                   </a:moveTo>
                   <a:lnTo>
                     <a:pt x="0" y="0"/>
@@ -2953,609 +2945,652 @@
         </p:sp>
         <p:sp>
           <p:nvSpPr>
-            <p:cNvPr id="20" name="pg20"/>
+            <p:cNvPr id="20" name="pl20"/>
             <p:cNvSpPr/>
             <p:nvPr/>
           </p:nvSpPr>
           <p:spPr>
             <a:xfrm>
-              <a:off x="1172049" y="2073503"/>
-              <a:ext cx="7090630" cy="3345439"/>
+              <a:off x="6633461" y="2143092"/>
+              <a:ext cx="0" cy="1317069"/>
             </a:xfrm>
             <a:custGeom>
               <a:avLst/>
               <a:pathLst>
-                <a:path w="7090630" h="3345439">
+                <a:path w="0" h="1317069">
                   <a:moveTo>
-                    <a:pt x="256870" y="0"/>
+                    <a:pt x="0" y="1317069"/>
                   </a:moveTo>
                   <a:lnTo>
-                    <a:pt x="286490" y="48853"/>
-                  </a:lnTo>
-                  <a:lnTo>
-                    <a:pt x="358112" y="163056"/>
-                  </a:lnTo>
-                  <a:lnTo>
-                    <a:pt x="429735" y="273463"/>
-                  </a:lnTo>
-                  <a:lnTo>
-                    <a:pt x="501357" y="380198"/>
-                  </a:lnTo>
-                  <a:lnTo>
-                    <a:pt x="572980" y="483385"/>
-                  </a:lnTo>
-                  <a:lnTo>
-                    <a:pt x="644602" y="583141"/>
-                  </a:lnTo>
-                  <a:lnTo>
-                    <a:pt x="716225" y="679581"/>
-                  </a:lnTo>
-                  <a:lnTo>
-                    <a:pt x="787847" y="772814"/>
-                  </a:lnTo>
-                  <a:lnTo>
-                    <a:pt x="859470" y="862947"/>
-                  </a:lnTo>
-                  <a:lnTo>
-                    <a:pt x="931092" y="950083"/>
-                  </a:lnTo>
-                  <a:lnTo>
-                    <a:pt x="1002715" y="1034322"/>
-                  </a:lnTo>
-                  <a:lnTo>
-                    <a:pt x="1074337" y="1115761"/>
-                  </a:lnTo>
-                  <a:lnTo>
-                    <a:pt x="1145960" y="1194492"/>
-                  </a:lnTo>
-                  <a:lnTo>
-                    <a:pt x="1217582" y="1270605"/>
-                  </a:lnTo>
-                  <a:lnTo>
-                    <a:pt x="1289205" y="1344188"/>
-                  </a:lnTo>
-                  <a:lnTo>
-                    <a:pt x="1360827" y="1415324"/>
-                  </a:lnTo>
-                  <a:lnTo>
-                    <a:pt x="1432450" y="1484095"/>
-                  </a:lnTo>
-                  <a:lnTo>
-                    <a:pt x="1504073" y="1550579"/>
-                  </a:lnTo>
-                  <a:lnTo>
-                    <a:pt x="1575695" y="1614853"/>
-                  </a:lnTo>
-                  <a:lnTo>
-                    <a:pt x="1647318" y="1676990"/>
-                  </a:lnTo>
-                  <a:lnTo>
-                    <a:pt x="1718940" y="1737061"/>
-                  </a:lnTo>
-                  <a:lnTo>
-                    <a:pt x="1790563" y="1795135"/>
-                  </a:lnTo>
-                  <a:lnTo>
-                    <a:pt x="1862185" y="1851278"/>
-                  </a:lnTo>
-                  <a:lnTo>
-                    <a:pt x="1933808" y="1905554"/>
-                  </a:lnTo>
-                  <a:lnTo>
-                    <a:pt x="2005430" y="1958026"/>
-                  </a:lnTo>
-                  <a:lnTo>
-                    <a:pt x="2077053" y="2008753"/>
-                  </a:lnTo>
-                  <a:lnTo>
-                    <a:pt x="2148675" y="2057794"/>
-                  </a:lnTo>
-                  <a:lnTo>
-                    <a:pt x="2220298" y="2105204"/>
-                  </a:lnTo>
-                  <a:lnTo>
-                    <a:pt x="2291920" y="2151038"/>
-                  </a:lnTo>
-                  <a:lnTo>
-                    <a:pt x="2363543" y="2195348"/>
-                  </a:lnTo>
-                  <a:lnTo>
-                    <a:pt x="2435165" y="2238185"/>
-                  </a:lnTo>
-                  <a:lnTo>
-                    <a:pt x="2506788" y="2279597"/>
-                  </a:lnTo>
-                  <a:lnTo>
-                    <a:pt x="2578410" y="2319633"/>
-                  </a:lnTo>
-                  <a:lnTo>
-                    <a:pt x="2650033" y="2358337"/>
-                  </a:lnTo>
-                  <a:lnTo>
-                    <a:pt x="2721655" y="2395755"/>
-                  </a:lnTo>
-                  <a:lnTo>
-                    <a:pt x="2793278" y="2431928"/>
-                  </a:lnTo>
-                  <a:lnTo>
-                    <a:pt x="2864901" y="2466899"/>
-                  </a:lnTo>
-                  <a:lnTo>
-                    <a:pt x="2936523" y="2500707"/>
-                  </a:lnTo>
-                  <a:lnTo>
-                    <a:pt x="3008146" y="2533391"/>
-                  </a:lnTo>
-                  <a:lnTo>
-                    <a:pt x="3079768" y="2564989"/>
-                  </a:lnTo>
-                  <a:lnTo>
-                    <a:pt x="3151391" y="2595536"/>
-                  </a:lnTo>
-                  <a:lnTo>
-                    <a:pt x="3223013" y="2625067"/>
-                  </a:lnTo>
-                  <a:lnTo>
-                    <a:pt x="3294636" y="2653616"/>
-                  </a:lnTo>
-                  <a:lnTo>
-                    <a:pt x="3366258" y="2650757"/>
-                  </a:lnTo>
-                  <a:lnTo>
-                    <a:pt x="3437881" y="2647131"/>
-                  </a:lnTo>
-                  <a:lnTo>
-                    <a:pt x="3509503" y="2643488"/>
-                  </a:lnTo>
-                  <a:lnTo>
-                    <a:pt x="3581126" y="2639830"/>
-                  </a:lnTo>
-                  <a:lnTo>
-                    <a:pt x="3652748" y="2636155"/>
-                  </a:lnTo>
-                  <a:lnTo>
-                    <a:pt x="3724371" y="2632465"/>
-                  </a:lnTo>
-                  <a:lnTo>
-                    <a:pt x="3795993" y="2628758"/>
-                  </a:lnTo>
-                  <a:lnTo>
-                    <a:pt x="3867616" y="2625036"/>
-                  </a:lnTo>
-                  <a:lnTo>
-                    <a:pt x="3939238" y="2621297"/>
-                  </a:lnTo>
-                  <a:lnTo>
-                    <a:pt x="4010861" y="2617542"/>
-                  </a:lnTo>
-                  <a:lnTo>
-                    <a:pt x="4082483" y="2613771"/>
-                  </a:lnTo>
-                  <a:lnTo>
-                    <a:pt x="4154106" y="2609983"/>
-                  </a:lnTo>
-                  <a:lnTo>
-                    <a:pt x="4225729" y="2606179"/>
-                  </a:lnTo>
-                  <a:lnTo>
-                    <a:pt x="4297351" y="2602358"/>
-                  </a:lnTo>
-                  <a:lnTo>
-                    <a:pt x="4368974" y="2598520"/>
-                  </a:lnTo>
-                  <a:lnTo>
-                    <a:pt x="4440596" y="2594666"/>
-                  </a:lnTo>
-                  <a:lnTo>
-                    <a:pt x="4512219" y="2590795"/>
-                  </a:lnTo>
-                  <a:lnTo>
-                    <a:pt x="4583841" y="2586907"/>
-                  </a:lnTo>
-                  <a:lnTo>
-                    <a:pt x="4655464" y="2583002"/>
-                  </a:lnTo>
-                  <a:lnTo>
-                    <a:pt x="4727086" y="2579081"/>
-                  </a:lnTo>
-                  <a:lnTo>
-                    <a:pt x="4798709" y="2575142"/>
-                  </a:lnTo>
-                  <a:lnTo>
-                    <a:pt x="4870331" y="2571186"/>
-                  </a:lnTo>
-                  <a:lnTo>
-                    <a:pt x="4941954" y="2567213"/>
-                  </a:lnTo>
-                  <a:lnTo>
-                    <a:pt x="5013576" y="2563222"/>
-                  </a:lnTo>
-                  <a:lnTo>
-                    <a:pt x="5085199" y="2559214"/>
-                  </a:lnTo>
-                  <a:lnTo>
-                    <a:pt x="5156821" y="2555189"/>
-                  </a:lnTo>
-                  <a:lnTo>
-                    <a:pt x="5228444" y="2551146"/>
-                  </a:lnTo>
-                  <a:lnTo>
-                    <a:pt x="5300066" y="2547085"/>
-                  </a:lnTo>
-                  <a:lnTo>
-                    <a:pt x="5371689" y="2543007"/>
-                  </a:lnTo>
-                  <a:lnTo>
-                    <a:pt x="5443311" y="2538911"/>
-                  </a:lnTo>
-                  <a:lnTo>
-                    <a:pt x="5514934" y="2534798"/>
-                  </a:lnTo>
-                  <a:lnTo>
-                    <a:pt x="5586557" y="2530666"/>
-                  </a:lnTo>
-                  <a:lnTo>
-                    <a:pt x="5658179" y="2526516"/>
-                  </a:lnTo>
-                  <a:lnTo>
-                    <a:pt x="5729802" y="2522349"/>
-                  </a:lnTo>
-                  <a:lnTo>
-                    <a:pt x="5801424" y="2518163"/>
-                  </a:lnTo>
-                  <a:lnTo>
-                    <a:pt x="5873047" y="2513959"/>
-                  </a:lnTo>
-                  <a:lnTo>
-                    <a:pt x="5944669" y="2509736"/>
-                  </a:lnTo>
-                  <a:lnTo>
-                    <a:pt x="6016292" y="2505495"/>
-                  </a:lnTo>
-                  <a:lnTo>
-                    <a:pt x="6087914" y="2501236"/>
-                  </a:lnTo>
-                  <a:lnTo>
-                    <a:pt x="6159537" y="2496958"/>
-                  </a:lnTo>
-                  <a:lnTo>
-                    <a:pt x="6231159" y="2492662"/>
-                  </a:lnTo>
-                  <a:lnTo>
-                    <a:pt x="6302782" y="2488347"/>
-                  </a:lnTo>
-                  <a:lnTo>
-                    <a:pt x="6374404" y="2484013"/>
-                  </a:lnTo>
-                  <a:lnTo>
-                    <a:pt x="6446027" y="2479660"/>
-                  </a:lnTo>
-                  <a:lnTo>
-                    <a:pt x="6517649" y="2475289"/>
-                  </a:lnTo>
-                  <a:lnTo>
-                    <a:pt x="6589272" y="2470898"/>
-                  </a:lnTo>
-                  <a:lnTo>
-                    <a:pt x="6660894" y="2466488"/>
-                  </a:lnTo>
-                  <a:lnTo>
-                    <a:pt x="6732517" y="2462059"/>
-                  </a:lnTo>
-                  <a:lnTo>
-                    <a:pt x="6804139" y="2457610"/>
-                  </a:lnTo>
-                  <a:lnTo>
-                    <a:pt x="6875762" y="2453143"/>
-                  </a:lnTo>
-                  <a:lnTo>
-                    <a:pt x="6947385" y="2448656"/>
-                  </a:lnTo>
-                  <a:lnTo>
-                    <a:pt x="7019007" y="2444149"/>
-                  </a:lnTo>
-                  <a:lnTo>
-                    <a:pt x="7090630" y="2439623"/>
-                  </a:lnTo>
-                  <a:lnTo>
-                    <a:pt x="7090630" y="3345439"/>
-                  </a:lnTo>
-                  <a:lnTo>
-                    <a:pt x="7019007" y="3340683"/>
-                  </a:lnTo>
-                  <a:lnTo>
-                    <a:pt x="6947385" y="3335762"/>
-                  </a:lnTo>
-                  <a:lnTo>
-                    <a:pt x="6875762" y="3330673"/>
-                  </a:lnTo>
-                  <a:lnTo>
-                    <a:pt x="6804139" y="3325409"/>
-                  </a:lnTo>
-                  <a:lnTo>
-                    <a:pt x="6732517" y="3319963"/>
-                  </a:lnTo>
-                  <a:lnTo>
-                    <a:pt x="6660894" y="3314330"/>
-                  </a:lnTo>
-                  <a:lnTo>
-                    <a:pt x="6589272" y="3308504"/>
-                  </a:lnTo>
-                  <a:lnTo>
-                    <a:pt x="6517649" y="3302477"/>
-                  </a:lnTo>
-                  <a:lnTo>
-                    <a:pt x="6446027" y="3296243"/>
-                  </a:lnTo>
-                  <a:lnTo>
-                    <a:pt x="6374404" y="3289795"/>
-                  </a:lnTo>
-                  <a:lnTo>
-                    <a:pt x="6302782" y="3283124"/>
-                  </a:lnTo>
-                  <a:lnTo>
-                    <a:pt x="6231159" y="3276225"/>
-                  </a:lnTo>
-                  <a:lnTo>
-                    <a:pt x="6159537" y="3269088"/>
-                  </a:lnTo>
-                  <a:lnTo>
-                    <a:pt x="6087914" y="3261705"/>
-                  </a:lnTo>
-                  <a:lnTo>
-                    <a:pt x="6016292" y="3254069"/>
-                  </a:lnTo>
-                  <a:lnTo>
-                    <a:pt x="5944669" y="3246170"/>
-                  </a:lnTo>
-                  <a:lnTo>
-                    <a:pt x="5873047" y="3237999"/>
-                  </a:lnTo>
-                  <a:lnTo>
-                    <a:pt x="5801424" y="3229548"/>
-                  </a:lnTo>
-                  <a:lnTo>
-                    <a:pt x="5729802" y="3220805"/>
-                  </a:lnTo>
-                  <a:lnTo>
-                    <a:pt x="5658179" y="3211762"/>
-                  </a:lnTo>
-                  <a:lnTo>
-                    <a:pt x="5586557" y="3202409"/>
-                  </a:lnTo>
-                  <a:lnTo>
-                    <a:pt x="5514934" y="3192733"/>
-                  </a:lnTo>
-                  <a:lnTo>
-                    <a:pt x="5443311" y="3182724"/>
-                  </a:lnTo>
-                  <a:lnTo>
-                    <a:pt x="5371689" y="3172372"/>
-                  </a:lnTo>
-                  <a:lnTo>
-                    <a:pt x="5300066" y="3161663"/>
-                  </a:lnTo>
-                  <a:lnTo>
-                    <a:pt x="5228444" y="3150586"/>
-                  </a:lnTo>
-                  <a:lnTo>
-                    <a:pt x="5156821" y="3139128"/>
-                  </a:lnTo>
-                  <a:lnTo>
-                    <a:pt x="5085199" y="3127277"/>
-                  </a:lnTo>
-                  <a:lnTo>
-                    <a:pt x="5013576" y="3115017"/>
-                  </a:lnTo>
-                  <a:lnTo>
-                    <a:pt x="4941954" y="3102336"/>
-                  </a:lnTo>
-                  <a:lnTo>
-                    <a:pt x="4870331" y="3089219"/>
-                  </a:lnTo>
-                  <a:lnTo>
-                    <a:pt x="4798709" y="3075650"/>
-                  </a:lnTo>
-                  <a:lnTo>
-                    <a:pt x="4727086" y="3061615"/>
-                  </a:lnTo>
-                  <a:lnTo>
-                    <a:pt x="4655464" y="3047097"/>
-                  </a:lnTo>
-                  <a:lnTo>
-                    <a:pt x="4583841" y="3032080"/>
-                  </a:lnTo>
-                  <a:lnTo>
-                    <a:pt x="4512219" y="3016547"/>
-                  </a:lnTo>
-                  <a:lnTo>
-                    <a:pt x="4440596" y="3000479"/>
-                  </a:lnTo>
-                  <a:lnTo>
-                    <a:pt x="4368974" y="2983859"/>
-                  </a:lnTo>
-                  <a:lnTo>
-                    <a:pt x="4297351" y="2966667"/>
-                  </a:lnTo>
-                  <a:lnTo>
-                    <a:pt x="4225729" y="2948884"/>
-                  </a:lnTo>
-                  <a:lnTo>
-                    <a:pt x="4154106" y="2930489"/>
-                  </a:lnTo>
-                  <a:lnTo>
-                    <a:pt x="4082483" y="2911462"/>
-                  </a:lnTo>
-                  <a:lnTo>
-                    <a:pt x="4010861" y="2891780"/>
-                  </a:lnTo>
-                  <a:lnTo>
-                    <a:pt x="3939238" y="2871422"/>
-                  </a:lnTo>
-                  <a:lnTo>
-                    <a:pt x="3867616" y="2850363"/>
-                  </a:lnTo>
-                  <a:lnTo>
-                    <a:pt x="3795993" y="2828580"/>
-                  </a:lnTo>
-                  <a:lnTo>
-                    <a:pt x="3724371" y="2806048"/>
-                  </a:lnTo>
-                  <a:lnTo>
-                    <a:pt x="3652748" y="2782741"/>
-                  </a:lnTo>
-                  <a:lnTo>
-                    <a:pt x="3581126" y="2758632"/>
-                  </a:lnTo>
-                  <a:lnTo>
-                    <a:pt x="3509503" y="2733695"/>
-                  </a:lnTo>
-                  <a:lnTo>
-                    <a:pt x="3437881" y="2707899"/>
-                  </a:lnTo>
-                  <a:lnTo>
-                    <a:pt x="3366258" y="2681217"/>
-                  </a:lnTo>
-                  <a:lnTo>
-                    <a:pt x="3294636" y="2654368"/>
-                  </a:lnTo>
-                  <a:lnTo>
-                    <a:pt x="3223013" y="2657964"/>
-                  </a:lnTo>
-                  <a:lnTo>
-                    <a:pt x="3151391" y="2661544"/>
-                  </a:lnTo>
-                  <a:lnTo>
-                    <a:pt x="3079768" y="2665108"/>
-                  </a:lnTo>
-                  <a:lnTo>
-                    <a:pt x="3008146" y="2668657"/>
-                  </a:lnTo>
-                  <a:lnTo>
-                    <a:pt x="2936523" y="2672190"/>
-                  </a:lnTo>
-                  <a:lnTo>
-                    <a:pt x="2864901" y="2675708"/>
-                  </a:lnTo>
-                  <a:lnTo>
-                    <a:pt x="2793278" y="2679211"/>
-                  </a:lnTo>
-                  <a:lnTo>
-                    <a:pt x="2721655" y="2682699"/>
-                  </a:lnTo>
-                  <a:lnTo>
-                    <a:pt x="2650033" y="2686172"/>
-                  </a:lnTo>
-                  <a:lnTo>
-                    <a:pt x="2578410" y="2689629"/>
-                  </a:lnTo>
-                  <a:lnTo>
-                    <a:pt x="2506788" y="2693072"/>
-                  </a:lnTo>
-                  <a:lnTo>
-                    <a:pt x="2435165" y="2696499"/>
-                  </a:lnTo>
-                  <a:lnTo>
-                    <a:pt x="2363543" y="2699912"/>
-                  </a:lnTo>
-                  <a:lnTo>
-                    <a:pt x="2291920" y="2703310"/>
-                  </a:lnTo>
-                  <a:lnTo>
-                    <a:pt x="2220298" y="2706693"/>
-                  </a:lnTo>
-                  <a:lnTo>
-                    <a:pt x="2148675" y="2710062"/>
-                  </a:lnTo>
-                  <a:lnTo>
-                    <a:pt x="2077053" y="2713416"/>
-                  </a:lnTo>
-                  <a:lnTo>
-                    <a:pt x="2005430" y="2716755"/>
-                  </a:lnTo>
-                  <a:lnTo>
-                    <a:pt x="1933808" y="2720080"/>
-                  </a:lnTo>
-                  <a:lnTo>
-                    <a:pt x="1862185" y="2723391"/>
-                  </a:lnTo>
-                  <a:lnTo>
-                    <a:pt x="1790563" y="2726687"/>
-                  </a:lnTo>
-                  <a:lnTo>
-                    <a:pt x="1718940" y="2729969"/>
-                  </a:lnTo>
-                  <a:lnTo>
-                    <a:pt x="1647318" y="2733236"/>
-                  </a:lnTo>
-                  <a:lnTo>
-                    <a:pt x="1575695" y="2736490"/>
-                  </a:lnTo>
-                  <a:lnTo>
-                    <a:pt x="1504073" y="2739729"/>
-                  </a:lnTo>
-                  <a:lnTo>
-                    <a:pt x="1432450" y="2742955"/>
-                  </a:lnTo>
-                  <a:lnTo>
-                    <a:pt x="1360827" y="2746166"/>
-                  </a:lnTo>
-                  <a:lnTo>
-                    <a:pt x="1289205" y="2749364"/>
-                  </a:lnTo>
-                  <a:lnTo>
-                    <a:pt x="1217582" y="2752547"/>
-                  </a:lnTo>
-                  <a:lnTo>
-                    <a:pt x="1145960" y="2755717"/>
-                  </a:lnTo>
-                  <a:lnTo>
-                    <a:pt x="1074337" y="2758873"/>
-                  </a:lnTo>
-                  <a:lnTo>
-                    <a:pt x="1002715" y="2762015"/>
-                  </a:lnTo>
-                  <a:lnTo>
-                    <a:pt x="931092" y="2765144"/>
-                  </a:lnTo>
-                  <a:lnTo>
-                    <a:pt x="859470" y="2768259"/>
-                  </a:lnTo>
-                  <a:lnTo>
-                    <a:pt x="787847" y="2771361"/>
-                  </a:lnTo>
-                  <a:lnTo>
-                    <a:pt x="716225" y="2774449"/>
-                  </a:lnTo>
-                  <a:lnTo>
-                    <a:pt x="644602" y="2777524"/>
-                  </a:lnTo>
-                  <a:lnTo>
-                    <a:pt x="572980" y="2780586"/>
-                  </a:lnTo>
-                  <a:lnTo>
-                    <a:pt x="501357" y="2783634"/>
-                  </a:lnTo>
-                  <a:lnTo>
-                    <a:pt x="429735" y="2786669"/>
-                  </a:lnTo>
-                  <a:lnTo>
-                    <a:pt x="358112" y="2789691"/>
-                  </a:lnTo>
-                  <a:lnTo>
-                    <a:pt x="286490" y="2792699"/>
-                  </a:lnTo>
-                  <a:lnTo>
-                    <a:pt x="214867" y="2795695"/>
-                  </a:lnTo>
-                  <a:lnTo>
-                    <a:pt x="143245" y="2798678"/>
-                  </a:lnTo>
-                  <a:lnTo>
-                    <a:pt x="71622" y="2801648"/>
-                  </a:lnTo>
-                  <a:lnTo>
-                    <a:pt x="0" y="2804605"/>
+                    <a:pt x="0" y="0"/>
+                  </a:lnTo>
+                  <a:lnTo>
+                    <a:pt x="0" y="0"/>
+                  </a:lnTo>
+                </a:path>
+              </a:pathLst>
+            </a:custGeom>
+            <a:ln w="13550" cap="flat">
+              <a:solidFill>
+                <a:srgbClr val="EBEBEB">
+                  <a:alpha val="100000"/>
+                </a:srgbClr>
+              </a:solidFill>
+              <a:prstDash val="solid"/>
+              <a:round/>
+            </a:ln>
+          </p:spPr>
+          <p:txBody>
+            <a:bodyPr/>
+            <a:lstStyle/>
+            <a:p/>
+          </p:txBody>
+        </p:sp>
+        <p:sp>
+          <p:nvSpPr>
+            <p:cNvPr id="21" name="pg21"/>
+            <p:cNvSpPr/>
+            <p:nvPr/>
+          </p:nvSpPr>
+          <p:spPr>
+            <a:xfrm>
+              <a:off x="1235312" y="2143092"/>
+              <a:ext cx="6964104" cy="1207290"/>
+            </a:xfrm>
+            <a:custGeom>
+              <a:avLst/>
+              <a:pathLst>
+                <a:path w="6964104" h="1207290">
+                  <a:moveTo>
+                    <a:pt x="252286" y="0"/>
+                  </a:moveTo>
+                  <a:lnTo>
+                    <a:pt x="281377" y="17630"/>
+                  </a:lnTo>
+                  <a:lnTo>
+                    <a:pt x="351722" y="58843"/>
+                  </a:lnTo>
+                  <a:lnTo>
+                    <a:pt x="422066" y="98686"/>
+                  </a:lnTo>
+                  <a:lnTo>
+                    <a:pt x="492411" y="137204"/>
+                  </a:lnTo>
+                  <a:lnTo>
+                    <a:pt x="562755" y="174442"/>
+                  </a:lnTo>
+                  <a:lnTo>
+                    <a:pt x="633100" y="210442"/>
+                  </a:lnTo>
+                  <a:lnTo>
+                    <a:pt x="703444" y="245244"/>
+                  </a:lnTo>
+                  <a:lnTo>
+                    <a:pt x="773789" y="278890"/>
+                  </a:lnTo>
+                  <a:lnTo>
+                    <a:pt x="844133" y="311417"/>
+                  </a:lnTo>
+                  <a:lnTo>
+                    <a:pt x="914478" y="342862"/>
+                  </a:lnTo>
+                  <a:lnTo>
+                    <a:pt x="984822" y="373262"/>
+                  </a:lnTo>
+                  <a:lnTo>
+                    <a:pt x="1055167" y="402652"/>
+                  </a:lnTo>
+                  <a:lnTo>
+                    <a:pt x="1125511" y="431064"/>
+                  </a:lnTo>
+                  <a:lnTo>
+                    <a:pt x="1195856" y="458531"/>
+                  </a:lnTo>
+                  <a:lnTo>
+                    <a:pt x="1266200" y="485085"/>
+                  </a:lnTo>
+                  <a:lnTo>
+                    <a:pt x="1336545" y="510757"/>
+                  </a:lnTo>
+                  <a:lnTo>
+                    <a:pt x="1406889" y="535575"/>
+                  </a:lnTo>
+                  <a:lnTo>
+                    <a:pt x="1477234" y="559567"/>
+                  </a:lnTo>
+                  <a:lnTo>
+                    <a:pt x="1547578" y="582762"/>
+                  </a:lnTo>
+                  <a:lnTo>
+                    <a:pt x="1617923" y="605186"/>
+                  </a:lnTo>
+                  <a:lnTo>
+                    <a:pt x="1688267" y="626864"/>
+                  </a:lnTo>
+                  <a:lnTo>
+                    <a:pt x="1758612" y="647822"/>
+                  </a:lnTo>
+                  <a:lnTo>
+                    <a:pt x="1828956" y="668082"/>
+                  </a:lnTo>
+                  <a:lnTo>
+                    <a:pt x="1899301" y="687669"/>
+                  </a:lnTo>
+                  <a:lnTo>
+                    <a:pt x="1969645" y="706605"/>
+                  </a:lnTo>
+                  <a:lnTo>
+                    <a:pt x="2039990" y="724912"/>
+                  </a:lnTo>
+                  <a:lnTo>
+                    <a:pt x="2110334" y="742609"/>
+                  </a:lnTo>
+                  <a:lnTo>
+                    <a:pt x="2180679" y="759718"/>
+                  </a:lnTo>
+                  <a:lnTo>
+                    <a:pt x="2251023" y="776259"/>
+                  </a:lnTo>
+                  <a:lnTo>
+                    <a:pt x="2321368" y="792249"/>
+                  </a:lnTo>
+                  <a:lnTo>
+                    <a:pt x="2391712" y="807708"/>
+                  </a:lnTo>
+                  <a:lnTo>
+                    <a:pt x="2462057" y="822653"/>
+                  </a:lnTo>
+                  <a:lnTo>
+                    <a:pt x="2532401" y="837101"/>
+                  </a:lnTo>
+                  <a:lnTo>
+                    <a:pt x="2602746" y="851068"/>
+                  </a:lnTo>
+                  <a:lnTo>
+                    <a:pt x="2673090" y="864571"/>
+                  </a:lnTo>
+                  <a:lnTo>
+                    <a:pt x="2743435" y="877625"/>
+                  </a:lnTo>
+                  <a:lnTo>
+                    <a:pt x="2813779" y="890246"/>
+                  </a:lnTo>
+                  <a:lnTo>
+                    <a:pt x="2884124" y="902446"/>
+                  </a:lnTo>
+                  <a:lnTo>
+                    <a:pt x="2954468" y="914241"/>
+                  </a:lnTo>
+                  <a:lnTo>
+                    <a:pt x="3024813" y="925644"/>
+                  </a:lnTo>
+                  <a:lnTo>
+                    <a:pt x="3095157" y="936667"/>
+                  </a:lnTo>
+                  <a:lnTo>
+                    <a:pt x="3165502" y="947325"/>
+                  </a:lnTo>
+                  <a:lnTo>
+                    <a:pt x="3235846" y="957627"/>
+                  </a:lnTo>
+                  <a:lnTo>
+                    <a:pt x="3306191" y="956596"/>
+                  </a:lnTo>
+                  <a:lnTo>
+                    <a:pt x="3376535" y="955287"/>
+                  </a:lnTo>
+                  <a:lnTo>
+                    <a:pt x="3446880" y="953972"/>
+                  </a:lnTo>
+                  <a:lnTo>
+                    <a:pt x="3517224" y="952652"/>
+                  </a:lnTo>
+                  <a:lnTo>
+                    <a:pt x="3587569" y="951326"/>
+                  </a:lnTo>
+                  <a:lnTo>
+                    <a:pt x="3657913" y="949994"/>
+                  </a:lnTo>
+                  <a:lnTo>
+                    <a:pt x="3728257" y="948657"/>
+                  </a:lnTo>
+                  <a:lnTo>
+                    <a:pt x="3798602" y="947313"/>
+                  </a:lnTo>
+                  <a:lnTo>
+                    <a:pt x="3868946" y="945964"/>
+                  </a:lnTo>
+                  <a:lnTo>
+                    <a:pt x="3939291" y="944609"/>
+                  </a:lnTo>
+                  <a:lnTo>
+                    <a:pt x="4009635" y="943248"/>
+                  </a:lnTo>
+                  <a:lnTo>
+                    <a:pt x="4079980" y="941881"/>
+                  </a:lnTo>
+                  <a:lnTo>
+                    <a:pt x="4150324" y="940508"/>
+                  </a:lnTo>
+                  <a:lnTo>
+                    <a:pt x="4220669" y="939129"/>
+                  </a:lnTo>
+                  <a:lnTo>
+                    <a:pt x="4291013" y="937744"/>
+                  </a:lnTo>
+                  <a:lnTo>
+                    <a:pt x="4361358" y="936354"/>
+                  </a:lnTo>
+                  <a:lnTo>
+                    <a:pt x="4431702" y="934957"/>
+                  </a:lnTo>
+                  <a:lnTo>
+                    <a:pt x="4502047" y="933554"/>
+                  </a:lnTo>
+                  <a:lnTo>
+                    <a:pt x="4572391" y="932144"/>
+                  </a:lnTo>
+                  <a:lnTo>
+                    <a:pt x="4642736" y="930729"/>
+                  </a:lnTo>
+                  <a:lnTo>
+                    <a:pt x="4713080" y="929308"/>
+                  </a:lnTo>
+                  <a:lnTo>
+                    <a:pt x="4783425" y="927880"/>
+                  </a:lnTo>
+                  <a:lnTo>
+                    <a:pt x="4853769" y="926446"/>
+                  </a:lnTo>
+                  <a:lnTo>
+                    <a:pt x="4924114" y="925006"/>
+                  </a:lnTo>
+                  <a:lnTo>
+                    <a:pt x="4994458" y="923560"/>
+                  </a:lnTo>
+                  <a:lnTo>
+                    <a:pt x="5064803" y="922107"/>
+                  </a:lnTo>
+                  <a:lnTo>
+                    <a:pt x="5135147" y="920648"/>
+                  </a:lnTo>
+                  <a:lnTo>
+                    <a:pt x="5205492" y="919183"/>
+                  </a:lnTo>
+                  <a:lnTo>
+                    <a:pt x="5275836" y="917711"/>
+                  </a:lnTo>
+                  <a:lnTo>
+                    <a:pt x="5346181" y="916233"/>
+                  </a:lnTo>
+                  <a:lnTo>
+                    <a:pt x="5416525" y="914748"/>
+                  </a:lnTo>
+                  <a:lnTo>
+                    <a:pt x="5486870" y="913257"/>
+                  </a:lnTo>
+                  <a:lnTo>
+                    <a:pt x="5557214" y="911760"/>
+                  </a:lnTo>
+                  <a:lnTo>
+                    <a:pt x="5627559" y="910256"/>
+                  </a:lnTo>
+                  <a:lnTo>
+                    <a:pt x="5697903" y="908745"/>
+                  </a:lnTo>
+                  <a:lnTo>
+                    <a:pt x="5768248" y="907228"/>
+                  </a:lnTo>
+                  <a:lnTo>
+                    <a:pt x="5838592" y="905704"/>
+                  </a:lnTo>
+                  <a:lnTo>
+                    <a:pt x="5908937" y="904174"/>
+                  </a:lnTo>
+                  <a:lnTo>
+                    <a:pt x="5979281" y="902637"/>
+                  </a:lnTo>
+                  <a:lnTo>
+                    <a:pt x="6049626" y="901093"/>
+                  </a:lnTo>
+                  <a:lnTo>
+                    <a:pt x="6119970" y="899543"/>
+                  </a:lnTo>
+                  <a:lnTo>
+                    <a:pt x="6190315" y="897986"/>
+                  </a:lnTo>
+                  <a:lnTo>
+                    <a:pt x="6260659" y="896422"/>
+                  </a:lnTo>
+                  <a:lnTo>
+                    <a:pt x="6331004" y="894851"/>
+                  </a:lnTo>
+                  <a:lnTo>
+                    <a:pt x="6401348" y="893273"/>
+                  </a:lnTo>
+                  <a:lnTo>
+                    <a:pt x="6471693" y="891689"/>
+                  </a:lnTo>
+                  <a:lnTo>
+                    <a:pt x="6542037" y="890097"/>
+                  </a:lnTo>
+                  <a:lnTo>
+                    <a:pt x="6612382" y="888499"/>
+                  </a:lnTo>
+                  <a:lnTo>
+                    <a:pt x="6682726" y="886893"/>
+                  </a:lnTo>
+                  <a:lnTo>
+                    <a:pt x="6753071" y="885281"/>
+                  </a:lnTo>
+                  <a:lnTo>
+                    <a:pt x="6823415" y="883662"/>
+                  </a:lnTo>
+                  <a:lnTo>
+                    <a:pt x="6893760" y="882035"/>
+                  </a:lnTo>
+                  <a:lnTo>
+                    <a:pt x="6964104" y="880402"/>
+                  </a:lnTo>
+                  <a:lnTo>
+                    <a:pt x="6964104" y="1207290"/>
+                  </a:lnTo>
+                  <a:lnTo>
+                    <a:pt x="6893760" y="1205573"/>
+                  </a:lnTo>
+                  <a:lnTo>
+                    <a:pt x="6823415" y="1203798"/>
+                  </a:lnTo>
+                  <a:lnTo>
+                    <a:pt x="6753071" y="1201961"/>
+                  </a:lnTo>
+                  <a:lnTo>
+                    <a:pt x="6682726" y="1200061"/>
+                  </a:lnTo>
+                  <a:lnTo>
+                    <a:pt x="6612382" y="1198096"/>
+                  </a:lnTo>
+                  <a:lnTo>
+                    <a:pt x="6542037" y="1196064"/>
+                  </a:lnTo>
+                  <a:lnTo>
+                    <a:pt x="6471693" y="1193961"/>
+                  </a:lnTo>
+                  <a:lnTo>
+                    <a:pt x="6401348" y="1191786"/>
+                  </a:lnTo>
+                  <a:lnTo>
+                    <a:pt x="6331004" y="1189536"/>
+                  </a:lnTo>
+                  <a:lnTo>
+                    <a:pt x="6260659" y="1187209"/>
+                  </a:lnTo>
+                  <a:lnTo>
+                    <a:pt x="6190315" y="1184802"/>
+                  </a:lnTo>
+                  <a:lnTo>
+                    <a:pt x="6119970" y="1182312"/>
+                  </a:lnTo>
+                  <a:lnTo>
+                    <a:pt x="6049626" y="1179736"/>
+                  </a:lnTo>
+                  <a:lnTo>
+                    <a:pt x="5979281" y="1177072"/>
+                  </a:lnTo>
+                  <a:lnTo>
+                    <a:pt x="5908937" y="1174317"/>
+                  </a:lnTo>
+                  <a:lnTo>
+                    <a:pt x="5838592" y="1171466"/>
+                  </a:lnTo>
+                  <a:lnTo>
+                    <a:pt x="5768248" y="1168517"/>
+                  </a:lnTo>
+                  <a:lnTo>
+                    <a:pt x="5697903" y="1165467"/>
+                  </a:lnTo>
+                  <a:lnTo>
+                    <a:pt x="5627559" y="1162313"/>
+                  </a:lnTo>
+                  <a:lnTo>
+                    <a:pt x="5557214" y="1159049"/>
+                  </a:lnTo>
+                  <a:lnTo>
+                    <a:pt x="5486870" y="1155674"/>
+                  </a:lnTo>
+                  <a:lnTo>
+                    <a:pt x="5416525" y="1152182"/>
+                  </a:lnTo>
+                  <a:lnTo>
+                    <a:pt x="5346181" y="1148570"/>
+                  </a:lnTo>
+                  <a:lnTo>
+                    <a:pt x="5275836" y="1144834"/>
+                  </a:lnTo>
+                  <a:lnTo>
+                    <a:pt x="5205492" y="1140970"/>
+                  </a:lnTo>
+                  <a:lnTo>
+                    <a:pt x="5135147" y="1136972"/>
+                  </a:lnTo>
+                  <a:lnTo>
+                    <a:pt x="5064803" y="1132837"/>
+                  </a:lnTo>
+                  <a:lnTo>
+                    <a:pt x="4994458" y="1128560"/>
+                  </a:lnTo>
+                  <a:lnTo>
+                    <a:pt x="4924114" y="1124136"/>
+                  </a:lnTo>
+                  <a:lnTo>
+                    <a:pt x="4853769" y="1119560"/>
+                  </a:lnTo>
+                  <a:lnTo>
+                    <a:pt x="4783425" y="1114826"/>
+                  </a:lnTo>
+                  <a:lnTo>
+                    <a:pt x="4713080" y="1109929"/>
+                  </a:lnTo>
+                  <a:lnTo>
+                    <a:pt x="4642736" y="1104865"/>
+                  </a:lnTo>
+                  <a:lnTo>
+                    <a:pt x="4572391" y="1099625"/>
+                  </a:lnTo>
+                  <a:lnTo>
+                    <a:pt x="4502047" y="1094206"/>
+                  </a:lnTo>
+                  <a:lnTo>
+                    <a:pt x="4431702" y="1088601"/>
+                  </a:lnTo>
+                  <a:lnTo>
+                    <a:pt x="4361358" y="1082802"/>
+                  </a:lnTo>
+                  <a:lnTo>
+                    <a:pt x="4291013" y="1076804"/>
+                  </a:lnTo>
+                  <a:lnTo>
+                    <a:pt x="4220669" y="1070600"/>
+                  </a:lnTo>
+                  <a:lnTo>
+                    <a:pt x="4150324" y="1064183"/>
+                  </a:lnTo>
+                  <a:lnTo>
+                    <a:pt x="4079980" y="1057544"/>
+                  </a:lnTo>
+                  <a:lnTo>
+                    <a:pt x="4009635" y="1050678"/>
+                  </a:lnTo>
+                  <a:lnTo>
+                    <a:pt x="3939291" y="1043575"/>
+                  </a:lnTo>
+                  <a:lnTo>
+                    <a:pt x="3868946" y="1036228"/>
+                  </a:lnTo>
+                  <a:lnTo>
+                    <a:pt x="3798602" y="1028629"/>
+                  </a:lnTo>
+                  <a:lnTo>
+                    <a:pt x="3728257" y="1020768"/>
+                  </a:lnTo>
+                  <a:lnTo>
+                    <a:pt x="3657913" y="1012636"/>
+                  </a:lnTo>
+                  <a:lnTo>
+                    <a:pt x="3587569" y="1004225"/>
+                  </a:lnTo>
+                  <a:lnTo>
+                    <a:pt x="3517224" y="995525"/>
+                  </a:lnTo>
+                  <a:lnTo>
+                    <a:pt x="3446880" y="986526"/>
+                  </a:lnTo>
+                  <a:lnTo>
+                    <a:pt x="3376535" y="977217"/>
+                  </a:lnTo>
+                  <a:lnTo>
+                    <a:pt x="3306191" y="967588"/>
+                  </a:lnTo>
+                  <a:lnTo>
+                    <a:pt x="3235846" y="957899"/>
+                  </a:lnTo>
+                  <a:lnTo>
+                    <a:pt x="3165502" y="959196"/>
+                  </a:lnTo>
+                  <a:lnTo>
+                    <a:pt x="3095157" y="960488"/>
+                  </a:lnTo>
+                  <a:lnTo>
+                    <a:pt x="3024813" y="961774"/>
+                  </a:lnTo>
+                  <a:lnTo>
+                    <a:pt x="2954468" y="963055"/>
+                  </a:lnTo>
+                  <a:lnTo>
+                    <a:pt x="2884124" y="964330"/>
+                  </a:lnTo>
+                  <a:lnTo>
+                    <a:pt x="2813779" y="965600"/>
+                  </a:lnTo>
+                  <a:lnTo>
+                    <a:pt x="2743435" y="966864"/>
+                  </a:lnTo>
+                  <a:lnTo>
+                    <a:pt x="2673090" y="968123"/>
+                  </a:lnTo>
+                  <a:lnTo>
+                    <a:pt x="2602746" y="969376"/>
+                  </a:lnTo>
+                  <a:lnTo>
+                    <a:pt x="2532401" y="970624"/>
+                  </a:lnTo>
+                  <a:lnTo>
+                    <a:pt x="2462057" y="971866"/>
+                  </a:lnTo>
+                  <a:lnTo>
+                    <a:pt x="2391712" y="973103"/>
+                  </a:lnTo>
+                  <a:lnTo>
+                    <a:pt x="2321368" y="974334"/>
+                  </a:lnTo>
+                  <a:lnTo>
+                    <a:pt x="2251023" y="975561"/>
+                  </a:lnTo>
+                  <a:lnTo>
+                    <a:pt x="2180679" y="976782"/>
+                  </a:lnTo>
+                  <a:lnTo>
+                    <a:pt x="2110334" y="977997"/>
+                  </a:lnTo>
+                  <a:lnTo>
+                    <a:pt x="2039990" y="979208"/>
+                  </a:lnTo>
+                  <a:lnTo>
+                    <a:pt x="1969645" y="980413"/>
+                  </a:lnTo>
+                  <a:lnTo>
+                    <a:pt x="1899301" y="981613"/>
+                  </a:lnTo>
+                  <a:lnTo>
+                    <a:pt x="1828956" y="982807"/>
+                  </a:lnTo>
+                  <a:lnTo>
+                    <a:pt x="1758612" y="983997"/>
+                  </a:lnTo>
+                  <a:lnTo>
+                    <a:pt x="1688267" y="985181"/>
+                  </a:lnTo>
+                  <a:lnTo>
+                    <a:pt x="1617923" y="986360"/>
+                  </a:lnTo>
+                  <a:lnTo>
+                    <a:pt x="1547578" y="987535"/>
+                  </a:lnTo>
+                  <a:lnTo>
+                    <a:pt x="1477234" y="988704"/>
+                  </a:lnTo>
+                  <a:lnTo>
+                    <a:pt x="1406889" y="989868"/>
+                  </a:lnTo>
+                  <a:lnTo>
+                    <a:pt x="1336545" y="991026"/>
+                  </a:lnTo>
+                  <a:lnTo>
+                    <a:pt x="1266200" y="992180"/>
+                  </a:lnTo>
+                  <a:lnTo>
+                    <a:pt x="1195856" y="993329"/>
+                  </a:lnTo>
+                  <a:lnTo>
+                    <a:pt x="1125511" y="994473"/>
+                  </a:lnTo>
+                  <a:lnTo>
+                    <a:pt x="1055167" y="995612"/>
+                  </a:lnTo>
+                  <a:lnTo>
+                    <a:pt x="984822" y="996746"/>
+                  </a:lnTo>
+                  <a:lnTo>
+                    <a:pt x="914478" y="997875"/>
+                  </a:lnTo>
+                  <a:lnTo>
+                    <a:pt x="844133" y="998999"/>
+                  </a:lnTo>
+                  <a:lnTo>
+                    <a:pt x="773789" y="1000119"/>
+                  </a:lnTo>
+                  <a:lnTo>
+                    <a:pt x="703444" y="1001233"/>
+                  </a:lnTo>
+                  <a:lnTo>
+                    <a:pt x="633100" y="1002343"/>
+                  </a:lnTo>
+                  <a:lnTo>
+                    <a:pt x="562755" y="1003448"/>
+                  </a:lnTo>
+                  <a:lnTo>
+                    <a:pt x="492411" y="1004548"/>
+                  </a:lnTo>
+                  <a:lnTo>
+                    <a:pt x="422066" y="1005643"/>
+                  </a:lnTo>
+                  <a:lnTo>
+                    <a:pt x="351722" y="1006733"/>
+                  </a:lnTo>
+                  <a:lnTo>
+                    <a:pt x="281377" y="1007819"/>
+                  </a:lnTo>
+                  <a:lnTo>
+                    <a:pt x="211033" y="1008900"/>
+                  </a:lnTo>
+                  <a:lnTo>
+                    <a:pt x="140688" y="1009977"/>
+                  </a:lnTo>
+                  <a:lnTo>
+                    <a:pt x="70344" y="1011048"/>
+                  </a:lnTo>
+                  <a:lnTo>
+                    <a:pt x="0" y="1012116"/>
                   </a:lnTo>
                   <a:close/>
                 </a:path>
@@ -3575,634 +3610,309 @@
         </p:sp>
         <p:sp>
           <p:nvSpPr>
-            <p:cNvPr id="21" name="pl21"/>
-            <p:cNvSpPr/>
-            <p:nvPr/>
-          </p:nvSpPr>
-          <p:spPr>
-            <a:xfrm>
-              <a:off x="1428919" y="2073503"/>
-              <a:ext cx="6833759" cy="2653616"/>
-            </a:xfrm>
-            <a:custGeom>
-              <a:avLst/>
-              <a:pathLst>
-                <a:path w="6833759" h="2653616">
-                  <a:moveTo>
-                    <a:pt x="0" y="0"/>
-                  </a:moveTo>
-                  <a:lnTo>
-                    <a:pt x="29619" y="48853"/>
-                  </a:lnTo>
-                  <a:lnTo>
-                    <a:pt x="101242" y="163056"/>
-                  </a:lnTo>
-                  <a:lnTo>
-                    <a:pt x="172864" y="273463"/>
-                  </a:lnTo>
-                  <a:lnTo>
-                    <a:pt x="244487" y="380198"/>
-                  </a:lnTo>
-                  <a:lnTo>
-                    <a:pt x="316109" y="483385"/>
-                  </a:lnTo>
-                  <a:lnTo>
-                    <a:pt x="387732" y="583141"/>
-                  </a:lnTo>
-                  <a:lnTo>
-                    <a:pt x="459354" y="679581"/>
-                  </a:lnTo>
-                  <a:lnTo>
-                    <a:pt x="530977" y="772814"/>
-                  </a:lnTo>
-                  <a:lnTo>
-                    <a:pt x="602599" y="862947"/>
-                  </a:lnTo>
-                  <a:lnTo>
-                    <a:pt x="674222" y="950083"/>
-                  </a:lnTo>
-                  <a:lnTo>
-                    <a:pt x="745844" y="1034322"/>
-                  </a:lnTo>
-                  <a:lnTo>
-                    <a:pt x="817467" y="1115761"/>
-                  </a:lnTo>
-                  <a:lnTo>
-                    <a:pt x="889089" y="1194492"/>
-                  </a:lnTo>
-                  <a:lnTo>
-                    <a:pt x="960712" y="1270605"/>
-                  </a:lnTo>
-                  <a:lnTo>
-                    <a:pt x="1032335" y="1344188"/>
-                  </a:lnTo>
-                  <a:lnTo>
-                    <a:pt x="1103957" y="1415324"/>
-                  </a:lnTo>
-                  <a:lnTo>
-                    <a:pt x="1175580" y="1484095"/>
-                  </a:lnTo>
-                  <a:lnTo>
-                    <a:pt x="1247202" y="1550579"/>
-                  </a:lnTo>
-                  <a:lnTo>
-                    <a:pt x="1318825" y="1614853"/>
-                  </a:lnTo>
-                  <a:lnTo>
-                    <a:pt x="1390447" y="1676990"/>
-                  </a:lnTo>
-                  <a:lnTo>
-                    <a:pt x="1462070" y="1737061"/>
-                  </a:lnTo>
-                  <a:lnTo>
-                    <a:pt x="1533692" y="1795135"/>
-                  </a:lnTo>
-                  <a:lnTo>
-                    <a:pt x="1605315" y="1851278"/>
-                  </a:lnTo>
-                  <a:lnTo>
-                    <a:pt x="1676937" y="1905554"/>
-                  </a:lnTo>
-                  <a:lnTo>
-                    <a:pt x="1748560" y="1958026"/>
-                  </a:lnTo>
-                  <a:lnTo>
-                    <a:pt x="1820182" y="2008753"/>
-                  </a:lnTo>
-                  <a:lnTo>
-                    <a:pt x="1891805" y="2057794"/>
-                  </a:lnTo>
-                  <a:lnTo>
-                    <a:pt x="1963427" y="2105204"/>
-                  </a:lnTo>
-                  <a:lnTo>
-                    <a:pt x="2035050" y="2151038"/>
-                  </a:lnTo>
-                  <a:lnTo>
-                    <a:pt x="2106672" y="2195348"/>
-                  </a:lnTo>
-                  <a:lnTo>
-                    <a:pt x="2178295" y="2238185"/>
-                  </a:lnTo>
-                  <a:lnTo>
-                    <a:pt x="2249917" y="2279597"/>
-                  </a:lnTo>
-                  <a:lnTo>
-                    <a:pt x="2321540" y="2319633"/>
-                  </a:lnTo>
-                  <a:lnTo>
-                    <a:pt x="2393162" y="2358337"/>
-                  </a:lnTo>
-                  <a:lnTo>
-                    <a:pt x="2464785" y="2395755"/>
-                  </a:lnTo>
-                  <a:lnTo>
-                    <a:pt x="2536408" y="2431928"/>
-                  </a:lnTo>
-                  <a:lnTo>
-                    <a:pt x="2608030" y="2466899"/>
-                  </a:lnTo>
-                  <a:lnTo>
-                    <a:pt x="2679653" y="2500707"/>
-                  </a:lnTo>
-                  <a:lnTo>
-                    <a:pt x="2751275" y="2533391"/>
-                  </a:lnTo>
-                  <a:lnTo>
-                    <a:pt x="2822898" y="2564989"/>
-                  </a:lnTo>
-                  <a:lnTo>
-                    <a:pt x="2894520" y="2595536"/>
-                  </a:lnTo>
-                  <a:lnTo>
-                    <a:pt x="2966143" y="2625067"/>
-                  </a:lnTo>
-                  <a:lnTo>
-                    <a:pt x="3037765" y="2653616"/>
-                  </a:lnTo>
-                  <a:lnTo>
-                    <a:pt x="3109388" y="2650757"/>
-                  </a:lnTo>
-                  <a:lnTo>
-                    <a:pt x="3181010" y="2647131"/>
-                  </a:lnTo>
-                  <a:lnTo>
-                    <a:pt x="3252633" y="2643488"/>
-                  </a:lnTo>
-                  <a:lnTo>
-                    <a:pt x="3324255" y="2639830"/>
-                  </a:lnTo>
-                  <a:lnTo>
-                    <a:pt x="3395878" y="2636155"/>
-                  </a:lnTo>
-                  <a:lnTo>
-                    <a:pt x="3467500" y="2632465"/>
-                  </a:lnTo>
-                  <a:lnTo>
-                    <a:pt x="3539123" y="2628758"/>
-                  </a:lnTo>
-                  <a:lnTo>
-                    <a:pt x="3610745" y="2625036"/>
-                  </a:lnTo>
-                  <a:lnTo>
-                    <a:pt x="3682368" y="2621297"/>
-                  </a:lnTo>
-                  <a:lnTo>
-                    <a:pt x="3753990" y="2617542"/>
-                  </a:lnTo>
-                  <a:lnTo>
-                    <a:pt x="3825613" y="2613771"/>
-                  </a:lnTo>
-                  <a:lnTo>
-                    <a:pt x="3897236" y="2609983"/>
-                  </a:lnTo>
-                  <a:lnTo>
-                    <a:pt x="3968858" y="2606179"/>
-                  </a:lnTo>
-                  <a:lnTo>
-                    <a:pt x="4040481" y="2602358"/>
-                  </a:lnTo>
-                  <a:lnTo>
-                    <a:pt x="4112103" y="2598520"/>
-                  </a:lnTo>
-                  <a:lnTo>
-                    <a:pt x="4183726" y="2594666"/>
-                  </a:lnTo>
-                  <a:lnTo>
-                    <a:pt x="4255348" y="2590795"/>
-                  </a:lnTo>
-                  <a:lnTo>
-                    <a:pt x="4326971" y="2586907"/>
-                  </a:lnTo>
-                  <a:lnTo>
-                    <a:pt x="4398593" y="2583002"/>
-                  </a:lnTo>
-                  <a:lnTo>
-                    <a:pt x="4470216" y="2579081"/>
-                  </a:lnTo>
-                  <a:lnTo>
-                    <a:pt x="4541838" y="2575142"/>
-                  </a:lnTo>
-                  <a:lnTo>
-                    <a:pt x="4613461" y="2571186"/>
-                  </a:lnTo>
-                  <a:lnTo>
-                    <a:pt x="4685083" y="2567213"/>
-                  </a:lnTo>
-                  <a:lnTo>
-                    <a:pt x="4756706" y="2563222"/>
-                  </a:lnTo>
-                  <a:lnTo>
-                    <a:pt x="4828328" y="2559214"/>
-                  </a:lnTo>
-                  <a:lnTo>
-                    <a:pt x="4899951" y="2555189"/>
-                  </a:lnTo>
-                  <a:lnTo>
-                    <a:pt x="4971573" y="2551146"/>
-                  </a:lnTo>
-                  <a:lnTo>
-                    <a:pt x="5043196" y="2547085"/>
-                  </a:lnTo>
-                  <a:lnTo>
-                    <a:pt x="5114818" y="2543007"/>
-                  </a:lnTo>
-                  <a:lnTo>
-                    <a:pt x="5186441" y="2538911"/>
-                  </a:lnTo>
-                  <a:lnTo>
-                    <a:pt x="5258064" y="2534798"/>
-                  </a:lnTo>
-                  <a:lnTo>
-                    <a:pt x="5329686" y="2530666"/>
-                  </a:lnTo>
-                  <a:lnTo>
-                    <a:pt x="5401309" y="2526516"/>
-                  </a:lnTo>
-                  <a:lnTo>
-                    <a:pt x="5472931" y="2522349"/>
-                  </a:lnTo>
-                  <a:lnTo>
-                    <a:pt x="5544554" y="2518163"/>
-                  </a:lnTo>
-                  <a:lnTo>
-                    <a:pt x="5616176" y="2513959"/>
-                  </a:lnTo>
-                  <a:lnTo>
-                    <a:pt x="5687799" y="2509736"/>
-                  </a:lnTo>
-                  <a:lnTo>
-                    <a:pt x="5759421" y="2505495"/>
-                  </a:lnTo>
-                  <a:lnTo>
-                    <a:pt x="5831044" y="2501236"/>
-                  </a:lnTo>
-                  <a:lnTo>
-                    <a:pt x="5902666" y="2496958"/>
-                  </a:lnTo>
-                  <a:lnTo>
-                    <a:pt x="5974289" y="2492662"/>
-                  </a:lnTo>
-                  <a:lnTo>
-                    <a:pt x="6045911" y="2488347"/>
-                  </a:lnTo>
-                  <a:lnTo>
-                    <a:pt x="6117534" y="2484013"/>
-                  </a:lnTo>
-                  <a:lnTo>
-                    <a:pt x="6189156" y="2479660"/>
-                  </a:lnTo>
-                  <a:lnTo>
-                    <a:pt x="6260779" y="2475289"/>
-                  </a:lnTo>
-                  <a:lnTo>
-                    <a:pt x="6332401" y="2470898"/>
-                  </a:lnTo>
-                  <a:lnTo>
-                    <a:pt x="6404024" y="2466488"/>
-                  </a:lnTo>
-                  <a:lnTo>
-                    <a:pt x="6475646" y="2462059"/>
-                  </a:lnTo>
-                  <a:lnTo>
-                    <a:pt x="6547269" y="2457610"/>
-                  </a:lnTo>
-                  <a:lnTo>
-                    <a:pt x="6618892" y="2453143"/>
-                  </a:lnTo>
-                  <a:lnTo>
-                    <a:pt x="6690514" y="2448656"/>
-                  </a:lnTo>
-                  <a:lnTo>
-                    <a:pt x="6762137" y="2444149"/>
-                  </a:lnTo>
-                  <a:lnTo>
-                    <a:pt x="6833759" y="2439623"/>
-                  </a:lnTo>
-                </a:path>
-              </a:pathLst>
-            </a:custGeom>
-          </p:spPr>
-          <p:txBody>
-            <a:bodyPr/>
-            <a:lstStyle/>
-            <a:p/>
-          </p:txBody>
-        </p:sp>
-        <p:sp>
-          <p:nvSpPr>
             <p:cNvPr id="22" name="pl22"/>
             <p:cNvSpPr/>
             <p:nvPr/>
           </p:nvSpPr>
           <p:spPr>
             <a:xfrm>
-              <a:off x="1172049" y="4727871"/>
-              <a:ext cx="7090630" cy="691070"/>
+              <a:off x="1487598" y="2143092"/>
+              <a:ext cx="6711817" cy="957627"/>
             </a:xfrm>
             <a:custGeom>
               <a:avLst/>
               <a:pathLst>
-                <a:path w="7090630" h="691070">
+                <a:path w="6711817" h="957627">
                   <a:moveTo>
-                    <a:pt x="7090630" y="691070"/>
+                    <a:pt x="0" y="0"/>
                   </a:moveTo>
                   <a:lnTo>
-                    <a:pt x="7019007" y="686314"/>
-                  </a:lnTo>
-                  <a:lnTo>
-                    <a:pt x="6947385" y="681394"/>
-                  </a:lnTo>
-                  <a:lnTo>
-                    <a:pt x="6875762" y="676304"/>
-                  </a:lnTo>
-                  <a:lnTo>
-                    <a:pt x="6804139" y="671040"/>
-                  </a:lnTo>
-                  <a:lnTo>
-                    <a:pt x="6732517" y="665594"/>
-                  </a:lnTo>
-                  <a:lnTo>
-                    <a:pt x="6660894" y="659962"/>
-                  </a:lnTo>
-                  <a:lnTo>
-                    <a:pt x="6589272" y="654135"/>
-                  </a:lnTo>
-                  <a:lnTo>
-                    <a:pt x="6517649" y="648108"/>
-                  </a:lnTo>
-                  <a:lnTo>
-                    <a:pt x="6446027" y="641874"/>
-                  </a:lnTo>
-                  <a:lnTo>
-                    <a:pt x="6374404" y="635426"/>
-                  </a:lnTo>
-                  <a:lnTo>
-                    <a:pt x="6302782" y="628755"/>
-                  </a:lnTo>
-                  <a:lnTo>
-                    <a:pt x="6231159" y="621856"/>
-                  </a:lnTo>
-                  <a:lnTo>
-                    <a:pt x="6159537" y="614719"/>
-                  </a:lnTo>
-                  <a:lnTo>
-                    <a:pt x="6087914" y="607336"/>
-                  </a:lnTo>
-                  <a:lnTo>
-                    <a:pt x="6016292" y="599700"/>
-                  </a:lnTo>
-                  <a:lnTo>
-                    <a:pt x="5944669" y="591801"/>
-                  </a:lnTo>
-                  <a:lnTo>
-                    <a:pt x="5873047" y="583630"/>
-                  </a:lnTo>
-                  <a:lnTo>
-                    <a:pt x="5801424" y="575179"/>
-                  </a:lnTo>
-                  <a:lnTo>
-                    <a:pt x="5729802" y="566436"/>
-                  </a:lnTo>
-                  <a:lnTo>
-                    <a:pt x="5658179" y="557393"/>
-                  </a:lnTo>
-                  <a:lnTo>
-                    <a:pt x="5586557" y="548040"/>
-                  </a:lnTo>
-                  <a:lnTo>
-                    <a:pt x="5514934" y="538364"/>
-                  </a:lnTo>
-                  <a:lnTo>
-                    <a:pt x="5443311" y="528356"/>
-                  </a:lnTo>
-                  <a:lnTo>
-                    <a:pt x="5371689" y="518003"/>
-                  </a:lnTo>
-                  <a:lnTo>
-                    <a:pt x="5300066" y="507294"/>
-                  </a:lnTo>
-                  <a:lnTo>
-                    <a:pt x="5228444" y="496217"/>
-                  </a:lnTo>
-                  <a:lnTo>
-                    <a:pt x="5156821" y="484760"/>
-                  </a:lnTo>
-                  <a:lnTo>
-                    <a:pt x="5085199" y="472908"/>
-                  </a:lnTo>
-                  <a:lnTo>
-                    <a:pt x="5013576" y="460648"/>
-                  </a:lnTo>
-                  <a:lnTo>
-                    <a:pt x="4941954" y="447967"/>
-                  </a:lnTo>
-                  <a:lnTo>
-                    <a:pt x="4870331" y="434850"/>
-                  </a:lnTo>
-                  <a:lnTo>
-                    <a:pt x="4798709" y="421281"/>
-                  </a:lnTo>
-                  <a:lnTo>
-                    <a:pt x="4727086" y="407246"/>
-                  </a:lnTo>
-                  <a:lnTo>
-                    <a:pt x="4655464" y="392729"/>
-                  </a:lnTo>
-                  <a:lnTo>
-                    <a:pt x="4583841" y="377712"/>
-                  </a:lnTo>
-                  <a:lnTo>
-                    <a:pt x="4512219" y="362178"/>
-                  </a:lnTo>
-                  <a:lnTo>
-                    <a:pt x="4440596" y="346110"/>
-                  </a:lnTo>
-                  <a:lnTo>
-                    <a:pt x="4368974" y="329490"/>
-                  </a:lnTo>
-                  <a:lnTo>
-                    <a:pt x="4297351" y="312298"/>
-                  </a:lnTo>
-                  <a:lnTo>
-                    <a:pt x="4225729" y="294515"/>
-                  </a:lnTo>
-                  <a:lnTo>
-                    <a:pt x="4154106" y="276120"/>
-                  </a:lnTo>
-                  <a:lnTo>
-                    <a:pt x="4082483" y="257093"/>
-                  </a:lnTo>
-                  <a:lnTo>
-                    <a:pt x="4010861" y="237411"/>
-                  </a:lnTo>
-                  <a:lnTo>
-                    <a:pt x="3939238" y="217053"/>
-                  </a:lnTo>
-                  <a:lnTo>
-                    <a:pt x="3867616" y="195994"/>
-                  </a:lnTo>
-                  <a:lnTo>
-                    <a:pt x="3795993" y="174211"/>
-                  </a:lnTo>
-                  <a:lnTo>
-                    <a:pt x="3724371" y="151679"/>
-                  </a:lnTo>
-                  <a:lnTo>
-                    <a:pt x="3652748" y="128372"/>
-                  </a:lnTo>
-                  <a:lnTo>
-                    <a:pt x="3581126" y="104263"/>
-                  </a:lnTo>
-                  <a:lnTo>
-                    <a:pt x="3509503" y="79326"/>
-                  </a:lnTo>
-                  <a:lnTo>
-                    <a:pt x="3437881" y="53530"/>
-                  </a:lnTo>
-                  <a:lnTo>
-                    <a:pt x="3366258" y="26848"/>
-                  </a:lnTo>
-                  <a:lnTo>
-                    <a:pt x="3294636" y="0"/>
-                  </a:lnTo>
-                  <a:lnTo>
-                    <a:pt x="3223013" y="3595"/>
-                  </a:lnTo>
-                  <a:lnTo>
-                    <a:pt x="3151391" y="7175"/>
-                  </a:lnTo>
-                  <a:lnTo>
-                    <a:pt x="3079768" y="10739"/>
-                  </a:lnTo>
-                  <a:lnTo>
-                    <a:pt x="3008146" y="14288"/>
-                  </a:lnTo>
-                  <a:lnTo>
-                    <a:pt x="2936523" y="17821"/>
-                  </a:lnTo>
-                  <a:lnTo>
-                    <a:pt x="2864901" y="21339"/>
-                  </a:lnTo>
-                  <a:lnTo>
-                    <a:pt x="2793278" y="24842"/>
-                  </a:lnTo>
-                  <a:lnTo>
-                    <a:pt x="2721655" y="28330"/>
-                  </a:lnTo>
-                  <a:lnTo>
-                    <a:pt x="2650033" y="31803"/>
-                  </a:lnTo>
-                  <a:lnTo>
-                    <a:pt x="2578410" y="35260"/>
-                  </a:lnTo>
-                  <a:lnTo>
-                    <a:pt x="2506788" y="38703"/>
-                  </a:lnTo>
-                  <a:lnTo>
-                    <a:pt x="2435165" y="42130"/>
-                  </a:lnTo>
-                  <a:lnTo>
-                    <a:pt x="2363543" y="45543"/>
-                  </a:lnTo>
-                  <a:lnTo>
-                    <a:pt x="2291920" y="48941"/>
-                  </a:lnTo>
-                  <a:lnTo>
-                    <a:pt x="2220298" y="52324"/>
-                  </a:lnTo>
-                  <a:lnTo>
-                    <a:pt x="2148675" y="55693"/>
-                  </a:lnTo>
-                  <a:lnTo>
-                    <a:pt x="2077053" y="59047"/>
-                  </a:lnTo>
-                  <a:lnTo>
-                    <a:pt x="2005430" y="62386"/>
-                  </a:lnTo>
-                  <a:lnTo>
-                    <a:pt x="1933808" y="65711"/>
-                  </a:lnTo>
-                  <a:lnTo>
-                    <a:pt x="1862185" y="69022"/>
-                  </a:lnTo>
-                  <a:lnTo>
-                    <a:pt x="1790563" y="72318"/>
-                  </a:lnTo>
-                  <a:lnTo>
-                    <a:pt x="1718940" y="75600"/>
-                  </a:lnTo>
-                  <a:lnTo>
-                    <a:pt x="1647318" y="78867"/>
-                  </a:lnTo>
-                  <a:lnTo>
-                    <a:pt x="1575695" y="82121"/>
-                  </a:lnTo>
-                  <a:lnTo>
-                    <a:pt x="1504073" y="85360"/>
-                  </a:lnTo>
-                  <a:lnTo>
-                    <a:pt x="1432450" y="88586"/>
-                  </a:lnTo>
-                  <a:lnTo>
-                    <a:pt x="1360827" y="91797"/>
-                  </a:lnTo>
-                  <a:lnTo>
-                    <a:pt x="1289205" y="94995"/>
-                  </a:lnTo>
-                  <a:lnTo>
-                    <a:pt x="1217582" y="98178"/>
-                  </a:lnTo>
-                  <a:lnTo>
-                    <a:pt x="1145960" y="101348"/>
-                  </a:lnTo>
-                  <a:lnTo>
-                    <a:pt x="1074337" y="104504"/>
-                  </a:lnTo>
-                  <a:lnTo>
-                    <a:pt x="1002715" y="107646"/>
-                  </a:lnTo>
-                  <a:lnTo>
-                    <a:pt x="931092" y="110775"/>
-                  </a:lnTo>
-                  <a:lnTo>
-                    <a:pt x="859470" y="113890"/>
-                  </a:lnTo>
-                  <a:lnTo>
-                    <a:pt x="787847" y="116992"/>
-                  </a:lnTo>
-                  <a:lnTo>
-                    <a:pt x="716225" y="120080"/>
-                  </a:lnTo>
-                  <a:lnTo>
-                    <a:pt x="644602" y="123155"/>
-                  </a:lnTo>
-                  <a:lnTo>
-                    <a:pt x="572980" y="126217"/>
-                  </a:lnTo>
-                  <a:lnTo>
-                    <a:pt x="501357" y="129265"/>
-                  </a:lnTo>
-                  <a:lnTo>
-                    <a:pt x="429735" y="132300"/>
-                  </a:lnTo>
-                  <a:lnTo>
-                    <a:pt x="358112" y="135322"/>
-                  </a:lnTo>
-                  <a:lnTo>
-                    <a:pt x="286490" y="138330"/>
-                  </a:lnTo>
-                  <a:lnTo>
-                    <a:pt x="214867" y="141326"/>
-                  </a:lnTo>
-                  <a:lnTo>
-                    <a:pt x="143245" y="144309"/>
-                  </a:lnTo>
-                  <a:lnTo>
-                    <a:pt x="71622" y="147279"/>
-                  </a:lnTo>
-                  <a:lnTo>
-                    <a:pt x="0" y="150236"/>
+                    <a:pt x="29091" y="17630"/>
+                  </a:lnTo>
+                  <a:lnTo>
+                    <a:pt x="99435" y="58843"/>
+                  </a:lnTo>
+                  <a:lnTo>
+                    <a:pt x="169780" y="98686"/>
+                  </a:lnTo>
+                  <a:lnTo>
+                    <a:pt x="240124" y="137204"/>
+                  </a:lnTo>
+                  <a:lnTo>
+                    <a:pt x="310469" y="174442"/>
+                  </a:lnTo>
+                  <a:lnTo>
+                    <a:pt x="380813" y="210442"/>
+                  </a:lnTo>
+                  <a:lnTo>
+                    <a:pt x="451158" y="245244"/>
+                  </a:lnTo>
+                  <a:lnTo>
+                    <a:pt x="521502" y="278890"/>
+                  </a:lnTo>
+                  <a:lnTo>
+                    <a:pt x="591847" y="311417"/>
+                  </a:lnTo>
+                  <a:lnTo>
+                    <a:pt x="662191" y="342862"/>
+                  </a:lnTo>
+                  <a:lnTo>
+                    <a:pt x="732536" y="373262"/>
+                  </a:lnTo>
+                  <a:lnTo>
+                    <a:pt x="802880" y="402652"/>
+                  </a:lnTo>
+                  <a:lnTo>
+                    <a:pt x="873224" y="431064"/>
+                  </a:lnTo>
+                  <a:lnTo>
+                    <a:pt x="943569" y="458531"/>
+                  </a:lnTo>
+                  <a:lnTo>
+                    <a:pt x="1013913" y="485085"/>
+                  </a:lnTo>
+                  <a:lnTo>
+                    <a:pt x="1084258" y="510757"/>
+                  </a:lnTo>
+                  <a:lnTo>
+                    <a:pt x="1154602" y="535575"/>
+                  </a:lnTo>
+                  <a:lnTo>
+                    <a:pt x="1224947" y="559567"/>
+                  </a:lnTo>
+                  <a:lnTo>
+                    <a:pt x="1295291" y="582762"/>
+                  </a:lnTo>
+                  <a:lnTo>
+                    <a:pt x="1365636" y="605186"/>
+                  </a:lnTo>
+                  <a:lnTo>
+                    <a:pt x="1435980" y="626864"/>
+                  </a:lnTo>
+                  <a:lnTo>
+                    <a:pt x="1506325" y="647822"/>
+                  </a:lnTo>
+                  <a:lnTo>
+                    <a:pt x="1576669" y="668082"/>
+                  </a:lnTo>
+                  <a:lnTo>
+                    <a:pt x="1647014" y="687669"/>
+                  </a:lnTo>
+                  <a:lnTo>
+                    <a:pt x="1717358" y="706605"/>
+                  </a:lnTo>
+                  <a:lnTo>
+                    <a:pt x="1787703" y="724912"/>
+                  </a:lnTo>
+                  <a:lnTo>
+                    <a:pt x="1858047" y="742609"/>
+                  </a:lnTo>
+                  <a:lnTo>
+                    <a:pt x="1928392" y="759718"/>
+                  </a:lnTo>
+                  <a:lnTo>
+                    <a:pt x="1998736" y="776259"/>
+                  </a:lnTo>
+                  <a:lnTo>
+                    <a:pt x="2069081" y="792249"/>
+                  </a:lnTo>
+                  <a:lnTo>
+                    <a:pt x="2139425" y="807708"/>
+                  </a:lnTo>
+                  <a:lnTo>
+                    <a:pt x="2209770" y="822653"/>
+                  </a:lnTo>
+                  <a:lnTo>
+                    <a:pt x="2280114" y="837101"/>
+                  </a:lnTo>
+                  <a:lnTo>
+                    <a:pt x="2350459" y="851068"/>
+                  </a:lnTo>
+                  <a:lnTo>
+                    <a:pt x="2420803" y="864571"/>
+                  </a:lnTo>
+                  <a:lnTo>
+                    <a:pt x="2491148" y="877625"/>
+                  </a:lnTo>
+                  <a:lnTo>
+                    <a:pt x="2561492" y="890246"/>
+                  </a:lnTo>
+                  <a:lnTo>
+                    <a:pt x="2631837" y="902446"/>
+                  </a:lnTo>
+                  <a:lnTo>
+                    <a:pt x="2702181" y="914241"/>
+                  </a:lnTo>
+                  <a:lnTo>
+                    <a:pt x="2772526" y="925644"/>
+                  </a:lnTo>
+                  <a:lnTo>
+                    <a:pt x="2842870" y="936667"/>
+                  </a:lnTo>
+                  <a:lnTo>
+                    <a:pt x="2913215" y="947325"/>
+                  </a:lnTo>
+                  <a:lnTo>
+                    <a:pt x="2983559" y="957627"/>
+                  </a:lnTo>
+                  <a:lnTo>
+                    <a:pt x="3053904" y="956596"/>
+                  </a:lnTo>
+                  <a:lnTo>
+                    <a:pt x="3124248" y="955287"/>
+                  </a:lnTo>
+                  <a:lnTo>
+                    <a:pt x="3194593" y="953972"/>
+                  </a:lnTo>
+                  <a:lnTo>
+                    <a:pt x="3264937" y="952652"/>
+                  </a:lnTo>
+                  <a:lnTo>
+                    <a:pt x="3335282" y="951326"/>
+                  </a:lnTo>
+                  <a:lnTo>
+                    <a:pt x="3405626" y="949994"/>
+                  </a:lnTo>
+                  <a:lnTo>
+                    <a:pt x="3475971" y="948657"/>
+                  </a:lnTo>
+                  <a:lnTo>
+                    <a:pt x="3546315" y="947313"/>
+                  </a:lnTo>
+                  <a:lnTo>
+                    <a:pt x="3616660" y="945964"/>
+                  </a:lnTo>
+                  <a:lnTo>
+                    <a:pt x="3687004" y="944609"/>
+                  </a:lnTo>
+                  <a:lnTo>
+                    <a:pt x="3757349" y="943248"/>
+                  </a:lnTo>
+                  <a:lnTo>
+                    <a:pt x="3827693" y="941881"/>
+                  </a:lnTo>
+                  <a:lnTo>
+                    <a:pt x="3898038" y="940508"/>
+                  </a:lnTo>
+                  <a:lnTo>
+                    <a:pt x="3968382" y="939129"/>
+                  </a:lnTo>
+                  <a:lnTo>
+                    <a:pt x="4038727" y="937744"/>
+                  </a:lnTo>
+                  <a:lnTo>
+                    <a:pt x="4109071" y="936354"/>
+                  </a:lnTo>
+                  <a:lnTo>
+                    <a:pt x="4179416" y="934957"/>
+                  </a:lnTo>
+                  <a:lnTo>
+                    <a:pt x="4249760" y="933554"/>
+                  </a:lnTo>
+                  <a:lnTo>
+                    <a:pt x="4320105" y="932144"/>
+                  </a:lnTo>
+                  <a:lnTo>
+                    <a:pt x="4390449" y="930729"/>
+                  </a:lnTo>
+                  <a:lnTo>
+                    <a:pt x="4460794" y="929308"/>
+                  </a:lnTo>
+                  <a:lnTo>
+                    <a:pt x="4531138" y="927880"/>
+                  </a:lnTo>
+                  <a:lnTo>
+                    <a:pt x="4601482" y="926446"/>
+                  </a:lnTo>
+                  <a:lnTo>
+                    <a:pt x="4671827" y="925006"/>
+                  </a:lnTo>
+                  <a:lnTo>
+                    <a:pt x="4742171" y="923560"/>
+                  </a:lnTo>
+                  <a:lnTo>
+                    <a:pt x="4812516" y="922107"/>
+                  </a:lnTo>
+                  <a:lnTo>
+                    <a:pt x="4882860" y="920648"/>
+                  </a:lnTo>
+                  <a:lnTo>
+                    <a:pt x="4953205" y="919183"/>
+                  </a:lnTo>
+                  <a:lnTo>
+                    <a:pt x="5023549" y="917711"/>
+                  </a:lnTo>
+                  <a:lnTo>
+                    <a:pt x="5093894" y="916233"/>
+                  </a:lnTo>
+                  <a:lnTo>
+                    <a:pt x="5164238" y="914748"/>
+                  </a:lnTo>
+                  <a:lnTo>
+                    <a:pt x="5234583" y="913257"/>
+                  </a:lnTo>
+                  <a:lnTo>
+                    <a:pt x="5304927" y="911760"/>
+                  </a:lnTo>
+                  <a:lnTo>
+                    <a:pt x="5375272" y="910256"/>
+                  </a:lnTo>
+                  <a:lnTo>
+                    <a:pt x="5445616" y="908745"/>
+                  </a:lnTo>
+                  <a:lnTo>
+                    <a:pt x="5515961" y="907228"/>
+                  </a:lnTo>
+                  <a:lnTo>
+                    <a:pt x="5586305" y="905704"/>
+                  </a:lnTo>
+                  <a:lnTo>
+                    <a:pt x="5656650" y="904174"/>
+                  </a:lnTo>
+                  <a:lnTo>
+                    <a:pt x="5726994" y="902637"/>
+                  </a:lnTo>
+                  <a:lnTo>
+                    <a:pt x="5797339" y="901093"/>
+                  </a:lnTo>
+                  <a:lnTo>
+                    <a:pt x="5867683" y="899543"/>
+                  </a:lnTo>
+                  <a:lnTo>
+                    <a:pt x="5938028" y="897986"/>
+                  </a:lnTo>
+                  <a:lnTo>
+                    <a:pt x="6008372" y="896422"/>
+                  </a:lnTo>
+                  <a:lnTo>
+                    <a:pt x="6078717" y="894851"/>
+                  </a:lnTo>
+                  <a:lnTo>
+                    <a:pt x="6149061" y="893273"/>
+                  </a:lnTo>
+                  <a:lnTo>
+                    <a:pt x="6219406" y="891689"/>
+                  </a:lnTo>
+                  <a:lnTo>
+                    <a:pt x="6289750" y="890097"/>
+                  </a:lnTo>
+                  <a:lnTo>
+                    <a:pt x="6360095" y="888499"/>
+                  </a:lnTo>
+                  <a:lnTo>
+                    <a:pt x="6430439" y="886893"/>
+                  </a:lnTo>
+                  <a:lnTo>
+                    <a:pt x="6500784" y="885281"/>
+                  </a:lnTo>
+                  <a:lnTo>
+                    <a:pt x="6571128" y="883662"/>
+                  </a:lnTo>
+                  <a:lnTo>
+                    <a:pt x="6641473" y="882035"/>
+                  </a:lnTo>
+                  <a:lnTo>
+                    <a:pt x="6711817" y="880402"/>
                   </a:lnTo>
                 </a:path>
               </a:pathLst>
@@ -4222,312 +3932,637 @@
           </p:nvSpPr>
           <p:spPr>
             <a:xfrm>
-              <a:off x="1172049" y="3923044"/>
-              <a:ext cx="7090630" cy="1254192"/>
+              <a:off x="1235312" y="3100991"/>
+              <a:ext cx="6964104" cy="249391"/>
             </a:xfrm>
             <a:custGeom>
               <a:avLst/>
               <a:pathLst>
-                <a:path w="7090630" h="1254192">
+                <a:path w="6964104" h="249391">
+                  <a:moveTo>
+                    <a:pt x="6964104" y="249391"/>
+                  </a:moveTo>
+                  <a:lnTo>
+                    <a:pt x="6893760" y="247674"/>
+                  </a:lnTo>
+                  <a:lnTo>
+                    <a:pt x="6823415" y="245899"/>
+                  </a:lnTo>
+                  <a:lnTo>
+                    <a:pt x="6753071" y="244062"/>
+                  </a:lnTo>
+                  <a:lnTo>
+                    <a:pt x="6682726" y="242162"/>
+                  </a:lnTo>
+                  <a:lnTo>
+                    <a:pt x="6612382" y="240197"/>
+                  </a:lnTo>
+                  <a:lnTo>
+                    <a:pt x="6542037" y="238164"/>
+                  </a:lnTo>
+                  <a:lnTo>
+                    <a:pt x="6471693" y="236062"/>
+                  </a:lnTo>
+                  <a:lnTo>
+                    <a:pt x="6401348" y="233887"/>
+                  </a:lnTo>
+                  <a:lnTo>
+                    <a:pt x="6331004" y="231637"/>
+                  </a:lnTo>
+                  <a:lnTo>
+                    <a:pt x="6260659" y="229310"/>
+                  </a:lnTo>
+                  <a:lnTo>
+                    <a:pt x="6190315" y="226903"/>
+                  </a:lnTo>
+                  <a:lnTo>
+                    <a:pt x="6119970" y="224413"/>
+                  </a:lnTo>
+                  <a:lnTo>
+                    <a:pt x="6049626" y="221837"/>
+                  </a:lnTo>
+                  <a:lnTo>
+                    <a:pt x="5979281" y="219173"/>
+                  </a:lnTo>
+                  <a:lnTo>
+                    <a:pt x="5908937" y="216417"/>
+                  </a:lnTo>
+                  <a:lnTo>
+                    <a:pt x="5838592" y="213567"/>
+                  </a:lnTo>
+                  <a:lnTo>
+                    <a:pt x="5768248" y="210618"/>
+                  </a:lnTo>
+                  <a:lnTo>
+                    <a:pt x="5697903" y="207568"/>
+                  </a:lnTo>
+                  <a:lnTo>
+                    <a:pt x="5627559" y="204413"/>
+                  </a:lnTo>
+                  <a:lnTo>
+                    <a:pt x="5557214" y="201150"/>
+                  </a:lnTo>
+                  <a:lnTo>
+                    <a:pt x="5486870" y="197774"/>
+                  </a:lnTo>
+                  <a:lnTo>
+                    <a:pt x="5416525" y="194283"/>
+                  </a:lnTo>
+                  <a:lnTo>
+                    <a:pt x="5346181" y="190671"/>
+                  </a:lnTo>
+                  <a:lnTo>
+                    <a:pt x="5275836" y="186935"/>
+                  </a:lnTo>
+                  <a:lnTo>
+                    <a:pt x="5205492" y="183070"/>
+                  </a:lnTo>
+                  <a:lnTo>
+                    <a:pt x="5135147" y="179073"/>
+                  </a:lnTo>
+                  <a:lnTo>
+                    <a:pt x="5064803" y="174938"/>
+                  </a:lnTo>
+                  <a:lnTo>
+                    <a:pt x="4994458" y="170661"/>
+                  </a:lnTo>
+                  <a:lnTo>
+                    <a:pt x="4924114" y="166237"/>
+                  </a:lnTo>
+                  <a:lnTo>
+                    <a:pt x="4853769" y="161660"/>
+                  </a:lnTo>
+                  <a:lnTo>
+                    <a:pt x="4783425" y="156927"/>
+                  </a:lnTo>
+                  <a:lnTo>
+                    <a:pt x="4713080" y="152030"/>
+                  </a:lnTo>
+                  <a:lnTo>
+                    <a:pt x="4642736" y="146965"/>
+                  </a:lnTo>
+                  <a:lnTo>
+                    <a:pt x="4572391" y="141726"/>
+                  </a:lnTo>
+                  <a:lnTo>
+                    <a:pt x="4502047" y="136307"/>
+                  </a:lnTo>
+                  <a:lnTo>
+                    <a:pt x="4431702" y="130701"/>
+                  </a:lnTo>
+                  <a:lnTo>
+                    <a:pt x="4361358" y="124903"/>
+                  </a:lnTo>
+                  <a:lnTo>
+                    <a:pt x="4291013" y="118905"/>
+                  </a:lnTo>
+                  <a:lnTo>
+                    <a:pt x="4220669" y="112701"/>
+                  </a:lnTo>
+                  <a:lnTo>
+                    <a:pt x="4150324" y="106283"/>
+                  </a:lnTo>
+                  <a:lnTo>
+                    <a:pt x="4079980" y="99645"/>
+                  </a:lnTo>
+                  <a:lnTo>
+                    <a:pt x="4009635" y="92779"/>
+                  </a:lnTo>
+                  <a:lnTo>
+                    <a:pt x="3939291" y="85676"/>
+                  </a:lnTo>
+                  <a:lnTo>
+                    <a:pt x="3868946" y="78329"/>
+                  </a:lnTo>
+                  <a:lnTo>
+                    <a:pt x="3798602" y="70729"/>
+                  </a:lnTo>
+                  <a:lnTo>
+                    <a:pt x="3728257" y="62868"/>
+                  </a:lnTo>
+                  <a:lnTo>
+                    <a:pt x="3657913" y="54737"/>
+                  </a:lnTo>
+                  <a:lnTo>
+                    <a:pt x="3587569" y="46326"/>
+                  </a:lnTo>
+                  <a:lnTo>
+                    <a:pt x="3517224" y="37626"/>
+                  </a:lnTo>
+                  <a:lnTo>
+                    <a:pt x="3446880" y="28626"/>
+                  </a:lnTo>
+                  <a:lnTo>
+                    <a:pt x="3376535" y="19317"/>
+                  </a:lnTo>
+                  <a:lnTo>
+                    <a:pt x="3306191" y="9688"/>
+                  </a:lnTo>
+                  <a:lnTo>
+                    <a:pt x="3235846" y="0"/>
+                  </a:lnTo>
+                  <a:lnTo>
+                    <a:pt x="3165502" y="1297"/>
+                  </a:lnTo>
+                  <a:lnTo>
+                    <a:pt x="3095157" y="2589"/>
+                  </a:lnTo>
+                  <a:lnTo>
+                    <a:pt x="3024813" y="3875"/>
+                  </a:lnTo>
+                  <a:lnTo>
+                    <a:pt x="2954468" y="5156"/>
+                  </a:lnTo>
+                  <a:lnTo>
+                    <a:pt x="2884124" y="6431"/>
+                  </a:lnTo>
+                  <a:lnTo>
+                    <a:pt x="2813779" y="7701"/>
+                  </a:lnTo>
+                  <a:lnTo>
+                    <a:pt x="2743435" y="8965"/>
+                  </a:lnTo>
+                  <a:lnTo>
+                    <a:pt x="2673090" y="10223"/>
+                  </a:lnTo>
+                  <a:lnTo>
+                    <a:pt x="2602746" y="11477"/>
+                  </a:lnTo>
+                  <a:lnTo>
+                    <a:pt x="2532401" y="12724"/>
+                  </a:lnTo>
+                  <a:lnTo>
+                    <a:pt x="2462057" y="13967"/>
+                  </a:lnTo>
+                  <a:lnTo>
+                    <a:pt x="2391712" y="15204"/>
+                  </a:lnTo>
+                  <a:lnTo>
+                    <a:pt x="2321368" y="16435"/>
+                  </a:lnTo>
+                  <a:lnTo>
+                    <a:pt x="2251023" y="17661"/>
+                  </a:lnTo>
+                  <a:lnTo>
+                    <a:pt x="2180679" y="18882"/>
+                  </a:lnTo>
+                  <a:lnTo>
+                    <a:pt x="2110334" y="20098"/>
+                  </a:lnTo>
+                  <a:lnTo>
+                    <a:pt x="2039990" y="21308"/>
+                  </a:lnTo>
+                  <a:lnTo>
+                    <a:pt x="1969645" y="22513"/>
+                  </a:lnTo>
+                  <a:lnTo>
+                    <a:pt x="1899301" y="23713"/>
+                  </a:lnTo>
+                  <a:lnTo>
+                    <a:pt x="1828956" y="24908"/>
+                  </a:lnTo>
+                  <a:lnTo>
+                    <a:pt x="1758612" y="26098"/>
+                  </a:lnTo>
+                  <a:lnTo>
+                    <a:pt x="1688267" y="27282"/>
+                  </a:lnTo>
+                  <a:lnTo>
+                    <a:pt x="1617923" y="28461"/>
+                  </a:lnTo>
+                  <a:lnTo>
+                    <a:pt x="1547578" y="29635"/>
+                  </a:lnTo>
+                  <a:lnTo>
+                    <a:pt x="1477234" y="30804"/>
+                  </a:lnTo>
+                  <a:lnTo>
+                    <a:pt x="1406889" y="31968"/>
+                  </a:lnTo>
+                  <a:lnTo>
+                    <a:pt x="1336545" y="33127"/>
+                  </a:lnTo>
+                  <a:lnTo>
+                    <a:pt x="1266200" y="34281"/>
+                  </a:lnTo>
+                  <a:lnTo>
+                    <a:pt x="1195856" y="35430"/>
+                  </a:lnTo>
+                  <a:lnTo>
+                    <a:pt x="1125511" y="36574"/>
+                  </a:lnTo>
+                  <a:lnTo>
+                    <a:pt x="1055167" y="37713"/>
+                  </a:lnTo>
+                  <a:lnTo>
+                    <a:pt x="984822" y="38847"/>
+                  </a:lnTo>
+                  <a:lnTo>
+                    <a:pt x="914478" y="39976"/>
+                  </a:lnTo>
+                  <a:lnTo>
+                    <a:pt x="844133" y="41100"/>
+                  </a:lnTo>
+                  <a:lnTo>
+                    <a:pt x="773789" y="42219"/>
+                  </a:lnTo>
+                  <a:lnTo>
+                    <a:pt x="703444" y="43334"/>
+                  </a:lnTo>
+                  <a:lnTo>
+                    <a:pt x="633100" y="44443"/>
+                  </a:lnTo>
+                  <a:lnTo>
+                    <a:pt x="562755" y="45548"/>
+                  </a:lnTo>
+                  <a:lnTo>
+                    <a:pt x="492411" y="46648"/>
+                  </a:lnTo>
+                  <a:lnTo>
+                    <a:pt x="422066" y="47744"/>
+                  </a:lnTo>
+                  <a:lnTo>
+                    <a:pt x="351722" y="48834"/>
+                  </a:lnTo>
+                  <a:lnTo>
+                    <a:pt x="281377" y="49920"/>
+                  </a:lnTo>
+                  <a:lnTo>
+                    <a:pt x="211033" y="51001"/>
+                  </a:lnTo>
+                  <a:lnTo>
+                    <a:pt x="140688" y="52077"/>
+                  </a:lnTo>
+                  <a:lnTo>
+                    <a:pt x="70344" y="53149"/>
+                  </a:lnTo>
+                  <a:lnTo>
+                    <a:pt x="0" y="54216"/>
+                  </a:lnTo>
+                </a:path>
+              </a:pathLst>
+            </a:custGeom>
+          </p:spPr>
+          <p:txBody>
+            <a:bodyPr/>
+            <a:lstStyle/>
+            <a:p/>
+          </p:txBody>
+        </p:sp>
+        <p:sp>
+          <p:nvSpPr>
+            <p:cNvPr id="24" name="pl24"/>
+            <p:cNvSpPr/>
+            <p:nvPr/>
+          </p:nvSpPr>
+          <p:spPr>
+            <a:xfrm>
+              <a:off x="1235312" y="2810547"/>
+              <a:ext cx="6964104" cy="452608"/>
+            </a:xfrm>
+            <a:custGeom>
+              <a:avLst/>
+              <a:pathLst>
+                <a:path w="6964104" h="452608">
                   <a:moveTo>
                     <a:pt x="0" y="0"/>
                   </a:moveTo>
                   <a:lnTo>
-                    <a:pt x="71622" y="23902"/>
-                  </a:lnTo>
-                  <a:lnTo>
-                    <a:pt x="143245" y="47455"/>
-                  </a:lnTo>
-                  <a:lnTo>
-                    <a:pt x="214867" y="70663"/>
-                  </a:lnTo>
-                  <a:lnTo>
-                    <a:pt x="286490" y="93532"/>
-                  </a:lnTo>
-                  <a:lnTo>
-                    <a:pt x="358112" y="116067"/>
-                  </a:lnTo>
-                  <a:lnTo>
-                    <a:pt x="429735" y="138272"/>
-                  </a:lnTo>
-                  <a:lnTo>
-                    <a:pt x="501357" y="160152"/>
-                  </a:lnTo>
-                  <a:lnTo>
-                    <a:pt x="572980" y="181712"/>
-                  </a:lnTo>
-                  <a:lnTo>
-                    <a:pt x="644602" y="202957"/>
-                  </a:lnTo>
-                  <a:lnTo>
-                    <a:pt x="716225" y="223891"/>
-                  </a:lnTo>
-                  <a:lnTo>
-                    <a:pt x="787847" y="244519"/>
-                  </a:lnTo>
-                  <a:lnTo>
-                    <a:pt x="859470" y="264845"/>
-                  </a:lnTo>
-                  <a:lnTo>
-                    <a:pt x="931092" y="284873"/>
-                  </a:lnTo>
-                  <a:lnTo>
-                    <a:pt x="1002715" y="304609"/>
-                  </a:lnTo>
-                  <a:lnTo>
-                    <a:pt x="1074337" y="324056"/>
-                  </a:lnTo>
-                  <a:lnTo>
-                    <a:pt x="1145960" y="343219"/>
-                  </a:lnTo>
-                  <a:lnTo>
-                    <a:pt x="1217582" y="362102"/>
-                  </a:lnTo>
-                  <a:lnTo>
-                    <a:pt x="1289205" y="380708"/>
-                  </a:lnTo>
-                  <a:lnTo>
-                    <a:pt x="1360827" y="399042"/>
-                  </a:lnTo>
-                  <a:lnTo>
-                    <a:pt x="1432450" y="417108"/>
-                  </a:lnTo>
-                  <a:lnTo>
-                    <a:pt x="1504073" y="434910"/>
-                  </a:lnTo>
-                  <a:lnTo>
-                    <a:pt x="1575695" y="452451"/>
-                  </a:lnTo>
-                  <a:lnTo>
-                    <a:pt x="1647318" y="469736"/>
-                  </a:lnTo>
-                  <a:lnTo>
-                    <a:pt x="1718940" y="486768"/>
-                  </a:lnTo>
-                  <a:lnTo>
-                    <a:pt x="1790563" y="503551"/>
-                  </a:lnTo>
-                  <a:lnTo>
-                    <a:pt x="1862185" y="520088"/>
-                  </a:lnTo>
-                  <a:lnTo>
-                    <a:pt x="1933808" y="536384"/>
-                  </a:lnTo>
-                  <a:lnTo>
-                    <a:pt x="2005430" y="552441"/>
-                  </a:lnTo>
-                  <a:lnTo>
-                    <a:pt x="2077053" y="568263"/>
-                  </a:lnTo>
-                  <a:lnTo>
-                    <a:pt x="2148675" y="583854"/>
-                  </a:lnTo>
-                  <a:lnTo>
-                    <a:pt x="2220298" y="599217"/>
-                  </a:lnTo>
-                  <a:lnTo>
-                    <a:pt x="2291920" y="614355"/>
-                  </a:lnTo>
-                  <a:lnTo>
-                    <a:pt x="2363543" y="629272"/>
-                  </a:lnTo>
-                  <a:lnTo>
-                    <a:pt x="2435165" y="643970"/>
-                  </a:lnTo>
-                  <a:lnTo>
-                    <a:pt x="2506788" y="658454"/>
-                  </a:lnTo>
-                  <a:lnTo>
-                    <a:pt x="2578410" y="672726"/>
-                  </a:lnTo>
-                  <a:lnTo>
-                    <a:pt x="2650033" y="686789"/>
-                  </a:lnTo>
-                  <a:lnTo>
-                    <a:pt x="2721655" y="700646"/>
-                  </a:lnTo>
-                  <a:lnTo>
-                    <a:pt x="2793278" y="714301"/>
-                  </a:lnTo>
-                  <a:lnTo>
-                    <a:pt x="2864901" y="727755"/>
-                  </a:lnTo>
-                  <a:lnTo>
-                    <a:pt x="2936523" y="741014"/>
-                  </a:lnTo>
-                  <a:lnTo>
-                    <a:pt x="3008146" y="754078"/>
-                  </a:lnTo>
-                  <a:lnTo>
-                    <a:pt x="3079768" y="766951"/>
-                  </a:lnTo>
-                  <a:lnTo>
-                    <a:pt x="3151391" y="779636"/>
-                  </a:lnTo>
-                  <a:lnTo>
-                    <a:pt x="3223013" y="792135"/>
-                  </a:lnTo>
-                  <a:lnTo>
-                    <a:pt x="3294636" y="804451"/>
-                  </a:lnTo>
-                  <a:lnTo>
-                    <a:pt x="3366258" y="816588"/>
-                  </a:lnTo>
-                  <a:lnTo>
-                    <a:pt x="3437881" y="828546"/>
-                  </a:lnTo>
-                  <a:lnTo>
-                    <a:pt x="3509503" y="840330"/>
-                  </a:lnTo>
-                  <a:lnTo>
-                    <a:pt x="3581126" y="851942"/>
-                  </a:lnTo>
-                  <a:lnTo>
-                    <a:pt x="3652748" y="863384"/>
-                  </a:lnTo>
-                  <a:lnTo>
-                    <a:pt x="3724371" y="874658"/>
-                  </a:lnTo>
-                  <a:lnTo>
-                    <a:pt x="3795993" y="885767"/>
-                  </a:lnTo>
-                  <a:lnTo>
-                    <a:pt x="3867616" y="896714"/>
-                  </a:lnTo>
-                  <a:lnTo>
-                    <a:pt x="3939238" y="907501"/>
-                  </a:lnTo>
-                  <a:lnTo>
-                    <a:pt x="4010861" y="918130"/>
-                  </a:lnTo>
-                  <a:lnTo>
-                    <a:pt x="4082483" y="928604"/>
-                  </a:lnTo>
-                  <a:lnTo>
-                    <a:pt x="4154106" y="938924"/>
-                  </a:lnTo>
-                  <a:lnTo>
-                    <a:pt x="4225729" y="949094"/>
-                  </a:lnTo>
-                  <a:lnTo>
-                    <a:pt x="4297351" y="959114"/>
-                  </a:lnTo>
-                  <a:lnTo>
-                    <a:pt x="4368974" y="968988"/>
-                  </a:lnTo>
-                  <a:lnTo>
-                    <a:pt x="4440596" y="978718"/>
-                  </a:lnTo>
-                  <a:lnTo>
-                    <a:pt x="4512219" y="988306"/>
-                  </a:lnTo>
-                  <a:lnTo>
-                    <a:pt x="4583841" y="997753"/>
-                  </a:lnTo>
-                  <a:lnTo>
-                    <a:pt x="4655464" y="1007062"/>
-                  </a:lnTo>
-                  <a:lnTo>
-                    <a:pt x="4727086" y="1016235"/>
-                  </a:lnTo>
-                  <a:lnTo>
-                    <a:pt x="4798709" y="1025273"/>
-                  </a:lnTo>
-                  <a:lnTo>
-                    <a:pt x="4870331" y="1034180"/>
-                  </a:lnTo>
-                  <a:lnTo>
-                    <a:pt x="4941954" y="1042956"/>
-                  </a:lnTo>
-                  <a:lnTo>
-                    <a:pt x="5013576" y="1051604"/>
-                  </a:lnTo>
-                  <a:lnTo>
-                    <a:pt x="5085199" y="1060125"/>
-                  </a:lnTo>
-                  <a:lnTo>
-                    <a:pt x="5156821" y="1068522"/>
-                  </a:lnTo>
-                  <a:lnTo>
-                    <a:pt x="5228444" y="1076796"/>
-                  </a:lnTo>
-                  <a:lnTo>
-                    <a:pt x="5300066" y="1084949"/>
-                  </a:lnTo>
-                  <a:lnTo>
-                    <a:pt x="5371689" y="1092982"/>
-                  </a:lnTo>
-                  <a:lnTo>
-                    <a:pt x="5443311" y="1100898"/>
-                  </a:lnTo>
-                  <a:lnTo>
-                    <a:pt x="5514934" y="1108699"/>
-                  </a:lnTo>
-                  <a:lnTo>
-                    <a:pt x="5586557" y="1116385"/>
-                  </a:lnTo>
-                  <a:lnTo>
-                    <a:pt x="5658179" y="1123959"/>
-                  </a:lnTo>
-                  <a:lnTo>
-                    <a:pt x="5729802" y="1131422"/>
-                  </a:lnTo>
-                  <a:lnTo>
-                    <a:pt x="5801424" y="1138776"/>
-                  </a:lnTo>
-                  <a:lnTo>
-                    <a:pt x="5873047" y="1146022"/>
-                  </a:lnTo>
-                  <a:lnTo>
-                    <a:pt x="5944669" y="1153163"/>
-                  </a:lnTo>
-                  <a:lnTo>
-                    <a:pt x="6016292" y="1160199"/>
-                  </a:lnTo>
-                  <a:lnTo>
-                    <a:pt x="6087914" y="1167132"/>
-                  </a:lnTo>
-                  <a:lnTo>
-                    <a:pt x="6159537" y="1173963"/>
-                  </a:lnTo>
-                  <a:lnTo>
-                    <a:pt x="6231159" y="1180695"/>
-                  </a:lnTo>
-                  <a:lnTo>
-                    <a:pt x="6302782" y="1187328"/>
-                  </a:lnTo>
-                  <a:lnTo>
-                    <a:pt x="6374404" y="1193864"/>
-                  </a:lnTo>
-                  <a:lnTo>
-                    <a:pt x="6446027" y="1200305"/>
-                  </a:lnTo>
-                  <a:lnTo>
-                    <a:pt x="6517649" y="1206651"/>
-                  </a:lnTo>
-                  <a:lnTo>
-                    <a:pt x="6589272" y="1212905"/>
-                  </a:lnTo>
-                  <a:lnTo>
-                    <a:pt x="6660894" y="1219067"/>
-                  </a:lnTo>
-                  <a:lnTo>
-                    <a:pt x="6732517" y="1225139"/>
-                  </a:lnTo>
-                  <a:lnTo>
-                    <a:pt x="6804139" y="1231122"/>
-                  </a:lnTo>
-                  <a:lnTo>
-                    <a:pt x="6875762" y="1237018"/>
-                  </a:lnTo>
-                  <a:lnTo>
-                    <a:pt x="6947385" y="1242827"/>
-                  </a:lnTo>
-                  <a:lnTo>
-                    <a:pt x="7019007" y="1248552"/>
-                  </a:lnTo>
-                  <a:lnTo>
-                    <a:pt x="7090630" y="1254192"/>
+                    <a:pt x="70344" y="8625"/>
+                  </a:lnTo>
+                  <a:lnTo>
+                    <a:pt x="140688" y="17125"/>
+                  </a:lnTo>
+                  <a:lnTo>
+                    <a:pt x="211033" y="25500"/>
+                  </a:lnTo>
+                  <a:lnTo>
+                    <a:pt x="281377" y="33753"/>
+                  </a:lnTo>
+                  <a:lnTo>
+                    <a:pt x="351722" y="41885"/>
+                  </a:lnTo>
+                  <a:lnTo>
+                    <a:pt x="422066" y="49899"/>
+                  </a:lnTo>
+                  <a:lnTo>
+                    <a:pt x="492411" y="57795"/>
+                  </a:lnTo>
+                  <a:lnTo>
+                    <a:pt x="562755" y="65575"/>
+                  </a:lnTo>
+                  <a:lnTo>
+                    <a:pt x="633100" y="73242"/>
+                  </a:lnTo>
+                  <a:lnTo>
+                    <a:pt x="703444" y="80797"/>
+                  </a:lnTo>
+                  <a:lnTo>
+                    <a:pt x="773789" y="88241"/>
+                  </a:lnTo>
+                  <a:lnTo>
+                    <a:pt x="844133" y="95576"/>
+                  </a:lnTo>
+                  <a:lnTo>
+                    <a:pt x="914478" y="102804"/>
+                  </a:lnTo>
+                  <a:lnTo>
+                    <a:pt x="984822" y="109926"/>
+                  </a:lnTo>
+                  <a:lnTo>
+                    <a:pt x="1055167" y="116944"/>
+                  </a:lnTo>
+                  <a:lnTo>
+                    <a:pt x="1125511" y="123859"/>
+                  </a:lnTo>
+                  <a:lnTo>
+                    <a:pt x="1195856" y="130674"/>
+                  </a:lnTo>
+                  <a:lnTo>
+                    <a:pt x="1266200" y="137388"/>
+                  </a:lnTo>
+                  <a:lnTo>
+                    <a:pt x="1336545" y="144005"/>
+                  </a:lnTo>
+                  <a:lnTo>
+                    <a:pt x="1406889" y="150524"/>
+                  </a:lnTo>
+                  <a:lnTo>
+                    <a:pt x="1477234" y="156948"/>
+                  </a:lnTo>
+                  <a:lnTo>
+                    <a:pt x="1547578" y="163279"/>
+                  </a:lnTo>
+                  <a:lnTo>
+                    <a:pt x="1617923" y="169516"/>
+                  </a:lnTo>
+                  <a:lnTo>
+                    <a:pt x="1688267" y="175663"/>
+                  </a:lnTo>
+                  <a:lnTo>
+                    <a:pt x="1758612" y="181719"/>
+                  </a:lnTo>
+                  <a:lnTo>
+                    <a:pt x="1828956" y="187687"/>
+                  </a:lnTo>
+                  <a:lnTo>
+                    <a:pt x="1899301" y="193568"/>
+                  </a:lnTo>
+                  <a:lnTo>
+                    <a:pt x="1969645" y="199363"/>
+                  </a:lnTo>
+                  <a:lnTo>
+                    <a:pt x="2039990" y="205073"/>
+                  </a:lnTo>
+                  <a:lnTo>
+                    <a:pt x="2110334" y="210699"/>
+                  </a:lnTo>
+                  <a:lnTo>
+                    <a:pt x="2180679" y="216243"/>
+                  </a:lnTo>
+                  <a:lnTo>
+                    <a:pt x="2251023" y="221706"/>
+                  </a:lnTo>
+                  <a:lnTo>
+                    <a:pt x="2321368" y="227089"/>
+                  </a:lnTo>
+                  <a:lnTo>
+                    <a:pt x="2391712" y="232393"/>
+                  </a:lnTo>
+                  <a:lnTo>
+                    <a:pt x="2462057" y="237620"/>
+                  </a:lnTo>
+                  <a:lnTo>
+                    <a:pt x="2532401" y="242771"/>
+                  </a:lnTo>
+                  <a:lnTo>
+                    <a:pt x="2602746" y="247846"/>
+                  </a:lnTo>
+                  <a:lnTo>
+                    <a:pt x="2673090" y="252846"/>
+                  </a:lnTo>
+                  <a:lnTo>
+                    <a:pt x="2743435" y="257774"/>
+                  </a:lnTo>
+                  <a:lnTo>
+                    <a:pt x="2813779" y="262629"/>
+                  </a:lnTo>
+                  <a:lnTo>
+                    <a:pt x="2884124" y="267414"/>
+                  </a:lnTo>
+                  <a:lnTo>
+                    <a:pt x="2954468" y="272129"/>
+                  </a:lnTo>
+                  <a:lnTo>
+                    <a:pt x="3024813" y="276774"/>
+                  </a:lnTo>
+                  <a:lnTo>
+                    <a:pt x="3095157" y="281352"/>
+                  </a:lnTo>
+                  <a:lnTo>
+                    <a:pt x="3165502" y="285863"/>
+                  </a:lnTo>
+                  <a:lnTo>
+                    <a:pt x="3235846" y="290307"/>
+                  </a:lnTo>
+                  <a:lnTo>
+                    <a:pt x="3306191" y="294687"/>
+                  </a:lnTo>
+                  <a:lnTo>
+                    <a:pt x="3376535" y="299003"/>
+                  </a:lnTo>
+                  <a:lnTo>
+                    <a:pt x="3446880" y="303255"/>
+                  </a:lnTo>
+                  <a:lnTo>
+                    <a:pt x="3517224" y="307445"/>
+                  </a:lnTo>
+                  <a:lnTo>
+                    <a:pt x="3587569" y="311574"/>
+                  </a:lnTo>
+                  <a:lnTo>
+                    <a:pt x="3657913" y="315643"/>
+                  </a:lnTo>
+                  <a:lnTo>
+                    <a:pt x="3728257" y="319652"/>
+                  </a:lnTo>
+                  <a:lnTo>
+                    <a:pt x="3798602" y="323603"/>
+                  </a:lnTo>
+                  <a:lnTo>
+                    <a:pt x="3868946" y="327495"/>
+                  </a:lnTo>
+                  <a:lnTo>
+                    <a:pt x="3939291" y="331331"/>
+                  </a:lnTo>
+                  <a:lnTo>
+                    <a:pt x="4009635" y="335111"/>
+                  </a:lnTo>
+                  <a:lnTo>
+                    <a:pt x="4079980" y="338835"/>
+                  </a:lnTo>
+                  <a:lnTo>
+                    <a:pt x="4150324" y="342505"/>
+                  </a:lnTo>
+                  <a:lnTo>
+                    <a:pt x="4220669" y="346121"/>
+                  </a:lnTo>
+                  <a:lnTo>
+                    <a:pt x="4291013" y="349685"/>
+                  </a:lnTo>
+                  <a:lnTo>
+                    <a:pt x="4361358" y="353196"/>
+                  </a:lnTo>
+                  <a:lnTo>
+                    <a:pt x="4431702" y="356656"/>
+                  </a:lnTo>
+                  <a:lnTo>
+                    <a:pt x="4502047" y="360065"/>
+                  </a:lnTo>
+                  <a:lnTo>
+                    <a:pt x="4572391" y="363425"/>
+                  </a:lnTo>
+                  <a:lnTo>
+                    <a:pt x="4642736" y="366735"/>
+                  </a:lnTo>
+                  <a:lnTo>
+                    <a:pt x="4713080" y="369997"/>
+                  </a:lnTo>
+                  <a:lnTo>
+                    <a:pt x="4783425" y="373211"/>
+                  </a:lnTo>
+                  <a:lnTo>
+                    <a:pt x="4853769" y="376378"/>
+                  </a:lnTo>
+                  <a:lnTo>
+                    <a:pt x="4924114" y="379499"/>
+                  </a:lnTo>
+                  <a:lnTo>
+                    <a:pt x="4994458" y="382574"/>
+                  </a:lnTo>
+                  <a:lnTo>
+                    <a:pt x="5064803" y="385604"/>
+                  </a:lnTo>
+                  <a:lnTo>
+                    <a:pt x="5135147" y="388590"/>
+                  </a:lnTo>
+                  <a:lnTo>
+                    <a:pt x="5205492" y="391532"/>
+                  </a:lnTo>
+                  <a:lnTo>
+                    <a:pt x="5275836" y="394431"/>
+                  </a:lnTo>
+                  <a:lnTo>
+                    <a:pt x="5346181" y="397288"/>
+                  </a:lnTo>
+                  <a:lnTo>
+                    <a:pt x="5416525" y="400103"/>
+                  </a:lnTo>
+                  <a:lnTo>
+                    <a:pt x="5486870" y="402877"/>
+                  </a:lnTo>
+                  <a:lnTo>
+                    <a:pt x="5557214" y="405610"/>
+                  </a:lnTo>
+                  <a:lnTo>
+                    <a:pt x="5627559" y="408303"/>
+                  </a:lnTo>
+                  <a:lnTo>
+                    <a:pt x="5697903" y="410957"/>
+                  </a:lnTo>
+                  <a:lnTo>
+                    <a:pt x="5768248" y="413572"/>
+                  </a:lnTo>
+                  <a:lnTo>
+                    <a:pt x="5838592" y="416149"/>
+                  </a:lnTo>
+                  <a:lnTo>
+                    <a:pt x="5908937" y="418688"/>
+                  </a:lnTo>
+                  <a:lnTo>
+                    <a:pt x="5979281" y="421190"/>
+                  </a:lnTo>
+                  <a:lnTo>
+                    <a:pt x="6049626" y="423655"/>
+                  </a:lnTo>
+                  <a:lnTo>
+                    <a:pt x="6119970" y="426085"/>
+                  </a:lnTo>
+                  <a:lnTo>
+                    <a:pt x="6190315" y="428478"/>
+                  </a:lnTo>
+                  <a:lnTo>
+                    <a:pt x="6260659" y="430837"/>
+                  </a:lnTo>
+                  <a:lnTo>
+                    <a:pt x="6331004" y="433161"/>
+                  </a:lnTo>
+                  <a:lnTo>
+                    <a:pt x="6401348" y="435452"/>
+                  </a:lnTo>
+                  <a:lnTo>
+                    <a:pt x="6471693" y="437708"/>
+                  </a:lnTo>
+                  <a:lnTo>
+                    <a:pt x="6542037" y="439932"/>
+                  </a:lnTo>
+                  <a:lnTo>
+                    <a:pt x="6612382" y="442123"/>
+                  </a:lnTo>
+                  <a:lnTo>
+                    <a:pt x="6682726" y="444283"/>
+                  </a:lnTo>
+                  <a:lnTo>
+                    <a:pt x="6753071" y="446410"/>
+                  </a:lnTo>
+                  <a:lnTo>
+                    <a:pt x="6823415" y="448507"/>
+                  </a:lnTo>
+                  <a:lnTo>
+                    <a:pt x="6893760" y="450573"/>
+                  </a:lnTo>
+                  <a:lnTo>
+                    <a:pt x="6964104" y="452608"/>
                   </a:lnTo>
                 </a:path>
               </a:pathLst>
@@ -4550,27 +4585,27 @@
         </p:sp>
         <p:sp>
           <p:nvSpPr>
-            <p:cNvPr id="24" name="pl24"/>
+            <p:cNvPr id="25" name="pl25"/>
             <p:cNvSpPr/>
             <p:nvPr/>
           </p:nvSpPr>
           <p:spPr>
             <a:xfrm>
-              <a:off x="817517" y="4727786"/>
-              <a:ext cx="7799693" cy="0"/>
+              <a:off x="887106" y="3100960"/>
+              <a:ext cx="7660515" cy="0"/>
             </a:xfrm>
             <a:custGeom>
               <a:avLst/>
               <a:pathLst>
-                <a:path w="7799693" h="0">
+                <a:path w="7660515" h="0">
                   <a:moveTo>
                     <a:pt x="0" y="0"/>
                   </a:moveTo>
                   <a:lnTo>
-                    <a:pt x="7799693" y="0"/>
-                  </a:lnTo>
-                  <a:lnTo>
-                    <a:pt x="7799693" y="0"/>
+                    <a:pt x="7660515" y="0"/>
+                  </a:lnTo>
+                  <a:lnTo>
+                    <a:pt x="7660515" y="0"/>
                   </a:lnTo>
                 </a:path>
               </a:pathLst>
@@ -4593,21 +4628,21 @@
         </p:sp>
         <p:sp>
           <p:nvSpPr>
-            <p:cNvPr id="25" name="pl25"/>
+            <p:cNvPr id="26" name="pl26"/>
             <p:cNvSpPr/>
             <p:nvPr/>
           </p:nvSpPr>
           <p:spPr>
             <a:xfrm>
-              <a:off x="4468386" y="2073503"/>
-              <a:ext cx="0" cy="3649639"/>
+              <a:off x="4472829" y="2143092"/>
+              <a:ext cx="0" cy="1317069"/>
             </a:xfrm>
             <a:custGeom>
               <a:avLst/>
               <a:pathLst>
-                <a:path w="0" h="3649639">
+                <a:path w="0" h="1317069">
                   <a:moveTo>
-                    <a:pt x="0" y="3649639"/>
+                    <a:pt x="0" y="1317069"/>
                   </a:moveTo>
                   <a:lnTo>
                     <a:pt x="0" y="0"/>
@@ -4636,13 +4671,13 @@
         </p:sp>
         <p:sp>
           <p:nvSpPr>
-            <p:cNvPr id="26" name="tx26"/>
+            <p:cNvPr id="27" name="tx27"/>
             <p:cNvSpPr/>
             <p:nvPr/>
           </p:nvSpPr>
           <p:spPr>
             <a:xfrm>
-              <a:off x="692708" y="5517199"/>
+              <a:off x="762297" y="3360243"/>
               <a:ext cx="62179" cy="80101"/>
             </a:xfrm>
             <a:prstGeom prst="rect">
@@ -4682,13 +4717,13 @@
         </p:sp>
         <p:sp>
           <p:nvSpPr>
-            <p:cNvPr id="27" name="tx27"/>
+            <p:cNvPr id="28" name="tx28"/>
             <p:cNvSpPr/>
             <p:nvPr/>
           </p:nvSpPr>
           <p:spPr>
             <a:xfrm>
-              <a:off x="692708" y="4687735"/>
+              <a:off x="762297" y="3060909"/>
               <a:ext cx="62179" cy="80101"/>
             </a:xfrm>
             <a:prstGeom prst="rect">
@@ -4728,13 +4763,13 @@
         </p:sp>
         <p:sp>
           <p:nvSpPr>
-            <p:cNvPr id="28" name="tx28"/>
+            <p:cNvPr id="29" name="tx29"/>
             <p:cNvSpPr/>
             <p:nvPr/>
           </p:nvSpPr>
           <p:spPr>
             <a:xfrm>
-              <a:off x="692708" y="3858272"/>
+              <a:off x="762297" y="2761575"/>
               <a:ext cx="62179" cy="80101"/>
             </a:xfrm>
             <a:prstGeom prst="rect">
@@ -4774,13 +4809,13 @@
         </p:sp>
         <p:sp>
           <p:nvSpPr>
-            <p:cNvPr id="29" name="tx29"/>
+            <p:cNvPr id="30" name="tx30"/>
             <p:cNvSpPr/>
             <p:nvPr/>
           </p:nvSpPr>
           <p:spPr>
             <a:xfrm>
-              <a:off x="692708" y="3028808"/>
+              <a:off x="762297" y="2462242"/>
               <a:ext cx="62179" cy="80101"/>
             </a:xfrm>
             <a:prstGeom prst="rect">
@@ -4820,13 +4855,13 @@
         </p:sp>
         <p:sp>
           <p:nvSpPr>
-            <p:cNvPr id="30" name="tx30"/>
+            <p:cNvPr id="31" name="tx31"/>
             <p:cNvSpPr/>
             <p:nvPr/>
           </p:nvSpPr>
           <p:spPr>
             <a:xfrm>
-              <a:off x="692708" y="2199345"/>
+              <a:off x="762297" y="2162908"/>
               <a:ext cx="62179" cy="80101"/>
             </a:xfrm>
             <a:prstGeom prst="rect">
@@ -4866,13 +4901,13 @@
         </p:sp>
         <p:sp>
           <p:nvSpPr>
-            <p:cNvPr id="31" name="tx31"/>
+            <p:cNvPr id="32" name="tx32"/>
             <p:cNvSpPr/>
             <p:nvPr/>
           </p:nvSpPr>
           <p:spPr>
             <a:xfrm>
-              <a:off x="2478335" y="5785772"/>
+              <a:off x="2516846" y="3522791"/>
               <a:ext cx="161574" cy="80101"/>
             </a:xfrm>
             <a:prstGeom prst="rect">
@@ -4912,13 +4947,13 @@
         </p:sp>
         <p:sp>
           <p:nvSpPr>
-            <p:cNvPr id="32" name="tx32"/>
+            <p:cNvPr id="33" name="tx33"/>
             <p:cNvSpPr/>
             <p:nvPr/>
           </p:nvSpPr>
           <p:spPr>
             <a:xfrm>
-              <a:off x="4582608" y="5785772"/>
+              <a:off x="4584458" y="3522791"/>
               <a:ext cx="62179" cy="80101"/>
             </a:xfrm>
             <a:prstGeom prst="rect">
@@ -4958,13 +4993,13 @@
         </p:sp>
         <p:sp>
           <p:nvSpPr>
-            <p:cNvPr id="33" name="tx33"/>
+            <p:cNvPr id="34" name="tx34"/>
             <p:cNvSpPr/>
             <p:nvPr/>
           </p:nvSpPr>
           <p:spPr>
             <a:xfrm>
-              <a:off x="6606094" y="5785772"/>
+              <a:off x="6571282" y="3522791"/>
               <a:ext cx="124358" cy="80101"/>
             </a:xfrm>
             <a:prstGeom prst="rect">
@@ -5004,13 +5039,13 @@
         </p:sp>
         <p:sp>
           <p:nvSpPr>
-            <p:cNvPr id="34" name="tx34"/>
+            <p:cNvPr id="35" name="tx35"/>
             <p:cNvSpPr/>
             <p:nvPr/>
           </p:nvSpPr>
           <p:spPr>
             <a:xfrm>
-              <a:off x="2928340" y="5925448"/>
+              <a:off x="2928340" y="3662467"/>
               <a:ext cx="3578047" cy="100218"/>
             </a:xfrm>
             <a:prstGeom prst="rect">
@@ -5050,13 +5085,13 @@
         </p:sp>
         <p:sp>
           <p:nvSpPr>
-            <p:cNvPr id="35" name="tx35"/>
+            <p:cNvPr id="36" name="tx36"/>
             <p:cNvSpPr/>
             <p:nvPr/>
           </p:nvSpPr>
           <p:spPr>
             <a:xfrm rot="-5400000">
-              <a:off x="68446" y="3848213"/>
+              <a:off x="138035" y="2751517"/>
               <a:ext cx="1016904" cy="100218"/>
             </a:xfrm>
             <a:prstGeom prst="rect">
@@ -5096,13 +5131,13 @@
         </p:sp>
         <p:sp>
           <p:nvSpPr>
-            <p:cNvPr id="36" name="tx36"/>
+            <p:cNvPr id="37" name="tx37"/>
             <p:cNvSpPr/>
             <p:nvPr/>
           </p:nvSpPr>
           <p:spPr>
             <a:xfrm>
-              <a:off x="817517" y="1896563"/>
+              <a:off x="887106" y="1966152"/>
               <a:ext cx="6321612" cy="82021"/>
             </a:xfrm>
             <a:prstGeom prst="rect">
@@ -5142,13 +5177,3728 @@
         </p:sp>
         <p:sp>
           <p:nvSpPr>
-            <p:cNvPr id="37" name="tx37"/>
+            <p:cNvPr id="38" name="tx38"/>
             <p:cNvSpPr/>
             <p:nvPr/>
           </p:nvSpPr>
           <p:spPr>
             <a:xfrm>
-              <a:off x="817517" y="1669789"/>
+              <a:off x="887106" y="1739378"/>
+              <a:ext cx="3173790" cy="120152"/>
+            </a:xfrm>
+            <a:prstGeom prst="rect">
+              <a:avLst/>
+            </a:prstGeom>
+            <a:noFill/>
+          </p:spPr>
+          <p:txBody>
+            <a:bodyPr lIns="0" rIns="0" tIns="0" bIns="0" anchorCtr="1" anchor="ctr" wrap="none"/>
+            <a:lstStyle/>
+            <a:p>
+              <a:pPr algn="l" marL="0" marR="0" indent="0">
+                <a:lnSpc>
+                  <a:spcPts val="1320"/>
+                </a:lnSpc>
+                <a:spcBef>
+                  <a:spcPts val="0"/>
+                </a:spcBef>
+                <a:spcAft>
+                  <a:spcPts val="0"/>
+                </a:spcAft>
+              </a:pPr>
+              <a:r>
+                <a:rPr sz="1320">
+                  <a:solidFill>
+                    <a:srgbClr val="000000">
+                      <a:alpha val="100000"/>
+                    </a:srgbClr>
+                  </a:solidFill>
+                  <a:latin typeface="Helvetica"/>
+                  <a:cs typeface="Helvetica"/>
+                </a:rPr>
+                <a:t>Cancer Progression (Carboplatin AUC ≥ 3)</a:t>
+              </a:r>
+            </a:p>
+          </p:txBody>
+        </p:sp>
+        <p:sp>
+          <p:nvSpPr>
+            <p:cNvPr id="39" name="pl39"/>
+            <p:cNvSpPr/>
+            <p:nvPr/>
+          </p:nvSpPr>
+          <p:spPr>
+            <a:xfrm>
+              <a:off x="887106" y="5444019"/>
+              <a:ext cx="7660515" cy="0"/>
+            </a:xfrm>
+            <a:custGeom>
+              <a:avLst/>
+              <a:pathLst>
+                <a:path w="7660515" h="0">
+                  <a:moveTo>
+                    <a:pt x="0" y="0"/>
+                  </a:moveTo>
+                  <a:lnTo>
+                    <a:pt x="7660515" y="0"/>
+                  </a:lnTo>
+                  <a:lnTo>
+                    <a:pt x="7660515" y="0"/>
+                  </a:lnTo>
+                </a:path>
+              </a:pathLst>
+            </a:custGeom>
+            <a:ln w="6775" cap="flat">
+              <a:solidFill>
+                <a:srgbClr val="EBEBEB">
+                  <a:alpha val="100000"/>
+                </a:srgbClr>
+              </a:solidFill>
+              <a:prstDash val="solid"/>
+              <a:round/>
+            </a:ln>
+          </p:spPr>
+          <p:txBody>
+            <a:bodyPr/>
+            <a:lstStyle/>
+            <a:p/>
+          </p:txBody>
+        </p:sp>
+        <p:sp>
+          <p:nvSpPr>
+            <p:cNvPr id="40" name="pl40"/>
+            <p:cNvSpPr/>
+            <p:nvPr/>
+          </p:nvSpPr>
+          <p:spPr>
+            <a:xfrm>
+              <a:off x="887106" y="5144686"/>
+              <a:ext cx="7660515" cy="0"/>
+            </a:xfrm>
+            <a:custGeom>
+              <a:avLst/>
+              <a:pathLst>
+                <a:path w="7660515" h="0">
+                  <a:moveTo>
+                    <a:pt x="0" y="0"/>
+                  </a:moveTo>
+                  <a:lnTo>
+                    <a:pt x="7660515" y="0"/>
+                  </a:lnTo>
+                  <a:lnTo>
+                    <a:pt x="7660515" y="0"/>
+                  </a:lnTo>
+                </a:path>
+              </a:pathLst>
+            </a:custGeom>
+            <a:ln w="6775" cap="flat">
+              <a:solidFill>
+                <a:srgbClr val="EBEBEB">
+                  <a:alpha val="100000"/>
+                </a:srgbClr>
+              </a:solidFill>
+              <a:prstDash val="solid"/>
+              <a:round/>
+            </a:ln>
+          </p:spPr>
+          <p:txBody>
+            <a:bodyPr/>
+            <a:lstStyle/>
+            <a:p/>
+          </p:txBody>
+        </p:sp>
+        <p:sp>
+          <p:nvSpPr>
+            <p:cNvPr id="41" name="pl41"/>
+            <p:cNvSpPr/>
+            <p:nvPr/>
+          </p:nvSpPr>
+          <p:spPr>
+            <a:xfrm>
+              <a:off x="887106" y="4845352"/>
+              <a:ext cx="7660515" cy="0"/>
+            </a:xfrm>
+            <a:custGeom>
+              <a:avLst/>
+              <a:pathLst>
+                <a:path w="7660515" h="0">
+                  <a:moveTo>
+                    <a:pt x="0" y="0"/>
+                  </a:moveTo>
+                  <a:lnTo>
+                    <a:pt x="7660515" y="0"/>
+                  </a:lnTo>
+                  <a:lnTo>
+                    <a:pt x="7660515" y="0"/>
+                  </a:lnTo>
+                </a:path>
+              </a:pathLst>
+            </a:custGeom>
+            <a:ln w="6775" cap="flat">
+              <a:solidFill>
+                <a:srgbClr val="EBEBEB">
+                  <a:alpha val="100000"/>
+                </a:srgbClr>
+              </a:solidFill>
+              <a:prstDash val="solid"/>
+              <a:round/>
+            </a:ln>
+          </p:spPr>
+          <p:txBody>
+            <a:bodyPr/>
+            <a:lstStyle/>
+            <a:p/>
+          </p:txBody>
+        </p:sp>
+        <p:sp>
+          <p:nvSpPr>
+            <p:cNvPr id="42" name="pl42"/>
+            <p:cNvSpPr/>
+            <p:nvPr/>
+          </p:nvSpPr>
+          <p:spPr>
+            <a:xfrm>
+              <a:off x="887106" y="4546018"/>
+              <a:ext cx="7660515" cy="0"/>
+            </a:xfrm>
+            <a:custGeom>
+              <a:avLst/>
+              <a:pathLst>
+                <a:path w="7660515" h="0">
+                  <a:moveTo>
+                    <a:pt x="0" y="0"/>
+                  </a:moveTo>
+                  <a:lnTo>
+                    <a:pt x="7660515" y="0"/>
+                  </a:lnTo>
+                  <a:lnTo>
+                    <a:pt x="7660515" y="0"/>
+                  </a:lnTo>
+                </a:path>
+              </a:pathLst>
+            </a:custGeom>
+            <a:ln w="6775" cap="flat">
+              <a:solidFill>
+                <a:srgbClr val="EBEBEB">
+                  <a:alpha val="100000"/>
+                </a:srgbClr>
+              </a:solidFill>
+              <a:prstDash val="solid"/>
+              <a:round/>
+            </a:ln>
+          </p:spPr>
+          <p:txBody>
+            <a:bodyPr/>
+            <a:lstStyle/>
+            <a:p/>
+          </p:txBody>
+        </p:sp>
+        <p:sp>
+          <p:nvSpPr>
+            <p:cNvPr id="43" name="pl43"/>
+            <p:cNvSpPr/>
+            <p:nvPr/>
+          </p:nvSpPr>
+          <p:spPr>
+            <a:xfrm>
+              <a:off x="983303" y="4336484"/>
+              <a:ext cx="0" cy="1317069"/>
+            </a:xfrm>
+            <a:custGeom>
+              <a:avLst/>
+              <a:pathLst>
+                <a:path w="0" h="1317069">
+                  <a:moveTo>
+                    <a:pt x="0" y="1317069"/>
+                  </a:moveTo>
+                  <a:lnTo>
+                    <a:pt x="0" y="0"/>
+                  </a:lnTo>
+                  <a:lnTo>
+                    <a:pt x="0" y="0"/>
+                  </a:lnTo>
+                </a:path>
+              </a:pathLst>
+            </a:custGeom>
+            <a:ln w="6775" cap="flat">
+              <a:solidFill>
+                <a:srgbClr val="EBEBEB">
+                  <a:alpha val="100000"/>
+                </a:srgbClr>
+              </a:solidFill>
+              <a:prstDash val="solid"/>
+              <a:round/>
+            </a:ln>
+          </p:spPr>
+          <p:txBody>
+            <a:bodyPr/>
+            <a:lstStyle/>
+            <a:p/>
+          </p:txBody>
+        </p:sp>
+        <p:sp>
+          <p:nvSpPr>
+            <p:cNvPr id="44" name="pl44"/>
+            <p:cNvSpPr/>
+            <p:nvPr/>
+          </p:nvSpPr>
+          <p:spPr>
+            <a:xfrm>
+              <a:off x="1790468" y="4336484"/>
+              <a:ext cx="0" cy="1317069"/>
+            </a:xfrm>
+            <a:custGeom>
+              <a:avLst/>
+              <a:pathLst>
+                <a:path w="0" h="1317069">
+                  <a:moveTo>
+                    <a:pt x="0" y="1317069"/>
+                  </a:moveTo>
+                  <a:lnTo>
+                    <a:pt x="0" y="0"/>
+                  </a:lnTo>
+                  <a:lnTo>
+                    <a:pt x="0" y="0"/>
+                  </a:lnTo>
+                </a:path>
+              </a:pathLst>
+            </a:custGeom>
+            <a:ln w="6775" cap="flat">
+              <a:solidFill>
+                <a:srgbClr val="EBEBEB">
+                  <a:alpha val="100000"/>
+                </a:srgbClr>
+              </a:solidFill>
+              <a:prstDash val="solid"/>
+              <a:round/>
+            </a:ln>
+          </p:spPr>
+          <p:txBody>
+            <a:bodyPr/>
+            <a:lstStyle/>
+            <a:p/>
+          </p:txBody>
+        </p:sp>
+        <p:sp>
+          <p:nvSpPr>
+            <p:cNvPr id="45" name="pl45"/>
+            <p:cNvSpPr/>
+            <p:nvPr/>
+          </p:nvSpPr>
+          <p:spPr>
+            <a:xfrm>
+              <a:off x="2597634" y="4336484"/>
+              <a:ext cx="0" cy="1317069"/>
+            </a:xfrm>
+            <a:custGeom>
+              <a:avLst/>
+              <a:pathLst>
+                <a:path w="0" h="1317069">
+                  <a:moveTo>
+                    <a:pt x="0" y="1317069"/>
+                  </a:moveTo>
+                  <a:lnTo>
+                    <a:pt x="0" y="0"/>
+                  </a:lnTo>
+                  <a:lnTo>
+                    <a:pt x="0" y="0"/>
+                  </a:lnTo>
+                </a:path>
+              </a:pathLst>
+            </a:custGeom>
+            <a:ln w="6775" cap="flat">
+              <a:solidFill>
+                <a:srgbClr val="EBEBEB">
+                  <a:alpha val="100000"/>
+                </a:srgbClr>
+              </a:solidFill>
+              <a:prstDash val="solid"/>
+              <a:round/>
+            </a:ln>
+          </p:spPr>
+          <p:txBody>
+            <a:bodyPr/>
+            <a:lstStyle/>
+            <a:p/>
+          </p:txBody>
+        </p:sp>
+        <p:sp>
+          <p:nvSpPr>
+            <p:cNvPr id="46" name="pl46"/>
+            <p:cNvSpPr/>
+            <p:nvPr/>
+          </p:nvSpPr>
+          <p:spPr>
+            <a:xfrm>
+              <a:off x="3404799" y="4336484"/>
+              <a:ext cx="0" cy="1317069"/>
+            </a:xfrm>
+            <a:custGeom>
+              <a:avLst/>
+              <a:pathLst>
+                <a:path w="0" h="1317069">
+                  <a:moveTo>
+                    <a:pt x="0" y="1317069"/>
+                  </a:moveTo>
+                  <a:lnTo>
+                    <a:pt x="0" y="0"/>
+                  </a:lnTo>
+                  <a:lnTo>
+                    <a:pt x="0" y="0"/>
+                  </a:lnTo>
+                </a:path>
+              </a:pathLst>
+            </a:custGeom>
+            <a:ln w="6775" cap="flat">
+              <a:solidFill>
+                <a:srgbClr val="EBEBEB">
+                  <a:alpha val="100000"/>
+                </a:srgbClr>
+              </a:solidFill>
+              <a:prstDash val="solid"/>
+              <a:round/>
+            </a:ln>
+          </p:spPr>
+          <p:txBody>
+            <a:bodyPr/>
+            <a:lstStyle/>
+            <a:p/>
+          </p:txBody>
+        </p:sp>
+        <p:sp>
+          <p:nvSpPr>
+            <p:cNvPr id="47" name="pl47"/>
+            <p:cNvSpPr/>
+            <p:nvPr/>
+          </p:nvSpPr>
+          <p:spPr>
+            <a:xfrm>
+              <a:off x="4211965" y="4336484"/>
+              <a:ext cx="0" cy="1317069"/>
+            </a:xfrm>
+            <a:custGeom>
+              <a:avLst/>
+              <a:pathLst>
+                <a:path w="0" h="1317069">
+                  <a:moveTo>
+                    <a:pt x="0" y="1317069"/>
+                  </a:moveTo>
+                  <a:lnTo>
+                    <a:pt x="0" y="0"/>
+                  </a:lnTo>
+                  <a:lnTo>
+                    <a:pt x="0" y="0"/>
+                  </a:lnTo>
+                </a:path>
+              </a:pathLst>
+            </a:custGeom>
+            <a:ln w="6775" cap="flat">
+              <a:solidFill>
+                <a:srgbClr val="EBEBEB">
+                  <a:alpha val="100000"/>
+                </a:srgbClr>
+              </a:solidFill>
+              <a:prstDash val="solid"/>
+              <a:round/>
+            </a:ln>
+          </p:spPr>
+          <p:txBody>
+            <a:bodyPr/>
+            <a:lstStyle/>
+            <a:p/>
+          </p:txBody>
+        </p:sp>
+        <p:sp>
+          <p:nvSpPr>
+            <p:cNvPr id="48" name="pl48"/>
+            <p:cNvSpPr/>
+            <p:nvPr/>
+          </p:nvSpPr>
+          <p:spPr>
+            <a:xfrm>
+              <a:off x="5019130" y="4336484"/>
+              <a:ext cx="0" cy="1317069"/>
+            </a:xfrm>
+            <a:custGeom>
+              <a:avLst/>
+              <a:pathLst>
+                <a:path w="0" h="1317069">
+                  <a:moveTo>
+                    <a:pt x="0" y="1317069"/>
+                  </a:moveTo>
+                  <a:lnTo>
+                    <a:pt x="0" y="0"/>
+                  </a:lnTo>
+                  <a:lnTo>
+                    <a:pt x="0" y="0"/>
+                  </a:lnTo>
+                </a:path>
+              </a:pathLst>
+            </a:custGeom>
+            <a:ln w="6775" cap="flat">
+              <a:solidFill>
+                <a:srgbClr val="EBEBEB">
+                  <a:alpha val="100000"/>
+                </a:srgbClr>
+              </a:solidFill>
+              <a:prstDash val="solid"/>
+              <a:round/>
+            </a:ln>
+          </p:spPr>
+          <p:txBody>
+            <a:bodyPr/>
+            <a:lstStyle/>
+            <a:p/>
+          </p:txBody>
+        </p:sp>
+        <p:sp>
+          <p:nvSpPr>
+            <p:cNvPr id="49" name="pl49"/>
+            <p:cNvSpPr/>
+            <p:nvPr/>
+          </p:nvSpPr>
+          <p:spPr>
+            <a:xfrm>
+              <a:off x="5826296" y="4336484"/>
+              <a:ext cx="0" cy="1317069"/>
+            </a:xfrm>
+            <a:custGeom>
+              <a:avLst/>
+              <a:pathLst>
+                <a:path w="0" h="1317069">
+                  <a:moveTo>
+                    <a:pt x="0" y="1317069"/>
+                  </a:moveTo>
+                  <a:lnTo>
+                    <a:pt x="0" y="0"/>
+                  </a:lnTo>
+                  <a:lnTo>
+                    <a:pt x="0" y="0"/>
+                  </a:lnTo>
+                </a:path>
+              </a:pathLst>
+            </a:custGeom>
+            <a:ln w="6775" cap="flat">
+              <a:solidFill>
+                <a:srgbClr val="EBEBEB">
+                  <a:alpha val="100000"/>
+                </a:srgbClr>
+              </a:solidFill>
+              <a:prstDash val="solid"/>
+              <a:round/>
+            </a:ln>
+          </p:spPr>
+          <p:txBody>
+            <a:bodyPr/>
+            <a:lstStyle/>
+            <a:p/>
+          </p:txBody>
+        </p:sp>
+        <p:sp>
+          <p:nvSpPr>
+            <p:cNvPr id="50" name="pl50"/>
+            <p:cNvSpPr/>
+            <p:nvPr/>
+          </p:nvSpPr>
+          <p:spPr>
+            <a:xfrm>
+              <a:off x="6633461" y="4336484"/>
+              <a:ext cx="0" cy="1317069"/>
+            </a:xfrm>
+            <a:custGeom>
+              <a:avLst/>
+              <a:pathLst>
+                <a:path w="0" h="1317069">
+                  <a:moveTo>
+                    <a:pt x="0" y="1317069"/>
+                  </a:moveTo>
+                  <a:lnTo>
+                    <a:pt x="0" y="0"/>
+                  </a:lnTo>
+                  <a:lnTo>
+                    <a:pt x="0" y="0"/>
+                  </a:lnTo>
+                </a:path>
+              </a:pathLst>
+            </a:custGeom>
+            <a:ln w="6775" cap="flat">
+              <a:solidFill>
+                <a:srgbClr val="EBEBEB">
+                  <a:alpha val="100000"/>
+                </a:srgbClr>
+              </a:solidFill>
+              <a:prstDash val="solid"/>
+              <a:round/>
+            </a:ln>
+          </p:spPr>
+          <p:txBody>
+            <a:bodyPr/>
+            <a:lstStyle/>
+            <a:p/>
+          </p:txBody>
+        </p:sp>
+        <p:sp>
+          <p:nvSpPr>
+            <p:cNvPr id="51" name="pl51"/>
+            <p:cNvSpPr/>
+            <p:nvPr/>
+          </p:nvSpPr>
+          <p:spPr>
+            <a:xfrm>
+              <a:off x="7440627" y="4336484"/>
+              <a:ext cx="0" cy="1317069"/>
+            </a:xfrm>
+            <a:custGeom>
+              <a:avLst/>
+              <a:pathLst>
+                <a:path w="0" h="1317069">
+                  <a:moveTo>
+                    <a:pt x="0" y="1317069"/>
+                  </a:moveTo>
+                  <a:lnTo>
+                    <a:pt x="0" y="0"/>
+                  </a:lnTo>
+                  <a:lnTo>
+                    <a:pt x="0" y="0"/>
+                  </a:lnTo>
+                </a:path>
+              </a:pathLst>
+            </a:custGeom>
+            <a:ln w="6775" cap="flat">
+              <a:solidFill>
+                <a:srgbClr val="EBEBEB">
+                  <a:alpha val="100000"/>
+                </a:srgbClr>
+              </a:solidFill>
+              <a:prstDash val="solid"/>
+              <a:round/>
+            </a:ln>
+          </p:spPr>
+          <p:txBody>
+            <a:bodyPr/>
+            <a:lstStyle/>
+            <a:p/>
+          </p:txBody>
+        </p:sp>
+        <p:sp>
+          <p:nvSpPr>
+            <p:cNvPr id="52" name="pl52"/>
+            <p:cNvSpPr/>
+            <p:nvPr/>
+          </p:nvSpPr>
+          <p:spPr>
+            <a:xfrm>
+              <a:off x="8247792" y="4336484"/>
+              <a:ext cx="0" cy="1317069"/>
+            </a:xfrm>
+            <a:custGeom>
+              <a:avLst/>
+              <a:pathLst>
+                <a:path w="0" h="1317069">
+                  <a:moveTo>
+                    <a:pt x="0" y="1317069"/>
+                  </a:moveTo>
+                  <a:lnTo>
+                    <a:pt x="0" y="0"/>
+                  </a:lnTo>
+                  <a:lnTo>
+                    <a:pt x="0" y="0"/>
+                  </a:lnTo>
+                </a:path>
+              </a:pathLst>
+            </a:custGeom>
+            <a:ln w="6775" cap="flat">
+              <a:solidFill>
+                <a:srgbClr val="EBEBEB">
+                  <a:alpha val="100000"/>
+                </a:srgbClr>
+              </a:solidFill>
+              <a:prstDash val="solid"/>
+              <a:round/>
+            </a:ln>
+          </p:spPr>
+          <p:txBody>
+            <a:bodyPr/>
+            <a:lstStyle/>
+            <a:p/>
+          </p:txBody>
+        </p:sp>
+        <p:sp>
+          <p:nvSpPr>
+            <p:cNvPr id="53" name="pl53"/>
+            <p:cNvSpPr/>
+            <p:nvPr/>
+          </p:nvSpPr>
+          <p:spPr>
+            <a:xfrm>
+              <a:off x="887106" y="5593686"/>
+              <a:ext cx="7660515" cy="0"/>
+            </a:xfrm>
+            <a:custGeom>
+              <a:avLst/>
+              <a:pathLst>
+                <a:path w="7660515" h="0">
+                  <a:moveTo>
+                    <a:pt x="0" y="0"/>
+                  </a:moveTo>
+                  <a:lnTo>
+                    <a:pt x="7660515" y="0"/>
+                  </a:lnTo>
+                  <a:lnTo>
+                    <a:pt x="7660515" y="0"/>
+                  </a:lnTo>
+                </a:path>
+              </a:pathLst>
+            </a:custGeom>
+            <a:ln w="13550" cap="flat">
+              <a:solidFill>
+                <a:srgbClr val="EBEBEB">
+                  <a:alpha val="100000"/>
+                </a:srgbClr>
+              </a:solidFill>
+              <a:prstDash val="solid"/>
+              <a:round/>
+            </a:ln>
+          </p:spPr>
+          <p:txBody>
+            <a:bodyPr/>
+            <a:lstStyle/>
+            <a:p/>
+          </p:txBody>
+        </p:sp>
+        <p:sp>
+          <p:nvSpPr>
+            <p:cNvPr id="54" name="pl54"/>
+            <p:cNvSpPr/>
+            <p:nvPr/>
+          </p:nvSpPr>
+          <p:spPr>
+            <a:xfrm>
+              <a:off x="887106" y="5294352"/>
+              <a:ext cx="7660515" cy="0"/>
+            </a:xfrm>
+            <a:custGeom>
+              <a:avLst/>
+              <a:pathLst>
+                <a:path w="7660515" h="0">
+                  <a:moveTo>
+                    <a:pt x="0" y="0"/>
+                  </a:moveTo>
+                  <a:lnTo>
+                    <a:pt x="7660515" y="0"/>
+                  </a:lnTo>
+                  <a:lnTo>
+                    <a:pt x="7660515" y="0"/>
+                  </a:lnTo>
+                </a:path>
+              </a:pathLst>
+            </a:custGeom>
+            <a:ln w="13550" cap="flat">
+              <a:solidFill>
+                <a:srgbClr val="EBEBEB">
+                  <a:alpha val="100000"/>
+                </a:srgbClr>
+              </a:solidFill>
+              <a:prstDash val="solid"/>
+              <a:round/>
+            </a:ln>
+          </p:spPr>
+          <p:txBody>
+            <a:bodyPr/>
+            <a:lstStyle/>
+            <a:p/>
+          </p:txBody>
+        </p:sp>
+        <p:sp>
+          <p:nvSpPr>
+            <p:cNvPr id="55" name="pl55"/>
+            <p:cNvSpPr/>
+            <p:nvPr/>
+          </p:nvSpPr>
+          <p:spPr>
+            <a:xfrm>
+              <a:off x="887106" y="4995019"/>
+              <a:ext cx="7660515" cy="0"/>
+            </a:xfrm>
+            <a:custGeom>
+              <a:avLst/>
+              <a:pathLst>
+                <a:path w="7660515" h="0">
+                  <a:moveTo>
+                    <a:pt x="0" y="0"/>
+                  </a:moveTo>
+                  <a:lnTo>
+                    <a:pt x="7660515" y="0"/>
+                  </a:lnTo>
+                  <a:lnTo>
+                    <a:pt x="7660515" y="0"/>
+                  </a:lnTo>
+                </a:path>
+              </a:pathLst>
+            </a:custGeom>
+            <a:ln w="13550" cap="flat">
+              <a:solidFill>
+                <a:srgbClr val="EBEBEB">
+                  <a:alpha val="100000"/>
+                </a:srgbClr>
+              </a:solidFill>
+              <a:prstDash val="solid"/>
+              <a:round/>
+            </a:ln>
+          </p:spPr>
+          <p:txBody>
+            <a:bodyPr/>
+            <a:lstStyle/>
+            <a:p/>
+          </p:txBody>
+        </p:sp>
+        <p:sp>
+          <p:nvSpPr>
+            <p:cNvPr id="56" name="pl56"/>
+            <p:cNvSpPr/>
+            <p:nvPr/>
+          </p:nvSpPr>
+          <p:spPr>
+            <a:xfrm>
+              <a:off x="887106" y="4695685"/>
+              <a:ext cx="7660515" cy="0"/>
+            </a:xfrm>
+            <a:custGeom>
+              <a:avLst/>
+              <a:pathLst>
+                <a:path w="7660515" h="0">
+                  <a:moveTo>
+                    <a:pt x="0" y="0"/>
+                  </a:moveTo>
+                  <a:lnTo>
+                    <a:pt x="7660515" y="0"/>
+                  </a:lnTo>
+                  <a:lnTo>
+                    <a:pt x="7660515" y="0"/>
+                  </a:lnTo>
+                </a:path>
+              </a:pathLst>
+            </a:custGeom>
+            <a:ln w="13550" cap="flat">
+              <a:solidFill>
+                <a:srgbClr val="EBEBEB">
+                  <a:alpha val="100000"/>
+                </a:srgbClr>
+              </a:solidFill>
+              <a:prstDash val="solid"/>
+              <a:round/>
+            </a:ln>
+          </p:spPr>
+          <p:txBody>
+            <a:bodyPr/>
+            <a:lstStyle/>
+            <a:p/>
+          </p:txBody>
+        </p:sp>
+        <p:sp>
+          <p:nvSpPr>
+            <p:cNvPr id="57" name="pl57"/>
+            <p:cNvSpPr/>
+            <p:nvPr/>
+          </p:nvSpPr>
+          <p:spPr>
+            <a:xfrm>
+              <a:off x="887106" y="4396351"/>
+              <a:ext cx="7660515" cy="0"/>
+            </a:xfrm>
+            <a:custGeom>
+              <a:avLst/>
+              <a:pathLst>
+                <a:path w="7660515" h="0">
+                  <a:moveTo>
+                    <a:pt x="0" y="0"/>
+                  </a:moveTo>
+                  <a:lnTo>
+                    <a:pt x="7660515" y="0"/>
+                  </a:lnTo>
+                  <a:lnTo>
+                    <a:pt x="7660515" y="0"/>
+                  </a:lnTo>
+                </a:path>
+              </a:pathLst>
+            </a:custGeom>
+            <a:ln w="13550" cap="flat">
+              <a:solidFill>
+                <a:srgbClr val="EBEBEB">
+                  <a:alpha val="100000"/>
+                </a:srgbClr>
+              </a:solidFill>
+              <a:prstDash val="solid"/>
+              <a:round/>
+            </a:ln>
+          </p:spPr>
+          <p:txBody>
+            <a:bodyPr/>
+            <a:lstStyle/>
+            <a:p/>
+          </p:txBody>
+        </p:sp>
+        <p:sp>
+          <p:nvSpPr>
+            <p:cNvPr id="58" name="pl58"/>
+            <p:cNvSpPr/>
+            <p:nvPr/>
+          </p:nvSpPr>
+          <p:spPr>
+            <a:xfrm>
+              <a:off x="1386885" y="4336484"/>
+              <a:ext cx="0" cy="1317069"/>
+            </a:xfrm>
+            <a:custGeom>
+              <a:avLst/>
+              <a:pathLst>
+                <a:path w="0" h="1317069">
+                  <a:moveTo>
+                    <a:pt x="0" y="1317069"/>
+                  </a:moveTo>
+                  <a:lnTo>
+                    <a:pt x="0" y="0"/>
+                  </a:lnTo>
+                  <a:lnTo>
+                    <a:pt x="0" y="0"/>
+                  </a:lnTo>
+                </a:path>
+              </a:pathLst>
+            </a:custGeom>
+            <a:ln w="13550" cap="flat">
+              <a:solidFill>
+                <a:srgbClr val="EBEBEB">
+                  <a:alpha val="100000"/>
+                </a:srgbClr>
+              </a:solidFill>
+              <a:prstDash val="solid"/>
+              <a:round/>
+            </a:ln>
+          </p:spPr>
+          <p:txBody>
+            <a:bodyPr/>
+            <a:lstStyle/>
+            <a:p/>
+          </p:txBody>
+        </p:sp>
+        <p:sp>
+          <p:nvSpPr>
+            <p:cNvPr id="59" name="pl59"/>
+            <p:cNvSpPr/>
+            <p:nvPr/>
+          </p:nvSpPr>
+          <p:spPr>
+            <a:xfrm>
+              <a:off x="2194051" y="4336484"/>
+              <a:ext cx="0" cy="1317069"/>
+            </a:xfrm>
+            <a:custGeom>
+              <a:avLst/>
+              <a:pathLst>
+                <a:path w="0" h="1317069">
+                  <a:moveTo>
+                    <a:pt x="0" y="1317069"/>
+                  </a:moveTo>
+                  <a:lnTo>
+                    <a:pt x="0" y="0"/>
+                  </a:lnTo>
+                  <a:lnTo>
+                    <a:pt x="0" y="0"/>
+                  </a:lnTo>
+                </a:path>
+              </a:pathLst>
+            </a:custGeom>
+            <a:ln w="13550" cap="flat">
+              <a:solidFill>
+                <a:srgbClr val="EBEBEB">
+                  <a:alpha val="100000"/>
+                </a:srgbClr>
+              </a:solidFill>
+              <a:prstDash val="solid"/>
+              <a:round/>
+            </a:ln>
+          </p:spPr>
+          <p:txBody>
+            <a:bodyPr/>
+            <a:lstStyle/>
+            <a:p/>
+          </p:txBody>
+        </p:sp>
+        <p:sp>
+          <p:nvSpPr>
+            <p:cNvPr id="60" name="pl60"/>
+            <p:cNvSpPr/>
+            <p:nvPr/>
+          </p:nvSpPr>
+          <p:spPr>
+            <a:xfrm>
+              <a:off x="3001216" y="4336484"/>
+              <a:ext cx="0" cy="1317069"/>
+            </a:xfrm>
+            <a:custGeom>
+              <a:avLst/>
+              <a:pathLst>
+                <a:path w="0" h="1317069">
+                  <a:moveTo>
+                    <a:pt x="0" y="1317069"/>
+                  </a:moveTo>
+                  <a:lnTo>
+                    <a:pt x="0" y="0"/>
+                  </a:lnTo>
+                  <a:lnTo>
+                    <a:pt x="0" y="0"/>
+                  </a:lnTo>
+                </a:path>
+              </a:pathLst>
+            </a:custGeom>
+            <a:ln w="13550" cap="flat">
+              <a:solidFill>
+                <a:srgbClr val="EBEBEB">
+                  <a:alpha val="100000"/>
+                </a:srgbClr>
+              </a:solidFill>
+              <a:prstDash val="solid"/>
+              <a:round/>
+            </a:ln>
+          </p:spPr>
+          <p:txBody>
+            <a:bodyPr/>
+            <a:lstStyle/>
+            <a:p/>
+          </p:txBody>
+        </p:sp>
+        <p:sp>
+          <p:nvSpPr>
+            <p:cNvPr id="61" name="pl61"/>
+            <p:cNvSpPr/>
+            <p:nvPr/>
+          </p:nvSpPr>
+          <p:spPr>
+            <a:xfrm>
+              <a:off x="3808382" y="4336484"/>
+              <a:ext cx="0" cy="1317069"/>
+            </a:xfrm>
+            <a:custGeom>
+              <a:avLst/>
+              <a:pathLst>
+                <a:path w="0" h="1317069">
+                  <a:moveTo>
+                    <a:pt x="0" y="1317069"/>
+                  </a:moveTo>
+                  <a:lnTo>
+                    <a:pt x="0" y="0"/>
+                  </a:lnTo>
+                  <a:lnTo>
+                    <a:pt x="0" y="0"/>
+                  </a:lnTo>
+                </a:path>
+              </a:pathLst>
+            </a:custGeom>
+            <a:ln w="13550" cap="flat">
+              <a:solidFill>
+                <a:srgbClr val="EBEBEB">
+                  <a:alpha val="100000"/>
+                </a:srgbClr>
+              </a:solidFill>
+              <a:prstDash val="solid"/>
+              <a:round/>
+            </a:ln>
+          </p:spPr>
+          <p:txBody>
+            <a:bodyPr/>
+            <a:lstStyle/>
+            <a:p/>
+          </p:txBody>
+        </p:sp>
+        <p:sp>
+          <p:nvSpPr>
+            <p:cNvPr id="62" name="pl62"/>
+            <p:cNvSpPr/>
+            <p:nvPr/>
+          </p:nvSpPr>
+          <p:spPr>
+            <a:xfrm>
+              <a:off x="4615547" y="4336484"/>
+              <a:ext cx="0" cy="1317069"/>
+            </a:xfrm>
+            <a:custGeom>
+              <a:avLst/>
+              <a:pathLst>
+                <a:path w="0" h="1317069">
+                  <a:moveTo>
+                    <a:pt x="0" y="1317069"/>
+                  </a:moveTo>
+                  <a:lnTo>
+                    <a:pt x="0" y="0"/>
+                  </a:lnTo>
+                  <a:lnTo>
+                    <a:pt x="0" y="0"/>
+                  </a:lnTo>
+                </a:path>
+              </a:pathLst>
+            </a:custGeom>
+            <a:ln w="13550" cap="flat">
+              <a:solidFill>
+                <a:srgbClr val="EBEBEB">
+                  <a:alpha val="100000"/>
+                </a:srgbClr>
+              </a:solidFill>
+              <a:prstDash val="solid"/>
+              <a:round/>
+            </a:ln>
+          </p:spPr>
+          <p:txBody>
+            <a:bodyPr/>
+            <a:lstStyle/>
+            <a:p/>
+          </p:txBody>
+        </p:sp>
+        <p:sp>
+          <p:nvSpPr>
+            <p:cNvPr id="63" name="pl63"/>
+            <p:cNvSpPr/>
+            <p:nvPr/>
+          </p:nvSpPr>
+          <p:spPr>
+            <a:xfrm>
+              <a:off x="5422713" y="4336484"/>
+              <a:ext cx="0" cy="1317069"/>
+            </a:xfrm>
+            <a:custGeom>
+              <a:avLst/>
+              <a:pathLst>
+                <a:path w="0" h="1317069">
+                  <a:moveTo>
+                    <a:pt x="0" y="1317069"/>
+                  </a:moveTo>
+                  <a:lnTo>
+                    <a:pt x="0" y="0"/>
+                  </a:lnTo>
+                  <a:lnTo>
+                    <a:pt x="0" y="0"/>
+                  </a:lnTo>
+                </a:path>
+              </a:pathLst>
+            </a:custGeom>
+            <a:ln w="13550" cap="flat">
+              <a:solidFill>
+                <a:srgbClr val="EBEBEB">
+                  <a:alpha val="100000"/>
+                </a:srgbClr>
+              </a:solidFill>
+              <a:prstDash val="solid"/>
+              <a:round/>
+            </a:ln>
+          </p:spPr>
+          <p:txBody>
+            <a:bodyPr/>
+            <a:lstStyle/>
+            <a:p/>
+          </p:txBody>
+        </p:sp>
+        <p:sp>
+          <p:nvSpPr>
+            <p:cNvPr id="64" name="pl64"/>
+            <p:cNvSpPr/>
+            <p:nvPr/>
+          </p:nvSpPr>
+          <p:spPr>
+            <a:xfrm>
+              <a:off x="6229878" y="4336484"/>
+              <a:ext cx="0" cy="1317069"/>
+            </a:xfrm>
+            <a:custGeom>
+              <a:avLst/>
+              <a:pathLst>
+                <a:path w="0" h="1317069">
+                  <a:moveTo>
+                    <a:pt x="0" y="1317069"/>
+                  </a:moveTo>
+                  <a:lnTo>
+                    <a:pt x="0" y="0"/>
+                  </a:lnTo>
+                  <a:lnTo>
+                    <a:pt x="0" y="0"/>
+                  </a:lnTo>
+                </a:path>
+              </a:pathLst>
+            </a:custGeom>
+            <a:ln w="13550" cap="flat">
+              <a:solidFill>
+                <a:srgbClr val="EBEBEB">
+                  <a:alpha val="100000"/>
+                </a:srgbClr>
+              </a:solidFill>
+              <a:prstDash val="solid"/>
+              <a:round/>
+            </a:ln>
+          </p:spPr>
+          <p:txBody>
+            <a:bodyPr/>
+            <a:lstStyle/>
+            <a:p/>
+          </p:txBody>
+        </p:sp>
+        <p:sp>
+          <p:nvSpPr>
+            <p:cNvPr id="65" name="pl65"/>
+            <p:cNvSpPr/>
+            <p:nvPr/>
+          </p:nvSpPr>
+          <p:spPr>
+            <a:xfrm>
+              <a:off x="7037044" y="4336484"/>
+              <a:ext cx="0" cy="1317069"/>
+            </a:xfrm>
+            <a:custGeom>
+              <a:avLst/>
+              <a:pathLst>
+                <a:path w="0" h="1317069">
+                  <a:moveTo>
+                    <a:pt x="0" y="1317069"/>
+                  </a:moveTo>
+                  <a:lnTo>
+                    <a:pt x="0" y="0"/>
+                  </a:lnTo>
+                  <a:lnTo>
+                    <a:pt x="0" y="0"/>
+                  </a:lnTo>
+                </a:path>
+              </a:pathLst>
+            </a:custGeom>
+            <a:ln w="13550" cap="flat">
+              <a:solidFill>
+                <a:srgbClr val="EBEBEB">
+                  <a:alpha val="100000"/>
+                </a:srgbClr>
+              </a:solidFill>
+              <a:prstDash val="solid"/>
+              <a:round/>
+            </a:ln>
+          </p:spPr>
+          <p:txBody>
+            <a:bodyPr/>
+            <a:lstStyle/>
+            <a:p/>
+          </p:txBody>
+        </p:sp>
+        <p:sp>
+          <p:nvSpPr>
+            <p:cNvPr id="66" name="pl66"/>
+            <p:cNvSpPr/>
+            <p:nvPr/>
+          </p:nvSpPr>
+          <p:spPr>
+            <a:xfrm>
+              <a:off x="7844209" y="4336484"/>
+              <a:ext cx="0" cy="1317069"/>
+            </a:xfrm>
+            <a:custGeom>
+              <a:avLst/>
+              <a:pathLst>
+                <a:path w="0" h="1317069">
+                  <a:moveTo>
+                    <a:pt x="0" y="1317069"/>
+                  </a:moveTo>
+                  <a:lnTo>
+                    <a:pt x="0" y="0"/>
+                  </a:lnTo>
+                  <a:lnTo>
+                    <a:pt x="0" y="0"/>
+                  </a:lnTo>
+                </a:path>
+              </a:pathLst>
+            </a:custGeom>
+            <a:ln w="13550" cap="flat">
+              <a:solidFill>
+                <a:srgbClr val="EBEBEB">
+                  <a:alpha val="100000"/>
+                </a:srgbClr>
+              </a:solidFill>
+              <a:prstDash val="solid"/>
+              <a:round/>
+            </a:ln>
+          </p:spPr>
+          <p:txBody>
+            <a:bodyPr/>
+            <a:lstStyle/>
+            <a:p/>
+          </p:txBody>
+        </p:sp>
+        <p:sp>
+          <p:nvSpPr>
+            <p:cNvPr id="67" name="pg67"/>
+            <p:cNvSpPr/>
+            <p:nvPr/>
+          </p:nvSpPr>
+          <p:spPr>
+            <a:xfrm>
+              <a:off x="1235312" y="4336484"/>
+              <a:ext cx="6964104" cy="1207290"/>
+            </a:xfrm>
+            <a:custGeom>
+              <a:avLst/>
+              <a:pathLst>
+                <a:path w="6964104" h="1207290">
+                  <a:moveTo>
+                    <a:pt x="252286" y="0"/>
+                  </a:moveTo>
+                  <a:lnTo>
+                    <a:pt x="281377" y="17630"/>
+                  </a:lnTo>
+                  <a:lnTo>
+                    <a:pt x="351722" y="58843"/>
+                  </a:lnTo>
+                  <a:lnTo>
+                    <a:pt x="422066" y="98686"/>
+                  </a:lnTo>
+                  <a:lnTo>
+                    <a:pt x="492411" y="137204"/>
+                  </a:lnTo>
+                  <a:lnTo>
+                    <a:pt x="562755" y="174442"/>
+                  </a:lnTo>
+                  <a:lnTo>
+                    <a:pt x="633100" y="210442"/>
+                  </a:lnTo>
+                  <a:lnTo>
+                    <a:pt x="703444" y="245244"/>
+                  </a:lnTo>
+                  <a:lnTo>
+                    <a:pt x="773789" y="278890"/>
+                  </a:lnTo>
+                  <a:lnTo>
+                    <a:pt x="844133" y="311417"/>
+                  </a:lnTo>
+                  <a:lnTo>
+                    <a:pt x="914478" y="342862"/>
+                  </a:lnTo>
+                  <a:lnTo>
+                    <a:pt x="984822" y="373262"/>
+                  </a:lnTo>
+                  <a:lnTo>
+                    <a:pt x="1055167" y="402652"/>
+                  </a:lnTo>
+                  <a:lnTo>
+                    <a:pt x="1125511" y="431064"/>
+                  </a:lnTo>
+                  <a:lnTo>
+                    <a:pt x="1195856" y="458531"/>
+                  </a:lnTo>
+                  <a:lnTo>
+                    <a:pt x="1266200" y="485085"/>
+                  </a:lnTo>
+                  <a:lnTo>
+                    <a:pt x="1336545" y="510757"/>
+                  </a:lnTo>
+                  <a:lnTo>
+                    <a:pt x="1406889" y="535575"/>
+                  </a:lnTo>
+                  <a:lnTo>
+                    <a:pt x="1477234" y="559567"/>
+                  </a:lnTo>
+                  <a:lnTo>
+                    <a:pt x="1547578" y="582762"/>
+                  </a:lnTo>
+                  <a:lnTo>
+                    <a:pt x="1617923" y="605186"/>
+                  </a:lnTo>
+                  <a:lnTo>
+                    <a:pt x="1688267" y="626864"/>
+                  </a:lnTo>
+                  <a:lnTo>
+                    <a:pt x="1758612" y="647822"/>
+                  </a:lnTo>
+                  <a:lnTo>
+                    <a:pt x="1828956" y="668082"/>
+                  </a:lnTo>
+                  <a:lnTo>
+                    <a:pt x="1899301" y="687669"/>
+                  </a:lnTo>
+                  <a:lnTo>
+                    <a:pt x="1969645" y="706605"/>
+                  </a:lnTo>
+                  <a:lnTo>
+                    <a:pt x="2039990" y="724912"/>
+                  </a:lnTo>
+                  <a:lnTo>
+                    <a:pt x="2110334" y="742609"/>
+                  </a:lnTo>
+                  <a:lnTo>
+                    <a:pt x="2180679" y="759718"/>
+                  </a:lnTo>
+                  <a:lnTo>
+                    <a:pt x="2251023" y="776259"/>
+                  </a:lnTo>
+                  <a:lnTo>
+                    <a:pt x="2321368" y="792249"/>
+                  </a:lnTo>
+                  <a:lnTo>
+                    <a:pt x="2391712" y="807708"/>
+                  </a:lnTo>
+                  <a:lnTo>
+                    <a:pt x="2462057" y="822653"/>
+                  </a:lnTo>
+                  <a:lnTo>
+                    <a:pt x="2532401" y="837101"/>
+                  </a:lnTo>
+                  <a:lnTo>
+                    <a:pt x="2602746" y="851068"/>
+                  </a:lnTo>
+                  <a:lnTo>
+                    <a:pt x="2673090" y="864571"/>
+                  </a:lnTo>
+                  <a:lnTo>
+                    <a:pt x="2743435" y="877625"/>
+                  </a:lnTo>
+                  <a:lnTo>
+                    <a:pt x="2813779" y="890246"/>
+                  </a:lnTo>
+                  <a:lnTo>
+                    <a:pt x="2884124" y="902446"/>
+                  </a:lnTo>
+                  <a:lnTo>
+                    <a:pt x="2954468" y="914241"/>
+                  </a:lnTo>
+                  <a:lnTo>
+                    <a:pt x="3024813" y="925644"/>
+                  </a:lnTo>
+                  <a:lnTo>
+                    <a:pt x="3095157" y="936667"/>
+                  </a:lnTo>
+                  <a:lnTo>
+                    <a:pt x="3165502" y="947325"/>
+                  </a:lnTo>
+                  <a:lnTo>
+                    <a:pt x="3235846" y="957627"/>
+                  </a:lnTo>
+                  <a:lnTo>
+                    <a:pt x="3306191" y="956596"/>
+                  </a:lnTo>
+                  <a:lnTo>
+                    <a:pt x="3376535" y="955287"/>
+                  </a:lnTo>
+                  <a:lnTo>
+                    <a:pt x="3446880" y="953972"/>
+                  </a:lnTo>
+                  <a:lnTo>
+                    <a:pt x="3517224" y="952652"/>
+                  </a:lnTo>
+                  <a:lnTo>
+                    <a:pt x="3587569" y="951326"/>
+                  </a:lnTo>
+                  <a:lnTo>
+                    <a:pt x="3657913" y="949994"/>
+                  </a:lnTo>
+                  <a:lnTo>
+                    <a:pt x="3728257" y="948657"/>
+                  </a:lnTo>
+                  <a:lnTo>
+                    <a:pt x="3798602" y="947313"/>
+                  </a:lnTo>
+                  <a:lnTo>
+                    <a:pt x="3868946" y="945964"/>
+                  </a:lnTo>
+                  <a:lnTo>
+                    <a:pt x="3939291" y="944609"/>
+                  </a:lnTo>
+                  <a:lnTo>
+                    <a:pt x="4009635" y="943248"/>
+                  </a:lnTo>
+                  <a:lnTo>
+                    <a:pt x="4079980" y="941881"/>
+                  </a:lnTo>
+                  <a:lnTo>
+                    <a:pt x="4150324" y="940508"/>
+                  </a:lnTo>
+                  <a:lnTo>
+                    <a:pt x="4220669" y="939129"/>
+                  </a:lnTo>
+                  <a:lnTo>
+                    <a:pt x="4291013" y="937744"/>
+                  </a:lnTo>
+                  <a:lnTo>
+                    <a:pt x="4361358" y="936354"/>
+                  </a:lnTo>
+                  <a:lnTo>
+                    <a:pt x="4431702" y="934957"/>
+                  </a:lnTo>
+                  <a:lnTo>
+                    <a:pt x="4502047" y="933554"/>
+                  </a:lnTo>
+                  <a:lnTo>
+                    <a:pt x="4572391" y="932144"/>
+                  </a:lnTo>
+                  <a:lnTo>
+                    <a:pt x="4642736" y="930729"/>
+                  </a:lnTo>
+                  <a:lnTo>
+                    <a:pt x="4713080" y="929308"/>
+                  </a:lnTo>
+                  <a:lnTo>
+                    <a:pt x="4783425" y="927880"/>
+                  </a:lnTo>
+                  <a:lnTo>
+                    <a:pt x="4853769" y="926446"/>
+                  </a:lnTo>
+                  <a:lnTo>
+                    <a:pt x="4924114" y="925006"/>
+                  </a:lnTo>
+                  <a:lnTo>
+                    <a:pt x="4994458" y="923560"/>
+                  </a:lnTo>
+                  <a:lnTo>
+                    <a:pt x="5064803" y="922107"/>
+                  </a:lnTo>
+                  <a:lnTo>
+                    <a:pt x="5135147" y="920648"/>
+                  </a:lnTo>
+                  <a:lnTo>
+                    <a:pt x="5205492" y="919183"/>
+                  </a:lnTo>
+                  <a:lnTo>
+                    <a:pt x="5275836" y="917711"/>
+                  </a:lnTo>
+                  <a:lnTo>
+                    <a:pt x="5346181" y="916233"/>
+                  </a:lnTo>
+                  <a:lnTo>
+                    <a:pt x="5416525" y="914748"/>
+                  </a:lnTo>
+                  <a:lnTo>
+                    <a:pt x="5486870" y="913257"/>
+                  </a:lnTo>
+                  <a:lnTo>
+                    <a:pt x="5557214" y="911760"/>
+                  </a:lnTo>
+                  <a:lnTo>
+                    <a:pt x="5627559" y="910256"/>
+                  </a:lnTo>
+                  <a:lnTo>
+                    <a:pt x="5697903" y="908745"/>
+                  </a:lnTo>
+                  <a:lnTo>
+                    <a:pt x="5768248" y="907228"/>
+                  </a:lnTo>
+                  <a:lnTo>
+                    <a:pt x="5838592" y="905704"/>
+                  </a:lnTo>
+                  <a:lnTo>
+                    <a:pt x="5908937" y="904174"/>
+                  </a:lnTo>
+                  <a:lnTo>
+                    <a:pt x="5979281" y="902637"/>
+                  </a:lnTo>
+                  <a:lnTo>
+                    <a:pt x="6049626" y="901093"/>
+                  </a:lnTo>
+                  <a:lnTo>
+                    <a:pt x="6119970" y="899543"/>
+                  </a:lnTo>
+                  <a:lnTo>
+                    <a:pt x="6190315" y="897986"/>
+                  </a:lnTo>
+                  <a:lnTo>
+                    <a:pt x="6260659" y="896422"/>
+                  </a:lnTo>
+                  <a:lnTo>
+                    <a:pt x="6331004" y="894851"/>
+                  </a:lnTo>
+                  <a:lnTo>
+                    <a:pt x="6401348" y="893273"/>
+                  </a:lnTo>
+                  <a:lnTo>
+                    <a:pt x="6471693" y="891689"/>
+                  </a:lnTo>
+                  <a:lnTo>
+                    <a:pt x="6542037" y="890097"/>
+                  </a:lnTo>
+                  <a:lnTo>
+                    <a:pt x="6612382" y="888499"/>
+                  </a:lnTo>
+                  <a:lnTo>
+                    <a:pt x="6682726" y="886893"/>
+                  </a:lnTo>
+                  <a:lnTo>
+                    <a:pt x="6753071" y="885281"/>
+                  </a:lnTo>
+                  <a:lnTo>
+                    <a:pt x="6823415" y="883662"/>
+                  </a:lnTo>
+                  <a:lnTo>
+                    <a:pt x="6893760" y="882035"/>
+                  </a:lnTo>
+                  <a:lnTo>
+                    <a:pt x="6964104" y="880402"/>
+                  </a:lnTo>
+                  <a:lnTo>
+                    <a:pt x="6964104" y="1207290"/>
+                  </a:lnTo>
+                  <a:lnTo>
+                    <a:pt x="6893760" y="1205573"/>
+                  </a:lnTo>
+                  <a:lnTo>
+                    <a:pt x="6823415" y="1203798"/>
+                  </a:lnTo>
+                  <a:lnTo>
+                    <a:pt x="6753071" y="1201961"/>
+                  </a:lnTo>
+                  <a:lnTo>
+                    <a:pt x="6682726" y="1200061"/>
+                  </a:lnTo>
+                  <a:lnTo>
+                    <a:pt x="6612382" y="1198096"/>
+                  </a:lnTo>
+                  <a:lnTo>
+                    <a:pt x="6542037" y="1196064"/>
+                  </a:lnTo>
+                  <a:lnTo>
+                    <a:pt x="6471693" y="1193961"/>
+                  </a:lnTo>
+                  <a:lnTo>
+                    <a:pt x="6401348" y="1191786"/>
+                  </a:lnTo>
+                  <a:lnTo>
+                    <a:pt x="6331004" y="1189536"/>
+                  </a:lnTo>
+                  <a:lnTo>
+                    <a:pt x="6260659" y="1187209"/>
+                  </a:lnTo>
+                  <a:lnTo>
+                    <a:pt x="6190315" y="1184802"/>
+                  </a:lnTo>
+                  <a:lnTo>
+                    <a:pt x="6119970" y="1182312"/>
+                  </a:lnTo>
+                  <a:lnTo>
+                    <a:pt x="6049626" y="1179736"/>
+                  </a:lnTo>
+                  <a:lnTo>
+                    <a:pt x="5979281" y="1177072"/>
+                  </a:lnTo>
+                  <a:lnTo>
+                    <a:pt x="5908937" y="1174317"/>
+                  </a:lnTo>
+                  <a:lnTo>
+                    <a:pt x="5838592" y="1171466"/>
+                  </a:lnTo>
+                  <a:lnTo>
+                    <a:pt x="5768248" y="1168517"/>
+                  </a:lnTo>
+                  <a:lnTo>
+                    <a:pt x="5697903" y="1165467"/>
+                  </a:lnTo>
+                  <a:lnTo>
+                    <a:pt x="5627559" y="1162313"/>
+                  </a:lnTo>
+                  <a:lnTo>
+                    <a:pt x="5557214" y="1159049"/>
+                  </a:lnTo>
+                  <a:lnTo>
+                    <a:pt x="5486870" y="1155674"/>
+                  </a:lnTo>
+                  <a:lnTo>
+                    <a:pt x="5416525" y="1152182"/>
+                  </a:lnTo>
+                  <a:lnTo>
+                    <a:pt x="5346181" y="1148570"/>
+                  </a:lnTo>
+                  <a:lnTo>
+                    <a:pt x="5275836" y="1144834"/>
+                  </a:lnTo>
+                  <a:lnTo>
+                    <a:pt x="5205492" y="1140970"/>
+                  </a:lnTo>
+                  <a:lnTo>
+                    <a:pt x="5135147" y="1136972"/>
+                  </a:lnTo>
+                  <a:lnTo>
+                    <a:pt x="5064803" y="1132837"/>
+                  </a:lnTo>
+                  <a:lnTo>
+                    <a:pt x="4994458" y="1128560"/>
+                  </a:lnTo>
+                  <a:lnTo>
+                    <a:pt x="4924114" y="1124136"/>
+                  </a:lnTo>
+                  <a:lnTo>
+                    <a:pt x="4853769" y="1119560"/>
+                  </a:lnTo>
+                  <a:lnTo>
+                    <a:pt x="4783425" y="1114826"/>
+                  </a:lnTo>
+                  <a:lnTo>
+                    <a:pt x="4713080" y="1109929"/>
+                  </a:lnTo>
+                  <a:lnTo>
+                    <a:pt x="4642736" y="1104865"/>
+                  </a:lnTo>
+                  <a:lnTo>
+                    <a:pt x="4572391" y="1099625"/>
+                  </a:lnTo>
+                  <a:lnTo>
+                    <a:pt x="4502047" y="1094206"/>
+                  </a:lnTo>
+                  <a:lnTo>
+                    <a:pt x="4431702" y="1088601"/>
+                  </a:lnTo>
+                  <a:lnTo>
+                    <a:pt x="4361358" y="1082802"/>
+                  </a:lnTo>
+                  <a:lnTo>
+                    <a:pt x="4291013" y="1076804"/>
+                  </a:lnTo>
+                  <a:lnTo>
+                    <a:pt x="4220669" y="1070600"/>
+                  </a:lnTo>
+                  <a:lnTo>
+                    <a:pt x="4150324" y="1064183"/>
+                  </a:lnTo>
+                  <a:lnTo>
+                    <a:pt x="4079980" y="1057544"/>
+                  </a:lnTo>
+                  <a:lnTo>
+                    <a:pt x="4009635" y="1050678"/>
+                  </a:lnTo>
+                  <a:lnTo>
+                    <a:pt x="3939291" y="1043575"/>
+                  </a:lnTo>
+                  <a:lnTo>
+                    <a:pt x="3868946" y="1036228"/>
+                  </a:lnTo>
+                  <a:lnTo>
+                    <a:pt x="3798602" y="1028629"/>
+                  </a:lnTo>
+                  <a:lnTo>
+                    <a:pt x="3728257" y="1020768"/>
+                  </a:lnTo>
+                  <a:lnTo>
+                    <a:pt x="3657913" y="1012636"/>
+                  </a:lnTo>
+                  <a:lnTo>
+                    <a:pt x="3587569" y="1004225"/>
+                  </a:lnTo>
+                  <a:lnTo>
+                    <a:pt x="3517224" y="995525"/>
+                  </a:lnTo>
+                  <a:lnTo>
+                    <a:pt x="3446880" y="986526"/>
+                  </a:lnTo>
+                  <a:lnTo>
+                    <a:pt x="3376535" y="977217"/>
+                  </a:lnTo>
+                  <a:lnTo>
+                    <a:pt x="3306191" y="967588"/>
+                  </a:lnTo>
+                  <a:lnTo>
+                    <a:pt x="3235846" y="957899"/>
+                  </a:lnTo>
+                  <a:lnTo>
+                    <a:pt x="3165502" y="959196"/>
+                  </a:lnTo>
+                  <a:lnTo>
+                    <a:pt x="3095157" y="960488"/>
+                  </a:lnTo>
+                  <a:lnTo>
+                    <a:pt x="3024813" y="961774"/>
+                  </a:lnTo>
+                  <a:lnTo>
+                    <a:pt x="2954468" y="963055"/>
+                  </a:lnTo>
+                  <a:lnTo>
+                    <a:pt x="2884124" y="964330"/>
+                  </a:lnTo>
+                  <a:lnTo>
+                    <a:pt x="2813779" y="965600"/>
+                  </a:lnTo>
+                  <a:lnTo>
+                    <a:pt x="2743435" y="966864"/>
+                  </a:lnTo>
+                  <a:lnTo>
+                    <a:pt x="2673090" y="968123"/>
+                  </a:lnTo>
+                  <a:lnTo>
+                    <a:pt x="2602746" y="969376"/>
+                  </a:lnTo>
+                  <a:lnTo>
+                    <a:pt x="2532401" y="970624"/>
+                  </a:lnTo>
+                  <a:lnTo>
+                    <a:pt x="2462057" y="971866"/>
+                  </a:lnTo>
+                  <a:lnTo>
+                    <a:pt x="2391712" y="973103"/>
+                  </a:lnTo>
+                  <a:lnTo>
+                    <a:pt x="2321368" y="974334"/>
+                  </a:lnTo>
+                  <a:lnTo>
+                    <a:pt x="2251023" y="975561"/>
+                  </a:lnTo>
+                  <a:lnTo>
+                    <a:pt x="2180679" y="976782"/>
+                  </a:lnTo>
+                  <a:lnTo>
+                    <a:pt x="2110334" y="977997"/>
+                  </a:lnTo>
+                  <a:lnTo>
+                    <a:pt x="2039990" y="979208"/>
+                  </a:lnTo>
+                  <a:lnTo>
+                    <a:pt x="1969645" y="980413"/>
+                  </a:lnTo>
+                  <a:lnTo>
+                    <a:pt x="1899301" y="981613"/>
+                  </a:lnTo>
+                  <a:lnTo>
+                    <a:pt x="1828956" y="982807"/>
+                  </a:lnTo>
+                  <a:lnTo>
+                    <a:pt x="1758612" y="983997"/>
+                  </a:lnTo>
+                  <a:lnTo>
+                    <a:pt x="1688267" y="985181"/>
+                  </a:lnTo>
+                  <a:lnTo>
+                    <a:pt x="1617923" y="986360"/>
+                  </a:lnTo>
+                  <a:lnTo>
+                    <a:pt x="1547578" y="987535"/>
+                  </a:lnTo>
+                  <a:lnTo>
+                    <a:pt x="1477234" y="988704"/>
+                  </a:lnTo>
+                  <a:lnTo>
+                    <a:pt x="1406889" y="989868"/>
+                  </a:lnTo>
+                  <a:lnTo>
+                    <a:pt x="1336545" y="991026"/>
+                  </a:lnTo>
+                  <a:lnTo>
+                    <a:pt x="1266200" y="992180"/>
+                  </a:lnTo>
+                  <a:lnTo>
+                    <a:pt x="1195856" y="993329"/>
+                  </a:lnTo>
+                  <a:lnTo>
+                    <a:pt x="1125511" y="994473"/>
+                  </a:lnTo>
+                  <a:lnTo>
+                    <a:pt x="1055167" y="995612"/>
+                  </a:lnTo>
+                  <a:lnTo>
+                    <a:pt x="984822" y="996746"/>
+                  </a:lnTo>
+                  <a:lnTo>
+                    <a:pt x="914478" y="997875"/>
+                  </a:lnTo>
+                  <a:lnTo>
+                    <a:pt x="844133" y="998999"/>
+                  </a:lnTo>
+                  <a:lnTo>
+                    <a:pt x="773789" y="1000119"/>
+                  </a:lnTo>
+                  <a:lnTo>
+                    <a:pt x="703444" y="1001233"/>
+                  </a:lnTo>
+                  <a:lnTo>
+                    <a:pt x="633100" y="1002343"/>
+                  </a:lnTo>
+                  <a:lnTo>
+                    <a:pt x="562755" y="1003448"/>
+                  </a:lnTo>
+                  <a:lnTo>
+                    <a:pt x="492411" y="1004548"/>
+                  </a:lnTo>
+                  <a:lnTo>
+                    <a:pt x="422066" y="1005643"/>
+                  </a:lnTo>
+                  <a:lnTo>
+                    <a:pt x="351722" y="1006733"/>
+                  </a:lnTo>
+                  <a:lnTo>
+                    <a:pt x="281377" y="1007819"/>
+                  </a:lnTo>
+                  <a:lnTo>
+                    <a:pt x="211033" y="1008900"/>
+                  </a:lnTo>
+                  <a:lnTo>
+                    <a:pt x="140688" y="1009977"/>
+                  </a:lnTo>
+                  <a:lnTo>
+                    <a:pt x="70344" y="1011048"/>
+                  </a:lnTo>
+                  <a:lnTo>
+                    <a:pt x="0" y="1012116"/>
+                  </a:lnTo>
+                  <a:close/>
+                </a:path>
+              </a:pathLst>
+            </a:custGeom>
+            <a:solidFill>
+              <a:srgbClr val="FF8C00">
+                <a:alpha val="20000"/>
+              </a:srgbClr>
+            </a:solidFill>
+          </p:spPr>
+          <p:txBody>
+            <a:bodyPr/>
+            <a:lstStyle/>
+            <a:p/>
+          </p:txBody>
+        </p:sp>
+        <p:sp>
+          <p:nvSpPr>
+            <p:cNvPr id="68" name="pl68"/>
+            <p:cNvSpPr/>
+            <p:nvPr/>
+          </p:nvSpPr>
+          <p:spPr>
+            <a:xfrm>
+              <a:off x="1487598" y="4336484"/>
+              <a:ext cx="6711817" cy="957627"/>
+            </a:xfrm>
+            <a:custGeom>
+              <a:avLst/>
+              <a:pathLst>
+                <a:path w="6711817" h="957627">
+                  <a:moveTo>
+                    <a:pt x="0" y="0"/>
+                  </a:moveTo>
+                  <a:lnTo>
+                    <a:pt x="29091" y="17630"/>
+                  </a:lnTo>
+                  <a:lnTo>
+                    <a:pt x="99435" y="58843"/>
+                  </a:lnTo>
+                  <a:lnTo>
+                    <a:pt x="169780" y="98686"/>
+                  </a:lnTo>
+                  <a:lnTo>
+                    <a:pt x="240124" y="137204"/>
+                  </a:lnTo>
+                  <a:lnTo>
+                    <a:pt x="310469" y="174442"/>
+                  </a:lnTo>
+                  <a:lnTo>
+                    <a:pt x="380813" y="210442"/>
+                  </a:lnTo>
+                  <a:lnTo>
+                    <a:pt x="451158" y="245244"/>
+                  </a:lnTo>
+                  <a:lnTo>
+                    <a:pt x="521502" y="278890"/>
+                  </a:lnTo>
+                  <a:lnTo>
+                    <a:pt x="591847" y="311417"/>
+                  </a:lnTo>
+                  <a:lnTo>
+                    <a:pt x="662191" y="342862"/>
+                  </a:lnTo>
+                  <a:lnTo>
+                    <a:pt x="732536" y="373262"/>
+                  </a:lnTo>
+                  <a:lnTo>
+                    <a:pt x="802880" y="402652"/>
+                  </a:lnTo>
+                  <a:lnTo>
+                    <a:pt x="873224" y="431064"/>
+                  </a:lnTo>
+                  <a:lnTo>
+                    <a:pt x="943569" y="458531"/>
+                  </a:lnTo>
+                  <a:lnTo>
+                    <a:pt x="1013913" y="485085"/>
+                  </a:lnTo>
+                  <a:lnTo>
+                    <a:pt x="1084258" y="510757"/>
+                  </a:lnTo>
+                  <a:lnTo>
+                    <a:pt x="1154602" y="535575"/>
+                  </a:lnTo>
+                  <a:lnTo>
+                    <a:pt x="1224947" y="559567"/>
+                  </a:lnTo>
+                  <a:lnTo>
+                    <a:pt x="1295291" y="582762"/>
+                  </a:lnTo>
+                  <a:lnTo>
+                    <a:pt x="1365636" y="605186"/>
+                  </a:lnTo>
+                  <a:lnTo>
+                    <a:pt x="1435980" y="626864"/>
+                  </a:lnTo>
+                  <a:lnTo>
+                    <a:pt x="1506325" y="647822"/>
+                  </a:lnTo>
+                  <a:lnTo>
+                    <a:pt x="1576669" y="668082"/>
+                  </a:lnTo>
+                  <a:lnTo>
+                    <a:pt x="1647014" y="687669"/>
+                  </a:lnTo>
+                  <a:lnTo>
+                    <a:pt x="1717358" y="706605"/>
+                  </a:lnTo>
+                  <a:lnTo>
+                    <a:pt x="1787703" y="724912"/>
+                  </a:lnTo>
+                  <a:lnTo>
+                    <a:pt x="1858047" y="742609"/>
+                  </a:lnTo>
+                  <a:lnTo>
+                    <a:pt x="1928392" y="759718"/>
+                  </a:lnTo>
+                  <a:lnTo>
+                    <a:pt x="1998736" y="776259"/>
+                  </a:lnTo>
+                  <a:lnTo>
+                    <a:pt x="2069081" y="792249"/>
+                  </a:lnTo>
+                  <a:lnTo>
+                    <a:pt x="2139425" y="807708"/>
+                  </a:lnTo>
+                  <a:lnTo>
+                    <a:pt x="2209770" y="822653"/>
+                  </a:lnTo>
+                  <a:lnTo>
+                    <a:pt x="2280114" y="837101"/>
+                  </a:lnTo>
+                  <a:lnTo>
+                    <a:pt x="2350459" y="851068"/>
+                  </a:lnTo>
+                  <a:lnTo>
+                    <a:pt x="2420803" y="864571"/>
+                  </a:lnTo>
+                  <a:lnTo>
+                    <a:pt x="2491148" y="877625"/>
+                  </a:lnTo>
+                  <a:lnTo>
+                    <a:pt x="2561492" y="890246"/>
+                  </a:lnTo>
+                  <a:lnTo>
+                    <a:pt x="2631837" y="902446"/>
+                  </a:lnTo>
+                  <a:lnTo>
+                    <a:pt x="2702181" y="914241"/>
+                  </a:lnTo>
+                  <a:lnTo>
+                    <a:pt x="2772526" y="925644"/>
+                  </a:lnTo>
+                  <a:lnTo>
+                    <a:pt x="2842870" y="936667"/>
+                  </a:lnTo>
+                  <a:lnTo>
+                    <a:pt x="2913215" y="947325"/>
+                  </a:lnTo>
+                  <a:lnTo>
+                    <a:pt x="2983559" y="957627"/>
+                  </a:lnTo>
+                  <a:lnTo>
+                    <a:pt x="3053904" y="956596"/>
+                  </a:lnTo>
+                  <a:lnTo>
+                    <a:pt x="3124248" y="955287"/>
+                  </a:lnTo>
+                  <a:lnTo>
+                    <a:pt x="3194593" y="953972"/>
+                  </a:lnTo>
+                  <a:lnTo>
+                    <a:pt x="3264937" y="952652"/>
+                  </a:lnTo>
+                  <a:lnTo>
+                    <a:pt x="3335282" y="951326"/>
+                  </a:lnTo>
+                  <a:lnTo>
+                    <a:pt x="3405626" y="949994"/>
+                  </a:lnTo>
+                  <a:lnTo>
+                    <a:pt x="3475971" y="948657"/>
+                  </a:lnTo>
+                  <a:lnTo>
+                    <a:pt x="3546315" y="947313"/>
+                  </a:lnTo>
+                  <a:lnTo>
+                    <a:pt x="3616660" y="945964"/>
+                  </a:lnTo>
+                  <a:lnTo>
+                    <a:pt x="3687004" y="944609"/>
+                  </a:lnTo>
+                  <a:lnTo>
+                    <a:pt x="3757349" y="943248"/>
+                  </a:lnTo>
+                  <a:lnTo>
+                    <a:pt x="3827693" y="941881"/>
+                  </a:lnTo>
+                  <a:lnTo>
+                    <a:pt x="3898038" y="940508"/>
+                  </a:lnTo>
+                  <a:lnTo>
+                    <a:pt x="3968382" y="939129"/>
+                  </a:lnTo>
+                  <a:lnTo>
+                    <a:pt x="4038727" y="937744"/>
+                  </a:lnTo>
+                  <a:lnTo>
+                    <a:pt x="4109071" y="936354"/>
+                  </a:lnTo>
+                  <a:lnTo>
+                    <a:pt x="4179416" y="934957"/>
+                  </a:lnTo>
+                  <a:lnTo>
+                    <a:pt x="4249760" y="933554"/>
+                  </a:lnTo>
+                  <a:lnTo>
+                    <a:pt x="4320105" y="932144"/>
+                  </a:lnTo>
+                  <a:lnTo>
+                    <a:pt x="4390449" y="930729"/>
+                  </a:lnTo>
+                  <a:lnTo>
+                    <a:pt x="4460794" y="929308"/>
+                  </a:lnTo>
+                  <a:lnTo>
+                    <a:pt x="4531138" y="927880"/>
+                  </a:lnTo>
+                  <a:lnTo>
+                    <a:pt x="4601482" y="926446"/>
+                  </a:lnTo>
+                  <a:lnTo>
+                    <a:pt x="4671827" y="925006"/>
+                  </a:lnTo>
+                  <a:lnTo>
+                    <a:pt x="4742171" y="923560"/>
+                  </a:lnTo>
+                  <a:lnTo>
+                    <a:pt x="4812516" y="922107"/>
+                  </a:lnTo>
+                  <a:lnTo>
+                    <a:pt x="4882860" y="920648"/>
+                  </a:lnTo>
+                  <a:lnTo>
+                    <a:pt x="4953205" y="919183"/>
+                  </a:lnTo>
+                  <a:lnTo>
+                    <a:pt x="5023549" y="917711"/>
+                  </a:lnTo>
+                  <a:lnTo>
+                    <a:pt x="5093894" y="916233"/>
+                  </a:lnTo>
+                  <a:lnTo>
+                    <a:pt x="5164238" y="914748"/>
+                  </a:lnTo>
+                  <a:lnTo>
+                    <a:pt x="5234583" y="913257"/>
+                  </a:lnTo>
+                  <a:lnTo>
+                    <a:pt x="5304927" y="911760"/>
+                  </a:lnTo>
+                  <a:lnTo>
+                    <a:pt x="5375272" y="910256"/>
+                  </a:lnTo>
+                  <a:lnTo>
+                    <a:pt x="5445616" y="908745"/>
+                  </a:lnTo>
+                  <a:lnTo>
+                    <a:pt x="5515961" y="907228"/>
+                  </a:lnTo>
+                  <a:lnTo>
+                    <a:pt x="5586305" y="905704"/>
+                  </a:lnTo>
+                  <a:lnTo>
+                    <a:pt x="5656650" y="904174"/>
+                  </a:lnTo>
+                  <a:lnTo>
+                    <a:pt x="5726994" y="902637"/>
+                  </a:lnTo>
+                  <a:lnTo>
+                    <a:pt x="5797339" y="901093"/>
+                  </a:lnTo>
+                  <a:lnTo>
+                    <a:pt x="5867683" y="899543"/>
+                  </a:lnTo>
+                  <a:lnTo>
+                    <a:pt x="5938028" y="897986"/>
+                  </a:lnTo>
+                  <a:lnTo>
+                    <a:pt x="6008372" y="896422"/>
+                  </a:lnTo>
+                  <a:lnTo>
+                    <a:pt x="6078717" y="894851"/>
+                  </a:lnTo>
+                  <a:lnTo>
+                    <a:pt x="6149061" y="893273"/>
+                  </a:lnTo>
+                  <a:lnTo>
+                    <a:pt x="6219406" y="891689"/>
+                  </a:lnTo>
+                  <a:lnTo>
+                    <a:pt x="6289750" y="890097"/>
+                  </a:lnTo>
+                  <a:lnTo>
+                    <a:pt x="6360095" y="888499"/>
+                  </a:lnTo>
+                  <a:lnTo>
+                    <a:pt x="6430439" y="886893"/>
+                  </a:lnTo>
+                  <a:lnTo>
+                    <a:pt x="6500784" y="885281"/>
+                  </a:lnTo>
+                  <a:lnTo>
+                    <a:pt x="6571128" y="883662"/>
+                  </a:lnTo>
+                  <a:lnTo>
+                    <a:pt x="6641473" y="882035"/>
+                  </a:lnTo>
+                  <a:lnTo>
+                    <a:pt x="6711817" y="880402"/>
+                  </a:lnTo>
+                </a:path>
+              </a:pathLst>
+            </a:custGeom>
+          </p:spPr>
+          <p:txBody>
+            <a:bodyPr/>
+            <a:lstStyle/>
+            <a:p/>
+          </p:txBody>
+        </p:sp>
+        <p:sp>
+          <p:nvSpPr>
+            <p:cNvPr id="69" name="pl69"/>
+            <p:cNvSpPr/>
+            <p:nvPr/>
+          </p:nvSpPr>
+          <p:spPr>
+            <a:xfrm>
+              <a:off x="1235312" y="5294383"/>
+              <a:ext cx="6964104" cy="249391"/>
+            </a:xfrm>
+            <a:custGeom>
+              <a:avLst/>
+              <a:pathLst>
+                <a:path w="6964104" h="249391">
+                  <a:moveTo>
+                    <a:pt x="6964104" y="249391"/>
+                  </a:moveTo>
+                  <a:lnTo>
+                    <a:pt x="6893760" y="247674"/>
+                  </a:lnTo>
+                  <a:lnTo>
+                    <a:pt x="6823415" y="245899"/>
+                  </a:lnTo>
+                  <a:lnTo>
+                    <a:pt x="6753071" y="244062"/>
+                  </a:lnTo>
+                  <a:lnTo>
+                    <a:pt x="6682726" y="242162"/>
+                  </a:lnTo>
+                  <a:lnTo>
+                    <a:pt x="6612382" y="240197"/>
+                  </a:lnTo>
+                  <a:lnTo>
+                    <a:pt x="6542037" y="238164"/>
+                  </a:lnTo>
+                  <a:lnTo>
+                    <a:pt x="6471693" y="236062"/>
+                  </a:lnTo>
+                  <a:lnTo>
+                    <a:pt x="6401348" y="233887"/>
+                  </a:lnTo>
+                  <a:lnTo>
+                    <a:pt x="6331004" y="231637"/>
+                  </a:lnTo>
+                  <a:lnTo>
+                    <a:pt x="6260659" y="229310"/>
+                  </a:lnTo>
+                  <a:lnTo>
+                    <a:pt x="6190315" y="226903"/>
+                  </a:lnTo>
+                  <a:lnTo>
+                    <a:pt x="6119970" y="224413"/>
+                  </a:lnTo>
+                  <a:lnTo>
+                    <a:pt x="6049626" y="221837"/>
+                  </a:lnTo>
+                  <a:lnTo>
+                    <a:pt x="5979281" y="219173"/>
+                  </a:lnTo>
+                  <a:lnTo>
+                    <a:pt x="5908937" y="216417"/>
+                  </a:lnTo>
+                  <a:lnTo>
+                    <a:pt x="5838592" y="213567"/>
+                  </a:lnTo>
+                  <a:lnTo>
+                    <a:pt x="5768248" y="210618"/>
+                  </a:lnTo>
+                  <a:lnTo>
+                    <a:pt x="5697903" y="207568"/>
+                  </a:lnTo>
+                  <a:lnTo>
+                    <a:pt x="5627559" y="204413"/>
+                  </a:lnTo>
+                  <a:lnTo>
+                    <a:pt x="5557214" y="201150"/>
+                  </a:lnTo>
+                  <a:lnTo>
+                    <a:pt x="5486870" y="197774"/>
+                  </a:lnTo>
+                  <a:lnTo>
+                    <a:pt x="5416525" y="194283"/>
+                  </a:lnTo>
+                  <a:lnTo>
+                    <a:pt x="5346181" y="190671"/>
+                  </a:lnTo>
+                  <a:lnTo>
+                    <a:pt x="5275836" y="186935"/>
+                  </a:lnTo>
+                  <a:lnTo>
+                    <a:pt x="5205492" y="183070"/>
+                  </a:lnTo>
+                  <a:lnTo>
+                    <a:pt x="5135147" y="179073"/>
+                  </a:lnTo>
+                  <a:lnTo>
+                    <a:pt x="5064803" y="174938"/>
+                  </a:lnTo>
+                  <a:lnTo>
+                    <a:pt x="4994458" y="170661"/>
+                  </a:lnTo>
+                  <a:lnTo>
+                    <a:pt x="4924114" y="166237"/>
+                  </a:lnTo>
+                  <a:lnTo>
+                    <a:pt x="4853769" y="161660"/>
+                  </a:lnTo>
+                  <a:lnTo>
+                    <a:pt x="4783425" y="156927"/>
+                  </a:lnTo>
+                  <a:lnTo>
+                    <a:pt x="4713080" y="152030"/>
+                  </a:lnTo>
+                  <a:lnTo>
+                    <a:pt x="4642736" y="146965"/>
+                  </a:lnTo>
+                  <a:lnTo>
+                    <a:pt x="4572391" y="141726"/>
+                  </a:lnTo>
+                  <a:lnTo>
+                    <a:pt x="4502047" y="136307"/>
+                  </a:lnTo>
+                  <a:lnTo>
+                    <a:pt x="4431702" y="130701"/>
+                  </a:lnTo>
+                  <a:lnTo>
+                    <a:pt x="4361358" y="124903"/>
+                  </a:lnTo>
+                  <a:lnTo>
+                    <a:pt x="4291013" y="118905"/>
+                  </a:lnTo>
+                  <a:lnTo>
+                    <a:pt x="4220669" y="112701"/>
+                  </a:lnTo>
+                  <a:lnTo>
+                    <a:pt x="4150324" y="106283"/>
+                  </a:lnTo>
+                  <a:lnTo>
+                    <a:pt x="4079980" y="99645"/>
+                  </a:lnTo>
+                  <a:lnTo>
+                    <a:pt x="4009635" y="92779"/>
+                  </a:lnTo>
+                  <a:lnTo>
+                    <a:pt x="3939291" y="85676"/>
+                  </a:lnTo>
+                  <a:lnTo>
+                    <a:pt x="3868946" y="78329"/>
+                  </a:lnTo>
+                  <a:lnTo>
+                    <a:pt x="3798602" y="70729"/>
+                  </a:lnTo>
+                  <a:lnTo>
+                    <a:pt x="3728257" y="62868"/>
+                  </a:lnTo>
+                  <a:lnTo>
+                    <a:pt x="3657913" y="54737"/>
+                  </a:lnTo>
+                  <a:lnTo>
+                    <a:pt x="3587569" y="46326"/>
+                  </a:lnTo>
+                  <a:lnTo>
+                    <a:pt x="3517224" y="37626"/>
+                  </a:lnTo>
+                  <a:lnTo>
+                    <a:pt x="3446880" y="28626"/>
+                  </a:lnTo>
+                  <a:lnTo>
+                    <a:pt x="3376535" y="19317"/>
+                  </a:lnTo>
+                  <a:lnTo>
+                    <a:pt x="3306191" y="9688"/>
+                  </a:lnTo>
+                  <a:lnTo>
+                    <a:pt x="3235846" y="0"/>
+                  </a:lnTo>
+                  <a:lnTo>
+                    <a:pt x="3165502" y="1297"/>
+                  </a:lnTo>
+                  <a:lnTo>
+                    <a:pt x="3095157" y="2589"/>
+                  </a:lnTo>
+                  <a:lnTo>
+                    <a:pt x="3024813" y="3875"/>
+                  </a:lnTo>
+                  <a:lnTo>
+                    <a:pt x="2954468" y="5156"/>
+                  </a:lnTo>
+                  <a:lnTo>
+                    <a:pt x="2884124" y="6431"/>
+                  </a:lnTo>
+                  <a:lnTo>
+                    <a:pt x="2813779" y="7701"/>
+                  </a:lnTo>
+                  <a:lnTo>
+                    <a:pt x="2743435" y="8965"/>
+                  </a:lnTo>
+                  <a:lnTo>
+                    <a:pt x="2673090" y="10223"/>
+                  </a:lnTo>
+                  <a:lnTo>
+                    <a:pt x="2602746" y="11477"/>
+                  </a:lnTo>
+                  <a:lnTo>
+                    <a:pt x="2532401" y="12724"/>
+                  </a:lnTo>
+                  <a:lnTo>
+                    <a:pt x="2462057" y="13967"/>
+                  </a:lnTo>
+                  <a:lnTo>
+                    <a:pt x="2391712" y="15204"/>
+                  </a:lnTo>
+                  <a:lnTo>
+                    <a:pt x="2321368" y="16435"/>
+                  </a:lnTo>
+                  <a:lnTo>
+                    <a:pt x="2251023" y="17661"/>
+                  </a:lnTo>
+                  <a:lnTo>
+                    <a:pt x="2180679" y="18882"/>
+                  </a:lnTo>
+                  <a:lnTo>
+                    <a:pt x="2110334" y="20098"/>
+                  </a:lnTo>
+                  <a:lnTo>
+                    <a:pt x="2039990" y="21308"/>
+                  </a:lnTo>
+                  <a:lnTo>
+                    <a:pt x="1969645" y="22513"/>
+                  </a:lnTo>
+                  <a:lnTo>
+                    <a:pt x="1899301" y="23713"/>
+                  </a:lnTo>
+                  <a:lnTo>
+                    <a:pt x="1828956" y="24908"/>
+                  </a:lnTo>
+                  <a:lnTo>
+                    <a:pt x="1758612" y="26098"/>
+                  </a:lnTo>
+                  <a:lnTo>
+                    <a:pt x="1688267" y="27282"/>
+                  </a:lnTo>
+                  <a:lnTo>
+                    <a:pt x="1617923" y="28461"/>
+                  </a:lnTo>
+                  <a:lnTo>
+                    <a:pt x="1547578" y="29635"/>
+                  </a:lnTo>
+                  <a:lnTo>
+                    <a:pt x="1477234" y="30804"/>
+                  </a:lnTo>
+                  <a:lnTo>
+                    <a:pt x="1406889" y="31968"/>
+                  </a:lnTo>
+                  <a:lnTo>
+                    <a:pt x="1336545" y="33127"/>
+                  </a:lnTo>
+                  <a:lnTo>
+                    <a:pt x="1266200" y="34281"/>
+                  </a:lnTo>
+                  <a:lnTo>
+                    <a:pt x="1195856" y="35430"/>
+                  </a:lnTo>
+                  <a:lnTo>
+                    <a:pt x="1125511" y="36574"/>
+                  </a:lnTo>
+                  <a:lnTo>
+                    <a:pt x="1055167" y="37713"/>
+                  </a:lnTo>
+                  <a:lnTo>
+                    <a:pt x="984822" y="38847"/>
+                  </a:lnTo>
+                  <a:lnTo>
+                    <a:pt x="914478" y="39976"/>
+                  </a:lnTo>
+                  <a:lnTo>
+                    <a:pt x="844133" y="41100"/>
+                  </a:lnTo>
+                  <a:lnTo>
+                    <a:pt x="773789" y="42219"/>
+                  </a:lnTo>
+                  <a:lnTo>
+                    <a:pt x="703444" y="43334"/>
+                  </a:lnTo>
+                  <a:lnTo>
+                    <a:pt x="633100" y="44443"/>
+                  </a:lnTo>
+                  <a:lnTo>
+                    <a:pt x="562755" y="45548"/>
+                  </a:lnTo>
+                  <a:lnTo>
+                    <a:pt x="492411" y="46648"/>
+                  </a:lnTo>
+                  <a:lnTo>
+                    <a:pt x="422066" y="47744"/>
+                  </a:lnTo>
+                  <a:lnTo>
+                    <a:pt x="351722" y="48834"/>
+                  </a:lnTo>
+                  <a:lnTo>
+                    <a:pt x="281377" y="49920"/>
+                  </a:lnTo>
+                  <a:lnTo>
+                    <a:pt x="211033" y="51001"/>
+                  </a:lnTo>
+                  <a:lnTo>
+                    <a:pt x="140688" y="52077"/>
+                  </a:lnTo>
+                  <a:lnTo>
+                    <a:pt x="70344" y="53149"/>
+                  </a:lnTo>
+                  <a:lnTo>
+                    <a:pt x="0" y="54216"/>
+                  </a:lnTo>
+                </a:path>
+              </a:pathLst>
+            </a:custGeom>
+          </p:spPr>
+          <p:txBody>
+            <a:bodyPr/>
+            <a:lstStyle/>
+            <a:p/>
+          </p:txBody>
+        </p:sp>
+        <p:sp>
+          <p:nvSpPr>
+            <p:cNvPr id="70" name="pl70"/>
+            <p:cNvSpPr/>
+            <p:nvPr/>
+          </p:nvSpPr>
+          <p:spPr>
+            <a:xfrm>
+              <a:off x="1235312" y="5003940"/>
+              <a:ext cx="6964104" cy="452608"/>
+            </a:xfrm>
+            <a:custGeom>
+              <a:avLst/>
+              <a:pathLst>
+                <a:path w="6964104" h="452608">
+                  <a:moveTo>
+                    <a:pt x="0" y="0"/>
+                  </a:moveTo>
+                  <a:lnTo>
+                    <a:pt x="70344" y="8625"/>
+                  </a:lnTo>
+                  <a:lnTo>
+                    <a:pt x="140688" y="17125"/>
+                  </a:lnTo>
+                  <a:lnTo>
+                    <a:pt x="211033" y="25500"/>
+                  </a:lnTo>
+                  <a:lnTo>
+                    <a:pt x="281377" y="33753"/>
+                  </a:lnTo>
+                  <a:lnTo>
+                    <a:pt x="351722" y="41885"/>
+                  </a:lnTo>
+                  <a:lnTo>
+                    <a:pt x="422066" y="49899"/>
+                  </a:lnTo>
+                  <a:lnTo>
+                    <a:pt x="492411" y="57795"/>
+                  </a:lnTo>
+                  <a:lnTo>
+                    <a:pt x="562755" y="65575"/>
+                  </a:lnTo>
+                  <a:lnTo>
+                    <a:pt x="633100" y="73242"/>
+                  </a:lnTo>
+                  <a:lnTo>
+                    <a:pt x="703444" y="80797"/>
+                  </a:lnTo>
+                  <a:lnTo>
+                    <a:pt x="773789" y="88241"/>
+                  </a:lnTo>
+                  <a:lnTo>
+                    <a:pt x="844133" y="95576"/>
+                  </a:lnTo>
+                  <a:lnTo>
+                    <a:pt x="914478" y="102804"/>
+                  </a:lnTo>
+                  <a:lnTo>
+                    <a:pt x="984822" y="109926"/>
+                  </a:lnTo>
+                  <a:lnTo>
+                    <a:pt x="1055167" y="116944"/>
+                  </a:lnTo>
+                  <a:lnTo>
+                    <a:pt x="1125511" y="123859"/>
+                  </a:lnTo>
+                  <a:lnTo>
+                    <a:pt x="1195856" y="130674"/>
+                  </a:lnTo>
+                  <a:lnTo>
+                    <a:pt x="1266200" y="137388"/>
+                  </a:lnTo>
+                  <a:lnTo>
+                    <a:pt x="1336545" y="144005"/>
+                  </a:lnTo>
+                  <a:lnTo>
+                    <a:pt x="1406889" y="150524"/>
+                  </a:lnTo>
+                  <a:lnTo>
+                    <a:pt x="1477234" y="156948"/>
+                  </a:lnTo>
+                  <a:lnTo>
+                    <a:pt x="1547578" y="163279"/>
+                  </a:lnTo>
+                  <a:lnTo>
+                    <a:pt x="1617923" y="169516"/>
+                  </a:lnTo>
+                  <a:lnTo>
+                    <a:pt x="1688267" y="175663"/>
+                  </a:lnTo>
+                  <a:lnTo>
+                    <a:pt x="1758612" y="181719"/>
+                  </a:lnTo>
+                  <a:lnTo>
+                    <a:pt x="1828956" y="187687"/>
+                  </a:lnTo>
+                  <a:lnTo>
+                    <a:pt x="1899301" y="193568"/>
+                  </a:lnTo>
+                  <a:lnTo>
+                    <a:pt x="1969645" y="199363"/>
+                  </a:lnTo>
+                  <a:lnTo>
+                    <a:pt x="2039990" y="205073"/>
+                  </a:lnTo>
+                  <a:lnTo>
+                    <a:pt x="2110334" y="210699"/>
+                  </a:lnTo>
+                  <a:lnTo>
+                    <a:pt x="2180679" y="216243"/>
+                  </a:lnTo>
+                  <a:lnTo>
+                    <a:pt x="2251023" y="221706"/>
+                  </a:lnTo>
+                  <a:lnTo>
+                    <a:pt x="2321368" y="227089"/>
+                  </a:lnTo>
+                  <a:lnTo>
+                    <a:pt x="2391712" y="232393"/>
+                  </a:lnTo>
+                  <a:lnTo>
+                    <a:pt x="2462057" y="237620"/>
+                  </a:lnTo>
+                  <a:lnTo>
+                    <a:pt x="2532401" y="242771"/>
+                  </a:lnTo>
+                  <a:lnTo>
+                    <a:pt x="2602746" y="247846"/>
+                  </a:lnTo>
+                  <a:lnTo>
+                    <a:pt x="2673090" y="252846"/>
+                  </a:lnTo>
+                  <a:lnTo>
+                    <a:pt x="2743435" y="257774"/>
+                  </a:lnTo>
+                  <a:lnTo>
+                    <a:pt x="2813779" y="262629"/>
+                  </a:lnTo>
+                  <a:lnTo>
+                    <a:pt x="2884124" y="267414"/>
+                  </a:lnTo>
+                  <a:lnTo>
+                    <a:pt x="2954468" y="272129"/>
+                  </a:lnTo>
+                  <a:lnTo>
+                    <a:pt x="3024813" y="276774"/>
+                  </a:lnTo>
+                  <a:lnTo>
+                    <a:pt x="3095157" y="281352"/>
+                  </a:lnTo>
+                  <a:lnTo>
+                    <a:pt x="3165502" y="285863"/>
+                  </a:lnTo>
+                  <a:lnTo>
+                    <a:pt x="3235846" y="290307"/>
+                  </a:lnTo>
+                  <a:lnTo>
+                    <a:pt x="3306191" y="294687"/>
+                  </a:lnTo>
+                  <a:lnTo>
+                    <a:pt x="3376535" y="299003"/>
+                  </a:lnTo>
+                  <a:lnTo>
+                    <a:pt x="3446880" y="303255"/>
+                  </a:lnTo>
+                  <a:lnTo>
+                    <a:pt x="3517224" y="307445"/>
+                  </a:lnTo>
+                  <a:lnTo>
+                    <a:pt x="3587569" y="311574"/>
+                  </a:lnTo>
+                  <a:lnTo>
+                    <a:pt x="3657913" y="315643"/>
+                  </a:lnTo>
+                  <a:lnTo>
+                    <a:pt x="3728257" y="319652"/>
+                  </a:lnTo>
+                  <a:lnTo>
+                    <a:pt x="3798602" y="323603"/>
+                  </a:lnTo>
+                  <a:lnTo>
+                    <a:pt x="3868946" y="327495"/>
+                  </a:lnTo>
+                  <a:lnTo>
+                    <a:pt x="3939291" y="331331"/>
+                  </a:lnTo>
+                  <a:lnTo>
+                    <a:pt x="4009635" y="335111"/>
+                  </a:lnTo>
+                  <a:lnTo>
+                    <a:pt x="4079980" y="338835"/>
+                  </a:lnTo>
+                  <a:lnTo>
+                    <a:pt x="4150324" y="342505"/>
+                  </a:lnTo>
+                  <a:lnTo>
+                    <a:pt x="4220669" y="346121"/>
+                  </a:lnTo>
+                  <a:lnTo>
+                    <a:pt x="4291013" y="349685"/>
+                  </a:lnTo>
+                  <a:lnTo>
+                    <a:pt x="4361358" y="353196"/>
+                  </a:lnTo>
+                  <a:lnTo>
+                    <a:pt x="4431702" y="356656"/>
+                  </a:lnTo>
+                  <a:lnTo>
+                    <a:pt x="4502047" y="360065"/>
+                  </a:lnTo>
+                  <a:lnTo>
+                    <a:pt x="4572391" y="363425"/>
+                  </a:lnTo>
+                  <a:lnTo>
+                    <a:pt x="4642736" y="366735"/>
+                  </a:lnTo>
+                  <a:lnTo>
+                    <a:pt x="4713080" y="369997"/>
+                  </a:lnTo>
+                  <a:lnTo>
+                    <a:pt x="4783425" y="373211"/>
+                  </a:lnTo>
+                  <a:lnTo>
+                    <a:pt x="4853769" y="376378"/>
+                  </a:lnTo>
+                  <a:lnTo>
+                    <a:pt x="4924114" y="379499"/>
+                  </a:lnTo>
+                  <a:lnTo>
+                    <a:pt x="4994458" y="382574"/>
+                  </a:lnTo>
+                  <a:lnTo>
+                    <a:pt x="5064803" y="385604"/>
+                  </a:lnTo>
+                  <a:lnTo>
+                    <a:pt x="5135147" y="388590"/>
+                  </a:lnTo>
+                  <a:lnTo>
+                    <a:pt x="5205492" y="391532"/>
+                  </a:lnTo>
+                  <a:lnTo>
+                    <a:pt x="5275836" y="394431"/>
+                  </a:lnTo>
+                  <a:lnTo>
+                    <a:pt x="5346181" y="397288"/>
+                  </a:lnTo>
+                  <a:lnTo>
+                    <a:pt x="5416525" y="400103"/>
+                  </a:lnTo>
+                  <a:lnTo>
+                    <a:pt x="5486870" y="402877"/>
+                  </a:lnTo>
+                  <a:lnTo>
+                    <a:pt x="5557214" y="405610"/>
+                  </a:lnTo>
+                  <a:lnTo>
+                    <a:pt x="5627559" y="408303"/>
+                  </a:lnTo>
+                  <a:lnTo>
+                    <a:pt x="5697903" y="410957"/>
+                  </a:lnTo>
+                  <a:lnTo>
+                    <a:pt x="5768248" y="413572"/>
+                  </a:lnTo>
+                  <a:lnTo>
+                    <a:pt x="5838592" y="416149"/>
+                  </a:lnTo>
+                  <a:lnTo>
+                    <a:pt x="5908937" y="418688"/>
+                  </a:lnTo>
+                  <a:lnTo>
+                    <a:pt x="5979281" y="421190"/>
+                  </a:lnTo>
+                  <a:lnTo>
+                    <a:pt x="6049626" y="423655"/>
+                  </a:lnTo>
+                  <a:lnTo>
+                    <a:pt x="6119970" y="426085"/>
+                  </a:lnTo>
+                  <a:lnTo>
+                    <a:pt x="6190315" y="428478"/>
+                  </a:lnTo>
+                  <a:lnTo>
+                    <a:pt x="6260659" y="430837"/>
+                  </a:lnTo>
+                  <a:lnTo>
+                    <a:pt x="6331004" y="433161"/>
+                  </a:lnTo>
+                  <a:lnTo>
+                    <a:pt x="6401348" y="435452"/>
+                  </a:lnTo>
+                  <a:lnTo>
+                    <a:pt x="6471693" y="437708"/>
+                  </a:lnTo>
+                  <a:lnTo>
+                    <a:pt x="6542037" y="439932"/>
+                  </a:lnTo>
+                  <a:lnTo>
+                    <a:pt x="6612382" y="442123"/>
+                  </a:lnTo>
+                  <a:lnTo>
+                    <a:pt x="6682726" y="444283"/>
+                  </a:lnTo>
+                  <a:lnTo>
+                    <a:pt x="6753071" y="446410"/>
+                  </a:lnTo>
+                  <a:lnTo>
+                    <a:pt x="6823415" y="448507"/>
+                  </a:lnTo>
+                  <a:lnTo>
+                    <a:pt x="6893760" y="450573"/>
+                  </a:lnTo>
+                  <a:lnTo>
+                    <a:pt x="6964104" y="452608"/>
+                  </a:lnTo>
+                </a:path>
+              </a:pathLst>
+            </a:custGeom>
+            <a:ln w="27101" cap="flat">
+              <a:solidFill>
+                <a:srgbClr val="FF8C00">
+                  <a:alpha val="100000"/>
+                </a:srgbClr>
+              </a:solidFill>
+              <a:prstDash val="solid"/>
+              <a:round/>
+            </a:ln>
+          </p:spPr>
+          <p:txBody>
+            <a:bodyPr/>
+            <a:lstStyle/>
+            <a:p/>
+          </p:txBody>
+        </p:sp>
+        <p:sp>
+          <p:nvSpPr>
+            <p:cNvPr id="71" name="pl71"/>
+            <p:cNvSpPr/>
+            <p:nvPr/>
+          </p:nvSpPr>
+          <p:spPr>
+            <a:xfrm>
+              <a:off x="887106" y="5294352"/>
+              <a:ext cx="7660515" cy="0"/>
+            </a:xfrm>
+            <a:custGeom>
+              <a:avLst/>
+              <a:pathLst>
+                <a:path w="7660515" h="0">
+                  <a:moveTo>
+                    <a:pt x="0" y="0"/>
+                  </a:moveTo>
+                  <a:lnTo>
+                    <a:pt x="7660515" y="0"/>
+                  </a:lnTo>
+                  <a:lnTo>
+                    <a:pt x="7660515" y="0"/>
+                  </a:lnTo>
+                </a:path>
+              </a:pathLst>
+            </a:custGeom>
+            <a:ln w="13550" cap="flat">
+              <a:solidFill>
+                <a:srgbClr val="7F7F7F">
+                  <a:alpha val="100000"/>
+                </a:srgbClr>
+              </a:solidFill>
+              <a:prstDash val="dash"/>
+              <a:round/>
+            </a:ln>
+          </p:spPr>
+          <p:txBody>
+            <a:bodyPr/>
+            <a:lstStyle/>
+            <a:p/>
+          </p:txBody>
+        </p:sp>
+        <p:sp>
+          <p:nvSpPr>
+            <p:cNvPr id="72" name="pl72"/>
+            <p:cNvSpPr/>
+            <p:nvPr/>
+          </p:nvSpPr>
+          <p:spPr>
+            <a:xfrm>
+              <a:off x="4472829" y="4336484"/>
+              <a:ext cx="0" cy="1317069"/>
+            </a:xfrm>
+            <a:custGeom>
+              <a:avLst/>
+              <a:pathLst>
+                <a:path w="0" h="1317069">
+                  <a:moveTo>
+                    <a:pt x="0" y="1317069"/>
+                  </a:moveTo>
+                  <a:lnTo>
+                    <a:pt x="0" y="0"/>
+                  </a:lnTo>
+                  <a:lnTo>
+                    <a:pt x="0" y="0"/>
+                  </a:lnTo>
+                </a:path>
+              </a:pathLst>
+            </a:custGeom>
+            <a:ln w="13550" cap="flat">
+              <a:solidFill>
+                <a:srgbClr val="666666">
+                  <a:alpha val="100000"/>
+                </a:srgbClr>
+              </a:solidFill>
+              <a:prstDash val="dot"/>
+              <a:round/>
+            </a:ln>
+          </p:spPr>
+          <p:txBody>
+            <a:bodyPr/>
+            <a:lstStyle/>
+            <a:p/>
+          </p:txBody>
+        </p:sp>
+        <p:sp>
+          <p:nvSpPr>
+            <p:cNvPr id="73" name="tx73"/>
+            <p:cNvSpPr/>
+            <p:nvPr/>
+          </p:nvSpPr>
+          <p:spPr>
+            <a:xfrm>
+              <a:off x="762297" y="5553636"/>
+              <a:ext cx="62179" cy="80101"/>
+            </a:xfrm>
+            <a:prstGeom prst="rect">
+              <a:avLst/>
+            </a:prstGeom>
+            <a:noFill/>
+          </p:spPr>
+          <p:txBody>
+            <a:bodyPr lIns="0" rIns="0" tIns="0" bIns="0" anchorCtr="1" anchor="ctr" wrap="none"/>
+            <a:lstStyle/>
+            <a:p>
+              <a:pPr algn="l" marL="0" marR="0" indent="0">
+                <a:lnSpc>
+                  <a:spcPts val="880"/>
+                </a:lnSpc>
+                <a:spcBef>
+                  <a:spcPts val="0"/>
+                </a:spcBef>
+                <a:spcAft>
+                  <a:spcPts val="0"/>
+                </a:spcAft>
+              </a:pPr>
+              <a:r>
+                <a:rPr sz="880">
+                  <a:solidFill>
+                    <a:srgbClr val="4D4D4D">
+                      <a:alpha val="100000"/>
+                    </a:srgbClr>
+                  </a:solidFill>
+                  <a:latin typeface="Helvetica"/>
+                  <a:cs typeface="Helvetica"/>
+                </a:rPr>
+                <a:t>0</a:t>
+              </a:r>
+            </a:p>
+          </p:txBody>
+        </p:sp>
+        <p:sp>
+          <p:nvSpPr>
+            <p:cNvPr id="74" name="tx74"/>
+            <p:cNvSpPr/>
+            <p:nvPr/>
+          </p:nvSpPr>
+          <p:spPr>
+            <a:xfrm>
+              <a:off x="762297" y="5254302"/>
+              <a:ext cx="62179" cy="80101"/>
+            </a:xfrm>
+            <a:prstGeom prst="rect">
+              <a:avLst/>
+            </a:prstGeom>
+            <a:noFill/>
+          </p:spPr>
+          <p:txBody>
+            <a:bodyPr lIns="0" rIns="0" tIns="0" bIns="0" anchorCtr="1" anchor="ctr" wrap="none"/>
+            <a:lstStyle/>
+            <a:p>
+              <a:pPr algn="l" marL="0" marR="0" indent="0">
+                <a:lnSpc>
+                  <a:spcPts val="880"/>
+                </a:lnSpc>
+                <a:spcBef>
+                  <a:spcPts val="0"/>
+                </a:spcBef>
+                <a:spcAft>
+                  <a:spcPts val="0"/>
+                </a:spcAft>
+              </a:pPr>
+              <a:r>
+                <a:rPr sz="880">
+                  <a:solidFill>
+                    <a:srgbClr val="4D4D4D">
+                      <a:alpha val="100000"/>
+                    </a:srgbClr>
+                  </a:solidFill>
+                  <a:latin typeface="Helvetica"/>
+                  <a:cs typeface="Helvetica"/>
+                </a:rPr>
+                <a:t>1</a:t>
+              </a:r>
+            </a:p>
+          </p:txBody>
+        </p:sp>
+        <p:sp>
+          <p:nvSpPr>
+            <p:cNvPr id="75" name="tx75"/>
+            <p:cNvSpPr/>
+            <p:nvPr/>
+          </p:nvSpPr>
+          <p:spPr>
+            <a:xfrm>
+              <a:off x="762297" y="4954968"/>
+              <a:ext cx="62179" cy="80101"/>
+            </a:xfrm>
+            <a:prstGeom prst="rect">
+              <a:avLst/>
+            </a:prstGeom>
+            <a:noFill/>
+          </p:spPr>
+          <p:txBody>
+            <a:bodyPr lIns="0" rIns="0" tIns="0" bIns="0" anchorCtr="1" anchor="ctr" wrap="none"/>
+            <a:lstStyle/>
+            <a:p>
+              <a:pPr algn="l" marL="0" marR="0" indent="0">
+                <a:lnSpc>
+                  <a:spcPts val="880"/>
+                </a:lnSpc>
+                <a:spcBef>
+                  <a:spcPts val="0"/>
+                </a:spcBef>
+                <a:spcAft>
+                  <a:spcPts val="0"/>
+                </a:spcAft>
+              </a:pPr>
+              <a:r>
+                <a:rPr sz="880">
+                  <a:solidFill>
+                    <a:srgbClr val="4D4D4D">
+                      <a:alpha val="100000"/>
+                    </a:srgbClr>
+                  </a:solidFill>
+                  <a:latin typeface="Helvetica"/>
+                  <a:cs typeface="Helvetica"/>
+                </a:rPr>
+                <a:t>2</a:t>
+              </a:r>
+            </a:p>
+          </p:txBody>
+        </p:sp>
+        <p:sp>
+          <p:nvSpPr>
+            <p:cNvPr id="76" name="tx76"/>
+            <p:cNvSpPr/>
+            <p:nvPr/>
+          </p:nvSpPr>
+          <p:spPr>
+            <a:xfrm>
+              <a:off x="762297" y="4655634"/>
+              <a:ext cx="62179" cy="80101"/>
+            </a:xfrm>
+            <a:prstGeom prst="rect">
+              <a:avLst/>
+            </a:prstGeom>
+            <a:noFill/>
+          </p:spPr>
+          <p:txBody>
+            <a:bodyPr lIns="0" rIns="0" tIns="0" bIns="0" anchorCtr="1" anchor="ctr" wrap="none"/>
+            <a:lstStyle/>
+            <a:p>
+              <a:pPr algn="l" marL="0" marR="0" indent="0">
+                <a:lnSpc>
+                  <a:spcPts val="880"/>
+                </a:lnSpc>
+                <a:spcBef>
+                  <a:spcPts val="0"/>
+                </a:spcBef>
+                <a:spcAft>
+                  <a:spcPts val="0"/>
+                </a:spcAft>
+              </a:pPr>
+              <a:r>
+                <a:rPr sz="880">
+                  <a:solidFill>
+                    <a:srgbClr val="4D4D4D">
+                      <a:alpha val="100000"/>
+                    </a:srgbClr>
+                  </a:solidFill>
+                  <a:latin typeface="Helvetica"/>
+                  <a:cs typeface="Helvetica"/>
+                </a:rPr>
+                <a:t>3</a:t>
+              </a:r>
+            </a:p>
+          </p:txBody>
+        </p:sp>
+        <p:sp>
+          <p:nvSpPr>
+            <p:cNvPr id="77" name="tx77"/>
+            <p:cNvSpPr/>
+            <p:nvPr/>
+          </p:nvSpPr>
+          <p:spPr>
+            <a:xfrm>
+              <a:off x="762297" y="4356300"/>
+              <a:ext cx="62179" cy="80101"/>
+            </a:xfrm>
+            <a:prstGeom prst="rect">
+              <a:avLst/>
+            </a:prstGeom>
+            <a:noFill/>
+          </p:spPr>
+          <p:txBody>
+            <a:bodyPr lIns="0" rIns="0" tIns="0" bIns="0" anchorCtr="1" anchor="ctr" wrap="none"/>
+            <a:lstStyle/>
+            <a:p>
+              <a:pPr algn="l" marL="0" marR="0" indent="0">
+                <a:lnSpc>
+                  <a:spcPts val="880"/>
+                </a:lnSpc>
+                <a:spcBef>
+                  <a:spcPts val="0"/>
+                </a:spcBef>
+                <a:spcAft>
+                  <a:spcPts val="0"/>
+                </a:spcAft>
+              </a:pPr>
+              <a:r>
+                <a:rPr sz="880">
+                  <a:solidFill>
+                    <a:srgbClr val="4D4D4D">
+                      <a:alpha val="100000"/>
+                    </a:srgbClr>
+                  </a:solidFill>
+                  <a:latin typeface="Helvetica"/>
+                  <a:cs typeface="Helvetica"/>
+                </a:rPr>
+                <a:t>4</a:t>
+              </a:r>
+            </a:p>
+          </p:txBody>
+        </p:sp>
+        <p:sp>
+          <p:nvSpPr>
+            <p:cNvPr id="78" name="tx78"/>
+            <p:cNvSpPr/>
+            <p:nvPr/>
+          </p:nvSpPr>
+          <p:spPr>
+            <a:xfrm>
+              <a:off x="1306098" y="5716183"/>
+              <a:ext cx="161574" cy="80101"/>
+            </a:xfrm>
+            <a:prstGeom prst="rect">
+              <a:avLst/>
+            </a:prstGeom>
+            <a:noFill/>
+          </p:spPr>
+          <p:txBody>
+            <a:bodyPr lIns="0" rIns="0" tIns="0" bIns="0" anchorCtr="1" anchor="ctr" wrap="none"/>
+            <a:lstStyle/>
+            <a:p>
+              <a:pPr algn="l" marL="0" marR="0" indent="0">
+                <a:lnSpc>
+                  <a:spcPts val="880"/>
+                </a:lnSpc>
+                <a:spcBef>
+                  <a:spcPts val="0"/>
+                </a:spcBef>
+                <a:spcAft>
+                  <a:spcPts val="0"/>
+                </a:spcAft>
+              </a:pPr>
+              <a:r>
+                <a:rPr sz="880">
+                  <a:solidFill>
+                    <a:srgbClr val="4D4D4D">
+                      <a:alpha val="100000"/>
+                    </a:srgbClr>
+                  </a:solidFill>
+                  <a:latin typeface="Helvetica"/>
+                  <a:cs typeface="Helvetica"/>
+                </a:rPr>
+                <a:t>-40</a:t>
+              </a:r>
+            </a:p>
+          </p:txBody>
+        </p:sp>
+        <p:sp>
+          <p:nvSpPr>
+            <p:cNvPr id="79" name="tx79"/>
+            <p:cNvSpPr/>
+            <p:nvPr/>
+          </p:nvSpPr>
+          <p:spPr>
+            <a:xfrm>
+              <a:off x="2113264" y="5716183"/>
+              <a:ext cx="161574" cy="80101"/>
+            </a:xfrm>
+            <a:prstGeom prst="rect">
+              <a:avLst/>
+            </a:prstGeom>
+            <a:noFill/>
+          </p:spPr>
+          <p:txBody>
+            <a:bodyPr lIns="0" rIns="0" tIns="0" bIns="0" anchorCtr="1" anchor="ctr" wrap="none"/>
+            <a:lstStyle/>
+            <a:p>
+              <a:pPr algn="l" marL="0" marR="0" indent="0">
+                <a:lnSpc>
+                  <a:spcPts val="880"/>
+                </a:lnSpc>
+                <a:spcBef>
+                  <a:spcPts val="0"/>
+                </a:spcBef>
+                <a:spcAft>
+                  <a:spcPts val="0"/>
+                </a:spcAft>
+              </a:pPr>
+              <a:r>
+                <a:rPr sz="880">
+                  <a:solidFill>
+                    <a:srgbClr val="4D4D4D">
+                      <a:alpha val="100000"/>
+                    </a:srgbClr>
+                  </a:solidFill>
+                  <a:latin typeface="Helvetica"/>
+                  <a:cs typeface="Helvetica"/>
+                </a:rPr>
+                <a:t>-30</a:t>
+              </a:r>
+            </a:p>
+          </p:txBody>
+        </p:sp>
+        <p:sp>
+          <p:nvSpPr>
+            <p:cNvPr id="80" name="tx80"/>
+            <p:cNvSpPr/>
+            <p:nvPr/>
+          </p:nvSpPr>
+          <p:spPr>
+            <a:xfrm>
+              <a:off x="2920429" y="5716183"/>
+              <a:ext cx="161574" cy="80101"/>
+            </a:xfrm>
+            <a:prstGeom prst="rect">
+              <a:avLst/>
+            </a:prstGeom>
+            <a:noFill/>
+          </p:spPr>
+          <p:txBody>
+            <a:bodyPr lIns="0" rIns="0" tIns="0" bIns="0" anchorCtr="1" anchor="ctr" wrap="none"/>
+            <a:lstStyle/>
+            <a:p>
+              <a:pPr algn="l" marL="0" marR="0" indent="0">
+                <a:lnSpc>
+                  <a:spcPts val="880"/>
+                </a:lnSpc>
+                <a:spcBef>
+                  <a:spcPts val="0"/>
+                </a:spcBef>
+                <a:spcAft>
+                  <a:spcPts val="0"/>
+                </a:spcAft>
+              </a:pPr>
+              <a:r>
+                <a:rPr sz="880">
+                  <a:solidFill>
+                    <a:srgbClr val="4D4D4D">
+                      <a:alpha val="100000"/>
+                    </a:srgbClr>
+                  </a:solidFill>
+                  <a:latin typeface="Helvetica"/>
+                  <a:cs typeface="Helvetica"/>
+                </a:rPr>
+                <a:t>-20</a:t>
+              </a:r>
+            </a:p>
+          </p:txBody>
+        </p:sp>
+        <p:sp>
+          <p:nvSpPr>
+            <p:cNvPr id="81" name="tx81"/>
+            <p:cNvSpPr/>
+            <p:nvPr/>
+          </p:nvSpPr>
+          <p:spPr>
+            <a:xfrm>
+              <a:off x="3727595" y="5716183"/>
+              <a:ext cx="161574" cy="80101"/>
+            </a:xfrm>
+            <a:prstGeom prst="rect">
+              <a:avLst/>
+            </a:prstGeom>
+            <a:noFill/>
+          </p:spPr>
+          <p:txBody>
+            <a:bodyPr lIns="0" rIns="0" tIns="0" bIns="0" anchorCtr="1" anchor="ctr" wrap="none"/>
+            <a:lstStyle/>
+            <a:p>
+              <a:pPr algn="l" marL="0" marR="0" indent="0">
+                <a:lnSpc>
+                  <a:spcPts val="880"/>
+                </a:lnSpc>
+                <a:spcBef>
+                  <a:spcPts val="0"/>
+                </a:spcBef>
+                <a:spcAft>
+                  <a:spcPts val="0"/>
+                </a:spcAft>
+              </a:pPr>
+              <a:r>
+                <a:rPr sz="880">
+                  <a:solidFill>
+                    <a:srgbClr val="4D4D4D">
+                      <a:alpha val="100000"/>
+                    </a:srgbClr>
+                  </a:solidFill>
+                  <a:latin typeface="Helvetica"/>
+                  <a:cs typeface="Helvetica"/>
+                </a:rPr>
+                <a:t>-10</a:t>
+              </a:r>
+            </a:p>
+          </p:txBody>
+        </p:sp>
+        <p:sp>
+          <p:nvSpPr>
+            <p:cNvPr id="82" name="tx82"/>
+            <p:cNvSpPr/>
+            <p:nvPr/>
+          </p:nvSpPr>
+          <p:spPr>
+            <a:xfrm>
+              <a:off x="4584458" y="5716183"/>
+              <a:ext cx="62179" cy="80101"/>
+            </a:xfrm>
+            <a:prstGeom prst="rect">
+              <a:avLst/>
+            </a:prstGeom>
+            <a:noFill/>
+          </p:spPr>
+          <p:txBody>
+            <a:bodyPr lIns="0" rIns="0" tIns="0" bIns="0" anchorCtr="1" anchor="ctr" wrap="none"/>
+            <a:lstStyle/>
+            <a:p>
+              <a:pPr algn="l" marL="0" marR="0" indent="0">
+                <a:lnSpc>
+                  <a:spcPts val="880"/>
+                </a:lnSpc>
+                <a:spcBef>
+                  <a:spcPts val="0"/>
+                </a:spcBef>
+                <a:spcAft>
+                  <a:spcPts val="0"/>
+                </a:spcAft>
+              </a:pPr>
+              <a:r>
+                <a:rPr sz="880">
+                  <a:solidFill>
+                    <a:srgbClr val="4D4D4D">
+                      <a:alpha val="100000"/>
+                    </a:srgbClr>
+                  </a:solidFill>
+                  <a:latin typeface="Helvetica"/>
+                  <a:cs typeface="Helvetica"/>
+                </a:rPr>
+                <a:t>0</a:t>
+              </a:r>
+            </a:p>
+          </p:txBody>
+        </p:sp>
+        <p:sp>
+          <p:nvSpPr>
+            <p:cNvPr id="83" name="tx83"/>
+            <p:cNvSpPr/>
+            <p:nvPr/>
+          </p:nvSpPr>
+          <p:spPr>
+            <a:xfrm>
+              <a:off x="5360534" y="5716183"/>
+              <a:ext cx="124358" cy="80101"/>
+            </a:xfrm>
+            <a:prstGeom prst="rect">
+              <a:avLst/>
+            </a:prstGeom>
+            <a:noFill/>
+          </p:spPr>
+          <p:txBody>
+            <a:bodyPr lIns="0" rIns="0" tIns="0" bIns="0" anchorCtr="1" anchor="ctr" wrap="none"/>
+            <a:lstStyle/>
+            <a:p>
+              <a:pPr algn="l" marL="0" marR="0" indent="0">
+                <a:lnSpc>
+                  <a:spcPts val="880"/>
+                </a:lnSpc>
+                <a:spcBef>
+                  <a:spcPts val="0"/>
+                </a:spcBef>
+                <a:spcAft>
+                  <a:spcPts val="0"/>
+                </a:spcAft>
+              </a:pPr>
+              <a:r>
+                <a:rPr sz="880">
+                  <a:solidFill>
+                    <a:srgbClr val="4D4D4D">
+                      <a:alpha val="100000"/>
+                    </a:srgbClr>
+                  </a:solidFill>
+                  <a:latin typeface="Helvetica"/>
+                  <a:cs typeface="Helvetica"/>
+                </a:rPr>
+                <a:t>10</a:t>
+              </a:r>
+            </a:p>
+          </p:txBody>
+        </p:sp>
+        <p:sp>
+          <p:nvSpPr>
+            <p:cNvPr id="84" name="tx84"/>
+            <p:cNvSpPr/>
+            <p:nvPr/>
+          </p:nvSpPr>
+          <p:spPr>
+            <a:xfrm>
+              <a:off x="6167699" y="5716183"/>
+              <a:ext cx="124358" cy="80101"/>
+            </a:xfrm>
+            <a:prstGeom prst="rect">
+              <a:avLst/>
+            </a:prstGeom>
+            <a:noFill/>
+          </p:spPr>
+          <p:txBody>
+            <a:bodyPr lIns="0" rIns="0" tIns="0" bIns="0" anchorCtr="1" anchor="ctr" wrap="none"/>
+            <a:lstStyle/>
+            <a:p>
+              <a:pPr algn="l" marL="0" marR="0" indent="0">
+                <a:lnSpc>
+                  <a:spcPts val="880"/>
+                </a:lnSpc>
+                <a:spcBef>
+                  <a:spcPts val="0"/>
+                </a:spcBef>
+                <a:spcAft>
+                  <a:spcPts val="0"/>
+                </a:spcAft>
+              </a:pPr>
+              <a:r>
+                <a:rPr sz="880">
+                  <a:solidFill>
+                    <a:srgbClr val="4D4D4D">
+                      <a:alpha val="100000"/>
+                    </a:srgbClr>
+                  </a:solidFill>
+                  <a:latin typeface="Helvetica"/>
+                  <a:cs typeface="Helvetica"/>
+                </a:rPr>
+                <a:t>20</a:t>
+              </a:r>
+            </a:p>
+          </p:txBody>
+        </p:sp>
+        <p:sp>
+          <p:nvSpPr>
+            <p:cNvPr id="85" name="tx85"/>
+            <p:cNvSpPr/>
+            <p:nvPr/>
+          </p:nvSpPr>
+          <p:spPr>
+            <a:xfrm>
+              <a:off x="6974865" y="5716183"/>
+              <a:ext cx="124358" cy="80101"/>
+            </a:xfrm>
+            <a:prstGeom prst="rect">
+              <a:avLst/>
+            </a:prstGeom>
+            <a:noFill/>
+          </p:spPr>
+          <p:txBody>
+            <a:bodyPr lIns="0" rIns="0" tIns="0" bIns="0" anchorCtr="1" anchor="ctr" wrap="none"/>
+            <a:lstStyle/>
+            <a:p>
+              <a:pPr algn="l" marL="0" marR="0" indent="0">
+                <a:lnSpc>
+                  <a:spcPts val="880"/>
+                </a:lnSpc>
+                <a:spcBef>
+                  <a:spcPts val="0"/>
+                </a:spcBef>
+                <a:spcAft>
+                  <a:spcPts val="0"/>
+                </a:spcAft>
+              </a:pPr>
+              <a:r>
+                <a:rPr sz="880">
+                  <a:solidFill>
+                    <a:srgbClr val="4D4D4D">
+                      <a:alpha val="100000"/>
+                    </a:srgbClr>
+                  </a:solidFill>
+                  <a:latin typeface="Helvetica"/>
+                  <a:cs typeface="Helvetica"/>
+                </a:rPr>
+                <a:t>30</a:t>
+              </a:r>
+            </a:p>
+          </p:txBody>
+        </p:sp>
+        <p:sp>
+          <p:nvSpPr>
+            <p:cNvPr id="86" name="tx86"/>
+            <p:cNvSpPr/>
+            <p:nvPr/>
+          </p:nvSpPr>
+          <p:spPr>
+            <a:xfrm>
+              <a:off x="7782030" y="5716183"/>
+              <a:ext cx="124358" cy="80101"/>
+            </a:xfrm>
+            <a:prstGeom prst="rect">
+              <a:avLst/>
+            </a:prstGeom>
+            <a:noFill/>
+          </p:spPr>
+          <p:txBody>
+            <a:bodyPr lIns="0" rIns="0" tIns="0" bIns="0" anchorCtr="1" anchor="ctr" wrap="none"/>
+            <a:lstStyle/>
+            <a:p>
+              <a:pPr algn="l" marL="0" marR="0" indent="0">
+                <a:lnSpc>
+                  <a:spcPts val="880"/>
+                </a:lnSpc>
+                <a:spcBef>
+                  <a:spcPts val="0"/>
+                </a:spcBef>
+                <a:spcAft>
+                  <a:spcPts val="0"/>
+                </a:spcAft>
+              </a:pPr>
+              <a:r>
+                <a:rPr sz="880">
+                  <a:solidFill>
+                    <a:srgbClr val="4D4D4D">
+                      <a:alpha val="100000"/>
+                    </a:srgbClr>
+                  </a:solidFill>
+                  <a:latin typeface="Helvetica"/>
+                  <a:cs typeface="Helvetica"/>
+                </a:rPr>
+                <a:t>40</a:t>
+              </a:r>
+            </a:p>
+          </p:txBody>
+        </p:sp>
+        <p:sp>
+          <p:nvSpPr>
+            <p:cNvPr id="87" name="tx87"/>
+            <p:cNvSpPr/>
+            <p:nvPr/>
+          </p:nvSpPr>
+          <p:spPr>
+            <a:xfrm>
+              <a:off x="2928340" y="5855859"/>
+              <a:ext cx="3578047" cy="100218"/>
+            </a:xfrm>
+            <a:prstGeom prst="rect">
+              <a:avLst/>
+            </a:prstGeom>
+            <a:noFill/>
+          </p:spPr>
+          <p:txBody>
+            <a:bodyPr lIns="0" rIns="0" tIns="0" bIns="0" anchorCtr="1" anchor="ctr" wrap="none"/>
+            <a:lstStyle/>
+            <a:p>
+              <a:pPr algn="l" marL="0" marR="0" indent="0">
+                <a:lnSpc>
+                  <a:spcPts val="1100"/>
+                </a:lnSpc>
+                <a:spcBef>
+                  <a:spcPts val="0"/>
+                </a:spcBef>
+                <a:spcAft>
+                  <a:spcPts val="0"/>
+                </a:spcAft>
+              </a:pPr>
+              <a:r>
+                <a:rPr sz="1100">
+                  <a:solidFill>
+                    <a:srgbClr val="000000">
+                      <a:alpha val="100000"/>
+                    </a:srgbClr>
+                  </a:solidFill>
+                  <a:latin typeface="Helvetica"/>
+                  <a:cs typeface="Helvetica"/>
+                </a:rPr>
+                <a:t>eGFR difference (%): 100 × (CKD-EPI Cr-Cys − CG) / CG</a:t>
+              </a:r>
+            </a:p>
+          </p:txBody>
+        </p:sp>
+        <p:sp>
+          <p:nvSpPr>
+            <p:cNvPr id="88" name="tx88"/>
+            <p:cNvSpPr/>
+            <p:nvPr/>
+          </p:nvSpPr>
+          <p:spPr>
+            <a:xfrm rot="-5400000">
+              <a:off x="138035" y="4944909"/>
+              <a:ext cx="1016904" cy="100218"/>
+            </a:xfrm>
+            <a:prstGeom prst="rect">
+              <a:avLst/>
+            </a:prstGeom>
+            <a:noFill/>
+          </p:spPr>
+          <p:txBody>
+            <a:bodyPr lIns="0" rIns="0" tIns="0" bIns="0" anchorCtr="1" anchor="ctr" wrap="none"/>
+            <a:lstStyle/>
+            <a:p>
+              <a:pPr algn="l" marL="0" marR="0" indent="0">
+                <a:lnSpc>
+                  <a:spcPts val="1100"/>
+                </a:lnSpc>
+                <a:spcBef>
+                  <a:spcPts val="0"/>
+                </a:spcBef>
+                <a:spcAft>
+                  <a:spcPts val="0"/>
+                </a:spcAft>
+              </a:pPr>
+              <a:r>
+                <a:rPr sz="1100">
+                  <a:solidFill>
+                    <a:srgbClr val="000000">
+                      <a:alpha val="100000"/>
+                    </a:srgbClr>
+                  </a:solidFill>
+                  <a:latin typeface="Helvetica"/>
+                  <a:cs typeface="Helvetica"/>
+                </a:rPr>
+                <a:t>subHR (95% CI)</a:t>
+              </a:r>
+            </a:p>
+          </p:txBody>
+        </p:sp>
+        <p:sp>
+          <p:nvSpPr>
+            <p:cNvPr id="89" name="tx89"/>
+            <p:cNvSpPr/>
+            <p:nvPr/>
+          </p:nvSpPr>
+          <p:spPr>
+            <a:xfrm>
+              <a:off x="887106" y="4159544"/>
+              <a:ext cx="6321612" cy="82021"/>
+            </a:xfrm>
+            <a:prstGeom prst="rect">
+              <a:avLst/>
+            </a:prstGeom>
+            <a:noFill/>
+          </p:spPr>
+          <p:txBody>
+            <a:bodyPr lIns="0" rIns="0" tIns="0" bIns="0" anchorCtr="1" anchor="ctr" wrap="none"/>
+            <a:lstStyle/>
+            <a:p>
+              <a:pPr algn="l" marL="0" marR="0" indent="0">
+                <a:lnSpc>
+                  <a:spcPts val="900"/>
+                </a:lnSpc>
+                <a:spcBef>
+                  <a:spcPts val="0"/>
+                </a:spcBef>
+                <a:spcAft>
+                  <a:spcPts val="0"/>
+                </a:spcAft>
+              </a:pPr>
+              <a:r>
+                <a:rPr sz="900">
+                  <a:solidFill>
+                    <a:srgbClr val="404040">
+                      <a:alpha val="100000"/>
+                    </a:srgbClr>
+                  </a:solidFill>
+                  <a:latin typeface="Helvetica"/>
+                  <a:cs typeface="Helvetica"/>
+                </a:rPr>
+                <a:t>subHR per 10 % decline: 1.18 (0.95-1.47), p = 0.130  |  per IQR decline (Δ = 29.5 %): 1.65 (0.86-3.15)  |  IQR: [-15.6, 13.9] %</a:t>
+              </a:r>
+            </a:p>
+          </p:txBody>
+        </p:sp>
+        <p:sp>
+          <p:nvSpPr>
+            <p:cNvPr id="90" name="tx90"/>
+            <p:cNvSpPr/>
+            <p:nvPr/>
+          </p:nvSpPr>
+          <p:spPr>
+            <a:xfrm>
+              <a:off x="887106" y="3932770"/>
               <a:ext cx="3173790" cy="120152"/>
             </a:xfrm>
             <a:prstGeom prst="rect">
